--- a/I2K_2026_QuPath_Extensions.pptx
+++ b/I2K_2026_QuPath_Extensions.pptx
@@ -54,9 +54,10 @@
     <p:sldId id="302" r:id="rId48"/>
     <p:sldId id="303" r:id="rId49"/>
     <p:sldId id="304" r:id="rId50"/>
+    <p:sldId id="305" r:id="rId51"/>
   </p:sldIdLst>
   <p:notesMasterIdLst>
-    <p:notesMasterId r:id="rId51"/>
+    <p:notesMasterId r:id="rId52"/>
   </p:notesMasterIdLst>
   <p:sldSz cx="12192000" cy="6858000"/>
   <p:notesSz cx="6858000" cy="12192000"/>
@@ -4446,6 +4447,94 @@
             <a:fld id="{F7021451-1387-4CA6-816F-3879F97B5CBC}" type="slidenum">
               <a:rPr lang="en-US"/>
               <a:t>5</a:t>
+            </a:fld>
+            <a:endParaRPr lang="en-US"/>
+          </a:p>
+        </p:txBody>
+      </p:sp>
+    </p:spTree>
+    <p:extLst>
+      <p:ext uri="{BB962C8B-B14F-4D97-AF65-F5344CB8AC3E}">
+        <p14:creationId xmlns:p14="http://schemas.microsoft.com/office/powerpoint/2010/main" val="1024086991"/>
+      </p:ext>
+    </p:extLst>
+  </p:cSld>
+  <p:clrMapOvr>
+    <a:masterClrMapping/>
+  </p:clrMapOvr>
+</p:notes>
+</file>
+
+<file path=ppt/notesSlides/notesSlide50.xml><?xml version="1.0" encoding="utf-8"?>
+<p:notes xmlns:a="http://schemas.openxmlformats.org/drawingml/2006/main" xmlns:r="http://schemas.openxmlformats.org/officeDocument/2006/relationships" xmlns:p="http://schemas.openxmlformats.org/presentationml/2006/main">
+  <p:cSld>
+    <p:spTree>
+      <p:nvGrpSpPr>
+        <p:cNvPr id="1" name=""/>
+        <p:cNvGrpSpPr/>
+        <p:nvPr/>
+      </p:nvGrpSpPr>
+      <p:grpSpPr>
+        <a:xfrm>
+          <a:off x="0" y="0"/>
+          <a:ext cx="0" cy="0"/>
+          <a:chOff x="0" y="0"/>
+          <a:chExt cx="0" cy="0"/>
+        </a:xfrm>
+      </p:grpSpPr>
+      <p:sp>
+        <p:nvSpPr>
+          <p:cNvPr id="2" name="Slide Image Placeholder 1"/>
+          <p:cNvSpPr>
+            <a:spLocks noGrp="1" noRot="1" noChangeAspect="1"/>
+          </p:cNvSpPr>
+          <p:nvPr>
+            <p:ph type="sldImg"/>
+          </p:nvPr>
+        </p:nvSpPr>
+        <p:spPr/>
+      </p:sp>
+      <p:sp>
+        <p:nvSpPr>
+          <p:cNvPr id="3" name="Notes Placeholder 2"/>
+          <p:cNvSpPr>
+            <a:spLocks noGrp="1"/>
+          </p:cNvSpPr>
+          <p:nvPr>
+            <p:ph type="body" idx="1"/>
+          </p:nvPr>
+        </p:nvSpPr>
+        <p:spPr/>
+        <p:txBody>
+          <a:bodyPr/>
+          <a:lstStyle/>
+          <a:p>
+            <a:r>
+              <a:rPr lang="en-US" dirty="0"/>
+              <a:t/>
+            </a:r>
+            <a:endParaRPr lang="en-US" dirty="0"/>
+          </a:p>
+        </p:txBody>
+      </p:sp>
+      <p:sp>
+        <p:nvSpPr>
+          <p:cNvPr id="4" name="Slide Number Placeholder 3"/>
+          <p:cNvSpPr>
+            <a:spLocks noGrp="1"/>
+          </p:cNvSpPr>
+          <p:nvPr>
+            <p:ph type="sldNum" sz="quarter" idx="10"/>
+          </p:nvPr>
+        </p:nvSpPr>
+        <p:spPr/>
+        <p:txBody>
+          <a:bodyPr/>
+          <a:lstStyle/>
+          <a:p>
+            <a:fld id="{F7021451-1387-4CA6-816F-3879F97B5CBC}" type="slidenum">
+              <a:rPr lang="en-US"/>
+              <a:t>50</a:t>
             </a:fld>
             <a:endParaRPr lang="en-US"/>
           </a:p>
@@ -18747,14 +18836,53 @@
       </p:grpSpPr>
       <p:sp>
         <p:nvSpPr>
-          <p:cNvPr id="2" name="Shape 0"/>
-          <p:cNvSpPr/>
-          <p:nvPr/>
-        </p:nvSpPr>
-        <p:spPr>
-          <a:xfrm>
-            <a:off x="0" y="0"/>
-            <a:ext cx="274320" cy="6858000"/>
+          <p:cNvPr id="2" name="Text 0"/>
+          <p:cNvSpPr/>
+          <p:nvPr/>
+        </p:nvSpPr>
+        <p:spPr>
+          <a:xfrm>
+            <a:off x="566928" y="411480"/>
+            <a:ext cx="11055096" cy="685800"/>
+          </a:xfrm>
+          <a:prstGeom prst="rect">
+            <a:avLst/>
+          </a:prstGeom>
+          <a:noFill/>
+          <a:ln/>
+        </p:spPr>
+        <p:txBody>
+          <a:bodyPr wrap="square" rtlCol="0" anchor="ctr"/>
+          <a:lstStyle/>
+          <a:p>
+            <a:pPr indent="0" marL="0">
+              <a:buNone/>
+            </a:pPr>
+            <a:r>
+              <a:rPr lang="en-US" sz="3200" b="1" dirty="0">
+                <a:solidFill>
+                  <a:srgbClr val="1F4C86"/>
+                </a:solidFill>
+                <a:latin typeface="Trebuchet MS" pitchFamily="34" charset="0"/>
+                <a:ea typeface="Trebuchet MS" pitchFamily="34" charset="-122"/>
+                <a:cs typeface="Trebuchet MS" pitchFamily="34" charset="-120"/>
+              </a:rPr>
+              <a:t>Acknowledgements</a:t>
+            </a:r>
+            <a:endParaRPr lang="en-US" sz="3200" dirty="0"/>
+          </a:p>
+        </p:txBody>
+      </p:sp>
+      <p:sp>
+        <p:nvSpPr>
+          <p:cNvPr id="3" name="Shape 1"/>
+          <p:cNvSpPr/>
+          <p:nvPr/>
+        </p:nvSpPr>
+        <p:spPr>
+          <a:xfrm>
+            <a:off x="566928" y="1152144"/>
+            <a:ext cx="1920240" cy="50292"/>
           </a:xfrm>
           <a:prstGeom prst="rect">
             <a:avLst/>
@@ -18767,14 +18895,54 @@
       </p:sp>
       <p:sp>
         <p:nvSpPr>
-          <p:cNvPr id="3" name="Text 1"/>
-          <p:cNvSpPr/>
-          <p:nvPr/>
-        </p:nvSpPr>
-        <p:spPr>
-          <a:xfrm>
-            <a:off x="960120" y="777240"/>
-            <a:ext cx="10268712" cy="822960"/>
+          <p:cNvPr id="4" name="Shape 2"/>
+          <p:cNvSpPr/>
+          <p:nvPr/>
+        </p:nvSpPr>
+        <p:spPr>
+          <a:xfrm>
+            <a:off x="566928" y="1572768"/>
+            <a:ext cx="11055096" cy="2240280"/>
+          </a:xfrm>
+          <a:prstGeom prst="rect">
+            <a:avLst/>
+          </a:prstGeom>
+          <a:solidFill>
+            <a:srgbClr val="E8F0FA"/>
+          </a:solidFill>
+          <a:ln/>
+        </p:spPr>
+      </p:sp>
+      <p:sp>
+        <p:nvSpPr>
+          <p:cNvPr id="5" name="Shape 3"/>
+          <p:cNvSpPr/>
+          <p:nvPr/>
+        </p:nvSpPr>
+        <p:spPr>
+          <a:xfrm>
+            <a:off x="566928" y="1572768"/>
+            <a:ext cx="146304" cy="2240280"/>
+          </a:xfrm>
+          <a:prstGeom prst="rect">
+            <a:avLst/>
+          </a:prstGeom>
+          <a:solidFill>
+            <a:srgbClr val="3674C1"/>
+          </a:solidFill>
+          <a:ln/>
+        </p:spPr>
+      </p:sp>
+      <p:sp>
+        <p:nvSpPr>
+          <p:cNvPr id="6" name="Text 4"/>
+          <p:cNvSpPr/>
+          <p:nvPr/>
+        </p:nvSpPr>
+        <p:spPr>
+          <a:xfrm>
+            <a:off x="978408" y="1737360"/>
+            <a:ext cx="10232136" cy="365760"/>
           </a:xfrm>
           <a:prstGeom prst="rect">
             <a:avLst/>
@@ -18790,7 +18958,46 @@
               <a:buNone/>
             </a:pPr>
             <a:r>
-              <a:rPr lang="en-US" sz="4000" b="1" dirty="0">
+              <a:rPr lang="en-US" sz="1600" b="1" spc="150" kern="0" dirty="0">
+                <a:solidFill>
+                  <a:srgbClr val="3674C1"/>
+                </a:solidFill>
+                <a:latin typeface="Calibri" pitchFamily="34" charset="0"/>
+                <a:ea typeface="Calibri" pitchFamily="34" charset="-122"/>
+                <a:cs typeface="Calibri" pitchFamily="34" charset="-120"/>
+              </a:rPr>
+              <a:t>Sample data</a:t>
+            </a:r>
+            <a:endParaRPr lang="en-US" sz="1600" dirty="0"/>
+          </a:p>
+        </p:txBody>
+      </p:sp>
+      <p:sp>
+        <p:nvSpPr>
+          <p:cNvPr id="7" name="Text 5"/>
+          <p:cNvSpPr/>
+          <p:nvPr/>
+        </p:nvSpPr>
+        <p:spPr>
+          <a:xfrm>
+            <a:off x="978408" y="2103120"/>
+            <a:ext cx="10232136" cy="566928"/>
+          </a:xfrm>
+          <a:prstGeom prst="rect">
+            <a:avLst/>
+          </a:prstGeom>
+          <a:noFill/>
+          <a:ln/>
+        </p:spPr>
+        <p:txBody>
+          <a:bodyPr wrap="square" rtlCol="0" anchor="ctr"/>
+          <a:lstStyle/>
+          <a:p>
+            <a:pPr indent="0" marL="0">
+              <a:buNone/>
+            </a:pPr>
+            <a:r>
+              <a:rPr lang="en-US" sz="3200" b="1" dirty="0">
                 <a:solidFill>
                   <a:srgbClr val="1F4C86"/>
                 </a:solidFill>
@@ -18798,42 +19005,22 @@
                 <a:ea typeface="Trebuchet MS" pitchFamily="34" charset="-122"/>
                 <a:cs typeface="Trebuchet MS" pitchFamily="34" charset="-120"/>
               </a:rPr>
-              <a:t>Everything is here</a:t>
-            </a:r>
-            <a:endParaRPr lang="en-US" sz="4000" dirty="0"/>
-          </a:p>
-        </p:txBody>
-      </p:sp>
-      <p:sp>
-        <p:nvSpPr>
-          <p:cNvPr id="4" name="Shape 2"/>
-          <p:cNvSpPr/>
-          <p:nvPr/>
-        </p:nvSpPr>
-        <p:spPr>
-          <a:xfrm>
-            <a:off x="960120" y="1691640"/>
-            <a:ext cx="8686800" cy="713232"/>
-          </a:xfrm>
-          <a:prstGeom prst="rect">
-            <a:avLst/>
-          </a:prstGeom>
-          <a:solidFill>
-            <a:srgbClr val="E8F0FA"/>
-          </a:solidFill>
-          <a:ln/>
-        </p:spPr>
-      </p:sp>
-      <p:sp>
-        <p:nvSpPr>
-          <p:cNvPr id="5" name="Text 3"/>
-          <p:cNvSpPr/>
-          <p:nvPr/>
-        </p:nvSpPr>
-        <p:spPr>
-          <a:xfrm>
-            <a:off x="1188720" y="1691640"/>
-            <a:ext cx="8412480" cy="713232"/>
+              <a:t>Sara McArdle  ·  Zbigniew Mikulski</a:t>
+            </a:r>
+            <a:endParaRPr lang="en-US" sz="3200" dirty="0"/>
+          </a:p>
+        </p:txBody>
+      </p:sp>
+      <p:sp>
+        <p:nvSpPr>
+          <p:cNvPr id="8" name="Text 6"/>
+          <p:cNvSpPr/>
+          <p:nvPr/>
+        </p:nvSpPr>
+        <p:spPr>
+          <a:xfrm>
+            <a:off x="978408" y="2670048"/>
+            <a:ext cx="10232136" cy="384048"/>
           </a:xfrm>
           <a:prstGeom prst="rect">
             <a:avLst/>
@@ -18849,30 +19036,92 @@
               <a:buNone/>
             </a:pPr>
             <a:r>
-              <a:rPr lang="en-US" sz="2200" b="1" dirty="0">
-                <a:solidFill>
-                  <a:srgbClr val="1F4C86"/>
-                </a:solidFill>
-                <a:latin typeface="Calibri" pitchFamily="34" charset="0"/>
-                <a:ea typeface="Calibri" pitchFamily="34" charset="-122"/>
-                <a:cs typeface="Calibri" pitchFamily="34" charset="-120"/>
-              </a:rPr>
-              <a:t>michaelsnelson.github.io/BINA-I2K-2026-QuPath-Extensions</a:t>
-            </a:r>
-            <a:endParaRPr lang="en-US" sz="2200" dirty="0"/>
-          </a:p>
-        </p:txBody>
-      </p:sp>
-      <p:sp>
-        <p:nvSpPr>
-          <p:cNvPr id="6" name="Text 4"/>
-          <p:cNvSpPr/>
-          <p:nvPr/>
-        </p:nvSpPr>
-        <p:spPr>
-          <a:xfrm>
-            <a:off x="960120" y="2697480"/>
-            <a:ext cx="9811512" cy="2560320"/>
+              <a:rPr lang="en-US" sz="2100" dirty="0">
+                <a:solidFill>
+                  <a:srgbClr val="1F2933"/>
+                </a:solidFill>
+                <a:latin typeface="Calibri" pitchFamily="34" charset="0"/>
+                <a:ea typeface="Calibri" pitchFamily="34" charset="-122"/>
+                <a:cs typeface="Calibri" pitchFamily="34" charset="-120"/>
+              </a:rPr>
+              <a:t>La Jolla Institute for Immunology</a:t>
+            </a:r>
+            <a:endParaRPr lang="en-US" sz="2100" dirty="0"/>
+          </a:p>
+        </p:txBody>
+      </p:sp>
+      <p:sp>
+        <p:nvSpPr>
+          <p:cNvPr id="9" name="Text 7"/>
+          <p:cNvSpPr/>
+          <p:nvPr/>
+        </p:nvSpPr>
+        <p:spPr>
+          <a:xfrm>
+            <a:off x="978408" y="3054096"/>
+            <a:ext cx="10232136" cy="731520"/>
+          </a:xfrm>
+          <a:prstGeom prst="rect">
+            <a:avLst/>
+          </a:prstGeom>
+          <a:noFill/>
+          <a:ln/>
+        </p:spPr>
+        <p:txBody>
+          <a:bodyPr wrap="square" rtlCol="0" anchor="ctr"/>
+          <a:lstStyle/>
+          <a:p>
+            <a:pPr indent="0" marL="0">
+              <a:lnSpc>
+                <a:spcPct val="110000"/>
+              </a:lnSpc>
+              <a:buNone/>
+            </a:pPr>
+            <a:r>
+              <a:rPr lang="en-US" sz="1700" i="1" dirty="0">
+                <a:solidFill>
+                  <a:srgbClr val="5A6675"/>
+                </a:solidFill>
+                <a:latin typeface="Calibri" pitchFamily="34" charset="0"/>
+                <a:ea typeface="Calibri" pitchFamily="34" charset="-122"/>
+                <a:cs typeface="Calibri" pitchFamily="34" charset="-120"/>
+              </a:rPr>
+              <a:t>They provided the majority of the test and demonstration data behind almost every exercise you will see today.</a:t>
+            </a:r>
+            <a:endParaRPr lang="en-US" sz="1700" dirty="0"/>
+          </a:p>
+          <a:p>
+            <a:pPr indent="0" marL="0">
+              <a:lnSpc>
+                <a:spcPct val="110000"/>
+              </a:lnSpc>
+              <a:buNone/>
+            </a:pPr>
+            <a:r>
+              <a:rPr lang="en-US" sz="1700" i="1" dirty="0">
+                <a:solidFill>
+                  <a:srgbClr val="5A6675"/>
+                </a:solidFill>
+                <a:latin typeface="Calibri" pitchFamily="34" charset="0"/>
+                <a:ea typeface="Calibri" pitchFamily="34" charset="-122"/>
+                <a:cs typeface="Calibri" pitchFamily="34" charset="-120"/>
+              </a:rPr>
+              <a:t>These tools could not have been built, tested, or taught without it.</a:t>
+            </a:r>
+            <a:endParaRPr lang="en-US" sz="1700" dirty="0"/>
+          </a:p>
+        </p:txBody>
+      </p:sp>
+      <p:sp>
+        <p:nvSpPr>
+          <p:cNvPr id="10" name="Text 8"/>
+          <p:cNvSpPr/>
+          <p:nvPr/>
+        </p:nvSpPr>
+        <p:spPr>
+          <a:xfrm>
+            <a:off x="566928" y="3977640"/>
+            <a:ext cx="11055096" cy="2103120"/>
           </a:xfrm>
           <a:prstGeom prst="rect">
             <a:avLst/>
@@ -18891,7 +19140,7 @@
               <a:buNone/>
             </a:pPr>
             <a:r>
-              <a:rPr lang="en-US" sz="1900" dirty="0">
+              <a:rPr lang="en-US" sz="1700" dirty="0">
                 <a:solidFill>
                   <a:srgbClr val="1F2933"/>
                 </a:solidFill>
@@ -18899,17 +19148,17 @@
                 <a:ea typeface="Calibri" pitchFamily="34" charset="-122"/>
                 <a:cs typeface="Calibri" pitchFamily="34" charset="-120"/>
               </a:rPr>
-              <a:t>A written walkthrough and a video for every tool  ·  setup instructions  ·  sample data  ·  these slides
+              <a:t>Sara McArdle also shaped the software directly — two of these extensions began as her Groovy scripts, and her FS2K course was the model for how the workshop pages are written.
 </a:t>
             </a:r>
             <a:pPr indent="0" marL="0">
               <a:spcAft>
-                <a:spcPts val="600"/>
+                <a:spcPts val="1000"/>
               </a:spcAft>
               <a:buNone/>
             </a:pPr>
             <a:r>
-              <a:rPr lang="en-US" sz="1900" dirty="0">
+              <a:rPr lang="en-US" sz="1700" dirty="0">
                 <a:solidFill>
                   <a:srgbClr val="1F2933"/>
                 </a:solidFill>
@@ -18917,50 +19166,14 @@
                 <a:ea typeface="Calibri" pitchFamily="34" charset="-122"/>
                 <a:cs typeface="Calibri" pitchFamily="34" charset="-120"/>
               </a:rPr>
-              <a:t>Add the two catalogs in QuPath, install only what interests you, and restart:
-</a:t>
-            </a:r>
-            <a:pPr indent="0" marL="0">
-              <a:spcAft>
-                <a:spcPts val="400"/>
-              </a:spcAft>
-              <a:buNone/>
-            </a:pPr>
-            <a:r>
-              <a:rPr lang="en-US" sz="1800" b="1" dirty="0">
-                <a:solidFill>
-                  <a:srgbClr val="1F4C86"/>
-                </a:solidFill>
-                <a:latin typeface="Calibri" pitchFamily="34" charset="0"/>
-                <a:ea typeface="Calibri" pitchFamily="34" charset="-122"/>
-                <a:cs typeface="Calibri" pitchFamily="34" charset="-120"/>
-              </a:rPr>
-              <a:t>github.com/uw-loci/qupath-catalog-mikenelson
-</a:t>
-            </a:r>
-            <a:pPr indent="0" marL="0">
-              <a:spcAft>
-                <a:spcPts val="1400"/>
-              </a:spcAft>
-              <a:buNone/>
-            </a:pPr>
-            <a:r>
-              <a:rPr lang="en-US" sz="1800" b="1" dirty="0">
-                <a:solidFill>
-                  <a:srgbClr val="1F4C86"/>
-                </a:solidFill>
-                <a:latin typeface="Calibri" pitchFamily="34" charset="0"/>
-                <a:ea typeface="Calibri" pitchFamily="34" charset="-122"/>
-                <a:cs typeface="Calibri" pitchFamily="34" charset="-120"/>
-              </a:rPr>
-              <a:t>github.com/uw-loci/qupath-catalog-qpsc
+              <a:t>Pete Bankhead and the QuPath team.  ·  CT-FIRE, CurveAlign, TACS and TWOMBLI for the fibre work.  ·  CytoMAP and QuBaLab for bringing clustering into QuPath.  ·  QUAREP-LiMi for the reporting standards.  ·  The image.sc community, where several of these features were first requested.
 </a:t>
             </a:r>
             <a:pPr indent="0" marL="0">
               <a:buNone/>
             </a:pPr>
             <a:r>
-              <a:rPr lang="en-US" sz="1900" b="1" dirty="0">
+              <a:rPr lang="en-US" sz="1700" b="1" dirty="0">
                 <a:solidFill>
                   <a:srgbClr val="1F4C86"/>
                 </a:solidFill>
@@ -18968,54 +19181,15 @@
                 <a:ea typeface="Calibri" pitchFamily="34" charset="-122"/>
                 <a:cs typeface="Calibri" pitchFamily="34" charset="-120"/>
               </a:rPr>
-              <a:t>Whatever we did not reach today, the walkthrough and the video are waiting for you.</a:t>
-            </a:r>
-            <a:endParaRPr lang="en-US" sz="1900" dirty="0"/>
-          </a:p>
-        </p:txBody>
-      </p:sp>
-      <p:sp>
-        <p:nvSpPr>
-          <p:cNvPr id="7" name="Text 5"/>
-          <p:cNvSpPr/>
-          <p:nvPr/>
-        </p:nvSpPr>
-        <p:spPr>
-          <a:xfrm>
-            <a:off x="960120" y="5532120"/>
-            <a:ext cx="9811512" cy="457200"/>
-          </a:xfrm>
-          <a:prstGeom prst="rect">
-            <a:avLst/>
-          </a:prstGeom>
-          <a:noFill/>
-          <a:ln/>
-        </p:spPr>
-        <p:txBody>
-          <a:bodyPr wrap="square" rtlCol="0" anchor="ctr"/>
-          <a:lstStyle/>
-          <a:p>
-            <a:pPr indent="0" marL="0">
-              <a:buNone/>
-            </a:pPr>
-            <a:r>
-              <a:rPr lang="en-US" sz="1800" i="1" dirty="0">
-                <a:solidFill>
-                  <a:srgbClr val="5A6675"/>
-                </a:solidFill>
-                <a:latin typeface="Calibri" pitchFamily="34" charset="0"/>
-                <a:ea typeface="Calibri" pitchFamily="34" charset="-122"/>
-                <a:cs typeface="Calibri" pitchFamily="34" charset="-120"/>
-              </a:rPr>
-              <a:t>Questions welcome now, during the hands-on hour, or by email afterwards.</a:t>
-            </a:r>
-            <a:endParaRPr lang="en-US" sz="1800" dirty="0"/>
-          </a:p>
-        </p:txBody>
-      </p:sp>
-      <p:sp>
-        <p:nvSpPr>
-          <p:cNvPr id="8" name="Text 6"/>
+              <a:t>Full credits: michaelsnelson.github.io/BINA-I2K-2026-QuPath-Extensions/docs/acknowledgements.html</a:t>
+            </a:r>
+            <a:endParaRPr lang="en-US" sz="1700" dirty="0"/>
+          </a:p>
+        </p:txBody>
+      </p:sp>
+      <p:sp>
+        <p:nvSpPr>
+          <p:cNvPr id="11" name="Text 9"/>
           <p:cNvSpPr/>
           <p:nvPr/>
         </p:nvSpPr>
@@ -19398,6 +19572,384 @@
                 <a:cs typeface="Calibri" pitchFamily="34" charset="-120"/>
               </a:rPr>
               <a:t>5</a:t>
+            </a:r>
+            <a:endParaRPr lang="en-US" sz="1400" dirty="0"/>
+          </a:p>
+        </p:txBody>
+      </p:sp>
+    </p:spTree>
+  </p:cSld>
+  <p:clrMapOvr>
+    <a:masterClrMapping/>
+  </p:clrMapOvr>
+</p:sld>
+</file>
+
+<file path=ppt/slides/slide50.xml><?xml version="1.0" encoding="utf-8"?>
+<p:sld xmlns:a="http://schemas.openxmlformats.org/drawingml/2006/main" xmlns:r="http://schemas.openxmlformats.org/officeDocument/2006/relationships" xmlns:p="http://schemas.openxmlformats.org/presentationml/2006/main">
+  <p:cSld name="Slide 50">
+    <p:bg>
+      <p:bgPr>
+        <a:solidFill>
+          <a:srgbClr val="FFFFFF"/>
+        </a:solidFill>
+      </p:bgPr>
+    </p:bg>
+    <p:spTree>
+      <p:nvGrpSpPr>
+        <p:cNvPr id="1" name=""/>
+        <p:cNvGrpSpPr/>
+        <p:nvPr/>
+      </p:nvGrpSpPr>
+      <p:grpSpPr>
+        <a:xfrm>
+          <a:off x="0" y="0"/>
+          <a:ext cx="0" cy="0"/>
+          <a:chOff x="0" y="0"/>
+          <a:chExt cx="0" cy="0"/>
+        </a:xfrm>
+      </p:grpSpPr>
+      <p:sp>
+        <p:nvSpPr>
+          <p:cNvPr id="2" name="Shape 0"/>
+          <p:cNvSpPr/>
+          <p:nvPr/>
+        </p:nvSpPr>
+        <p:spPr>
+          <a:xfrm>
+            <a:off x="0" y="0"/>
+            <a:ext cx="274320" cy="6858000"/>
+          </a:xfrm>
+          <a:prstGeom prst="rect">
+            <a:avLst/>
+          </a:prstGeom>
+          <a:solidFill>
+            <a:srgbClr val="3674C1"/>
+          </a:solidFill>
+          <a:ln/>
+        </p:spPr>
+      </p:sp>
+      <p:sp>
+        <p:nvSpPr>
+          <p:cNvPr id="3" name="Text 1"/>
+          <p:cNvSpPr/>
+          <p:nvPr/>
+        </p:nvSpPr>
+        <p:spPr>
+          <a:xfrm>
+            <a:off x="960120" y="777240"/>
+            <a:ext cx="10268712" cy="822960"/>
+          </a:xfrm>
+          <a:prstGeom prst="rect">
+            <a:avLst/>
+          </a:prstGeom>
+          <a:noFill/>
+          <a:ln/>
+        </p:spPr>
+        <p:txBody>
+          <a:bodyPr wrap="square" rtlCol="0" anchor="ctr"/>
+          <a:lstStyle/>
+          <a:p>
+            <a:pPr indent="0" marL="0">
+              <a:buNone/>
+            </a:pPr>
+            <a:r>
+              <a:rPr lang="en-US" sz="4000" b="1" dirty="0">
+                <a:solidFill>
+                  <a:srgbClr val="1F4C86"/>
+                </a:solidFill>
+                <a:latin typeface="Trebuchet MS" pitchFamily="34" charset="0"/>
+                <a:ea typeface="Trebuchet MS" pitchFamily="34" charset="-122"/>
+                <a:cs typeface="Trebuchet MS" pitchFamily="34" charset="-120"/>
+              </a:rPr>
+              <a:t>Everything is here</a:t>
+            </a:r>
+            <a:endParaRPr lang="en-US" sz="4000" dirty="0"/>
+          </a:p>
+        </p:txBody>
+      </p:sp>
+      <p:sp>
+        <p:nvSpPr>
+          <p:cNvPr id="4" name="Shape 2"/>
+          <p:cNvSpPr/>
+          <p:nvPr/>
+        </p:nvSpPr>
+        <p:spPr>
+          <a:xfrm>
+            <a:off x="960120" y="1691640"/>
+            <a:ext cx="8686800" cy="713232"/>
+          </a:xfrm>
+          <a:prstGeom prst="rect">
+            <a:avLst/>
+          </a:prstGeom>
+          <a:solidFill>
+            <a:srgbClr val="E8F0FA"/>
+          </a:solidFill>
+          <a:ln/>
+        </p:spPr>
+      </p:sp>
+      <p:sp>
+        <p:nvSpPr>
+          <p:cNvPr id="5" name="Text 3"/>
+          <p:cNvSpPr/>
+          <p:nvPr/>
+        </p:nvSpPr>
+        <p:spPr>
+          <a:xfrm>
+            <a:off x="1188720" y="1691640"/>
+            <a:ext cx="8412480" cy="713232"/>
+          </a:xfrm>
+          <a:prstGeom prst="rect">
+            <a:avLst/>
+          </a:prstGeom>
+          <a:noFill/>
+          <a:ln/>
+        </p:spPr>
+        <p:txBody>
+          <a:bodyPr wrap="square" rtlCol="0" anchor="ctr"/>
+          <a:lstStyle/>
+          <a:p>
+            <a:pPr indent="0" marL="0">
+              <a:buNone/>
+            </a:pPr>
+            <a:r>
+              <a:rPr lang="en-US" sz="2200" b="1" dirty="0">
+                <a:solidFill>
+                  <a:srgbClr val="1F4C86"/>
+                </a:solidFill>
+                <a:latin typeface="Calibri" pitchFamily="34" charset="0"/>
+                <a:ea typeface="Calibri" pitchFamily="34" charset="-122"/>
+                <a:cs typeface="Calibri" pitchFamily="34" charset="-120"/>
+              </a:rPr>
+              <a:t>michaelsnelson.github.io/BINA-I2K-2026-QuPath-Extensions</a:t>
+            </a:r>
+            <a:endParaRPr lang="en-US" sz="2200" dirty="0"/>
+          </a:p>
+        </p:txBody>
+      </p:sp>
+      <p:sp>
+        <p:nvSpPr>
+          <p:cNvPr id="6" name="Text 4"/>
+          <p:cNvSpPr/>
+          <p:nvPr/>
+        </p:nvSpPr>
+        <p:spPr>
+          <a:xfrm>
+            <a:off x="960120" y="2697480"/>
+            <a:ext cx="9811512" cy="2560320"/>
+          </a:xfrm>
+          <a:prstGeom prst="rect">
+            <a:avLst/>
+          </a:prstGeom>
+          <a:noFill/>
+          <a:ln/>
+        </p:spPr>
+        <p:txBody>
+          <a:bodyPr wrap="square" rtlCol="0" anchor="t"/>
+          <a:lstStyle/>
+          <a:p>
+            <a:pPr indent="0" marL="0">
+              <a:spcAft>
+                <a:spcPts val="1000"/>
+              </a:spcAft>
+              <a:buNone/>
+            </a:pPr>
+            <a:r>
+              <a:rPr lang="en-US" sz="1900" dirty="0">
+                <a:solidFill>
+                  <a:srgbClr val="1F2933"/>
+                </a:solidFill>
+                <a:latin typeface="Calibri" pitchFamily="34" charset="0"/>
+                <a:ea typeface="Calibri" pitchFamily="34" charset="-122"/>
+                <a:cs typeface="Calibri" pitchFamily="34" charset="-120"/>
+              </a:rPr>
+              <a:t>A written walkthrough and a video for every tool  ·  setup instructions  ·  sample data  ·  these slides
+</a:t>
+            </a:r>
+            <a:pPr indent="0" marL="0">
+              <a:spcAft>
+                <a:spcPts val="600"/>
+              </a:spcAft>
+              <a:buNone/>
+            </a:pPr>
+            <a:r>
+              <a:rPr lang="en-US" sz="1900" dirty="0">
+                <a:solidFill>
+                  <a:srgbClr val="1F2933"/>
+                </a:solidFill>
+                <a:latin typeface="Calibri" pitchFamily="34" charset="0"/>
+                <a:ea typeface="Calibri" pitchFamily="34" charset="-122"/>
+                <a:cs typeface="Calibri" pitchFamily="34" charset="-120"/>
+              </a:rPr>
+              <a:t>Add the two catalogs in QuPath, install only what interests you, and restart:
+</a:t>
+            </a:r>
+            <a:pPr indent="0" marL="0">
+              <a:spcAft>
+                <a:spcPts val="400"/>
+              </a:spcAft>
+              <a:buNone/>
+            </a:pPr>
+            <a:r>
+              <a:rPr lang="en-US" sz="1800" b="1" dirty="0">
+                <a:solidFill>
+                  <a:srgbClr val="1F4C86"/>
+                </a:solidFill>
+                <a:latin typeface="Calibri" pitchFamily="34" charset="0"/>
+                <a:ea typeface="Calibri" pitchFamily="34" charset="-122"/>
+                <a:cs typeface="Calibri" pitchFamily="34" charset="-120"/>
+              </a:rPr>
+              <a:t>github.com/uw-loci/qupath-catalog-mikenelson
+</a:t>
+            </a:r>
+            <a:pPr indent="0" marL="0">
+              <a:spcAft>
+                <a:spcPts val="1400"/>
+              </a:spcAft>
+              <a:buNone/>
+            </a:pPr>
+            <a:r>
+              <a:rPr lang="en-US" sz="1800" b="1" dirty="0">
+                <a:solidFill>
+                  <a:srgbClr val="1F4C86"/>
+                </a:solidFill>
+                <a:latin typeface="Calibri" pitchFamily="34" charset="0"/>
+                <a:ea typeface="Calibri" pitchFamily="34" charset="-122"/>
+                <a:cs typeface="Calibri" pitchFamily="34" charset="-120"/>
+              </a:rPr>
+              <a:t>github.com/uw-loci/qupath-catalog-qpsc
+</a:t>
+            </a:r>
+            <a:pPr indent="0" marL="0">
+              <a:buNone/>
+            </a:pPr>
+            <a:r>
+              <a:rPr lang="en-US" sz="1900" b="1" dirty="0">
+                <a:solidFill>
+                  <a:srgbClr val="1F4C86"/>
+                </a:solidFill>
+                <a:latin typeface="Calibri" pitchFamily="34" charset="0"/>
+                <a:ea typeface="Calibri" pitchFamily="34" charset="-122"/>
+                <a:cs typeface="Calibri" pitchFamily="34" charset="-120"/>
+              </a:rPr>
+              <a:t>Whatever we did not reach today, the walkthrough and the video are waiting for you.</a:t>
+            </a:r>
+            <a:endParaRPr lang="en-US" sz="1900" dirty="0"/>
+          </a:p>
+        </p:txBody>
+      </p:sp>
+      <p:sp>
+        <p:nvSpPr>
+          <p:cNvPr id="7" name="Text 5"/>
+          <p:cNvSpPr/>
+          <p:nvPr/>
+        </p:nvSpPr>
+        <p:spPr>
+          <a:xfrm>
+            <a:off x="960120" y="5230368"/>
+            <a:ext cx="9811512" cy="365760"/>
+          </a:xfrm>
+          <a:prstGeom prst="rect">
+            <a:avLst/>
+          </a:prstGeom>
+          <a:noFill/>
+          <a:ln/>
+        </p:spPr>
+        <p:txBody>
+          <a:bodyPr wrap="square" rtlCol="0" anchor="ctr"/>
+          <a:lstStyle/>
+          <a:p>
+            <a:pPr indent="0" marL="0">
+              <a:buNone/>
+            </a:pPr>
+            <a:r>
+              <a:rPr lang="en-US" sz="1600" b="1" dirty="0">
+                <a:solidFill>
+                  <a:srgbClr val="1F4C86"/>
+                </a:solidFill>
+                <a:latin typeface="Calibri" pitchFamily="34" charset="0"/>
+                <a:ea typeface="Calibri" pitchFamily="34" charset="-122"/>
+                <a:cs typeface="Calibri" pitchFamily="34" charset="-120"/>
+              </a:rPr>
+              <a:t>Sample data courtesy of Sara McArdle and Zbigniew Mikulski, La Jolla Institute for Immunology.</a:t>
+            </a:r>
+            <a:endParaRPr lang="en-US" sz="1600" dirty="0"/>
+          </a:p>
+        </p:txBody>
+      </p:sp>
+      <p:sp>
+        <p:nvSpPr>
+          <p:cNvPr id="8" name="Text 6"/>
+          <p:cNvSpPr/>
+          <p:nvPr/>
+        </p:nvSpPr>
+        <p:spPr>
+          <a:xfrm>
+            <a:off x="960120" y="5532120"/>
+            <a:ext cx="9811512" cy="457200"/>
+          </a:xfrm>
+          <a:prstGeom prst="rect">
+            <a:avLst/>
+          </a:prstGeom>
+          <a:noFill/>
+          <a:ln/>
+        </p:spPr>
+        <p:txBody>
+          <a:bodyPr wrap="square" rtlCol="0" anchor="ctr"/>
+          <a:lstStyle/>
+          <a:p>
+            <a:pPr indent="0" marL="0">
+              <a:buNone/>
+            </a:pPr>
+            <a:r>
+              <a:rPr lang="en-US" sz="1800" i="1" dirty="0">
+                <a:solidFill>
+                  <a:srgbClr val="5A6675"/>
+                </a:solidFill>
+                <a:latin typeface="Calibri" pitchFamily="34" charset="0"/>
+                <a:ea typeface="Calibri" pitchFamily="34" charset="-122"/>
+                <a:cs typeface="Calibri" pitchFamily="34" charset="-120"/>
+              </a:rPr>
+              <a:t>Questions welcome now, during the hands-on hour, or by email afterwards.</a:t>
+            </a:r>
+            <a:endParaRPr lang="en-US" sz="1800" dirty="0"/>
+          </a:p>
+        </p:txBody>
+      </p:sp>
+      <p:sp>
+        <p:nvSpPr>
+          <p:cNvPr id="9" name="Text 7"/>
+          <p:cNvSpPr/>
+          <p:nvPr/>
+        </p:nvSpPr>
+        <p:spPr>
+          <a:xfrm>
+            <a:off x="11274552" y="6291072"/>
+            <a:ext cx="457200" cy="310896"/>
+          </a:xfrm>
+          <a:prstGeom prst="rect">
+            <a:avLst/>
+          </a:prstGeom>
+          <a:noFill/>
+          <a:ln/>
+        </p:spPr>
+        <p:txBody>
+          <a:bodyPr wrap="square" rtlCol="0" anchor="ctr"/>
+          <a:lstStyle/>
+          <a:p>
+            <a:pPr algn="r" indent="0" marL="0">
+              <a:buNone/>
+            </a:pPr>
+            <a:r>
+              <a:rPr lang="en-US" sz="1400" dirty="0">
+                <a:solidFill>
+                  <a:srgbClr val="A8B2BF"/>
+                </a:solidFill>
+                <a:latin typeface="Calibri" pitchFamily="34" charset="0"/>
+                <a:ea typeface="Calibri" pitchFamily="34" charset="-122"/>
+                <a:cs typeface="Calibri" pitchFamily="34" charset="-120"/>
+              </a:rPr>
+              <a:t>50</a:t>
             </a:r>
             <a:endParaRPr lang="en-US" sz="1400" dirty="0"/>
           </a:p>

--- a/I2K_2026_QuPath_Extensions.pptx
+++ b/I2K_2026_QuPath_Extensions.pptx
@@ -13207,7 +13207,7 @@
                 <a:ea typeface="Calibri" pitchFamily="34" charset="-122"/>
                 <a:cs typeface="Calibri" pitchFamily="34" charset="-120"/>
               </a:rPr>
-              <a:t>Demo only: the repository is currently private, so there is no version for you to install.</a:t>
+              <a:t>Written by Kristin Gallick.  ·  Demo only: the repository is currently private, so there is no version for you to install.</a:t>
             </a:r>
             <a:endParaRPr lang="en-US" sz="1600" dirty="0"/>
           </a:p>
@@ -19166,7 +19166,7 @@
                 <a:ea typeface="Calibri" pitchFamily="34" charset="-122"/>
                 <a:cs typeface="Calibri" pitchFamily="34" charset="-120"/>
               </a:rPr>
-              <a:t>Pete Bankhead and the QuPath team.  ·  CT-FIRE, CurveAlign, TACS and TWOMBLI for the fibre work.  ·  CytoMAP and QuBaLab for bringing clustering into QuPath.  ·  QUAREP-LiMi for the reporting standards.  ·  The image.sc community, where several of these features were first requested.
+              <a:t>Kristin Gallick, who wrote the Confusion Matrix extension.  ·  Pete Bankhead and the QuPath team.  ·  CT-FIRE, CurveAlign, TACS and TWOMBLI for the fibre work.  ·  CytoMAP and QuBaLab for bringing clustering into QuPath.  ·  QUAREP-LiMi for the reporting standards.  ·  The image.sc community, where several of these features were first requested.
 </a:t>
             </a:r>
             <a:pPr indent="0" marL="0">

--- a/I2K_2026_QuPath_Extensions.pptx
+++ b/I2K_2026_QuPath_Extensions.pptx
@@ -13207,7 +13207,7 @@
                 <a:ea typeface="Calibri" pitchFamily="34" charset="-122"/>
                 <a:cs typeface="Calibri" pitchFamily="34" charset="-120"/>
               </a:rPr>
-              <a:t>Written by Kristin Gallick.  ·  Demo only: the repository is currently private, so there is no version for you to install.</a:t>
+              <a:t>Originated by Kristin Gallick — concept and initial scripts; built out at LOCI.  ·  Demo only: the repository is currently private.</a:t>
             </a:r>
             <a:endParaRPr lang="en-US" sz="1600" dirty="0"/>
           </a:p>
@@ -19166,7 +19166,7 @@
                 <a:ea typeface="Calibri" pitchFamily="34" charset="-122"/>
                 <a:cs typeface="Calibri" pitchFamily="34" charset="-120"/>
               </a:rPr>
-              <a:t>Kristin Gallick, who wrote the Confusion Matrix extension.  ·  Pete Bankhead and the QuPath team.  ·  CT-FIRE, CurveAlign, TACS and TWOMBLI for the fibre work.  ·  CytoMAP and QuBaLab for bringing clustering into QuPath.  ·  QUAREP-LiMi for the reporting standards.  ·  The image.sc community, where several of these features were first requested.
+              <a:t>Kristin Gallick, whose concept and scripts the Confusion Matrix grew from.  ·  Pete Bankhead and the QuPath team.  ·  CT-FIRE, CurveAlign, TACS and TWOMBLI for the fibre work.  ·  CytoMAP and QuBaLab for bringing clustering into QuPath.  ·  QUAREP-LiMi for the reporting standards.  ·  The image.sc community, where several of these features were first requested.
 </a:t>
             </a:r>
             <a:pPr indent="0" marL="0">

--- a/I2K_2026_QuPath_Extensions.pptx
+++ b/I2K_2026_QuPath_Extensions.pptx
@@ -55,9 +55,10 @@
     <p:sldId id="303" r:id="rId49"/>
     <p:sldId id="304" r:id="rId50"/>
     <p:sldId id="305" r:id="rId51"/>
+    <p:sldId id="306" r:id="rId52"/>
   </p:sldIdLst>
   <p:notesMasterIdLst>
-    <p:notesMasterId r:id="rId52"/>
+    <p:notesMasterId r:id="rId53"/>
   </p:notesMasterIdLst>
   <p:sldSz cx="12192000" cy="6858000"/>
   <p:notesSz cx="6858000" cy="12192000"/>
@@ -4535,6 +4536,94 @@
             <a:fld id="{F7021451-1387-4CA6-816F-3879F97B5CBC}" type="slidenum">
               <a:rPr lang="en-US"/>
               <a:t>50</a:t>
+            </a:fld>
+            <a:endParaRPr lang="en-US"/>
+          </a:p>
+        </p:txBody>
+      </p:sp>
+    </p:spTree>
+    <p:extLst>
+      <p:ext uri="{BB962C8B-B14F-4D97-AF65-F5344CB8AC3E}">
+        <p14:creationId xmlns:p14="http://schemas.microsoft.com/office/powerpoint/2010/main" val="1024086991"/>
+      </p:ext>
+    </p:extLst>
+  </p:cSld>
+  <p:clrMapOvr>
+    <a:masterClrMapping/>
+  </p:clrMapOvr>
+</p:notes>
+</file>
+
+<file path=ppt/notesSlides/notesSlide51.xml><?xml version="1.0" encoding="utf-8"?>
+<p:notes xmlns:a="http://schemas.openxmlformats.org/drawingml/2006/main" xmlns:r="http://schemas.openxmlformats.org/officeDocument/2006/relationships" xmlns:p="http://schemas.openxmlformats.org/presentationml/2006/main">
+  <p:cSld>
+    <p:spTree>
+      <p:nvGrpSpPr>
+        <p:cNvPr id="1" name=""/>
+        <p:cNvGrpSpPr/>
+        <p:nvPr/>
+      </p:nvGrpSpPr>
+      <p:grpSpPr>
+        <a:xfrm>
+          <a:off x="0" y="0"/>
+          <a:ext cx="0" cy="0"/>
+          <a:chOff x="0" y="0"/>
+          <a:chExt cx="0" cy="0"/>
+        </a:xfrm>
+      </p:grpSpPr>
+      <p:sp>
+        <p:nvSpPr>
+          <p:cNvPr id="2" name="Slide Image Placeholder 1"/>
+          <p:cNvSpPr>
+            <a:spLocks noGrp="1" noRot="1" noChangeAspect="1"/>
+          </p:cNvSpPr>
+          <p:nvPr>
+            <p:ph type="sldImg"/>
+          </p:nvPr>
+        </p:nvSpPr>
+        <p:spPr/>
+      </p:sp>
+      <p:sp>
+        <p:nvSpPr>
+          <p:cNvPr id="3" name="Notes Placeholder 2"/>
+          <p:cNvSpPr>
+            <a:spLocks noGrp="1"/>
+          </p:cNvSpPr>
+          <p:nvPr>
+            <p:ph type="body" idx="1"/>
+          </p:nvPr>
+        </p:nvSpPr>
+        <p:spPr/>
+        <p:txBody>
+          <a:bodyPr/>
+          <a:lstStyle/>
+          <a:p>
+            <a:r>
+              <a:rPr lang="en-US" dirty="0"/>
+              <a:t/>
+            </a:r>
+            <a:endParaRPr lang="en-US" dirty="0"/>
+          </a:p>
+        </p:txBody>
+      </p:sp>
+      <p:sp>
+        <p:nvSpPr>
+          <p:cNvPr id="4" name="Slide Number Placeholder 3"/>
+          <p:cNvSpPr>
+            <a:spLocks noGrp="1"/>
+          </p:cNvSpPr>
+          <p:nvPr>
+            <p:ph type="sldNum" sz="quarter" idx="10"/>
+          </p:nvPr>
+        </p:nvSpPr>
+        <p:spPr/>
+        <p:txBody>
+          <a:bodyPr/>
+          <a:lstStyle/>
+          <a:p>
+            <a:fld id="{F7021451-1387-4CA6-816F-3879F97B5CBC}" type="slidenum">
+              <a:rPr lang="en-US"/>
+              <a:t>51</a:t>
             </a:fld>
             <a:endParaRPr lang="en-US"/>
           </a:p>
@@ -15003,6 +15092,30 @@
             </a:r>
             <a:endParaRPr lang="en-US" sz="2000" dirty="0"/>
           </a:p>
+          <a:p>
+            <a:pPr marL="342900" indent="-342900">
+              <a:lnSpc>
+                <a:spcPct val="105000"/>
+              </a:lnSpc>
+              <a:spcAft>
+                <a:spcPts val="1200"/>
+              </a:spcAft>
+              <a:buSzPct val="100000"/>
+              <a:buChar char="•"/>
+            </a:pPr>
+            <a:r>
+              <a:rPr lang="en-US" sz="2000" dirty="0">
+                <a:solidFill>
+                  <a:srgbClr val="1F2933"/>
+                </a:solidFill>
+                <a:latin typeface="Calibri" pitchFamily="34" charset="0"/>
+                <a:ea typeface="Calibri" pitchFamily="34" charset="-122"/>
+                <a:cs typeface="Calibri" pitchFamily="34" charset="-120"/>
+              </a:rPr>
+              <a:t>Separate tissue stays separate — no spatial graph edge ever crosses two TMA cores</a:t>
+            </a:r>
+            <a:endParaRPr lang="en-US" sz="2000" dirty="0"/>
+          </a:p>
         </p:txBody>
       </p:sp>
       <p:sp>
@@ -15173,7 +15286,7 @@
                 <a:ea typeface="Trebuchet MS" pitchFamily="34" charset="-122"/>
                 <a:cs typeface="Trebuchet MS" pitchFamily="34" charset="-120"/>
               </a:rPr>
-              <a:t>Cluster 3D Navigator</a:t>
+              <a:t>You can check the answer</a:t>
             </a:r>
             <a:endParaRPr lang="en-US" sz="3000" dirty="0"/>
           </a:p>
@@ -15207,8 +15320,47 @@
         </p:nvSpPr>
         <p:spPr>
           <a:xfrm>
-            <a:off x="640080" y="1481328"/>
-            <a:ext cx="10963656" cy="4553712"/>
+            <a:off x="566928" y="1243584"/>
+            <a:ext cx="11055096" cy="384048"/>
+          </a:xfrm>
+          <a:prstGeom prst="rect">
+            <a:avLst/>
+          </a:prstGeom>
+          <a:noFill/>
+          <a:ln/>
+        </p:spPr>
+        <p:txBody>
+          <a:bodyPr wrap="square" rtlCol="0" anchor="ctr"/>
+          <a:lstStyle/>
+          <a:p>
+            <a:pPr indent="0" marL="0">
+              <a:buNone/>
+            </a:pPr>
+            <a:r>
+              <a:rPr lang="en-US" sz="1700" i="1" dirty="0">
+                <a:solidFill>
+                  <a:srgbClr val="5A6675"/>
+                </a:solidFill>
+                <a:latin typeface="Calibri" pitchFamily="34" charset="0"/>
+                <a:ea typeface="Calibri" pitchFamily="34" charset="-122"/>
+                <a:cs typeface="Calibri" pitchFamily="34" charset="-120"/>
+              </a:rPr>
+              <a:t>Learn what a correct result looks like, so you can recognise a wrong one later.</a:t>
+            </a:r>
+            <a:endParaRPr lang="en-US" sz="1700" dirty="0"/>
+          </a:p>
+        </p:txBody>
+      </p:sp>
+      <p:sp>
+        <p:nvSpPr>
+          <p:cNvPr id="5" name="Text 3"/>
+          <p:cNvSpPr/>
+          <p:nvPr/>
+        </p:nvSpPr>
+        <p:spPr>
+          <a:xfrm>
+            <a:off x="640080" y="1755648"/>
+            <a:ext cx="10963656" cy="4279392"/>
           </a:xfrm>
           <a:prstGeom prst="rect">
             <a:avLst/>
@@ -15239,7 +15391,7 @@
                 <a:ea typeface="Calibri" pitchFamily="34" charset="-122"/>
                 <a:cs typeface="Calibri" pitchFamily="34" charset="-120"/>
               </a:rPr>
-              <a:t>A rotatable point cloud of your cells, one point per detection, coloured by class</a:t>
+              <a:t>Real multiplexed tissue has no ground truth — you never know which cell is really which type</a:t>
             </a:r>
             <a:endParaRPr lang="en-US" sz="2000" dirty="0"/>
           </a:p>
@@ -15263,7 +15415,7 @@
                 <a:ea typeface="Calibri" pitchFamily="34" charset="-122"/>
                 <a:cs typeface="Calibri" pitchFamily="34" charset="-120"/>
               </a:rPr>
-              <a:t>Click a point and land on that cell in the viewer</a:t>
+              <a:t>So the exercise uses a synthetic tumour microenvironment where every cell is labelled</a:t>
             </a:r>
             <a:endParaRPr lang="en-US" sz="2000" dirty="0"/>
           </a:p>
@@ -15287,7 +15439,7 @@
                 <a:ea typeface="Calibri" pitchFamily="34" charset="-122"/>
                 <a:cs typeface="Calibri" pitchFamily="34" charset="-120"/>
               </a:rPr>
-              <a:t>Structure that two dimensions hide is often obvious the moment you rotate</a:t>
+              <a:t>Six cell types, tumour nests, an immune-infiltrated boundary, B-cell follicles, a proliferation gradient</a:t>
             </a:r>
             <a:endParaRPr lang="en-US" sz="2000" dirty="0"/>
           </a:p>
@@ -15311,15 +15463,39 @@
                 <a:ea typeface="Calibri" pitchFamily="34" charset="-122"/>
                 <a:cs typeface="Calibri" pitchFamily="34" charset="-120"/>
               </a:rPr>
-              <a:t>Works with any clustering tool’s output, not just ours. It only reads — it writes nothing</a:t>
+              <a:t>Inflamed versus desert: one image is 55% lymphoid, another 14% with no follicles at all</a:t>
             </a:r>
             <a:endParaRPr lang="en-US" sz="2000" dirty="0"/>
           </a:p>
-        </p:txBody>
-      </p:sp>
-      <p:sp>
-        <p:nvSpPr>
-          <p:cNvPr id="5" name="Shape 3"/>
+          <a:p>
+            <a:pPr marL="342900" indent="-342900">
+              <a:lnSpc>
+                <a:spcPct val="105000"/>
+              </a:lnSpc>
+              <a:spcAft>
+                <a:spcPts val="1200"/>
+              </a:spcAft>
+              <a:buSzPct val="100000"/>
+              <a:buChar char="•"/>
+            </a:pPr>
+            <a:r>
+              <a:rPr lang="en-US" sz="2000" dirty="0">
+                <a:solidFill>
+                  <a:srgbClr val="1F2933"/>
+                </a:solidFill>
+                <a:latin typeface="Calibri" pitchFamily="34" charset="0"/>
+                <a:ea typeface="Calibri" pitchFamily="34" charset="-122"/>
+                <a:cs typeface="Calibri" pitchFamily="34" charset="-120"/>
+              </a:rPr>
+              <a:t>20 MB, public domain, and it downloads straight from GitHub</a:t>
+            </a:r>
+            <a:endParaRPr lang="en-US" sz="2000" dirty="0"/>
+          </a:p>
+        </p:txBody>
+      </p:sp>
+      <p:sp>
+        <p:nvSpPr>
+          <p:cNvPr id="6" name="Shape 4"/>
           <p:cNvSpPr/>
           <p:nvPr/>
         </p:nvSpPr>
@@ -15344,7 +15520,7 @@
       </p:sp>
       <p:sp>
         <p:nvSpPr>
-          <p:cNvPr id="6" name="Text 4"/>
+          <p:cNvPr id="7" name="Text 5"/>
           <p:cNvSpPr/>
           <p:nvPr/>
         </p:nvSpPr>
@@ -15375,7 +15551,7 @@
                 <a:ea typeface="Calibri" pitchFamily="34" charset="-122"/>
                 <a:cs typeface="Calibri" pitchFamily="34" charset="-120"/>
               </a:rPr>
-              <a:t>Boundary cells are where classification errors live. This makes them one click away.</a:t>
+              <a:t>Cluster it, then click a boundary cell and find out whether the cluster was telling the truth.</a:t>
             </a:r>
             <a:endParaRPr lang="en-US" sz="1600" dirty="0"/>
           </a:p>
@@ -15383,7 +15559,7 @@
       </p:sp>
       <p:sp>
         <p:nvSpPr>
-          <p:cNvPr id="7" name="Text 5"/>
+          <p:cNvPr id="8" name="Text 6"/>
           <p:cNvSpPr/>
           <p:nvPr/>
         </p:nvSpPr>
@@ -15454,23 +15630,42 @@
       </p:grpSpPr>
       <p:sp>
         <p:nvSpPr>
-          <p:cNvPr id="2" name="Shape 0"/>
-          <p:cNvSpPr/>
-          <p:nvPr/>
-        </p:nvSpPr>
-        <p:spPr>
-          <a:xfrm>
-            <a:off x="0" y="1417320"/>
-            <a:ext cx="12188952" cy="3108960"/>
-          </a:xfrm>
-          <a:prstGeom prst="rect">
-            <a:avLst/>
-          </a:prstGeom>
-          <a:solidFill>
-            <a:srgbClr val="E8F0FA"/>
-          </a:solidFill>
-          <a:ln/>
-        </p:spPr>
+          <p:cNvPr id="2" name="Text 0"/>
+          <p:cNvSpPr/>
+          <p:nvPr/>
+        </p:nvSpPr>
+        <p:spPr>
+          <a:xfrm>
+            <a:off x="566928" y="384048"/>
+            <a:ext cx="11055096" cy="658368"/>
+          </a:xfrm>
+          <a:prstGeom prst="rect">
+            <a:avLst/>
+          </a:prstGeom>
+          <a:noFill/>
+          <a:ln/>
+        </p:spPr>
+        <p:txBody>
+          <a:bodyPr wrap="square" rtlCol="0" anchor="ctr"/>
+          <a:lstStyle/>
+          <a:p>
+            <a:pPr indent="0" marL="0">
+              <a:buNone/>
+            </a:pPr>
+            <a:r>
+              <a:rPr lang="en-US" sz="3000" b="1" dirty="0">
+                <a:solidFill>
+                  <a:srgbClr val="1F4C86"/>
+                </a:solidFill>
+                <a:latin typeface="Trebuchet MS" pitchFamily="34" charset="0"/>
+                <a:ea typeface="Trebuchet MS" pitchFamily="34" charset="-122"/>
+                <a:cs typeface="Trebuchet MS" pitchFamily="34" charset="-120"/>
+              </a:rPr>
+              <a:t>Cluster 3D Navigator</a:t>
+            </a:r>
+            <a:endParaRPr lang="en-US" sz="3000" dirty="0"/>
+          </a:p>
+        </p:txBody>
       </p:sp>
       <p:sp>
         <p:nvSpPr>
@@ -15480,8 +15675,8 @@
         </p:nvSpPr>
         <p:spPr>
           <a:xfrm>
-            <a:off x="0" y="1417320"/>
-            <a:ext cx="201168" cy="3108960"/>
+            <a:off x="566928" y="1097280"/>
+            <a:ext cx="1920240" cy="50292"/>
           </a:xfrm>
           <a:prstGeom prst="rect">
             <a:avLst/>
@@ -15500,8 +15695,151 @@
         </p:nvSpPr>
         <p:spPr>
           <a:xfrm>
-            <a:off x="566928" y="1691640"/>
-            <a:ext cx="1828800" cy="914400"/>
+            <a:off x="640080" y="1481328"/>
+            <a:ext cx="10963656" cy="4553712"/>
+          </a:xfrm>
+          <a:prstGeom prst="rect">
+            <a:avLst/>
+          </a:prstGeom>
+          <a:noFill/>
+          <a:ln/>
+        </p:spPr>
+        <p:txBody>
+          <a:bodyPr wrap="square" rtlCol="0" anchor="t"/>
+          <a:lstStyle/>
+          <a:p>
+            <a:pPr marL="342900" indent="-342900">
+              <a:lnSpc>
+                <a:spcPct val="105000"/>
+              </a:lnSpc>
+              <a:spcAft>
+                <a:spcPts val="1200"/>
+              </a:spcAft>
+              <a:buSzPct val="100000"/>
+              <a:buChar char="•"/>
+            </a:pPr>
+            <a:r>
+              <a:rPr lang="en-US" sz="2000" dirty="0">
+                <a:solidFill>
+                  <a:srgbClr val="1F2933"/>
+                </a:solidFill>
+                <a:latin typeface="Calibri" pitchFamily="34" charset="0"/>
+                <a:ea typeface="Calibri" pitchFamily="34" charset="-122"/>
+                <a:cs typeface="Calibri" pitchFamily="34" charset="-120"/>
+              </a:rPr>
+              <a:t>A rotatable point cloud of your cells, one point per detection, coloured by class</a:t>
+            </a:r>
+            <a:endParaRPr lang="en-US" sz="2000" dirty="0"/>
+          </a:p>
+          <a:p>
+            <a:pPr marL="342900" indent="-342900">
+              <a:lnSpc>
+                <a:spcPct val="105000"/>
+              </a:lnSpc>
+              <a:spcAft>
+                <a:spcPts val="1200"/>
+              </a:spcAft>
+              <a:buSzPct val="100000"/>
+              <a:buChar char="•"/>
+            </a:pPr>
+            <a:r>
+              <a:rPr lang="en-US" sz="2000" dirty="0">
+                <a:solidFill>
+                  <a:srgbClr val="1F2933"/>
+                </a:solidFill>
+                <a:latin typeface="Calibri" pitchFamily="34" charset="0"/>
+                <a:ea typeface="Calibri" pitchFamily="34" charset="-122"/>
+                <a:cs typeface="Calibri" pitchFamily="34" charset="-120"/>
+              </a:rPr>
+              <a:t>Click a point and land on that cell in the viewer</a:t>
+            </a:r>
+            <a:endParaRPr lang="en-US" sz="2000" dirty="0"/>
+          </a:p>
+          <a:p>
+            <a:pPr marL="342900" indent="-342900">
+              <a:lnSpc>
+                <a:spcPct val="105000"/>
+              </a:lnSpc>
+              <a:spcAft>
+                <a:spcPts val="1200"/>
+              </a:spcAft>
+              <a:buSzPct val="100000"/>
+              <a:buChar char="•"/>
+            </a:pPr>
+            <a:r>
+              <a:rPr lang="en-US" sz="2000" dirty="0">
+                <a:solidFill>
+                  <a:srgbClr val="1F2933"/>
+                </a:solidFill>
+                <a:latin typeface="Calibri" pitchFamily="34" charset="0"/>
+                <a:ea typeface="Calibri" pitchFamily="34" charset="-122"/>
+                <a:cs typeface="Calibri" pitchFamily="34" charset="-120"/>
+              </a:rPr>
+              <a:t>Structure that two dimensions hide is often obvious the moment you rotate</a:t>
+            </a:r>
+            <a:endParaRPr lang="en-US" sz="2000" dirty="0"/>
+          </a:p>
+          <a:p>
+            <a:pPr marL="342900" indent="-342900">
+              <a:lnSpc>
+                <a:spcPct val="105000"/>
+              </a:lnSpc>
+              <a:spcAft>
+                <a:spcPts val="1200"/>
+              </a:spcAft>
+              <a:buSzPct val="100000"/>
+              <a:buChar char="•"/>
+            </a:pPr>
+            <a:r>
+              <a:rPr lang="en-US" sz="2000" dirty="0">
+                <a:solidFill>
+                  <a:srgbClr val="1F2933"/>
+                </a:solidFill>
+                <a:latin typeface="Calibri" pitchFamily="34" charset="0"/>
+                <a:ea typeface="Calibri" pitchFamily="34" charset="-122"/>
+                <a:cs typeface="Calibri" pitchFamily="34" charset="-120"/>
+              </a:rPr>
+              <a:t>Works with any clustering tool’s output, not just ours. It only reads — it writes nothing</a:t>
+            </a:r>
+            <a:endParaRPr lang="en-US" sz="2000" dirty="0"/>
+          </a:p>
+        </p:txBody>
+      </p:sp>
+      <p:sp>
+        <p:nvSpPr>
+          <p:cNvPr id="5" name="Shape 3"/>
+          <p:cNvSpPr/>
+          <p:nvPr/>
+        </p:nvSpPr>
+        <p:spPr>
+          <a:xfrm>
+            <a:off x="566928" y="5650992"/>
+            <a:ext cx="11055096" cy="566928"/>
+          </a:xfrm>
+          <a:prstGeom prst="rect">
+            <a:avLst/>
+          </a:prstGeom>
+          <a:solidFill>
+            <a:srgbClr val="F4F8FD"/>
+          </a:solidFill>
+          <a:ln w="9525">
+            <a:solidFill>
+              <a:srgbClr val="3674C1"/>
+            </a:solidFill>
+            <a:prstDash val="solid"/>
+          </a:ln>
+        </p:spPr>
+      </p:sp>
+      <p:sp>
+        <p:nvSpPr>
+          <p:cNvPr id="6" name="Text 4"/>
+          <p:cNvSpPr/>
+          <p:nvPr/>
+        </p:nvSpPr>
+        <p:spPr>
+          <a:xfrm>
+            <a:off x="768096" y="5650992"/>
+            <a:ext cx="10652760" cy="566928"/>
           </a:xfrm>
           <a:prstGeom prst="rect">
             <a:avLst/>
@@ -15517,140 +15855,23 @@
               <a:buNone/>
             </a:pPr>
             <a:r>
-              <a:rPr lang="en-US" sz="5400" b="1" dirty="0">
-                <a:solidFill>
-                  <a:srgbClr val="3674C1"/>
-                </a:solidFill>
-                <a:latin typeface="Trebuchet MS" pitchFamily="34" charset="0"/>
-                <a:ea typeface="Trebuchet MS" pitchFamily="34" charset="-122"/>
-                <a:cs typeface="Trebuchet MS" pitchFamily="34" charset="-120"/>
-              </a:rPr>
-              <a:t>07</a:t>
-            </a:r>
-            <a:endParaRPr lang="en-US" sz="5400" dirty="0"/>
-          </a:p>
-        </p:txBody>
-      </p:sp>
-      <p:sp>
-        <p:nvSpPr>
-          <p:cNvPr id="5" name="Text 3"/>
-          <p:cNvSpPr/>
-          <p:nvPr/>
-        </p:nvSpPr>
-        <p:spPr>
-          <a:xfrm>
-            <a:off x="566928" y="2606040"/>
-            <a:ext cx="11055096" cy="868680"/>
-          </a:xfrm>
-          <a:prstGeom prst="rect">
-            <a:avLst/>
-          </a:prstGeom>
-          <a:noFill/>
-          <a:ln/>
-        </p:spPr>
-        <p:txBody>
-          <a:bodyPr wrap="square" rtlCol="0" anchor="ctr"/>
-          <a:lstStyle/>
-          <a:p>
-            <a:pPr indent="0" marL="0">
-              <a:buNone/>
-            </a:pPr>
-            <a:r>
-              <a:rPr lang="en-US" sz="4000" b="1" dirty="0">
+              <a:rPr lang="en-US" sz="1600" b="1" dirty="0">
                 <a:solidFill>
                   <a:srgbClr val="1F4C86"/>
                 </a:solidFill>
-                <a:latin typeface="Trebuchet MS" pitchFamily="34" charset="0"/>
-                <a:ea typeface="Trebuchet MS" pitchFamily="34" charset="-122"/>
-                <a:cs typeface="Trebuchet MS" pitchFamily="34" charset="-120"/>
-              </a:rPr>
-              <a:t>Collagen fibre and texture</a:t>
-            </a:r>
-            <a:endParaRPr lang="en-US" sz="4000" dirty="0"/>
-          </a:p>
-        </p:txBody>
-      </p:sp>
-      <p:sp>
-        <p:nvSpPr>
-          <p:cNvPr id="6" name="Text 4"/>
-          <p:cNvSpPr/>
-          <p:nvPr/>
-        </p:nvSpPr>
-        <p:spPr>
-          <a:xfrm>
-            <a:off x="566928" y="3456432"/>
-            <a:ext cx="10140696" cy="731520"/>
-          </a:xfrm>
-          <a:prstGeom prst="rect">
-            <a:avLst/>
-          </a:prstGeom>
-          <a:noFill/>
-          <a:ln/>
-        </p:spPr>
-        <p:txBody>
-          <a:bodyPr wrap="square" rtlCol="0" anchor="t"/>
-          <a:lstStyle/>
-          <a:p>
-            <a:pPr indent="0" marL="0">
-              <a:buNone/>
-            </a:pPr>
-            <a:r>
-              <a:rPr lang="en-US" sz="1900" dirty="0">
-                <a:solidFill>
-                  <a:srgbClr val="5A6675"/>
-                </a:solidFill>
-                <a:latin typeface="Calibri" pitchFamily="34" charset="0"/>
-                <a:ea typeface="Calibri" pitchFamily="34" charset="-122"/>
-                <a:cs typeface="Calibri" pitchFamily="34" charset="-120"/>
-              </a:rPr>
-              <a:t>Architecture, not just presence</a:t>
-            </a:r>
-            <a:endParaRPr lang="en-US" sz="1900" dirty="0"/>
+                <a:latin typeface="Calibri" pitchFamily="34" charset="0"/>
+                <a:ea typeface="Calibri" pitchFamily="34" charset="-122"/>
+                <a:cs typeface="Calibri" pitchFamily="34" charset="-120"/>
+              </a:rPr>
+              <a:t>Boundary cells are where classification errors live. This makes them one click away.</a:t>
+            </a:r>
+            <a:endParaRPr lang="en-US" sz="1600" dirty="0"/>
           </a:p>
         </p:txBody>
       </p:sp>
       <p:sp>
         <p:nvSpPr>
           <p:cNvPr id="7" name="Text 5"/>
-          <p:cNvSpPr/>
-          <p:nvPr/>
-        </p:nvSpPr>
-        <p:spPr>
-          <a:xfrm>
-            <a:off x="566928" y="6199632"/>
-            <a:ext cx="8229600" cy="365760"/>
-          </a:xfrm>
-          <a:prstGeom prst="rect">
-            <a:avLst/>
-          </a:prstGeom>
-          <a:noFill/>
-          <a:ln/>
-        </p:spPr>
-        <p:txBody>
-          <a:bodyPr wrap="square" rtlCol="0" anchor="ctr"/>
-          <a:lstStyle/>
-          <a:p>
-            <a:pPr indent="0" marL="0">
-              <a:buNone/>
-            </a:pPr>
-            <a:r>
-              <a:rPr lang="en-US" sz="1400" dirty="0">
-                <a:solidFill>
-                  <a:srgbClr val="A8B2BF"/>
-                </a:solidFill>
-                <a:latin typeface="Calibri" pitchFamily="34" charset="0"/>
-                <a:ea typeface="Calibri" pitchFamily="34" charset="-122"/>
-                <a:cs typeface="Calibri" pitchFamily="34" charset="-120"/>
-              </a:rPr>
-              <a:t>michaelsnelson.github.io/BINA-I2K-2026-QuPath-Extensions</a:t>
-            </a:r>
-            <a:endParaRPr lang="en-US" sz="1400" dirty="0"/>
-          </a:p>
-        </p:txBody>
-      </p:sp>
-      <p:sp>
-        <p:nvSpPr>
-          <p:cNvPr id="8" name="Text 6"/>
           <p:cNvSpPr/>
           <p:nvPr/>
         </p:nvSpPr>
@@ -16033,14 +16254,54 @@
       </p:grpSpPr>
       <p:sp>
         <p:nvSpPr>
-          <p:cNvPr id="2" name="Text 0"/>
-          <p:cNvSpPr/>
-          <p:nvPr/>
-        </p:nvSpPr>
-        <p:spPr>
-          <a:xfrm>
-            <a:off x="566928" y="384048"/>
-            <a:ext cx="11055096" cy="658368"/>
+          <p:cNvPr id="2" name="Shape 0"/>
+          <p:cNvSpPr/>
+          <p:nvPr/>
+        </p:nvSpPr>
+        <p:spPr>
+          <a:xfrm>
+            <a:off x="0" y="1417320"/>
+            <a:ext cx="12188952" cy="3108960"/>
+          </a:xfrm>
+          <a:prstGeom prst="rect">
+            <a:avLst/>
+          </a:prstGeom>
+          <a:solidFill>
+            <a:srgbClr val="E8F0FA"/>
+          </a:solidFill>
+          <a:ln/>
+        </p:spPr>
+      </p:sp>
+      <p:sp>
+        <p:nvSpPr>
+          <p:cNvPr id="3" name="Shape 1"/>
+          <p:cNvSpPr/>
+          <p:nvPr/>
+        </p:nvSpPr>
+        <p:spPr>
+          <a:xfrm>
+            <a:off x="0" y="1417320"/>
+            <a:ext cx="201168" cy="3108960"/>
+          </a:xfrm>
+          <a:prstGeom prst="rect">
+            <a:avLst/>
+          </a:prstGeom>
+          <a:solidFill>
+            <a:srgbClr val="3674C1"/>
+          </a:solidFill>
+          <a:ln/>
+        </p:spPr>
+      </p:sp>
+      <p:sp>
+        <p:nvSpPr>
+          <p:cNvPr id="4" name="Text 2"/>
+          <p:cNvSpPr/>
+          <p:nvPr/>
+        </p:nvSpPr>
+        <p:spPr>
+          <a:xfrm>
+            <a:off x="566928" y="1691640"/>
+            <a:ext cx="1828800" cy="914400"/>
           </a:xfrm>
           <a:prstGeom prst="rect">
             <a:avLst/>
@@ -16056,50 +16317,30 @@
               <a:buNone/>
             </a:pPr>
             <a:r>
-              <a:rPr lang="en-US" sz="3000" b="1" dirty="0">
-                <a:solidFill>
-                  <a:srgbClr val="1F4C86"/>
+              <a:rPr lang="en-US" sz="5400" b="1" dirty="0">
+                <a:solidFill>
+                  <a:srgbClr val="3674C1"/>
                 </a:solidFill>
                 <a:latin typeface="Trebuchet MS" pitchFamily="34" charset="0"/>
                 <a:ea typeface="Trebuchet MS" pitchFamily="34" charset="-122"/>
                 <a:cs typeface="Trebuchet MS" pitchFamily="34" charset="-120"/>
               </a:rPr>
-              <a:t>Why fibre architecture</a:t>
-            </a:r>
-            <a:endParaRPr lang="en-US" sz="3000" dirty="0"/>
-          </a:p>
-        </p:txBody>
-      </p:sp>
-      <p:sp>
-        <p:nvSpPr>
-          <p:cNvPr id="3" name="Shape 1"/>
-          <p:cNvSpPr/>
-          <p:nvPr/>
-        </p:nvSpPr>
-        <p:spPr>
-          <a:xfrm>
-            <a:off x="566928" y="1097280"/>
-            <a:ext cx="1920240" cy="50292"/>
-          </a:xfrm>
-          <a:prstGeom prst="rect">
-            <a:avLst/>
-          </a:prstGeom>
-          <a:solidFill>
-            <a:srgbClr val="3674C1"/>
-          </a:solidFill>
-          <a:ln/>
-        </p:spPr>
-      </p:sp>
-      <p:sp>
-        <p:nvSpPr>
-          <p:cNvPr id="4" name="Text 2"/>
-          <p:cNvSpPr/>
-          <p:nvPr/>
-        </p:nvSpPr>
-        <p:spPr>
-          <a:xfrm>
-            <a:off x="566928" y="1243584"/>
-            <a:ext cx="11055096" cy="384048"/>
+              <a:t>07</a:t>
+            </a:r>
+            <a:endParaRPr lang="en-US" sz="5400" dirty="0"/>
+          </a:p>
+        </p:txBody>
+      </p:sp>
+      <p:sp>
+        <p:nvSpPr>
+          <p:cNvPr id="5" name="Text 3"/>
+          <p:cNvSpPr/>
+          <p:nvPr/>
+        </p:nvSpPr>
+        <p:spPr>
+          <a:xfrm>
+            <a:off x="566928" y="2606040"/>
+            <a:ext cx="11055096" cy="868680"/>
           </a:xfrm>
           <a:prstGeom prst="rect">
             <a:avLst/>
@@ -16115,30 +16356,30 @@
               <a:buNone/>
             </a:pPr>
             <a:r>
-              <a:rPr lang="en-US" sz="1700" i="1" dirty="0">
-                <a:solidFill>
-                  <a:srgbClr val="5A6675"/>
-                </a:solidFill>
-                <a:latin typeface="Calibri" pitchFamily="34" charset="0"/>
-                <a:ea typeface="Calibri" pitchFamily="34" charset="-122"/>
-                <a:cs typeface="Calibri" pitchFamily="34" charset="-120"/>
-              </a:rPr>
-              <a:t>Conklin et al. 2011, American Journal of Pathology 178:1221.</a:t>
-            </a:r>
-            <a:endParaRPr lang="en-US" sz="1700" dirty="0"/>
-          </a:p>
-        </p:txBody>
-      </p:sp>
-      <p:sp>
-        <p:nvSpPr>
-          <p:cNvPr id="5" name="Text 3"/>
-          <p:cNvSpPr/>
-          <p:nvPr/>
-        </p:nvSpPr>
-        <p:spPr>
-          <a:xfrm>
-            <a:off x="640080" y="1755648"/>
-            <a:ext cx="10963656" cy="4279392"/>
+              <a:rPr lang="en-US" sz="4000" b="1" dirty="0">
+                <a:solidFill>
+                  <a:srgbClr val="1F4C86"/>
+                </a:solidFill>
+                <a:latin typeface="Trebuchet MS" pitchFamily="34" charset="0"/>
+                <a:ea typeface="Trebuchet MS" pitchFamily="34" charset="-122"/>
+                <a:cs typeface="Trebuchet MS" pitchFamily="34" charset="-120"/>
+              </a:rPr>
+              <a:t>Collagen fibre and texture</a:t>
+            </a:r>
+            <a:endParaRPr lang="en-US" sz="4000" dirty="0"/>
+          </a:p>
+        </p:txBody>
+      </p:sp>
+      <p:sp>
+        <p:nvSpPr>
+          <p:cNvPr id="6" name="Text 4"/>
+          <p:cNvSpPr/>
+          <p:nvPr/>
+        </p:nvSpPr>
+        <p:spPr>
+          <a:xfrm>
+            <a:off x="566928" y="3456432"/>
+            <a:ext cx="10140696" cy="731520"/>
           </a:xfrm>
           <a:prstGeom prst="rect">
             <a:avLst/>
@@ -16148,166 +16389,62 @@
         </p:spPr>
         <p:txBody>
           <a:bodyPr wrap="square" rtlCol="0" anchor="t"/>
-          <a:lstStyle/>
-          <a:p>
-            <a:pPr marL="342900" indent="-342900">
-              <a:lnSpc>
-                <a:spcPct val="105000"/>
-              </a:lnSpc>
-              <a:spcAft>
-                <a:spcPts val="1200"/>
-              </a:spcAft>
-              <a:buSzPct val="100000"/>
-              <a:buChar char="•"/>
-            </a:pPr>
-            <a:r>
-              <a:rPr lang="en-US" sz="2000" dirty="0">
-                <a:solidFill>
-                  <a:srgbClr val="1F2933"/>
-                </a:solidFill>
-                <a:latin typeface="Calibri" pitchFamily="34" charset="0"/>
-                <a:ea typeface="Calibri" pitchFamily="34" charset="-122"/>
-                <a:cs typeface="Calibri" pitchFamily="34" charset="-120"/>
-              </a:rPr>
-              <a:t>Collagen is not simply present or absent — the arrangement carries the biology</a:t>
-            </a:r>
-            <a:endParaRPr lang="en-US" sz="2000" dirty="0"/>
-          </a:p>
-          <a:p>
-            <a:pPr marL="342900" indent="-342900">
-              <a:lnSpc>
-                <a:spcPct val="105000"/>
-              </a:lnSpc>
-              <a:spcAft>
-                <a:spcPts val="1200"/>
-              </a:spcAft>
-              <a:buSzPct val="100000"/>
-              <a:buChar char="•"/>
-            </a:pPr>
-            <a:r>
-              <a:rPr lang="en-US" sz="2000" dirty="0">
-                <a:solidFill>
-                  <a:srgbClr val="1F2933"/>
-                </a:solidFill>
-                <a:latin typeface="Calibri" pitchFamily="34" charset="0"/>
-                <a:ea typeface="Calibri" pitchFamily="34" charset="-122"/>
-                <a:cs typeface="Calibri" pitchFamily="34" charset="-120"/>
-              </a:rPr>
-              <a:t>Wavy versus straightened; aligned versus isotropic; and how that changes at a boundary</a:t>
-            </a:r>
-            <a:endParaRPr lang="en-US" sz="2000" dirty="0"/>
-          </a:p>
-          <a:p>
-            <a:pPr marL="342900" indent="-342900">
-              <a:lnSpc>
-                <a:spcPct val="105000"/>
-              </a:lnSpc>
-              <a:spcAft>
-                <a:spcPts val="1200"/>
-              </a:spcAft>
-              <a:buSzPct val="100000"/>
-              <a:buChar char="•"/>
-            </a:pPr>
-            <a:r>
-              <a:rPr lang="en-US" sz="2000" dirty="0">
-                <a:solidFill>
-                  <a:srgbClr val="1F2933"/>
-                </a:solidFill>
-                <a:latin typeface="Calibri" pitchFamily="34" charset="0"/>
-                <a:ea typeface="Calibri" pitchFamily="34" charset="-122"/>
-                <a:cs typeface="Calibri" pitchFamily="34" charset="-120"/>
-              </a:rPr>
-              <a:t>In breast pathology, straightened fibres running perpendicular to the tumour boundary act as tracks for invading cells</a:t>
-            </a:r>
-            <a:endParaRPr lang="en-US" sz="2000" dirty="0"/>
-          </a:p>
-          <a:p>
-            <a:pPr marL="342900" indent="-342900">
-              <a:lnSpc>
-                <a:spcPct val="105000"/>
-              </a:lnSpc>
-              <a:spcAft>
-                <a:spcPts val="1200"/>
-              </a:spcAft>
-              <a:buSzPct val="100000"/>
-              <a:buChar char="•"/>
-            </a:pPr>
-            <a:r>
-              <a:rPr lang="en-US" sz="2000" dirty="0">
-                <a:solidFill>
-                  <a:srgbClr val="1F2933"/>
-                </a:solidFill>
-                <a:latin typeface="Calibri" pitchFamily="34" charset="0"/>
-                <a:ea typeface="Calibri" pitchFamily="34" charset="-122"/>
-                <a:cs typeface="Calibri" pitchFamily="34" charset="-120"/>
-              </a:rPr>
-              <a:t>Hazard ratio 3.0–3.9 for disease-free survival, independent of grade, size and receptor status</a:t>
-            </a:r>
-            <a:endParaRPr lang="en-US" sz="2000" dirty="0"/>
-          </a:p>
-        </p:txBody>
-      </p:sp>
-      <p:sp>
-        <p:nvSpPr>
-          <p:cNvPr id="6" name="Shape 4"/>
-          <p:cNvSpPr/>
-          <p:nvPr/>
-        </p:nvSpPr>
-        <p:spPr>
-          <a:xfrm>
-            <a:off x="566928" y="5650992"/>
-            <a:ext cx="11055096" cy="566928"/>
-          </a:xfrm>
-          <a:prstGeom prst="rect">
-            <a:avLst/>
-          </a:prstGeom>
-          <a:solidFill>
-            <a:srgbClr val="F4F8FD"/>
-          </a:solidFill>
-          <a:ln w="9525">
-            <a:solidFill>
-              <a:srgbClr val="3674C1"/>
-            </a:solidFill>
-            <a:prstDash val="solid"/>
-          </a:ln>
-        </p:spPr>
-      </p:sp>
-      <p:sp>
-        <p:nvSpPr>
-          <p:cNvPr id="7" name="Text 5"/>
-          <p:cNvSpPr/>
-          <p:nvPr/>
-        </p:nvSpPr>
-        <p:spPr>
-          <a:xfrm>
-            <a:off x="768096" y="5650992"/>
-            <a:ext cx="10652760" cy="566928"/>
-          </a:xfrm>
-          <a:prstGeom prst="rect">
-            <a:avLst/>
-          </a:prstGeom>
-          <a:noFill/>
-          <a:ln/>
-        </p:spPr>
-        <p:txBody>
-          <a:bodyPr wrap="square" rtlCol="0" anchor="ctr"/>
           <a:lstStyle/>
           <a:p>
             <a:pPr indent="0" marL="0">
               <a:buNone/>
             </a:pPr>
             <a:r>
-              <a:rPr lang="en-US" sz="1600" b="1" dirty="0">
-                <a:solidFill>
-                  <a:srgbClr val="1F4C86"/>
-                </a:solidFill>
-                <a:latin typeface="Calibri" pitchFamily="34" charset="0"/>
-                <a:ea typeface="Calibri" pitchFamily="34" charset="-122"/>
-                <a:cs typeface="Calibri" pitchFamily="34" charset="-120"/>
-              </a:rPr>
-              <a:t>The same wavy-to-straight axis recurs in arterial adventitia, sclera, alveolar wall, and cardiac fibrosis.</a:t>
-            </a:r>
-            <a:endParaRPr lang="en-US" sz="1600" dirty="0"/>
+              <a:rPr lang="en-US" sz="1900" dirty="0">
+                <a:solidFill>
+                  <a:srgbClr val="5A6675"/>
+                </a:solidFill>
+                <a:latin typeface="Calibri" pitchFamily="34" charset="0"/>
+                <a:ea typeface="Calibri" pitchFamily="34" charset="-122"/>
+                <a:cs typeface="Calibri" pitchFamily="34" charset="-120"/>
+              </a:rPr>
+              <a:t>Architecture, not just presence</a:t>
+            </a:r>
+            <a:endParaRPr lang="en-US" sz="1900" dirty="0"/>
+          </a:p>
+        </p:txBody>
+      </p:sp>
+      <p:sp>
+        <p:nvSpPr>
+          <p:cNvPr id="7" name="Text 5"/>
+          <p:cNvSpPr/>
+          <p:nvPr/>
+        </p:nvSpPr>
+        <p:spPr>
+          <a:xfrm>
+            <a:off x="566928" y="6199632"/>
+            <a:ext cx="8229600" cy="365760"/>
+          </a:xfrm>
+          <a:prstGeom prst="rect">
+            <a:avLst/>
+          </a:prstGeom>
+          <a:noFill/>
+          <a:ln/>
+        </p:spPr>
+        <p:txBody>
+          <a:bodyPr wrap="square" rtlCol="0" anchor="ctr"/>
+          <a:lstStyle/>
+          <a:p>
+            <a:pPr indent="0" marL="0">
+              <a:buNone/>
+            </a:pPr>
+            <a:r>
+              <a:rPr lang="en-US" sz="1400" dirty="0">
+                <a:solidFill>
+                  <a:srgbClr val="A8B2BF"/>
+                </a:solidFill>
+                <a:latin typeface="Calibri" pitchFamily="34" charset="0"/>
+                <a:ea typeface="Calibri" pitchFamily="34" charset="-122"/>
+                <a:cs typeface="Calibri" pitchFamily="34" charset="-120"/>
+              </a:rPr>
+              <a:t>michaelsnelson.github.io/BINA-I2K-2026-QuPath-Extensions</a:t>
+            </a:r>
+            <a:endParaRPr lang="en-US" sz="1400" dirty="0"/>
           </a:p>
         </p:txBody>
       </p:sp>
@@ -16415,7 +16552,7 @@
                 <a:ea typeface="Trebuchet MS" pitchFamily="34" charset="-122"/>
                 <a:cs typeface="Trebuchet MS" pitchFamily="34" charset="-120"/>
               </a:rPr>
-              <a:t>Two complementary tools</a:t>
+              <a:t>Why fibre architecture</a:t>
             </a:r>
             <a:endParaRPr lang="en-US" sz="3000" dirty="0"/>
           </a:p>
@@ -16443,34 +16580,14 @@
       </p:sp>
       <p:sp>
         <p:nvSpPr>
-          <p:cNvPr id="4" name="Shape 2"/>
-          <p:cNvSpPr/>
-          <p:nvPr/>
-        </p:nvSpPr>
-        <p:spPr>
-          <a:xfrm>
-            <a:off x="566928" y="1554480"/>
-            <a:ext cx="5298948" cy="530352"/>
-          </a:xfrm>
-          <a:prstGeom prst="rect">
-            <a:avLst/>
-          </a:prstGeom>
-          <a:solidFill>
-            <a:srgbClr val="E8F0FA"/>
-          </a:solidFill>
-          <a:ln/>
-        </p:spPr>
-      </p:sp>
-      <p:sp>
-        <p:nvSpPr>
-          <p:cNvPr id="5" name="Text 3"/>
-          <p:cNvSpPr/>
-          <p:nvPr/>
-        </p:nvSpPr>
-        <p:spPr>
-          <a:xfrm>
-            <a:off x="731520" y="1554480"/>
-            <a:ext cx="4969764" cy="530352"/>
+          <p:cNvPr id="4" name="Text 2"/>
+          <p:cNvSpPr/>
+          <p:nvPr/>
+        </p:nvSpPr>
+        <p:spPr>
+          <a:xfrm>
+            <a:off x="566928" y="1243584"/>
+            <a:ext cx="11055096" cy="384048"/>
           </a:xfrm>
           <a:prstGeom prst="rect">
             <a:avLst/>
@@ -16486,30 +16603,30 @@
               <a:buNone/>
             </a:pPr>
             <a:r>
-              <a:rPr lang="en-US" sz="2000" b="1" dirty="0">
-                <a:solidFill>
-                  <a:srgbClr val="1F4C86"/>
-                </a:solidFill>
-                <a:latin typeface="Trebuchet MS" pitchFamily="34" charset="0"/>
-                <a:ea typeface="Trebuchet MS" pitchFamily="34" charset="-122"/>
-                <a:cs typeface="Trebuchet MS" pitchFamily="34" charset="-120"/>
-              </a:rPr>
-              <a:t>Fiber Analysis — measure a zone</a:t>
-            </a:r>
-            <a:endParaRPr lang="en-US" sz="2000" dirty="0"/>
-          </a:p>
-        </p:txBody>
-      </p:sp>
-      <p:sp>
-        <p:nvSpPr>
-          <p:cNvPr id="6" name="Text 4"/>
-          <p:cNvSpPr/>
-          <p:nvPr/>
-        </p:nvSpPr>
-        <p:spPr>
-          <a:xfrm>
-            <a:off x="658368" y="2240280"/>
-            <a:ext cx="5116068" cy="3566160"/>
+              <a:rPr lang="en-US" sz="1700" i="1" dirty="0">
+                <a:solidFill>
+                  <a:srgbClr val="5A6675"/>
+                </a:solidFill>
+                <a:latin typeface="Calibri" pitchFamily="34" charset="0"/>
+                <a:ea typeface="Calibri" pitchFamily="34" charset="-122"/>
+                <a:cs typeface="Calibri" pitchFamily="34" charset="-120"/>
+              </a:rPr>
+              <a:t>Conklin et al. 2011, American Journal of Pathology 178:1221.</a:t>
+            </a:r>
+            <a:endParaRPr lang="en-US" sz="1700" dirty="0"/>
+          </a:p>
+        </p:txBody>
+      </p:sp>
+      <p:sp>
+        <p:nvSpPr>
+          <p:cNvPr id="5" name="Text 3"/>
+          <p:cNvSpPr/>
+          <p:nvPr/>
+        </p:nvSpPr>
+        <p:spPr>
+          <a:xfrm>
+            <a:off x="640080" y="1755648"/>
+            <a:ext cx="10963656" cy="4279392"/>
           </a:xfrm>
           <a:prstGeom prst="rect">
             <a:avLst/>
@@ -16522,14 +16639,17 @@
           <a:lstStyle/>
           <a:p>
             <a:pPr marL="342900" indent="-342900">
+              <a:lnSpc>
+                <a:spcPct val="105000"/>
+              </a:lnSpc>
               <a:spcAft>
-                <a:spcPts val="1100"/>
+                <a:spcPts val="1200"/>
               </a:spcAft>
               <a:buSzPct val="100000"/>
               <a:buChar char="•"/>
             </a:pPr>
             <a:r>
-              <a:rPr lang="en-US" sz="1800" dirty="0">
+              <a:rPr lang="en-US" sz="2000" dirty="0">
                 <a:solidFill>
                   <a:srgbClr val="1F2933"/>
                 </a:solidFill>
@@ -16537,20 +16657,23 @@
                 <a:ea typeface="Calibri" pitchFamily="34" charset="-122"/>
                 <a:cs typeface="Calibri" pitchFamily="34" charset="-120"/>
               </a:rPr>
-              <a:t>A band of chosen width inside, outside, or across an annotation boundary</a:t>
-            </a:r>
-            <a:endParaRPr lang="en-US" sz="1800" dirty="0"/>
+              <a:t>Collagen is not simply present or absent — the arrangement carries the biology</a:t>
+            </a:r>
+            <a:endParaRPr lang="en-US" sz="2000" dirty="0"/>
           </a:p>
           <a:p>
             <a:pPr marL="342900" indent="-342900">
+              <a:lnSpc>
+                <a:spcPct val="105000"/>
+              </a:lnSpc>
               <a:spcAft>
-                <a:spcPts val="1100"/>
+                <a:spcPts val="1200"/>
               </a:spcAft>
               <a:buSzPct val="100000"/>
               <a:buChar char="•"/>
             </a:pPr>
             <a:r>
-              <a:rPr lang="en-US" sz="1800" dirty="0">
+              <a:rPr lang="en-US" sz="2000" dirty="0">
                 <a:solidFill>
                   <a:srgbClr val="1F2933"/>
                 </a:solidFill>
@@ -16558,20 +16681,23 @@
                 <a:ea typeface="Calibri" pitchFamily="34" charset="-122"/>
                 <a:cs typeface="Calibri" pitchFamily="34" charset="-120"/>
               </a:rPr>
-              <a:t>Straightness and persistence: wavy versus straightened fibres</a:t>
-            </a:r>
-            <a:endParaRPr lang="en-US" sz="1800" dirty="0"/>
+              <a:t>Wavy versus straightened; aligned versus isotropic; and how that changes at a boundary</a:t>
+            </a:r>
+            <a:endParaRPr lang="en-US" sz="2000" dirty="0"/>
           </a:p>
           <a:p>
             <a:pPr marL="342900" indent="-342900">
+              <a:lnSpc>
+                <a:spcPct val="105000"/>
+              </a:lnSpc>
               <a:spcAft>
-                <a:spcPts val="1100"/>
+                <a:spcPts val="1200"/>
               </a:spcAft>
               <a:buSzPct val="100000"/>
               <a:buChar char="•"/>
             </a:pPr>
             <a:r>
-              <a:rPr lang="en-US" sz="1800" dirty="0">
+              <a:rPr lang="en-US" sz="2000" dirty="0">
                 <a:solidFill>
                   <a:srgbClr val="1F2933"/>
                 </a:solidFill>
@@ -16579,20 +16705,23 @@
                 <a:ea typeface="Calibri" pitchFamily="34" charset="-122"/>
                 <a:cs typeface="Calibri" pitchFamily="34" charset="-120"/>
               </a:rPr>
-              <a:t>Morphometrics: coverage, length, branching, fractal dimension, gaps</a:t>
-            </a:r>
-            <a:endParaRPr lang="en-US" sz="1800" dirty="0"/>
+              <a:t>In breast pathology, straightened fibres running perpendicular to the tumour boundary act as tracks for invading cells</a:t>
+            </a:r>
+            <a:endParaRPr lang="en-US" sz="2000" dirty="0"/>
           </a:p>
           <a:p>
             <a:pPr marL="342900" indent="-342900">
+              <a:lnSpc>
+                <a:spcPct val="105000"/>
+              </a:lnSpc>
               <a:spcAft>
-                <a:spcPts val="1100"/>
+                <a:spcPts val="1200"/>
               </a:spcAft>
               <a:buSzPct val="100000"/>
               <a:buChar char="•"/>
             </a:pPr>
             <a:r>
-              <a:rPr lang="en-US" sz="1800" dirty="0">
+              <a:rPr lang="en-US" sz="2000" dirty="0">
                 <a:solidFill>
                   <a:srgbClr val="1F2933"/>
                 </a:solidFill>
@@ -16600,42 +16729,47 @@
                 <a:ea typeface="Calibri" pitchFamily="34" charset="-122"/>
                 <a:cs typeface="Calibri" pitchFamily="34" charset="-120"/>
               </a:rPr>
-              <a:t>Texture: the information fibre-tracing misses entirely</a:t>
-            </a:r>
-            <a:endParaRPr lang="en-US" sz="1800" dirty="0"/>
-          </a:p>
-        </p:txBody>
-      </p:sp>
-      <p:sp>
-        <p:nvSpPr>
-          <p:cNvPr id="7" name="Shape 5"/>
-          <p:cNvSpPr/>
-          <p:nvPr/>
-        </p:nvSpPr>
-        <p:spPr>
-          <a:xfrm>
-            <a:off x="6323076" y="1554480"/>
-            <a:ext cx="5298948" cy="530352"/>
+              <a:t>Hazard ratio 3.0–3.9 for disease-free survival, independent of grade, size and receptor status</a:t>
+            </a:r>
+            <a:endParaRPr lang="en-US" sz="2000" dirty="0"/>
+          </a:p>
+        </p:txBody>
+      </p:sp>
+      <p:sp>
+        <p:nvSpPr>
+          <p:cNvPr id="6" name="Shape 4"/>
+          <p:cNvSpPr/>
+          <p:nvPr/>
+        </p:nvSpPr>
+        <p:spPr>
+          <a:xfrm>
+            <a:off x="566928" y="5650992"/>
+            <a:ext cx="11055096" cy="566928"/>
           </a:xfrm>
           <a:prstGeom prst="rect">
             <a:avLst/>
           </a:prstGeom>
           <a:solidFill>
-            <a:srgbClr val="E8F0FA"/>
+            <a:srgbClr val="F4F8FD"/>
           </a:solidFill>
-          <a:ln/>
-        </p:spPr>
-      </p:sp>
-      <p:sp>
-        <p:nvSpPr>
-          <p:cNvPr id="8" name="Text 6"/>
-          <p:cNvSpPr/>
-          <p:nvPr/>
-        </p:nvSpPr>
-        <p:spPr>
-          <a:xfrm>
-            <a:off x="6487668" y="1554480"/>
-            <a:ext cx="4969764" cy="530352"/>
+          <a:ln w="9525">
+            <a:solidFill>
+              <a:srgbClr val="3674C1"/>
+            </a:solidFill>
+            <a:prstDash val="solid"/>
+          </a:ln>
+        </p:spPr>
+      </p:sp>
+      <p:sp>
+        <p:nvSpPr>
+          <p:cNvPr id="7" name="Text 5"/>
+          <p:cNvSpPr/>
+          <p:nvPr/>
+        </p:nvSpPr>
+        <p:spPr>
+          <a:xfrm>
+            <a:off x="768096" y="5650992"/>
+            <a:ext cx="10652760" cy="566928"/>
           </a:xfrm>
           <a:prstGeom prst="rect">
             <a:avLst/>
@@ -16651,129 +16785,23 @@
               <a:buNone/>
             </a:pPr>
             <a:r>
-              <a:rPr lang="en-US" sz="2000" b="1" dirty="0">
-                <a:solidFill>
-                  <a:srgbClr val="B26A00"/>
-                </a:solidFill>
-                <a:latin typeface="Trebuchet MS" pitchFamily="34" charset="0"/>
-                <a:ea typeface="Trebuchet MS" pitchFamily="34" charset="-122"/>
-                <a:cs typeface="Trebuchet MS" pitchFamily="34" charset="-120"/>
-              </a:rPr>
-              <a:t>TME-Quant — trace the fibres</a:t>
-            </a:r>
-            <a:endParaRPr lang="en-US" sz="2000" dirty="0"/>
-          </a:p>
-        </p:txBody>
-      </p:sp>
-      <p:sp>
-        <p:nvSpPr>
-          <p:cNvPr id="9" name="Text 7"/>
-          <p:cNvSpPr/>
-          <p:nvPr/>
-        </p:nvSpPr>
-        <p:spPr>
-          <a:xfrm>
-            <a:off x="6414516" y="2240280"/>
-            <a:ext cx="5116068" cy="3566160"/>
-          </a:xfrm>
-          <a:prstGeom prst="rect">
-            <a:avLst/>
-          </a:prstGeom>
-          <a:noFill/>
-          <a:ln/>
-        </p:spPr>
-        <p:txBody>
-          <a:bodyPr wrap="square" rtlCol="0" anchor="t"/>
-          <a:lstStyle/>
-          <a:p>
-            <a:pPr marL="342900" indent="-342900">
-              <a:spcAft>
-                <a:spcPts val="1100"/>
-              </a:spcAft>
-              <a:buSzPct val="100000"/>
-              <a:buChar char="•"/>
-            </a:pPr>
-            <a:r>
-              <a:rPr lang="en-US" sz="1800" dirty="0">
-                <a:solidFill>
-                  <a:srgbClr val="1F2933"/>
-                </a:solidFill>
-                <a:latin typeface="Calibri" pitchFamily="34" charset="0"/>
-                <a:ea typeface="Calibri" pitchFamily="34" charset="-122"/>
-                <a:cs typeface="Calibri" pitchFamily="34" charset="-120"/>
-              </a:rPr>
-              <a:t>Individual fibres extracted and committed back as objects</a:t>
-            </a:r>
-            <a:endParaRPr lang="en-US" sz="1800" dirty="0"/>
-          </a:p>
-          <a:p>
-            <a:pPr marL="342900" indent="-342900">
-              <a:spcAft>
-                <a:spcPts val="1100"/>
-              </a:spcAft>
-              <a:buSzPct val="100000"/>
-              <a:buChar char="•"/>
-            </a:pPr>
-            <a:r>
-              <a:rPr lang="en-US" sz="1800" dirty="0">
-                <a:solidFill>
-                  <a:srgbClr val="1F2933"/>
-                </a:solidFill>
-                <a:latin typeface="Calibri" pitchFamily="34" charset="0"/>
-                <a:ea typeface="Calibri" pitchFamily="34" charset="-122"/>
-                <a:cs typeface="Calibri" pitchFamily="34" charset="-120"/>
-              </a:rPr>
-              <a:t>Set the threshold by eye, with the mask shown before you commit</a:t>
-            </a:r>
-            <a:endParaRPr lang="en-US" sz="1800" dirty="0"/>
-          </a:p>
-          <a:p>
-            <a:pPr marL="342900" indent="-342900">
-              <a:spcAft>
-                <a:spcPts val="1100"/>
-              </a:spcAft>
-              <a:buSzPct val="100000"/>
-              <a:buChar char="•"/>
-            </a:pPr>
-            <a:r>
-              <a:rPr lang="en-US" sz="1800" dirty="0">
-                <a:solidFill>
-                  <a:srgbClr val="1F2933"/>
-                </a:solidFill>
-                <a:latin typeface="Calibri" pitchFamily="34" charset="0"/>
-                <a:ea typeface="Calibri" pitchFamily="34" charset="-122"/>
-                <a:cs typeface="Calibri" pitchFamily="34" charset="-120"/>
-              </a:rPr>
-              <a:t>Trace a few real fibres yourself, and it tunes its own parameters to match</a:t>
-            </a:r>
-            <a:endParaRPr lang="en-US" sz="1800" dirty="0"/>
-          </a:p>
-          <a:p>
-            <a:pPr marL="342900" indent="-342900">
-              <a:spcAft>
-                <a:spcPts val="1100"/>
-              </a:spcAft>
-              <a:buSzPct val="100000"/>
-              <a:buChar char="•"/>
-            </a:pPr>
-            <a:r>
-              <a:rPr lang="en-US" sz="1800" dirty="0">
-                <a:solidFill>
-                  <a:srgbClr val="1F2933"/>
-                </a:solidFill>
-                <a:latin typeface="Calibri" pitchFamily="34" charset="0"/>
-                <a:ea typeface="Calibri" pitchFamily="34" charset="-122"/>
-                <a:cs typeface="Calibri" pitchFamily="34" charset="-120"/>
-              </a:rPr>
-              <a:t>Fibres classified by orientation relative to a tumour boundary</a:t>
-            </a:r>
-            <a:endParaRPr lang="en-US" sz="1800" dirty="0"/>
-          </a:p>
-        </p:txBody>
-      </p:sp>
-      <p:sp>
-        <p:nvSpPr>
-          <p:cNvPr id="10" name="Text 8"/>
+              <a:rPr lang="en-US" sz="1600" b="1" dirty="0">
+                <a:solidFill>
+                  <a:srgbClr val="1F4C86"/>
+                </a:solidFill>
+                <a:latin typeface="Calibri" pitchFamily="34" charset="0"/>
+                <a:ea typeface="Calibri" pitchFamily="34" charset="-122"/>
+                <a:cs typeface="Calibri" pitchFamily="34" charset="-120"/>
+              </a:rPr>
+              <a:t>The same wavy-to-straight axis recurs in arterial adventitia, sclera, alveolar wall, and cardiac fibrosis.</a:t>
+            </a:r>
+            <a:endParaRPr lang="en-US" sz="1600" dirty="0"/>
+          </a:p>
+        </p:txBody>
+      </p:sp>
+      <p:sp>
+        <p:nvSpPr>
+          <p:cNvPr id="8" name="Text 6"/>
           <p:cNvSpPr/>
           <p:nvPr/>
         </p:nvSpPr>
@@ -16875,7 +16903,7 @@
                 <a:ea typeface="Trebuchet MS" pitchFamily="34" charset="-122"/>
                 <a:cs typeface="Trebuchet MS" pitchFamily="34" charset="-120"/>
               </a:rPr>
-              <a:t>A dense mat and a sparse clump</a:t>
+              <a:t>Two complementary tools</a:t>
             </a:r>
             <a:endParaRPr lang="en-US" sz="3000" dirty="0"/>
           </a:p>
@@ -16903,14 +16931,73 @@
       </p:sp>
       <p:sp>
         <p:nvSpPr>
-          <p:cNvPr id="4" name="Text 2"/>
-          <p:cNvSpPr/>
-          <p:nvPr/>
-        </p:nvSpPr>
-        <p:spPr>
-          <a:xfrm>
-            <a:off x="640080" y="1481328"/>
-            <a:ext cx="10963656" cy="4553712"/>
+          <p:cNvPr id="4" name="Shape 2"/>
+          <p:cNvSpPr/>
+          <p:nvPr/>
+        </p:nvSpPr>
+        <p:spPr>
+          <a:xfrm>
+            <a:off x="566928" y="1554480"/>
+            <a:ext cx="5298948" cy="530352"/>
+          </a:xfrm>
+          <a:prstGeom prst="rect">
+            <a:avLst/>
+          </a:prstGeom>
+          <a:solidFill>
+            <a:srgbClr val="E8F0FA"/>
+          </a:solidFill>
+          <a:ln/>
+        </p:spPr>
+      </p:sp>
+      <p:sp>
+        <p:nvSpPr>
+          <p:cNvPr id="5" name="Text 3"/>
+          <p:cNvSpPr/>
+          <p:nvPr/>
+        </p:nvSpPr>
+        <p:spPr>
+          <a:xfrm>
+            <a:off x="731520" y="1554480"/>
+            <a:ext cx="4969764" cy="530352"/>
+          </a:xfrm>
+          <a:prstGeom prst="rect">
+            <a:avLst/>
+          </a:prstGeom>
+          <a:noFill/>
+          <a:ln/>
+        </p:spPr>
+        <p:txBody>
+          <a:bodyPr wrap="square" rtlCol="0" anchor="ctr"/>
+          <a:lstStyle/>
+          <a:p>
+            <a:pPr indent="0" marL="0">
+              <a:buNone/>
+            </a:pPr>
+            <a:r>
+              <a:rPr lang="en-US" sz="2000" b="1" dirty="0">
+                <a:solidFill>
+                  <a:srgbClr val="1F4C86"/>
+                </a:solidFill>
+                <a:latin typeface="Trebuchet MS" pitchFamily="34" charset="0"/>
+                <a:ea typeface="Trebuchet MS" pitchFamily="34" charset="-122"/>
+                <a:cs typeface="Trebuchet MS" pitchFamily="34" charset="-120"/>
+              </a:rPr>
+              <a:t>Fiber Analysis — measure a zone</a:t>
+            </a:r>
+            <a:endParaRPr lang="en-US" sz="2000" dirty="0"/>
+          </a:p>
+        </p:txBody>
+      </p:sp>
+      <p:sp>
+        <p:nvSpPr>
+          <p:cNvPr id="6" name="Text 4"/>
+          <p:cNvSpPr/>
+          <p:nvPr/>
+        </p:nvSpPr>
+        <p:spPr>
+          <a:xfrm>
+            <a:off x="658368" y="2240280"/>
+            <a:ext cx="5116068" cy="3566160"/>
           </a:xfrm>
           <a:prstGeom prst="rect">
             <a:avLst/>
@@ -16923,17 +17010,14 @@
           <a:lstStyle/>
           <a:p>
             <a:pPr marL="342900" indent="-342900">
-              <a:lnSpc>
-                <a:spcPct val="105000"/>
-              </a:lnSpc>
               <a:spcAft>
-                <a:spcPts val="1200"/>
+                <a:spcPts val="1100"/>
               </a:spcAft>
               <a:buSzPct val="100000"/>
               <a:buChar char="•"/>
             </a:pPr>
             <a:r>
-              <a:rPr lang="en-US" sz="2000" dirty="0">
+              <a:rPr lang="en-US" sz="1800" dirty="0">
                 <a:solidFill>
                   <a:srgbClr val="1F2933"/>
                 </a:solidFill>
@@ -16941,23 +17025,20 @@
                 <a:ea typeface="Calibri" pitchFamily="34" charset="-122"/>
                 <a:cs typeface="Calibri" pitchFamily="34" charset="-120"/>
               </a:rPr>
-              <a:t>Two fields can share the same mean fibre alignment and be completely different tissue</a:t>
-            </a:r>
-            <a:endParaRPr lang="en-US" sz="2000" dirty="0"/>
+              <a:t>A band of chosen width inside, outside, or across an annotation boundary</a:t>
+            </a:r>
+            <a:endParaRPr lang="en-US" sz="1800" dirty="0"/>
           </a:p>
           <a:p>
             <a:pPr marL="342900" indent="-342900">
-              <a:lnSpc>
-                <a:spcPct val="105000"/>
-              </a:lnSpc>
               <a:spcAft>
-                <a:spcPts val="1200"/>
+                <a:spcPts val="1100"/>
               </a:spcAft>
               <a:buSzPct val="100000"/>
               <a:buChar char="•"/>
             </a:pPr>
             <a:r>
-              <a:rPr lang="en-US" sz="2000" dirty="0">
+              <a:rPr lang="en-US" sz="1800" dirty="0">
                 <a:solidFill>
                   <a:srgbClr val="1F2933"/>
                 </a:solidFill>
@@ -16965,23 +17046,20 @@
                 <a:ea typeface="Calibri" pitchFamily="34" charset="-122"/>
                 <a:cs typeface="Calibri" pitchFamily="34" charset="-120"/>
               </a:rPr>
-              <a:t>Texture measures the spatial heterogeneity that alignment averages away</a:t>
-            </a:r>
-            <a:endParaRPr lang="en-US" sz="2000" dirty="0"/>
+              <a:t>Straightness and persistence: wavy versus straightened fibres</a:t>
+            </a:r>
+            <a:endParaRPr lang="en-US" sz="1800" dirty="0"/>
           </a:p>
           <a:p>
             <a:pPr marL="342900" indent="-342900">
-              <a:lnSpc>
-                <a:spcPct val="105000"/>
-              </a:lnSpc>
               <a:spcAft>
-                <a:spcPts val="1200"/>
+                <a:spcPts val="1100"/>
               </a:spcAft>
               <a:buSzPct val="100000"/>
               <a:buChar char="•"/>
             </a:pPr>
             <a:r>
-              <a:rPr lang="en-US" sz="2000" dirty="0">
+              <a:rPr lang="en-US" sz="1800" dirty="0">
                 <a:solidFill>
                   <a:srgbClr val="1F2933"/>
                 </a:solidFill>
@@ -16989,47 +17067,63 @@
                 <a:ea typeface="Calibri" pitchFamily="34" charset="-122"/>
                 <a:cs typeface="Calibri" pitchFamily="34" charset="-120"/>
               </a:rPr>
-              <a:t>Which is why both tools are worth running, on the same region</a:t>
-            </a:r>
-            <a:endParaRPr lang="en-US" sz="2000" dirty="0"/>
-          </a:p>
-        </p:txBody>
-      </p:sp>
-      <p:sp>
-        <p:nvSpPr>
-          <p:cNvPr id="5" name="Shape 3"/>
-          <p:cNvSpPr/>
-          <p:nvPr/>
-        </p:nvSpPr>
-        <p:spPr>
-          <a:xfrm>
-            <a:off x="566928" y="5650992"/>
-            <a:ext cx="11055096" cy="566928"/>
+              <a:t>Morphometrics: coverage, length, branching, fractal dimension, gaps</a:t>
+            </a:r>
+            <a:endParaRPr lang="en-US" sz="1800" dirty="0"/>
+          </a:p>
+          <a:p>
+            <a:pPr marL="342900" indent="-342900">
+              <a:spcAft>
+                <a:spcPts val="1100"/>
+              </a:spcAft>
+              <a:buSzPct val="100000"/>
+              <a:buChar char="•"/>
+            </a:pPr>
+            <a:r>
+              <a:rPr lang="en-US" sz="1800" dirty="0">
+                <a:solidFill>
+                  <a:srgbClr val="1F2933"/>
+                </a:solidFill>
+                <a:latin typeface="Calibri" pitchFamily="34" charset="0"/>
+                <a:ea typeface="Calibri" pitchFamily="34" charset="-122"/>
+                <a:cs typeface="Calibri" pitchFamily="34" charset="-120"/>
+              </a:rPr>
+              <a:t>Texture: the information fibre-tracing misses entirely</a:t>
+            </a:r>
+            <a:endParaRPr lang="en-US" sz="1800" dirty="0"/>
+          </a:p>
+        </p:txBody>
+      </p:sp>
+      <p:sp>
+        <p:nvSpPr>
+          <p:cNvPr id="7" name="Shape 5"/>
+          <p:cNvSpPr/>
+          <p:nvPr/>
+        </p:nvSpPr>
+        <p:spPr>
+          <a:xfrm>
+            <a:off x="6323076" y="1554480"/>
+            <a:ext cx="5298948" cy="530352"/>
           </a:xfrm>
           <a:prstGeom prst="rect">
             <a:avLst/>
           </a:prstGeom>
           <a:solidFill>
-            <a:srgbClr val="F4F8FD"/>
+            <a:srgbClr val="E8F0FA"/>
           </a:solidFill>
-          <a:ln w="9525">
-            <a:solidFill>
-              <a:srgbClr val="3674C1"/>
-            </a:solidFill>
-            <a:prstDash val="solid"/>
-          </a:ln>
-        </p:spPr>
-      </p:sp>
-      <p:sp>
-        <p:nvSpPr>
-          <p:cNvPr id="6" name="Text 4"/>
-          <p:cNvSpPr/>
-          <p:nvPr/>
-        </p:nvSpPr>
-        <p:spPr>
-          <a:xfrm>
-            <a:off x="768096" y="5650992"/>
-            <a:ext cx="10652760" cy="566928"/>
+          <a:ln/>
+        </p:spPr>
+      </p:sp>
+      <p:sp>
+        <p:nvSpPr>
+          <p:cNvPr id="8" name="Text 6"/>
+          <p:cNvSpPr/>
+          <p:nvPr/>
+        </p:nvSpPr>
+        <p:spPr>
+          <a:xfrm>
+            <a:off x="6487668" y="1554480"/>
+            <a:ext cx="4969764" cy="530352"/>
           </a:xfrm>
           <a:prstGeom prst="rect">
             <a:avLst/>
@@ -17045,23 +17139,129 @@
               <a:buNone/>
             </a:pPr>
             <a:r>
-              <a:rPr lang="en-US" sz="1600" b="1" dirty="0">
-                <a:solidFill>
-                  <a:srgbClr val="1F4C86"/>
-                </a:solidFill>
-                <a:latin typeface="Calibri" pitchFamily="34" charset="0"/>
-                <a:ea typeface="Calibri" pitchFamily="34" charset="-122"/>
-                <a:cs typeface="Calibri" pitchFamily="34" charset="-120"/>
-              </a:rPr>
-              <a:t>Demo only today: one needs a long environment build, the other a dedicated analysis server.</a:t>
-            </a:r>
-            <a:endParaRPr lang="en-US" sz="1600" dirty="0"/>
-          </a:p>
-        </p:txBody>
-      </p:sp>
-      <p:sp>
-        <p:nvSpPr>
-          <p:cNvPr id="7" name="Text 5"/>
+              <a:rPr lang="en-US" sz="2000" b="1" dirty="0">
+                <a:solidFill>
+                  <a:srgbClr val="B26A00"/>
+                </a:solidFill>
+                <a:latin typeface="Trebuchet MS" pitchFamily="34" charset="0"/>
+                <a:ea typeface="Trebuchet MS" pitchFamily="34" charset="-122"/>
+                <a:cs typeface="Trebuchet MS" pitchFamily="34" charset="-120"/>
+              </a:rPr>
+              <a:t>TME-Quant — trace the fibres</a:t>
+            </a:r>
+            <a:endParaRPr lang="en-US" sz="2000" dirty="0"/>
+          </a:p>
+        </p:txBody>
+      </p:sp>
+      <p:sp>
+        <p:nvSpPr>
+          <p:cNvPr id="9" name="Text 7"/>
+          <p:cNvSpPr/>
+          <p:nvPr/>
+        </p:nvSpPr>
+        <p:spPr>
+          <a:xfrm>
+            <a:off x="6414516" y="2240280"/>
+            <a:ext cx="5116068" cy="3566160"/>
+          </a:xfrm>
+          <a:prstGeom prst="rect">
+            <a:avLst/>
+          </a:prstGeom>
+          <a:noFill/>
+          <a:ln/>
+        </p:spPr>
+        <p:txBody>
+          <a:bodyPr wrap="square" rtlCol="0" anchor="t"/>
+          <a:lstStyle/>
+          <a:p>
+            <a:pPr marL="342900" indent="-342900">
+              <a:spcAft>
+                <a:spcPts val="1100"/>
+              </a:spcAft>
+              <a:buSzPct val="100000"/>
+              <a:buChar char="•"/>
+            </a:pPr>
+            <a:r>
+              <a:rPr lang="en-US" sz="1800" dirty="0">
+                <a:solidFill>
+                  <a:srgbClr val="1F2933"/>
+                </a:solidFill>
+                <a:latin typeface="Calibri" pitchFamily="34" charset="0"/>
+                <a:ea typeface="Calibri" pitchFamily="34" charset="-122"/>
+                <a:cs typeface="Calibri" pitchFamily="34" charset="-120"/>
+              </a:rPr>
+              <a:t>Individual fibres extracted and committed back as objects</a:t>
+            </a:r>
+            <a:endParaRPr lang="en-US" sz="1800" dirty="0"/>
+          </a:p>
+          <a:p>
+            <a:pPr marL="342900" indent="-342900">
+              <a:spcAft>
+                <a:spcPts val="1100"/>
+              </a:spcAft>
+              <a:buSzPct val="100000"/>
+              <a:buChar char="•"/>
+            </a:pPr>
+            <a:r>
+              <a:rPr lang="en-US" sz="1800" dirty="0">
+                <a:solidFill>
+                  <a:srgbClr val="1F2933"/>
+                </a:solidFill>
+                <a:latin typeface="Calibri" pitchFamily="34" charset="0"/>
+                <a:ea typeface="Calibri" pitchFamily="34" charset="-122"/>
+                <a:cs typeface="Calibri" pitchFamily="34" charset="-120"/>
+              </a:rPr>
+              <a:t>Set the threshold by eye, with the mask shown before you commit</a:t>
+            </a:r>
+            <a:endParaRPr lang="en-US" sz="1800" dirty="0"/>
+          </a:p>
+          <a:p>
+            <a:pPr marL="342900" indent="-342900">
+              <a:spcAft>
+                <a:spcPts val="1100"/>
+              </a:spcAft>
+              <a:buSzPct val="100000"/>
+              <a:buChar char="•"/>
+            </a:pPr>
+            <a:r>
+              <a:rPr lang="en-US" sz="1800" dirty="0">
+                <a:solidFill>
+                  <a:srgbClr val="1F2933"/>
+                </a:solidFill>
+                <a:latin typeface="Calibri" pitchFamily="34" charset="0"/>
+                <a:ea typeface="Calibri" pitchFamily="34" charset="-122"/>
+                <a:cs typeface="Calibri" pitchFamily="34" charset="-120"/>
+              </a:rPr>
+              <a:t>Trace a few real fibres yourself, and it tunes its own parameters to match</a:t>
+            </a:r>
+            <a:endParaRPr lang="en-US" sz="1800" dirty="0"/>
+          </a:p>
+          <a:p>
+            <a:pPr marL="342900" indent="-342900">
+              <a:spcAft>
+                <a:spcPts val="1100"/>
+              </a:spcAft>
+              <a:buSzPct val="100000"/>
+              <a:buChar char="•"/>
+            </a:pPr>
+            <a:r>
+              <a:rPr lang="en-US" sz="1800" dirty="0">
+                <a:solidFill>
+                  <a:srgbClr val="1F2933"/>
+                </a:solidFill>
+                <a:latin typeface="Calibri" pitchFamily="34" charset="0"/>
+                <a:ea typeface="Calibri" pitchFamily="34" charset="-122"/>
+                <a:cs typeface="Calibri" pitchFamily="34" charset="-120"/>
+              </a:rPr>
+              <a:t>Fibres classified by orientation relative to a tumour boundary</a:t>
+            </a:r>
+            <a:endParaRPr lang="en-US" sz="1800" dirty="0"/>
+          </a:p>
+        </p:txBody>
+      </p:sp>
+      <p:sp>
+        <p:nvSpPr>
+          <p:cNvPr id="10" name="Text 8"/>
           <p:cNvSpPr/>
           <p:nvPr/>
         </p:nvSpPr>
@@ -17163,7 +17363,7 @@
                 <a:ea typeface="Trebuchet MS" pitchFamily="34" charset="-122"/>
                 <a:cs typeface="Trebuchet MS" pitchFamily="34" charset="-120"/>
               </a:rPr>
-              <a:t>Please cite the methods</a:t>
+              <a:t>A dense mat and a sparse clump</a:t>
             </a:r>
             <a:endParaRPr lang="en-US" sz="3000" dirty="0"/>
           </a:p>
@@ -17229,7 +17429,7 @@
                 <a:ea typeface="Calibri" pitchFamily="34" charset="-122"/>
                 <a:cs typeface="Calibri" pitchFamily="34" charset="-120"/>
               </a:rPr>
-              <a:t>Both tools are thin wrappers over other people’s science</a:t>
+              <a:t>Two fields can share the same mean fibre alignment and be completely different tissue</a:t>
             </a:r>
             <a:endParaRPr lang="en-US" sz="2000" dirty="0"/>
           </a:p>
@@ -17253,7 +17453,7 @@
                 <a:ea typeface="Calibri" pitchFamily="34" charset="-122"/>
                 <a:cs typeface="Calibri" pitchFamily="34" charset="-120"/>
               </a:rPr>
-              <a:t>CT-FIRE — Bredfeldt et al. 2014, Journal of Biomedical Optics 19(1):016007</a:t>
+              <a:t>Texture measures the spatial heterogeneity that alignment averages away</a:t>
             </a:r>
             <a:endParaRPr lang="en-US" sz="2000" dirty="0"/>
           </a:p>
@@ -17277,63 +17477,79 @@
                 <a:ea typeface="Calibri" pitchFamily="34" charset="-122"/>
                 <a:cs typeface="Calibri" pitchFamily="34" charset="-120"/>
               </a:rPr>
-              <a:t>CurveAlign — LOCI, University of Wisconsin–Madison</a:t>
+              <a:t>Which is why both tools are worth running, on the same region</a:t>
             </a:r>
             <a:endParaRPr lang="en-US" sz="2000" dirty="0"/>
           </a:p>
-          <a:p>
-            <a:pPr marL="342900" indent="-342900">
-              <a:lnSpc>
-                <a:spcPct val="105000"/>
-              </a:lnSpc>
-              <a:spcAft>
-                <a:spcPts val="1200"/>
-              </a:spcAft>
-              <a:buSzPct val="100000"/>
-              <a:buChar char="•"/>
-            </a:pPr>
-            <a:r>
-              <a:rPr lang="en-US" sz="2000" dirty="0">
-                <a:solidFill>
-                  <a:srgbClr val="1F2933"/>
-                </a:solidFill>
-                <a:latin typeface="Calibri" pitchFamily="34" charset="0"/>
-                <a:ea typeface="Calibri" pitchFamily="34" charset="-122"/>
-                <a:cs typeface="Calibri" pitchFamily="34" charset="-120"/>
-              </a:rPr>
-              <a:t>TACS — Conklin et al. 2011; Provenzano et al. 2008, BMC Medicine 6:11</a:t>
-            </a:r>
-            <a:endParaRPr lang="en-US" sz="2000" dirty="0"/>
-          </a:p>
-          <a:p>
-            <a:pPr marL="342900" indent="-342900">
-              <a:lnSpc>
-                <a:spcPct val="105000"/>
-              </a:lnSpc>
-              <a:spcAft>
-                <a:spcPts val="1200"/>
-              </a:spcAft>
-              <a:buSzPct val="100000"/>
-              <a:buChar char="•"/>
-            </a:pPr>
-            <a:r>
-              <a:rPr lang="en-US" sz="2000" dirty="0">
-                <a:solidFill>
-                  <a:srgbClr val="1F2933"/>
-                </a:solidFill>
-                <a:latin typeface="Calibri" pitchFamily="34" charset="0"/>
-                <a:ea typeface="Calibri" pitchFamily="34" charset="-122"/>
-                <a:cs typeface="Calibri" pitchFamily="34" charset="-120"/>
-              </a:rPr>
-              <a:t>TWOMBLI — Wershof et al. 2021, Life Science Alliance 4(3)</a:t>
-            </a:r>
-            <a:endParaRPr lang="en-US" sz="2000" dirty="0"/>
-          </a:p>
-        </p:txBody>
-      </p:sp>
-      <p:sp>
-        <p:nvSpPr>
-          <p:cNvPr id="5" name="Text 3"/>
+        </p:txBody>
+      </p:sp>
+      <p:sp>
+        <p:nvSpPr>
+          <p:cNvPr id="5" name="Shape 3"/>
+          <p:cNvSpPr/>
+          <p:nvPr/>
+        </p:nvSpPr>
+        <p:spPr>
+          <a:xfrm>
+            <a:off x="566928" y="5650992"/>
+            <a:ext cx="11055096" cy="566928"/>
+          </a:xfrm>
+          <a:prstGeom prst="rect">
+            <a:avLst/>
+          </a:prstGeom>
+          <a:solidFill>
+            <a:srgbClr val="F4F8FD"/>
+          </a:solidFill>
+          <a:ln w="9525">
+            <a:solidFill>
+              <a:srgbClr val="3674C1"/>
+            </a:solidFill>
+            <a:prstDash val="solid"/>
+          </a:ln>
+        </p:spPr>
+      </p:sp>
+      <p:sp>
+        <p:nvSpPr>
+          <p:cNvPr id="6" name="Text 4"/>
+          <p:cNvSpPr/>
+          <p:nvPr/>
+        </p:nvSpPr>
+        <p:spPr>
+          <a:xfrm>
+            <a:off x="768096" y="5650992"/>
+            <a:ext cx="10652760" cy="566928"/>
+          </a:xfrm>
+          <a:prstGeom prst="rect">
+            <a:avLst/>
+          </a:prstGeom>
+          <a:noFill/>
+          <a:ln/>
+        </p:spPr>
+        <p:txBody>
+          <a:bodyPr wrap="square" rtlCol="0" anchor="ctr"/>
+          <a:lstStyle/>
+          <a:p>
+            <a:pPr indent="0" marL="0">
+              <a:buNone/>
+            </a:pPr>
+            <a:r>
+              <a:rPr lang="en-US" sz="1600" b="1" dirty="0">
+                <a:solidFill>
+                  <a:srgbClr val="1F4C86"/>
+                </a:solidFill>
+                <a:latin typeface="Calibri" pitchFamily="34" charset="0"/>
+                <a:ea typeface="Calibri" pitchFamily="34" charset="-122"/>
+                <a:cs typeface="Calibri" pitchFamily="34" charset="-120"/>
+              </a:rPr>
+              <a:t>Demo only today: one needs a long environment build, the other a dedicated analysis server.</a:t>
+            </a:r>
+            <a:endParaRPr lang="en-US" sz="1600" dirty="0"/>
+          </a:p>
+        </p:txBody>
+      </p:sp>
+      <p:sp>
+        <p:nvSpPr>
+          <p:cNvPr id="7" name="Text 5"/>
           <p:cNvSpPr/>
           <p:nvPr/>
         </p:nvSpPr>
@@ -17404,23 +17620,42 @@
       </p:grpSpPr>
       <p:sp>
         <p:nvSpPr>
-          <p:cNvPr id="2" name="Shape 0"/>
-          <p:cNvSpPr/>
-          <p:nvPr/>
-        </p:nvSpPr>
-        <p:spPr>
-          <a:xfrm>
-            <a:off x="0" y="1417320"/>
-            <a:ext cx="12188952" cy="3108960"/>
-          </a:xfrm>
-          <a:prstGeom prst="rect">
-            <a:avLst/>
-          </a:prstGeom>
-          <a:solidFill>
-            <a:srgbClr val="E8F0FA"/>
-          </a:solidFill>
-          <a:ln/>
-        </p:spPr>
+          <p:cNvPr id="2" name="Text 0"/>
+          <p:cNvSpPr/>
+          <p:nvPr/>
+        </p:nvSpPr>
+        <p:spPr>
+          <a:xfrm>
+            <a:off x="566928" y="384048"/>
+            <a:ext cx="11055096" cy="658368"/>
+          </a:xfrm>
+          <a:prstGeom prst="rect">
+            <a:avLst/>
+          </a:prstGeom>
+          <a:noFill/>
+          <a:ln/>
+        </p:spPr>
+        <p:txBody>
+          <a:bodyPr wrap="square" rtlCol="0" anchor="ctr"/>
+          <a:lstStyle/>
+          <a:p>
+            <a:pPr indent="0" marL="0">
+              <a:buNone/>
+            </a:pPr>
+            <a:r>
+              <a:rPr lang="en-US" sz="3000" b="1" dirty="0">
+                <a:solidFill>
+                  <a:srgbClr val="1F4C86"/>
+                </a:solidFill>
+                <a:latin typeface="Trebuchet MS" pitchFamily="34" charset="0"/>
+                <a:ea typeface="Trebuchet MS" pitchFamily="34" charset="-122"/>
+                <a:cs typeface="Trebuchet MS" pitchFamily="34" charset="-120"/>
+              </a:rPr>
+              <a:t>Please cite the methods</a:t>
+            </a:r>
+            <a:endParaRPr lang="en-US" sz="3000" dirty="0"/>
+          </a:p>
+        </p:txBody>
       </p:sp>
       <p:sp>
         <p:nvSpPr>
@@ -17430,8 +17665,8 @@
         </p:nvSpPr>
         <p:spPr>
           <a:xfrm>
-            <a:off x="0" y="1417320"/>
-            <a:ext cx="201168" cy="3108960"/>
+            <a:off x="566928" y="1097280"/>
+            <a:ext cx="1920240" cy="50292"/>
           </a:xfrm>
           <a:prstGeom prst="rect">
             <a:avLst/>
@@ -17450,157 +17685,143 @@
         </p:nvSpPr>
         <p:spPr>
           <a:xfrm>
-            <a:off x="566928" y="1691640"/>
-            <a:ext cx="1828800" cy="914400"/>
-          </a:xfrm>
-          <a:prstGeom prst="rect">
-            <a:avLst/>
-          </a:prstGeom>
-          <a:noFill/>
-          <a:ln/>
-        </p:spPr>
-        <p:txBody>
-          <a:bodyPr wrap="square" rtlCol="0" anchor="ctr"/>
-          <a:lstStyle/>
-          <a:p>
-            <a:pPr indent="0" marL="0">
-              <a:buNone/>
-            </a:pPr>
-            <a:r>
-              <a:rPr lang="en-US" sz="5400" b="1" dirty="0">
-                <a:solidFill>
-                  <a:srgbClr val="3674C1"/>
-                </a:solidFill>
-                <a:latin typeface="Trebuchet MS" pitchFamily="34" charset="0"/>
-                <a:ea typeface="Trebuchet MS" pitchFamily="34" charset="-122"/>
-                <a:cs typeface="Trebuchet MS" pitchFamily="34" charset="-120"/>
-              </a:rPr>
-              <a:t>08</a:t>
-            </a:r>
-            <a:endParaRPr lang="en-US" sz="5400" dirty="0"/>
+            <a:off x="640080" y="1481328"/>
+            <a:ext cx="10963656" cy="4553712"/>
+          </a:xfrm>
+          <a:prstGeom prst="rect">
+            <a:avLst/>
+          </a:prstGeom>
+          <a:noFill/>
+          <a:ln/>
+        </p:spPr>
+        <p:txBody>
+          <a:bodyPr wrap="square" rtlCol="0" anchor="t"/>
+          <a:lstStyle/>
+          <a:p>
+            <a:pPr marL="342900" indent="-342900">
+              <a:lnSpc>
+                <a:spcPct val="105000"/>
+              </a:lnSpc>
+              <a:spcAft>
+                <a:spcPts val="1200"/>
+              </a:spcAft>
+              <a:buSzPct val="100000"/>
+              <a:buChar char="•"/>
+            </a:pPr>
+            <a:r>
+              <a:rPr lang="en-US" sz="2000" dirty="0">
+                <a:solidFill>
+                  <a:srgbClr val="1F2933"/>
+                </a:solidFill>
+                <a:latin typeface="Calibri" pitchFamily="34" charset="0"/>
+                <a:ea typeface="Calibri" pitchFamily="34" charset="-122"/>
+                <a:cs typeface="Calibri" pitchFamily="34" charset="-120"/>
+              </a:rPr>
+              <a:t>Both tools are thin wrappers over other people’s science</a:t>
+            </a:r>
+            <a:endParaRPr lang="en-US" sz="2000" dirty="0"/>
+          </a:p>
+          <a:p>
+            <a:pPr marL="342900" indent="-342900">
+              <a:lnSpc>
+                <a:spcPct val="105000"/>
+              </a:lnSpc>
+              <a:spcAft>
+                <a:spcPts val="1200"/>
+              </a:spcAft>
+              <a:buSzPct val="100000"/>
+              <a:buChar char="•"/>
+            </a:pPr>
+            <a:r>
+              <a:rPr lang="en-US" sz="2000" dirty="0">
+                <a:solidFill>
+                  <a:srgbClr val="1F2933"/>
+                </a:solidFill>
+                <a:latin typeface="Calibri" pitchFamily="34" charset="0"/>
+                <a:ea typeface="Calibri" pitchFamily="34" charset="-122"/>
+                <a:cs typeface="Calibri" pitchFamily="34" charset="-120"/>
+              </a:rPr>
+              <a:t>CT-FIRE — Bredfeldt et al. 2014, Journal of Biomedical Optics 19(1):016007</a:t>
+            </a:r>
+            <a:endParaRPr lang="en-US" sz="2000" dirty="0"/>
+          </a:p>
+          <a:p>
+            <a:pPr marL="342900" indent="-342900">
+              <a:lnSpc>
+                <a:spcPct val="105000"/>
+              </a:lnSpc>
+              <a:spcAft>
+                <a:spcPts val="1200"/>
+              </a:spcAft>
+              <a:buSzPct val="100000"/>
+              <a:buChar char="•"/>
+            </a:pPr>
+            <a:r>
+              <a:rPr lang="en-US" sz="2000" dirty="0">
+                <a:solidFill>
+                  <a:srgbClr val="1F2933"/>
+                </a:solidFill>
+                <a:latin typeface="Calibri" pitchFamily="34" charset="0"/>
+                <a:ea typeface="Calibri" pitchFamily="34" charset="-122"/>
+                <a:cs typeface="Calibri" pitchFamily="34" charset="-120"/>
+              </a:rPr>
+              <a:t>CurveAlign — LOCI, University of Wisconsin–Madison</a:t>
+            </a:r>
+            <a:endParaRPr lang="en-US" sz="2000" dirty="0"/>
+          </a:p>
+          <a:p>
+            <a:pPr marL="342900" indent="-342900">
+              <a:lnSpc>
+                <a:spcPct val="105000"/>
+              </a:lnSpc>
+              <a:spcAft>
+                <a:spcPts val="1200"/>
+              </a:spcAft>
+              <a:buSzPct val="100000"/>
+              <a:buChar char="•"/>
+            </a:pPr>
+            <a:r>
+              <a:rPr lang="en-US" sz="2000" dirty="0">
+                <a:solidFill>
+                  <a:srgbClr val="1F2933"/>
+                </a:solidFill>
+                <a:latin typeface="Calibri" pitchFamily="34" charset="0"/>
+                <a:ea typeface="Calibri" pitchFamily="34" charset="-122"/>
+                <a:cs typeface="Calibri" pitchFamily="34" charset="-120"/>
+              </a:rPr>
+              <a:t>TACS — Conklin et al. 2011; Provenzano et al. 2008, BMC Medicine 6:11</a:t>
+            </a:r>
+            <a:endParaRPr lang="en-US" sz="2000" dirty="0"/>
+          </a:p>
+          <a:p>
+            <a:pPr marL="342900" indent="-342900">
+              <a:lnSpc>
+                <a:spcPct val="105000"/>
+              </a:lnSpc>
+              <a:spcAft>
+                <a:spcPts val="1200"/>
+              </a:spcAft>
+              <a:buSzPct val="100000"/>
+              <a:buChar char="•"/>
+            </a:pPr>
+            <a:r>
+              <a:rPr lang="en-US" sz="2000" dirty="0">
+                <a:solidFill>
+                  <a:srgbClr val="1F2933"/>
+                </a:solidFill>
+                <a:latin typeface="Calibri" pitchFamily="34" charset="0"/>
+                <a:ea typeface="Calibri" pitchFamily="34" charset="-122"/>
+                <a:cs typeface="Calibri" pitchFamily="34" charset="-120"/>
+              </a:rPr>
+              <a:t>TWOMBLI — Wershof et al. 2021, Life Science Alliance 4(3)</a:t>
+            </a:r>
+            <a:endParaRPr lang="en-US" sz="2000" dirty="0"/>
           </a:p>
         </p:txBody>
       </p:sp>
       <p:sp>
         <p:nvSpPr>
           <p:cNvPr id="5" name="Text 3"/>
-          <p:cNvSpPr/>
-          <p:nvPr/>
-        </p:nvSpPr>
-        <p:spPr>
-          <a:xfrm>
-            <a:off x="566928" y="2606040"/>
-            <a:ext cx="11055096" cy="868680"/>
-          </a:xfrm>
-          <a:prstGeom prst="rect">
-            <a:avLst/>
-          </a:prstGeom>
-          <a:noFill/>
-          <a:ln/>
-        </p:spPr>
-        <p:txBody>
-          <a:bodyPr wrap="square" rtlCol="0" anchor="ctr"/>
-          <a:lstStyle/>
-          <a:p>
-            <a:pPr indent="0" marL="0">
-              <a:buNone/>
-            </a:pPr>
-            <a:r>
-              <a:rPr lang="en-US" sz="4000" b="1" dirty="0">
-                <a:solidFill>
-                  <a:srgbClr val="1F4C86"/>
-                </a:solidFill>
-                <a:latin typeface="Trebuchet MS" pitchFamily="34" charset="0"/>
-                <a:ea typeface="Trebuchet MS" pitchFamily="34" charset="-122"/>
-                <a:cs typeface="Trebuchet MS" pitchFamily="34" charset="-120"/>
-              </a:rPr>
-              <a:t>Microscope control</a:t>
-            </a:r>
-            <a:endParaRPr lang="en-US" sz="4000" dirty="0"/>
-          </a:p>
-        </p:txBody>
-      </p:sp>
-      <p:sp>
-        <p:nvSpPr>
-          <p:cNvPr id="6" name="Text 4"/>
-          <p:cNvSpPr/>
-          <p:nvPr/>
-        </p:nvSpPr>
-        <p:spPr>
-          <a:xfrm>
-            <a:off x="566928" y="3456432"/>
-            <a:ext cx="10140696" cy="731520"/>
-          </a:xfrm>
-          <a:prstGeom prst="rect">
-            <a:avLst/>
-          </a:prstGeom>
-          <a:noFill/>
-          <a:ln/>
-        </p:spPr>
-        <p:txBody>
-          <a:bodyPr wrap="square" rtlCol="0" anchor="t"/>
-          <a:lstStyle/>
-          <a:p>
-            <a:pPr indent="0" marL="0">
-              <a:buNone/>
-            </a:pPr>
-            <a:r>
-              <a:rPr lang="en-US" sz="1900" dirty="0">
-                <a:solidFill>
-                  <a:srgbClr val="5A6675"/>
-                </a:solidFill>
-                <a:latin typeface="Calibri" pitchFamily="34" charset="0"/>
-                <a:ea typeface="Calibri" pitchFamily="34" charset="-122"/>
-                <a:cs typeface="Calibri" pitchFamily="34" charset="-120"/>
-              </a:rPr>
-              <a:t>The most complex thing here, and the reason for the rest</a:t>
-            </a:r>
-            <a:endParaRPr lang="en-US" sz="1900" dirty="0"/>
-          </a:p>
-        </p:txBody>
-      </p:sp>
-      <p:sp>
-        <p:nvSpPr>
-          <p:cNvPr id="7" name="Text 5"/>
-          <p:cNvSpPr/>
-          <p:nvPr/>
-        </p:nvSpPr>
-        <p:spPr>
-          <a:xfrm>
-            <a:off x="566928" y="6199632"/>
-            <a:ext cx="8229600" cy="365760"/>
-          </a:xfrm>
-          <a:prstGeom prst="rect">
-            <a:avLst/>
-          </a:prstGeom>
-          <a:noFill/>
-          <a:ln/>
-        </p:spPr>
-        <p:txBody>
-          <a:bodyPr wrap="square" rtlCol="0" anchor="ctr"/>
-          <a:lstStyle/>
-          <a:p>
-            <a:pPr indent="0" marL="0">
-              <a:buNone/>
-            </a:pPr>
-            <a:r>
-              <a:rPr lang="en-US" sz="1400" dirty="0">
-                <a:solidFill>
-                  <a:srgbClr val="A8B2BF"/>
-                </a:solidFill>
-                <a:latin typeface="Calibri" pitchFamily="34" charset="0"/>
-                <a:ea typeface="Calibri" pitchFamily="34" charset="-122"/>
-                <a:cs typeface="Calibri" pitchFamily="34" charset="-120"/>
-              </a:rPr>
-              <a:t>michaelsnelson.github.io/BINA-I2K-2026-QuPath-Extensions</a:t>
-            </a:r>
-            <a:endParaRPr lang="en-US" sz="1400" dirty="0"/>
-          </a:p>
-        </p:txBody>
-      </p:sp>
-      <p:sp>
-        <p:nvSpPr>
-          <p:cNvPr id="8" name="Text 6"/>
           <p:cNvSpPr/>
           <p:nvPr/>
         </p:nvSpPr>
@@ -17671,14 +17892,54 @@
       </p:grpSpPr>
       <p:sp>
         <p:nvSpPr>
-          <p:cNvPr id="2" name="Text 0"/>
-          <p:cNvSpPr/>
-          <p:nvPr/>
-        </p:nvSpPr>
-        <p:spPr>
-          <a:xfrm>
-            <a:off x="566928" y="384048"/>
-            <a:ext cx="11055096" cy="658368"/>
+          <p:cNvPr id="2" name="Shape 0"/>
+          <p:cNvSpPr/>
+          <p:nvPr/>
+        </p:nvSpPr>
+        <p:spPr>
+          <a:xfrm>
+            <a:off x="0" y="1417320"/>
+            <a:ext cx="12188952" cy="3108960"/>
+          </a:xfrm>
+          <a:prstGeom prst="rect">
+            <a:avLst/>
+          </a:prstGeom>
+          <a:solidFill>
+            <a:srgbClr val="E8F0FA"/>
+          </a:solidFill>
+          <a:ln/>
+        </p:spPr>
+      </p:sp>
+      <p:sp>
+        <p:nvSpPr>
+          <p:cNvPr id="3" name="Shape 1"/>
+          <p:cNvSpPr/>
+          <p:nvPr/>
+        </p:nvSpPr>
+        <p:spPr>
+          <a:xfrm>
+            <a:off x="0" y="1417320"/>
+            <a:ext cx="201168" cy="3108960"/>
+          </a:xfrm>
+          <a:prstGeom prst="rect">
+            <a:avLst/>
+          </a:prstGeom>
+          <a:solidFill>
+            <a:srgbClr val="3674C1"/>
+          </a:solidFill>
+          <a:ln/>
+        </p:spPr>
+      </p:sp>
+      <p:sp>
+        <p:nvSpPr>
+          <p:cNvPr id="4" name="Text 2"/>
+          <p:cNvSpPr/>
+          <p:nvPr/>
+        </p:nvSpPr>
+        <p:spPr>
+          <a:xfrm>
+            <a:off x="566928" y="1691640"/>
+            <a:ext cx="1828800" cy="914400"/>
           </a:xfrm>
           <a:prstGeom prst="rect">
             <a:avLst/>
@@ -17694,50 +17955,69 @@
               <a:buNone/>
             </a:pPr>
             <a:r>
-              <a:rPr lang="en-US" sz="3000" b="1" dirty="0">
-                <a:solidFill>
-                  <a:srgbClr val="1F4C86"/>
+              <a:rPr lang="en-US" sz="5400" b="1" dirty="0">
+                <a:solidFill>
+                  <a:srgbClr val="3674C1"/>
                 </a:solidFill>
                 <a:latin typeface="Trebuchet MS" pitchFamily="34" charset="0"/>
                 <a:ea typeface="Trebuchet MS" pitchFamily="34" charset="-122"/>
                 <a:cs typeface="Trebuchet MS" pitchFamily="34" charset="-120"/>
               </a:rPr>
-              <a:t>QPSC — QuPath Scope Control</a:t>
-            </a:r>
-            <a:endParaRPr lang="en-US" sz="3000" dirty="0"/>
-          </a:p>
-        </p:txBody>
-      </p:sp>
-      <p:sp>
-        <p:nvSpPr>
-          <p:cNvPr id="3" name="Shape 1"/>
-          <p:cNvSpPr/>
-          <p:nvPr/>
-        </p:nvSpPr>
-        <p:spPr>
-          <a:xfrm>
-            <a:off x="566928" y="1097280"/>
-            <a:ext cx="1920240" cy="50292"/>
-          </a:xfrm>
-          <a:prstGeom prst="rect">
-            <a:avLst/>
-          </a:prstGeom>
-          <a:solidFill>
-            <a:srgbClr val="3674C1"/>
-          </a:solidFill>
-          <a:ln/>
-        </p:spPr>
-      </p:sp>
-      <p:sp>
-        <p:nvSpPr>
-          <p:cNvPr id="4" name="Text 2"/>
-          <p:cNvSpPr/>
-          <p:nvPr/>
-        </p:nvSpPr>
-        <p:spPr>
-          <a:xfrm>
-            <a:off x="640080" y="1481328"/>
-            <a:ext cx="10963656" cy="4553712"/>
+              <a:t>08</a:t>
+            </a:r>
+            <a:endParaRPr lang="en-US" sz="5400" dirty="0"/>
+          </a:p>
+        </p:txBody>
+      </p:sp>
+      <p:sp>
+        <p:nvSpPr>
+          <p:cNvPr id="5" name="Text 3"/>
+          <p:cNvSpPr/>
+          <p:nvPr/>
+        </p:nvSpPr>
+        <p:spPr>
+          <a:xfrm>
+            <a:off x="566928" y="2606040"/>
+            <a:ext cx="11055096" cy="868680"/>
+          </a:xfrm>
+          <a:prstGeom prst="rect">
+            <a:avLst/>
+          </a:prstGeom>
+          <a:noFill/>
+          <a:ln/>
+        </p:spPr>
+        <p:txBody>
+          <a:bodyPr wrap="square" rtlCol="0" anchor="ctr"/>
+          <a:lstStyle/>
+          <a:p>
+            <a:pPr indent="0" marL="0">
+              <a:buNone/>
+            </a:pPr>
+            <a:r>
+              <a:rPr lang="en-US" sz="4000" b="1" dirty="0">
+                <a:solidFill>
+                  <a:srgbClr val="1F4C86"/>
+                </a:solidFill>
+                <a:latin typeface="Trebuchet MS" pitchFamily="34" charset="0"/>
+                <a:ea typeface="Trebuchet MS" pitchFamily="34" charset="-122"/>
+                <a:cs typeface="Trebuchet MS" pitchFamily="34" charset="-120"/>
+              </a:rPr>
+              <a:t>Microscope control</a:t>
+            </a:r>
+            <a:endParaRPr lang="en-US" sz="4000" dirty="0"/>
+          </a:p>
+        </p:txBody>
+      </p:sp>
+      <p:sp>
+        <p:nvSpPr>
+          <p:cNvPr id="6" name="Text 4"/>
+          <p:cNvSpPr/>
+          <p:nvPr/>
+        </p:nvSpPr>
+        <p:spPr>
+          <a:xfrm>
+            <a:off x="566928" y="3456432"/>
+            <a:ext cx="10140696" cy="731520"/>
           </a:xfrm>
           <a:prstGeom prst="rect">
             <a:avLst/>
@@ -17749,106 +18029,66 @@
           <a:bodyPr wrap="square" rtlCol="0" anchor="t"/>
           <a:lstStyle/>
           <a:p>
-            <a:pPr marL="342900" indent="-342900">
-              <a:lnSpc>
-                <a:spcPct val="105000"/>
-              </a:lnSpc>
-              <a:spcAft>
-                <a:spcPts val="1200"/>
-              </a:spcAft>
-              <a:buSzPct val="100000"/>
-              <a:buChar char="•"/>
-            </a:pPr>
-            <a:r>
-              <a:rPr lang="en-US" sz="2000" dirty="0">
-                <a:solidFill>
-                  <a:srgbClr val="1F2933"/>
-                </a:solidFill>
-                <a:latin typeface="Calibri" pitchFamily="34" charset="0"/>
-                <a:ea typeface="Calibri" pitchFamily="34" charset="-122"/>
-                <a:cs typeface="Calibri" pitchFamily="34" charset="-120"/>
-              </a:rPr>
-              <a:t>Draw a box around a region in QuPath. The stage moves, the tiles are captured and stitched, and the image appears back in your project</a:t>
-            </a:r>
-            <a:endParaRPr lang="en-US" sz="2000" dirty="0"/>
-          </a:p>
-          <a:p>
-            <a:pPr marL="342900" indent="-342900">
-              <a:lnSpc>
-                <a:spcPct val="105000"/>
-              </a:lnSpc>
-              <a:spcAft>
-                <a:spcPts val="1200"/>
-              </a:spcAft>
-              <a:buSzPct val="100000"/>
-              <a:buChar char="•"/>
-            </a:pPr>
-            <a:r>
-              <a:rPr lang="en-US" sz="2000" dirty="0">
-                <a:solidFill>
-                  <a:srgbClr val="1F2933"/>
-                </a:solidFill>
-                <a:latin typeface="Calibri" pitchFamily="34" charset="0"/>
-                <a:ea typeface="Calibri" pitchFamily="34" charset="-122"/>
-                <a:cs typeface="Calibri" pitchFamily="34" charset="-120"/>
-              </a:rPr>
-              <a:t>Target specific annotations on a slide you already scanned</a:t>
-            </a:r>
-            <a:endParaRPr lang="en-US" sz="2000" dirty="0"/>
-          </a:p>
-          <a:p>
-            <a:pPr marL="342900" indent="-342900">
-              <a:lnSpc>
-                <a:spcPct val="105000"/>
-              </a:lnSpc>
-              <a:spcAft>
-                <a:spcPts val="1200"/>
-              </a:spcAft>
-              <a:buSzPct val="100000"/>
-              <a:buChar char="•"/>
-            </a:pPr>
-            <a:r>
-              <a:rPr lang="en-US" sz="2000" dirty="0">
-                <a:solidFill>
-                  <a:srgbClr val="1F2933"/>
-                </a:solidFill>
-                <a:latin typeface="Calibri" pitchFamily="34" charset="0"/>
-                <a:ea typeface="Calibri" pitchFamily="34" charset="-122"/>
-                <a:cs typeface="Calibri" pitchFamily="34" charset="-120"/>
-              </a:rPr>
-              <a:t>Live camera view, stage map, saved positions, and a virtual joystick</a:t>
-            </a:r>
-            <a:endParaRPr lang="en-US" sz="2000" dirty="0"/>
-          </a:p>
-          <a:p>
-            <a:pPr marL="342900" indent="-342900">
-              <a:lnSpc>
-                <a:spcPct val="105000"/>
-              </a:lnSpc>
-              <a:spcAft>
-                <a:spcPts val="1200"/>
-              </a:spcAft>
-              <a:buSzPct val="100000"/>
-              <a:buChar char="•"/>
-            </a:pPr>
-            <a:r>
-              <a:rPr lang="en-US" sz="2000" dirty="0">
-                <a:solidFill>
-                  <a:srgbClr val="1F2933"/>
-                </a:solidFill>
-                <a:latin typeface="Calibri" pitchFamily="34" charset="0"/>
-                <a:ea typeface="Calibri" pitchFamily="34" charset="-122"/>
-                <a:cs typeface="Calibri" pitchFamily="34" charset="-120"/>
-              </a:rPr>
-              <a:t>Brightfield, multi-channel fluorescence, and combined passes on a single-camera scope</a:t>
-            </a:r>
-            <a:endParaRPr lang="en-US" sz="2000" dirty="0"/>
-          </a:p>
-        </p:txBody>
-      </p:sp>
-      <p:sp>
-        <p:nvSpPr>
-          <p:cNvPr id="5" name="Text 3"/>
+            <a:pPr indent="0" marL="0">
+              <a:buNone/>
+            </a:pPr>
+            <a:r>
+              <a:rPr lang="en-US" sz="1900" dirty="0">
+                <a:solidFill>
+                  <a:srgbClr val="5A6675"/>
+                </a:solidFill>
+                <a:latin typeface="Calibri" pitchFamily="34" charset="0"/>
+                <a:ea typeface="Calibri" pitchFamily="34" charset="-122"/>
+                <a:cs typeface="Calibri" pitchFamily="34" charset="-120"/>
+              </a:rPr>
+              <a:t>The most complex thing here, and the reason for the rest</a:t>
+            </a:r>
+            <a:endParaRPr lang="en-US" sz="1900" dirty="0"/>
+          </a:p>
+        </p:txBody>
+      </p:sp>
+      <p:sp>
+        <p:nvSpPr>
+          <p:cNvPr id="7" name="Text 5"/>
+          <p:cNvSpPr/>
+          <p:nvPr/>
+        </p:nvSpPr>
+        <p:spPr>
+          <a:xfrm>
+            <a:off x="566928" y="6199632"/>
+            <a:ext cx="8229600" cy="365760"/>
+          </a:xfrm>
+          <a:prstGeom prst="rect">
+            <a:avLst/>
+          </a:prstGeom>
+          <a:noFill/>
+          <a:ln/>
+        </p:spPr>
+        <p:txBody>
+          <a:bodyPr wrap="square" rtlCol="0" anchor="ctr"/>
+          <a:lstStyle/>
+          <a:p>
+            <a:pPr indent="0" marL="0">
+              <a:buNone/>
+            </a:pPr>
+            <a:r>
+              <a:rPr lang="en-US" sz="1400" dirty="0">
+                <a:solidFill>
+                  <a:srgbClr val="A8B2BF"/>
+                </a:solidFill>
+                <a:latin typeface="Calibri" pitchFamily="34" charset="0"/>
+                <a:ea typeface="Calibri" pitchFamily="34" charset="-122"/>
+                <a:cs typeface="Calibri" pitchFamily="34" charset="-120"/>
+              </a:rPr>
+              <a:t>michaelsnelson.github.io/BINA-I2K-2026-QuPath-Extensions</a:t>
+            </a:r>
+            <a:endParaRPr lang="en-US" sz="1400" dirty="0"/>
+          </a:p>
+        </p:txBody>
+      </p:sp>
+      <p:sp>
+        <p:nvSpPr>
+          <p:cNvPr id="8" name="Text 6"/>
           <p:cNvSpPr/>
           <p:nvPr/>
         </p:nvSpPr>
@@ -17950,7 +18190,7 @@
                 <a:ea typeface="Trebuchet MS" pitchFamily="34" charset="-122"/>
                 <a:cs typeface="Trebuchet MS" pitchFamily="34" charset="-120"/>
               </a:rPr>
-              <a:t>Why this changes the rest</a:t>
+              <a:t>QPSC — QuPath Scope Control</a:t>
             </a:r>
             <a:endParaRPr lang="en-US" sz="3000" dirty="0"/>
           </a:p>
@@ -18016,7 +18256,7 @@
                 <a:ea typeface="Calibri" pitchFamily="34" charset="-122"/>
                 <a:cs typeface="Calibri" pitchFamily="34" charset="-120"/>
               </a:rPr>
-              <a:t>The region you analysed is the region you acquire at high resolution</a:t>
+              <a:t>Draw a box around a region in QuPath. The stage moves, the tiles are captured and stitched, and the image appears back in your project</a:t>
             </a:r>
             <a:endParaRPr lang="en-US" sz="2000" dirty="0"/>
           </a:p>
@@ -18040,7 +18280,7 @@
                 <a:ea typeface="Calibri" pitchFamily="34" charset="-122"/>
                 <a:cs typeface="Calibri" pitchFamily="34" charset="-120"/>
               </a:rPr>
-              <a:t>Acquisition metadata arrives in the project, not in a folder that gets separated from the images</a:t>
+              <a:t>Target specific annotations on a slide you already scanned</a:t>
             </a:r>
             <a:endParaRPr lang="en-US" sz="2000" dirty="0"/>
           </a:p>
@@ -18064,79 +18304,39 @@
                 <a:ea typeface="Calibri" pitchFamily="34" charset="-122"/>
                 <a:cs typeface="Calibri" pitchFamily="34" charset="-120"/>
               </a:rPr>
-              <a:t>Stitching is a step in this pipeline — and it works perfectly well on its own, which is why it is in your hands-on hour</a:t>
+              <a:t>Live camera view, stage map, saved positions, and a virtual joystick</a:t>
             </a:r>
             <a:endParaRPr lang="en-US" sz="2000" dirty="0"/>
           </a:p>
-        </p:txBody>
-      </p:sp>
-      <p:sp>
-        <p:nvSpPr>
-          <p:cNvPr id="5" name="Shape 3"/>
-          <p:cNvSpPr/>
-          <p:nvPr/>
-        </p:nvSpPr>
-        <p:spPr>
-          <a:xfrm>
-            <a:off x="566928" y="5650992"/>
-            <a:ext cx="11055096" cy="566928"/>
-          </a:xfrm>
-          <a:prstGeom prst="rect">
-            <a:avLst/>
-          </a:prstGeom>
-          <a:solidFill>
-            <a:srgbClr val="F4F8FD"/>
-          </a:solidFill>
-          <a:ln w="9525">
-            <a:solidFill>
-              <a:srgbClr val="3674C1"/>
-            </a:solidFill>
-            <a:prstDash val="solid"/>
-          </a:ln>
-        </p:spPr>
-      </p:sp>
-      <p:sp>
-        <p:nvSpPr>
-          <p:cNvPr id="6" name="Text 4"/>
-          <p:cNvSpPr/>
-          <p:nvPr/>
-        </p:nvSpPr>
-        <p:spPr>
-          <a:xfrm>
-            <a:off x="768096" y="5650992"/>
-            <a:ext cx="10652760" cy="566928"/>
-          </a:xfrm>
-          <a:prstGeom prst="rect">
-            <a:avLst/>
-          </a:prstGeom>
-          <a:noFill/>
-          <a:ln/>
-        </p:spPr>
-        <p:txBody>
-          <a:bodyPr wrap="square" rtlCol="0" anchor="ctr"/>
-          <a:lstStyle/>
-          <a:p>
-            <a:pPr indent="0" marL="0">
-              <a:buNone/>
-            </a:pPr>
-            <a:r>
-              <a:rPr lang="en-US" sz="1600" b="1" dirty="0">
-                <a:solidFill>
-                  <a:srgbClr val="1F4C86"/>
-                </a:solidFill>
-                <a:latin typeface="Calibri" pitchFamily="34" charset="0"/>
-                <a:ea typeface="Calibri" pitchFamily="34" charset="-122"/>
-                <a:cs typeface="Calibri" pitchFamily="34" charset="-120"/>
-              </a:rPr>
-              <a:t>Once acquisition is driven from QuPath, "acquisition software" and "analysis software" stop being separate places your data lives.</a:t>
-            </a:r>
-            <a:endParaRPr lang="en-US" sz="1600" dirty="0"/>
-          </a:p>
-        </p:txBody>
-      </p:sp>
-      <p:sp>
-        <p:nvSpPr>
-          <p:cNvPr id="7" name="Text 5"/>
+          <a:p>
+            <a:pPr marL="342900" indent="-342900">
+              <a:lnSpc>
+                <a:spcPct val="105000"/>
+              </a:lnSpc>
+              <a:spcAft>
+                <a:spcPts val="1200"/>
+              </a:spcAft>
+              <a:buSzPct val="100000"/>
+              <a:buChar char="•"/>
+            </a:pPr>
+            <a:r>
+              <a:rPr lang="en-US" sz="2000" dirty="0">
+                <a:solidFill>
+                  <a:srgbClr val="1F2933"/>
+                </a:solidFill>
+                <a:latin typeface="Calibri" pitchFamily="34" charset="0"/>
+                <a:ea typeface="Calibri" pitchFamily="34" charset="-122"/>
+                <a:cs typeface="Calibri" pitchFamily="34" charset="-120"/>
+              </a:rPr>
+              <a:t>Brightfield, multi-channel fluorescence, and combined passes on a single-camera scope</a:t>
+            </a:r>
+            <a:endParaRPr lang="en-US" sz="2000" dirty="0"/>
+          </a:p>
+        </p:txBody>
+      </p:sp>
+      <p:sp>
+        <p:nvSpPr>
+          <p:cNvPr id="5" name="Text 3"/>
           <p:cNvSpPr/>
           <p:nvPr/>
         </p:nvSpPr>
@@ -18238,7 +18438,7 @@
                 <a:ea typeface="Trebuchet MS" pitchFamily="34" charset="-122"/>
                 <a:cs typeface="Trebuchet MS" pitchFamily="34" charset="-120"/>
               </a:rPr>
-              <a:t>How it is put together</a:t>
+              <a:t>Why this changes the rest</a:t>
             </a:r>
             <a:endParaRPr lang="en-US" sz="3000" dirty="0"/>
           </a:p>
@@ -18272,47 +18472,8 @@
         </p:nvSpPr>
         <p:spPr>
           <a:xfrm>
-            <a:off x="566928" y="1243584"/>
-            <a:ext cx="11055096" cy="384048"/>
-          </a:xfrm>
-          <a:prstGeom prst="rect">
-            <a:avLst/>
-          </a:prstGeom>
-          <a:noFill/>
-          <a:ln/>
-        </p:spPr>
-        <p:txBody>
-          <a:bodyPr wrap="square" rtlCol="0" anchor="ctr"/>
-          <a:lstStyle/>
-          <a:p>
-            <a:pPr indent="0" marL="0">
-              <a:buNone/>
-            </a:pPr>
-            <a:r>
-              <a:rPr lang="en-US" sz="1700" i="1" dirty="0">
-                <a:solidFill>
-                  <a:srgbClr val="5A6675"/>
-                </a:solidFill>
-                <a:latin typeface="Calibri" pitchFamily="34" charset="0"/>
-                <a:ea typeface="Calibri" pitchFamily="34" charset="-122"/>
-                <a:cs typeface="Calibri" pitchFamily="34" charset="-120"/>
-              </a:rPr>
-              <a:t>The easy part is the QuPath extension. Budget your time for the microscope side.</a:t>
-            </a:r>
-            <a:endParaRPr lang="en-US" sz="1700" dirty="0"/>
-          </a:p>
-        </p:txBody>
-      </p:sp>
-      <p:sp>
-        <p:nvSpPr>
-          <p:cNvPr id="5" name="Text 3"/>
-          <p:cNvSpPr/>
-          <p:nvPr/>
-        </p:nvSpPr>
-        <p:spPr>
-          <a:xfrm>
-            <a:off x="640080" y="1755648"/>
-            <a:ext cx="10963656" cy="4279392"/>
+            <a:off x="640080" y="1481328"/>
+            <a:ext cx="10963656" cy="4553712"/>
           </a:xfrm>
           <a:prstGeom prst="rect">
             <a:avLst/>
@@ -18343,7 +18504,7 @@
                 <a:ea typeface="Calibri" pitchFamily="34" charset="-122"/>
                 <a:cs typeface="Calibri" pitchFamily="34" charset="-120"/>
               </a:rPr>
-              <a:t>QuPath talks to a small command server, which drives Micro-Manager, which drives the hardware</a:t>
+              <a:t>The region you analysed is the region you acquire at high resolution</a:t>
             </a:r>
             <a:endParaRPr lang="en-US" sz="2000" dirty="0"/>
           </a:p>
@@ -18367,7 +18528,7 @@
                 <a:ea typeface="Calibri" pitchFamily="34" charset="-122"/>
                 <a:cs typeface="Calibri" pitchFamily="34" charset="-120"/>
               </a:rPr>
-              <a:t>Each instrument is described by its own configuration — the QuPath side does not know what kind of microscope it is</a:t>
+              <a:t>Acquisition metadata arrives in the project, not in a folder that gets separated from the images</a:t>
             </a:r>
             <a:endParaRPr lang="en-US" sz="2000" dirty="0"/>
           </a:p>
@@ -18391,7 +18552,7 @@
                 <a:ea typeface="Calibri" pitchFamily="34" charset="-122"/>
                 <a:cs typeface="Calibri" pitchFamily="34" charset="-120"/>
               </a:rPr>
-              <a:t>Micro-Manager remains the device layer. We did not reinvent it</a:t>
+              <a:t>Stitching is a step in this pipeline — and it works perfectly well on its own, which is why it is in your hands-on hour</a:t>
             </a:r>
             <a:endParaRPr lang="en-US" sz="2000" dirty="0"/>
           </a:p>
@@ -18399,7 +18560,71 @@
       </p:sp>
       <p:sp>
         <p:nvSpPr>
+          <p:cNvPr id="5" name="Shape 3"/>
+          <p:cNvSpPr/>
+          <p:nvPr/>
+        </p:nvSpPr>
+        <p:spPr>
+          <a:xfrm>
+            <a:off x="566928" y="5650992"/>
+            <a:ext cx="11055096" cy="566928"/>
+          </a:xfrm>
+          <a:prstGeom prst="rect">
+            <a:avLst/>
+          </a:prstGeom>
+          <a:solidFill>
+            <a:srgbClr val="F4F8FD"/>
+          </a:solidFill>
+          <a:ln w="9525">
+            <a:solidFill>
+              <a:srgbClr val="3674C1"/>
+            </a:solidFill>
+            <a:prstDash val="solid"/>
+          </a:ln>
+        </p:spPr>
+      </p:sp>
+      <p:sp>
+        <p:nvSpPr>
           <p:cNvPr id="6" name="Text 4"/>
+          <p:cNvSpPr/>
+          <p:nvPr/>
+        </p:nvSpPr>
+        <p:spPr>
+          <a:xfrm>
+            <a:off x="768096" y="5650992"/>
+            <a:ext cx="10652760" cy="566928"/>
+          </a:xfrm>
+          <a:prstGeom prst="rect">
+            <a:avLst/>
+          </a:prstGeom>
+          <a:noFill/>
+          <a:ln/>
+        </p:spPr>
+        <p:txBody>
+          <a:bodyPr wrap="square" rtlCol="0" anchor="ctr"/>
+          <a:lstStyle/>
+          <a:p>
+            <a:pPr indent="0" marL="0">
+              <a:buNone/>
+            </a:pPr>
+            <a:r>
+              <a:rPr lang="en-US" sz="1600" b="1" dirty="0">
+                <a:solidFill>
+                  <a:srgbClr val="1F4C86"/>
+                </a:solidFill>
+                <a:latin typeface="Calibri" pitchFamily="34" charset="0"/>
+                <a:ea typeface="Calibri" pitchFamily="34" charset="-122"/>
+                <a:cs typeface="Calibri" pitchFamily="34" charset="-120"/>
+              </a:rPr>
+              <a:t>Once acquisition is driven from QuPath, "acquisition software" and "analysis software" stop being separate places your data lives.</a:t>
+            </a:r>
+            <a:endParaRPr lang="en-US" sz="1600" dirty="0"/>
+          </a:p>
+        </p:txBody>
+      </p:sp>
+      <p:sp>
+        <p:nvSpPr>
+          <p:cNvPr id="7" name="Text 5"/>
           <p:cNvSpPr/>
           <p:nvPr/>
         </p:nvSpPr>
@@ -18470,41 +18695,14 @@
       </p:grpSpPr>
       <p:sp>
         <p:nvSpPr>
-          <p:cNvPr id="2" name="Shape 0"/>
-          <p:cNvSpPr/>
-          <p:nvPr/>
-        </p:nvSpPr>
-        <p:spPr>
-          <a:xfrm>
-            <a:off x="566928" y="411480"/>
-            <a:ext cx="2331720" cy="457200"/>
-          </a:xfrm>
-          <a:prstGeom prst="roundRect">
-            <a:avLst>
-              <a:gd name="adj" fmla="val 20000"/>
-            </a:avLst>
-          </a:prstGeom>
-          <a:solidFill>
-            <a:srgbClr val="FBF1E0"/>
-          </a:solidFill>
-          <a:ln w="12700">
-            <a:solidFill>
-              <a:srgbClr val="B26A00"/>
-            </a:solidFill>
-            <a:prstDash val="solid"/>
-          </a:ln>
-        </p:spPr>
-      </p:sp>
-      <p:sp>
-        <p:nvSpPr>
-          <p:cNvPr id="3" name="Text 1"/>
-          <p:cNvSpPr/>
-          <p:nvPr/>
-        </p:nvSpPr>
-        <p:spPr>
-          <a:xfrm>
-            <a:off x="566928" y="411480"/>
-            <a:ext cx="2331720" cy="457200"/>
+          <p:cNvPr id="2" name="Text 0"/>
+          <p:cNvSpPr/>
+          <p:nvPr/>
+        </p:nvSpPr>
+        <p:spPr>
+          <a:xfrm>
+            <a:off x="566928" y="384048"/>
+            <a:ext cx="11055096" cy="658368"/>
           </a:xfrm>
           <a:prstGeom prst="rect">
             <a:avLst/>
@@ -18516,72 +18714,33 @@
           <a:bodyPr wrap="square" rtlCol="0" anchor="ctr"/>
           <a:lstStyle/>
           <a:p>
-            <a:pPr algn="ctr" indent="0" marL="0">
+            <a:pPr indent="0" marL="0">
               <a:buNone/>
             </a:pPr>
             <a:r>
-              <a:rPr lang="en-US" sz="1600" b="1" dirty="0">
-                <a:solidFill>
-                  <a:srgbClr val="B26A00"/>
+              <a:rPr lang="en-US" sz="3000" b="1" dirty="0">
+                <a:solidFill>
+                  <a:srgbClr val="1F4C86"/>
                 </a:solidFill>
                 <a:latin typeface="Trebuchet MS" pitchFamily="34" charset="0"/>
                 <a:ea typeface="Trebuchet MS" pitchFamily="34" charset="-122"/>
                 <a:cs typeface="Trebuchet MS" pitchFamily="34" charset="-120"/>
               </a:rPr>
-              <a:t>▶  LIVE</a:t>
-            </a:r>
-            <a:endParaRPr lang="en-US" sz="1600" dirty="0"/>
-          </a:p>
-        </p:txBody>
-      </p:sp>
-      <p:sp>
-        <p:nvSpPr>
-          <p:cNvPr id="4" name="Text 2"/>
-          <p:cNvSpPr/>
-          <p:nvPr/>
-        </p:nvSpPr>
-        <p:spPr>
-          <a:xfrm>
-            <a:off x="566928" y="1024128"/>
-            <a:ext cx="11055096" cy="685800"/>
-          </a:xfrm>
-          <a:prstGeom prst="rect">
-            <a:avLst/>
-          </a:prstGeom>
-          <a:noFill/>
-          <a:ln/>
-        </p:spPr>
-        <p:txBody>
-          <a:bodyPr wrap="square" rtlCol="0" anchor="ctr"/>
-          <a:lstStyle/>
-          <a:p>
-            <a:pPr indent="0" marL="0">
-              <a:buNone/>
-            </a:pPr>
-            <a:r>
-              <a:rPr lang="en-US" sz="3200" b="1" dirty="0">
-                <a:solidFill>
-                  <a:srgbClr val="1F4C86"/>
-                </a:solidFill>
-                <a:latin typeface="Trebuchet MS" pitchFamily="34" charset="0"/>
-                <a:ea typeface="Trebuchet MS" pitchFamily="34" charset="-122"/>
-                <a:cs typeface="Trebuchet MS" pitchFamily="34" charset="-120"/>
-              </a:rPr>
-              <a:t>Acquisition, live</a:t>
-            </a:r>
-            <a:endParaRPr lang="en-US" sz="3200" dirty="0"/>
-          </a:p>
-        </p:txBody>
-      </p:sp>
-      <p:sp>
-        <p:nvSpPr>
-          <p:cNvPr id="5" name="Shape 3"/>
-          <p:cNvSpPr/>
-          <p:nvPr/>
-        </p:nvSpPr>
-        <p:spPr>
-          <a:xfrm>
-            <a:off x="566928" y="1783080"/>
+              <a:t>How it is put together</a:t>
+            </a:r>
+            <a:endParaRPr lang="en-US" sz="3000" dirty="0"/>
+          </a:p>
+        </p:txBody>
+      </p:sp>
+      <p:sp>
+        <p:nvSpPr>
+          <p:cNvPr id="3" name="Shape 1"/>
+          <p:cNvSpPr/>
+          <p:nvPr/>
+        </p:nvSpPr>
+        <p:spPr>
+          <a:xfrm>
+            <a:off x="566928" y="1097280"/>
             <a:ext cx="1920240" cy="50292"/>
           </a:xfrm>
           <a:prstGeom prst="rect">
@@ -18595,14 +18754,53 @@
       </p:sp>
       <p:sp>
         <p:nvSpPr>
-          <p:cNvPr id="6" name="Text 4"/>
-          <p:cNvSpPr/>
-          <p:nvPr/>
-        </p:nvSpPr>
-        <p:spPr>
-          <a:xfrm>
-            <a:off x="640080" y="2103120"/>
-            <a:ext cx="10963656" cy="3017520"/>
+          <p:cNvPr id="4" name="Text 2"/>
+          <p:cNvSpPr/>
+          <p:nvPr/>
+        </p:nvSpPr>
+        <p:spPr>
+          <a:xfrm>
+            <a:off x="566928" y="1243584"/>
+            <a:ext cx="11055096" cy="384048"/>
+          </a:xfrm>
+          <a:prstGeom prst="rect">
+            <a:avLst/>
+          </a:prstGeom>
+          <a:noFill/>
+          <a:ln/>
+        </p:spPr>
+        <p:txBody>
+          <a:bodyPr wrap="square" rtlCol="0" anchor="ctr"/>
+          <a:lstStyle/>
+          <a:p>
+            <a:pPr indent="0" marL="0">
+              <a:buNone/>
+            </a:pPr>
+            <a:r>
+              <a:rPr lang="en-US" sz="1700" i="1" dirty="0">
+                <a:solidFill>
+                  <a:srgbClr val="5A6675"/>
+                </a:solidFill>
+                <a:latin typeface="Calibri" pitchFamily="34" charset="0"/>
+                <a:ea typeface="Calibri" pitchFamily="34" charset="-122"/>
+                <a:cs typeface="Calibri" pitchFamily="34" charset="-120"/>
+              </a:rPr>
+              <a:t>The easy part is the QuPath extension. Budget your time for the microscope side.</a:t>
+            </a:r>
+            <a:endParaRPr lang="en-US" sz="1700" dirty="0"/>
+          </a:p>
+        </p:txBody>
+      </p:sp>
+      <p:sp>
+        <p:nvSpPr>
+          <p:cNvPr id="5" name="Text 3"/>
+          <p:cNvSpPr/>
+          <p:nvPr/>
+        </p:nvSpPr>
+        <p:spPr>
+          <a:xfrm>
+            <a:off x="640080" y="1755648"/>
+            <a:ext cx="10963656" cy="4279392"/>
           </a:xfrm>
           <a:prstGeom prst="rect">
             <a:avLst/>
@@ -18615,8 +18813,11 @@
           <a:lstStyle/>
           <a:p>
             <a:pPr marL="342900" indent="-342900">
+              <a:lnSpc>
+                <a:spcPct val="105000"/>
+              </a:lnSpc>
               <a:spcAft>
-                <a:spcPts val="1400"/>
+                <a:spcPts val="1200"/>
               </a:spcAft>
               <a:buSzPct val="100000"/>
               <a:buChar char="•"/>
@@ -18630,14 +18831,17 @@
                 <a:ea typeface="Calibri" pitchFamily="34" charset="-122"/>
                 <a:cs typeface="Calibri" pitchFamily="34" charset="-120"/>
               </a:rPr>
-              <a:t>Draw a bounding box on a slide overview</a:t>
+              <a:t>QuPath talks to a small command server, which drives Micro-Manager, which drives the hardware</a:t>
             </a:r>
             <a:endParaRPr lang="en-US" sz="2000" dirty="0"/>
           </a:p>
           <a:p>
             <a:pPr marL="342900" indent="-342900">
+              <a:lnSpc>
+                <a:spcPct val="105000"/>
+              </a:lnSpc>
               <a:spcAft>
-                <a:spcPts val="1400"/>
+                <a:spcPts val="1200"/>
               </a:spcAft>
               <a:buSzPct val="100000"/>
               <a:buChar char="•"/>
@@ -18651,14 +18855,17 @@
                 <a:ea typeface="Calibri" pitchFamily="34" charset="-122"/>
                 <a:cs typeface="Calibri" pitchFamily="34" charset="-120"/>
               </a:rPr>
-              <a:t>Watch the stage move and the tiles come in</a:t>
+              <a:t>Each instrument is described by its own configuration — the QuPath side does not know what kind of microscope it is</a:t>
             </a:r>
             <a:endParaRPr lang="en-US" sz="2000" dirty="0"/>
           </a:p>
           <a:p>
             <a:pPr marL="342900" indent="-342900">
+              <a:lnSpc>
+                <a:spcPct val="105000"/>
+              </a:lnSpc>
               <a:spcAft>
-                <a:spcPts val="1400"/>
+                <a:spcPts val="1200"/>
               </a:spcAft>
               <a:buSzPct val="100000"/>
               <a:buChar char="•"/>
@@ -18672,100 +18879,15 @@
                 <a:ea typeface="Calibri" pitchFamily="34" charset="-122"/>
                 <a:cs typeface="Calibri" pitchFamily="34" charset="-120"/>
               </a:rPr>
-              <a:t>Stitched pyramidal image lands back in the project, with its metadata</a:t>
+              <a:t>Micro-Manager remains the device layer. We did not reinvent it</a:t>
             </a:r>
             <a:endParaRPr lang="en-US" sz="2000" dirty="0"/>
           </a:p>
-          <a:p>
-            <a:pPr marL="342900" indent="-342900">
-              <a:spcAft>
-                <a:spcPts val="1400"/>
-              </a:spcAft>
-              <a:buSzPct val="100000"/>
-              <a:buChar char="•"/>
-            </a:pPr>
-            <a:r>
-              <a:rPr lang="en-US" sz="2000" dirty="0">
-                <a:solidFill>
-                  <a:srgbClr val="1F2933"/>
-                </a:solidFill>
-                <a:latin typeface="Calibri" pitchFamily="34" charset="0"/>
-                <a:ea typeface="Calibri" pitchFamily="34" charset="-122"/>
-                <a:cs typeface="Calibri" pitchFamily="34" charset="-120"/>
-              </a:rPr>
-              <a:t>Then open it and annotate it — the loop closes</a:t>
-            </a:r>
-            <a:endParaRPr lang="en-US" sz="2000" dirty="0"/>
-          </a:p>
-        </p:txBody>
-      </p:sp>
-      <p:sp>
-        <p:nvSpPr>
-          <p:cNvPr id="7" name="Shape 5"/>
-          <p:cNvSpPr/>
-          <p:nvPr/>
-        </p:nvSpPr>
-        <p:spPr>
-          <a:xfrm>
-            <a:off x="566928" y="5650992"/>
-            <a:ext cx="11055096" cy="566928"/>
-          </a:xfrm>
-          <a:prstGeom prst="rect">
-            <a:avLst/>
-          </a:prstGeom>
-          <a:solidFill>
-            <a:srgbClr val="F4F8FD"/>
-          </a:solidFill>
-          <a:ln w="9525">
-            <a:solidFill>
-              <a:srgbClr val="3674C1"/>
-            </a:solidFill>
-            <a:prstDash val="solid"/>
-          </a:ln>
-        </p:spPr>
-      </p:sp>
-      <p:sp>
-        <p:nvSpPr>
-          <p:cNvPr id="8" name="Text 6"/>
-          <p:cNvSpPr/>
-          <p:nvPr/>
-        </p:nvSpPr>
-        <p:spPr>
-          <a:xfrm>
-            <a:off x="768096" y="5650992"/>
-            <a:ext cx="10652760" cy="566928"/>
-          </a:xfrm>
-          <a:prstGeom prst="rect">
-            <a:avLst/>
-          </a:prstGeom>
-          <a:noFill/>
-          <a:ln/>
-        </p:spPr>
-        <p:txBody>
-          <a:bodyPr wrap="square" rtlCol="0" anchor="ctr"/>
-          <a:lstStyle/>
-          <a:p>
-            <a:pPr indent="0" marL="0">
-              <a:buNone/>
-            </a:pPr>
-            <a:r>
-              <a:rPr lang="en-US" sz="1600" b="1" dirty="0">
-                <a:solidFill>
-                  <a:srgbClr val="1F4C86"/>
-                </a:solidFill>
-                <a:latin typeface="Calibri" pitchFamily="34" charset="0"/>
-                <a:ea typeface="Calibri" pitchFamily="34" charset="-122"/>
-                <a:cs typeface="Calibri" pitchFamily="34" charset="-120"/>
-              </a:rPr>
-              <a:t>About five minutes. Recorded fallback ready if the network or the hardware disagrees.</a:t>
-            </a:r>
-            <a:endParaRPr lang="en-US" sz="1600" dirty="0"/>
-          </a:p>
-        </p:txBody>
-      </p:sp>
-      <p:sp>
-        <p:nvSpPr>
-          <p:cNvPr id="9" name="Text 7"/>
+        </p:txBody>
+      </p:sp>
+      <p:sp>
+        <p:nvSpPr>
+          <p:cNvPr id="6" name="Text 4"/>
           <p:cNvSpPr/>
           <p:nvPr/>
         </p:nvSpPr>
@@ -18836,14 +18958,41 @@
       </p:grpSpPr>
       <p:sp>
         <p:nvSpPr>
-          <p:cNvPr id="2" name="Text 0"/>
+          <p:cNvPr id="2" name="Shape 0"/>
           <p:cNvSpPr/>
           <p:nvPr/>
         </p:nvSpPr>
         <p:spPr>
           <a:xfrm>
             <a:off x="566928" y="411480"/>
-            <a:ext cx="11055096" cy="685800"/>
+            <a:ext cx="2331720" cy="457200"/>
+          </a:xfrm>
+          <a:prstGeom prst="roundRect">
+            <a:avLst>
+              <a:gd name="adj" fmla="val 20000"/>
+            </a:avLst>
+          </a:prstGeom>
+          <a:solidFill>
+            <a:srgbClr val="FBF1E0"/>
+          </a:solidFill>
+          <a:ln w="12700">
+            <a:solidFill>
+              <a:srgbClr val="B26A00"/>
+            </a:solidFill>
+            <a:prstDash val="solid"/>
+          </a:ln>
+        </p:spPr>
+      </p:sp>
+      <p:sp>
+        <p:nvSpPr>
+          <p:cNvPr id="3" name="Text 1"/>
+          <p:cNvSpPr/>
+          <p:nvPr/>
+        </p:nvSpPr>
+        <p:spPr>
+          <a:xfrm>
+            <a:off x="566928" y="411480"/>
+            <a:ext cx="2331720" cy="457200"/>
           </a:xfrm>
           <a:prstGeom prst="rect">
             <a:avLst/>
@@ -18855,19 +19004,58 @@
           <a:bodyPr wrap="square" rtlCol="0" anchor="ctr"/>
           <a:lstStyle/>
           <a:p>
-            <a:pPr indent="0" marL="0">
+            <a:pPr algn="ctr" indent="0" marL="0">
               <a:buNone/>
             </a:pPr>
             <a:r>
-              <a:rPr lang="en-US" sz="3200" b="1" dirty="0">
-                <a:solidFill>
-                  <a:srgbClr val="1F4C86"/>
+              <a:rPr lang="en-US" sz="1600" b="1" dirty="0">
+                <a:solidFill>
+                  <a:srgbClr val="B26A00"/>
                 </a:solidFill>
                 <a:latin typeface="Trebuchet MS" pitchFamily="34" charset="0"/>
                 <a:ea typeface="Trebuchet MS" pitchFamily="34" charset="-122"/>
                 <a:cs typeface="Trebuchet MS" pitchFamily="34" charset="-120"/>
               </a:rPr>
-              <a:t>Acknowledgements</a:t>
+              <a:t>▶  LIVE</a:t>
+            </a:r>
+            <a:endParaRPr lang="en-US" sz="1600" dirty="0"/>
+          </a:p>
+        </p:txBody>
+      </p:sp>
+      <p:sp>
+        <p:nvSpPr>
+          <p:cNvPr id="4" name="Text 2"/>
+          <p:cNvSpPr/>
+          <p:nvPr/>
+        </p:nvSpPr>
+        <p:spPr>
+          <a:xfrm>
+            <a:off x="566928" y="1024128"/>
+            <a:ext cx="11055096" cy="685800"/>
+          </a:xfrm>
+          <a:prstGeom prst="rect">
+            <a:avLst/>
+          </a:prstGeom>
+          <a:noFill/>
+          <a:ln/>
+        </p:spPr>
+        <p:txBody>
+          <a:bodyPr wrap="square" rtlCol="0" anchor="ctr"/>
+          <a:lstStyle/>
+          <a:p>
+            <a:pPr indent="0" marL="0">
+              <a:buNone/>
+            </a:pPr>
+            <a:r>
+              <a:rPr lang="en-US" sz="3200" b="1" dirty="0">
+                <a:solidFill>
+                  <a:srgbClr val="1F4C86"/>
+                </a:solidFill>
+                <a:latin typeface="Trebuchet MS" pitchFamily="34" charset="0"/>
+                <a:ea typeface="Trebuchet MS" pitchFamily="34" charset="-122"/>
+                <a:cs typeface="Trebuchet MS" pitchFamily="34" charset="-120"/>
+              </a:rPr>
+              <a:t>Acquisition, live</a:t>
             </a:r>
             <a:endParaRPr lang="en-US" sz="3200" dirty="0"/>
           </a:p>
@@ -18875,13 +19063,13 @@
       </p:sp>
       <p:sp>
         <p:nvSpPr>
-          <p:cNvPr id="3" name="Shape 1"/>
-          <p:cNvSpPr/>
-          <p:nvPr/>
-        </p:nvSpPr>
-        <p:spPr>
-          <a:xfrm>
-            <a:off x="566928" y="1152144"/>
+          <p:cNvPr id="5" name="Shape 3"/>
+          <p:cNvSpPr/>
+          <p:nvPr/>
+        </p:nvSpPr>
+        <p:spPr>
+          <a:xfrm>
+            <a:off x="566928" y="1783080"/>
             <a:ext cx="1920240" cy="50292"/>
           </a:xfrm>
           <a:prstGeom prst="rect">
@@ -18895,54 +19083,145 @@
       </p:sp>
       <p:sp>
         <p:nvSpPr>
-          <p:cNvPr id="4" name="Shape 2"/>
-          <p:cNvSpPr/>
-          <p:nvPr/>
-        </p:nvSpPr>
-        <p:spPr>
-          <a:xfrm>
-            <a:off x="566928" y="1572768"/>
-            <a:ext cx="11055096" cy="2240280"/>
+          <p:cNvPr id="6" name="Text 4"/>
+          <p:cNvSpPr/>
+          <p:nvPr/>
+        </p:nvSpPr>
+        <p:spPr>
+          <a:xfrm>
+            <a:off x="640080" y="2103120"/>
+            <a:ext cx="10963656" cy="3017520"/>
+          </a:xfrm>
+          <a:prstGeom prst="rect">
+            <a:avLst/>
+          </a:prstGeom>
+          <a:noFill/>
+          <a:ln/>
+        </p:spPr>
+        <p:txBody>
+          <a:bodyPr wrap="square" rtlCol="0" anchor="t"/>
+          <a:lstStyle/>
+          <a:p>
+            <a:pPr marL="342900" indent="-342900">
+              <a:spcAft>
+                <a:spcPts val="1400"/>
+              </a:spcAft>
+              <a:buSzPct val="100000"/>
+              <a:buChar char="•"/>
+            </a:pPr>
+            <a:r>
+              <a:rPr lang="en-US" sz="2000" dirty="0">
+                <a:solidFill>
+                  <a:srgbClr val="1F2933"/>
+                </a:solidFill>
+                <a:latin typeface="Calibri" pitchFamily="34" charset="0"/>
+                <a:ea typeface="Calibri" pitchFamily="34" charset="-122"/>
+                <a:cs typeface="Calibri" pitchFamily="34" charset="-120"/>
+              </a:rPr>
+              <a:t>Draw a bounding box on a slide overview</a:t>
+            </a:r>
+            <a:endParaRPr lang="en-US" sz="2000" dirty="0"/>
+          </a:p>
+          <a:p>
+            <a:pPr marL="342900" indent="-342900">
+              <a:spcAft>
+                <a:spcPts val="1400"/>
+              </a:spcAft>
+              <a:buSzPct val="100000"/>
+              <a:buChar char="•"/>
+            </a:pPr>
+            <a:r>
+              <a:rPr lang="en-US" sz="2000" dirty="0">
+                <a:solidFill>
+                  <a:srgbClr val="1F2933"/>
+                </a:solidFill>
+                <a:latin typeface="Calibri" pitchFamily="34" charset="0"/>
+                <a:ea typeface="Calibri" pitchFamily="34" charset="-122"/>
+                <a:cs typeface="Calibri" pitchFamily="34" charset="-120"/>
+              </a:rPr>
+              <a:t>Watch the stage move and the tiles come in</a:t>
+            </a:r>
+            <a:endParaRPr lang="en-US" sz="2000" dirty="0"/>
+          </a:p>
+          <a:p>
+            <a:pPr marL="342900" indent="-342900">
+              <a:spcAft>
+                <a:spcPts val="1400"/>
+              </a:spcAft>
+              <a:buSzPct val="100000"/>
+              <a:buChar char="•"/>
+            </a:pPr>
+            <a:r>
+              <a:rPr lang="en-US" sz="2000" dirty="0">
+                <a:solidFill>
+                  <a:srgbClr val="1F2933"/>
+                </a:solidFill>
+                <a:latin typeface="Calibri" pitchFamily="34" charset="0"/>
+                <a:ea typeface="Calibri" pitchFamily="34" charset="-122"/>
+                <a:cs typeface="Calibri" pitchFamily="34" charset="-120"/>
+              </a:rPr>
+              <a:t>Stitched pyramidal image lands back in the project, with its metadata</a:t>
+            </a:r>
+            <a:endParaRPr lang="en-US" sz="2000" dirty="0"/>
+          </a:p>
+          <a:p>
+            <a:pPr marL="342900" indent="-342900">
+              <a:spcAft>
+                <a:spcPts val="1400"/>
+              </a:spcAft>
+              <a:buSzPct val="100000"/>
+              <a:buChar char="•"/>
+            </a:pPr>
+            <a:r>
+              <a:rPr lang="en-US" sz="2000" dirty="0">
+                <a:solidFill>
+                  <a:srgbClr val="1F2933"/>
+                </a:solidFill>
+                <a:latin typeface="Calibri" pitchFamily="34" charset="0"/>
+                <a:ea typeface="Calibri" pitchFamily="34" charset="-122"/>
+                <a:cs typeface="Calibri" pitchFamily="34" charset="-120"/>
+              </a:rPr>
+              <a:t>Then open it and annotate it — the loop closes</a:t>
+            </a:r>
+            <a:endParaRPr lang="en-US" sz="2000" dirty="0"/>
+          </a:p>
+        </p:txBody>
+      </p:sp>
+      <p:sp>
+        <p:nvSpPr>
+          <p:cNvPr id="7" name="Shape 5"/>
+          <p:cNvSpPr/>
+          <p:nvPr/>
+        </p:nvSpPr>
+        <p:spPr>
+          <a:xfrm>
+            <a:off x="566928" y="5650992"/>
+            <a:ext cx="11055096" cy="566928"/>
           </a:xfrm>
           <a:prstGeom prst="rect">
             <a:avLst/>
           </a:prstGeom>
           <a:solidFill>
-            <a:srgbClr val="E8F0FA"/>
+            <a:srgbClr val="F4F8FD"/>
           </a:solidFill>
-          <a:ln/>
-        </p:spPr>
-      </p:sp>
-      <p:sp>
-        <p:nvSpPr>
-          <p:cNvPr id="5" name="Shape 3"/>
-          <p:cNvSpPr/>
-          <p:nvPr/>
-        </p:nvSpPr>
-        <p:spPr>
-          <a:xfrm>
-            <a:off x="566928" y="1572768"/>
-            <a:ext cx="146304" cy="2240280"/>
-          </a:xfrm>
-          <a:prstGeom prst="rect">
-            <a:avLst/>
-          </a:prstGeom>
-          <a:solidFill>
-            <a:srgbClr val="3674C1"/>
-          </a:solidFill>
-          <a:ln/>
-        </p:spPr>
-      </p:sp>
-      <p:sp>
-        <p:nvSpPr>
-          <p:cNvPr id="6" name="Text 4"/>
-          <p:cNvSpPr/>
-          <p:nvPr/>
-        </p:nvSpPr>
-        <p:spPr>
-          <a:xfrm>
-            <a:off x="978408" y="1737360"/>
-            <a:ext cx="10232136" cy="365760"/>
+          <a:ln w="9525">
+            <a:solidFill>
+              <a:srgbClr val="3674C1"/>
+            </a:solidFill>
+            <a:prstDash val="solid"/>
+          </a:ln>
+        </p:spPr>
+      </p:sp>
+      <p:sp>
+        <p:nvSpPr>
+          <p:cNvPr id="8" name="Text 6"/>
+          <p:cNvSpPr/>
+          <p:nvPr/>
+        </p:nvSpPr>
+        <p:spPr>
+          <a:xfrm>
+            <a:off x="768096" y="5650992"/>
+            <a:ext cx="10652760" cy="566928"/>
           </a:xfrm>
           <a:prstGeom prst="rect">
             <a:avLst/>
@@ -18958,15 +19237,15 @@
               <a:buNone/>
             </a:pPr>
             <a:r>
-              <a:rPr lang="en-US" sz="1600" b="1" spc="150" kern="0" dirty="0">
-                <a:solidFill>
-                  <a:srgbClr val="3674C1"/>
-                </a:solidFill>
-                <a:latin typeface="Calibri" pitchFamily="34" charset="0"/>
-                <a:ea typeface="Calibri" pitchFamily="34" charset="-122"/>
-                <a:cs typeface="Calibri" pitchFamily="34" charset="-120"/>
-              </a:rPr>
-              <a:t>Sample data</a:t>
+              <a:rPr lang="en-US" sz="1600" b="1" dirty="0">
+                <a:solidFill>
+                  <a:srgbClr val="1F4C86"/>
+                </a:solidFill>
+                <a:latin typeface="Calibri" pitchFamily="34" charset="0"/>
+                <a:ea typeface="Calibri" pitchFamily="34" charset="-122"/>
+                <a:cs typeface="Calibri" pitchFamily="34" charset="-120"/>
+              </a:rPr>
+              <a:t>About five minutes. Recorded fallback ready if the network or the hardware disagrees.</a:t>
             </a:r>
             <a:endParaRPr lang="en-US" sz="1600" dirty="0"/>
           </a:p>
@@ -18974,222 +19253,7 @@
       </p:sp>
       <p:sp>
         <p:nvSpPr>
-          <p:cNvPr id="7" name="Text 5"/>
-          <p:cNvSpPr/>
-          <p:nvPr/>
-        </p:nvSpPr>
-        <p:spPr>
-          <a:xfrm>
-            <a:off x="978408" y="2103120"/>
-            <a:ext cx="10232136" cy="566928"/>
-          </a:xfrm>
-          <a:prstGeom prst="rect">
-            <a:avLst/>
-          </a:prstGeom>
-          <a:noFill/>
-          <a:ln/>
-        </p:spPr>
-        <p:txBody>
-          <a:bodyPr wrap="square" rtlCol="0" anchor="ctr"/>
-          <a:lstStyle/>
-          <a:p>
-            <a:pPr indent="0" marL="0">
-              <a:buNone/>
-            </a:pPr>
-            <a:r>
-              <a:rPr lang="en-US" sz="3200" b="1" dirty="0">
-                <a:solidFill>
-                  <a:srgbClr val="1F4C86"/>
-                </a:solidFill>
-                <a:latin typeface="Trebuchet MS" pitchFamily="34" charset="0"/>
-                <a:ea typeface="Trebuchet MS" pitchFamily="34" charset="-122"/>
-                <a:cs typeface="Trebuchet MS" pitchFamily="34" charset="-120"/>
-              </a:rPr>
-              <a:t>Sara McArdle  ·  Zbigniew Mikulski</a:t>
-            </a:r>
-            <a:endParaRPr lang="en-US" sz="3200" dirty="0"/>
-          </a:p>
-        </p:txBody>
-      </p:sp>
-      <p:sp>
-        <p:nvSpPr>
-          <p:cNvPr id="8" name="Text 6"/>
-          <p:cNvSpPr/>
-          <p:nvPr/>
-        </p:nvSpPr>
-        <p:spPr>
-          <a:xfrm>
-            <a:off x="978408" y="2670048"/>
-            <a:ext cx="10232136" cy="384048"/>
-          </a:xfrm>
-          <a:prstGeom prst="rect">
-            <a:avLst/>
-          </a:prstGeom>
-          <a:noFill/>
-          <a:ln/>
-        </p:spPr>
-        <p:txBody>
-          <a:bodyPr wrap="square" rtlCol="0" anchor="ctr"/>
-          <a:lstStyle/>
-          <a:p>
-            <a:pPr indent="0" marL="0">
-              <a:buNone/>
-            </a:pPr>
-            <a:r>
-              <a:rPr lang="en-US" sz="2100" dirty="0">
-                <a:solidFill>
-                  <a:srgbClr val="1F2933"/>
-                </a:solidFill>
-                <a:latin typeface="Calibri" pitchFamily="34" charset="0"/>
-                <a:ea typeface="Calibri" pitchFamily="34" charset="-122"/>
-                <a:cs typeface="Calibri" pitchFamily="34" charset="-120"/>
-              </a:rPr>
-              <a:t>La Jolla Institute for Immunology</a:t>
-            </a:r>
-            <a:endParaRPr lang="en-US" sz="2100" dirty="0"/>
-          </a:p>
-        </p:txBody>
-      </p:sp>
-      <p:sp>
-        <p:nvSpPr>
           <p:cNvPr id="9" name="Text 7"/>
-          <p:cNvSpPr/>
-          <p:nvPr/>
-        </p:nvSpPr>
-        <p:spPr>
-          <a:xfrm>
-            <a:off x="978408" y="3054096"/>
-            <a:ext cx="10232136" cy="731520"/>
-          </a:xfrm>
-          <a:prstGeom prst="rect">
-            <a:avLst/>
-          </a:prstGeom>
-          <a:noFill/>
-          <a:ln/>
-        </p:spPr>
-        <p:txBody>
-          <a:bodyPr wrap="square" rtlCol="0" anchor="ctr"/>
-          <a:lstStyle/>
-          <a:p>
-            <a:pPr indent="0" marL="0">
-              <a:lnSpc>
-                <a:spcPct val="110000"/>
-              </a:lnSpc>
-              <a:buNone/>
-            </a:pPr>
-            <a:r>
-              <a:rPr lang="en-US" sz="1700" i="1" dirty="0">
-                <a:solidFill>
-                  <a:srgbClr val="5A6675"/>
-                </a:solidFill>
-                <a:latin typeface="Calibri" pitchFamily="34" charset="0"/>
-                <a:ea typeface="Calibri" pitchFamily="34" charset="-122"/>
-                <a:cs typeface="Calibri" pitchFamily="34" charset="-120"/>
-              </a:rPr>
-              <a:t>They provided the majority of the test and demonstration data behind almost every exercise you will see today.</a:t>
-            </a:r>
-            <a:endParaRPr lang="en-US" sz="1700" dirty="0"/>
-          </a:p>
-          <a:p>
-            <a:pPr indent="0" marL="0">
-              <a:lnSpc>
-                <a:spcPct val="110000"/>
-              </a:lnSpc>
-              <a:buNone/>
-            </a:pPr>
-            <a:r>
-              <a:rPr lang="en-US" sz="1700" i="1" dirty="0">
-                <a:solidFill>
-                  <a:srgbClr val="5A6675"/>
-                </a:solidFill>
-                <a:latin typeface="Calibri" pitchFamily="34" charset="0"/>
-                <a:ea typeface="Calibri" pitchFamily="34" charset="-122"/>
-                <a:cs typeface="Calibri" pitchFamily="34" charset="-120"/>
-              </a:rPr>
-              <a:t>These tools could not have been built, tested, or taught without it.</a:t>
-            </a:r>
-            <a:endParaRPr lang="en-US" sz="1700" dirty="0"/>
-          </a:p>
-        </p:txBody>
-      </p:sp>
-      <p:sp>
-        <p:nvSpPr>
-          <p:cNvPr id="10" name="Text 8"/>
-          <p:cNvSpPr/>
-          <p:nvPr/>
-        </p:nvSpPr>
-        <p:spPr>
-          <a:xfrm>
-            <a:off x="566928" y="3977640"/>
-            <a:ext cx="11055096" cy="2103120"/>
-          </a:xfrm>
-          <a:prstGeom prst="rect">
-            <a:avLst/>
-          </a:prstGeom>
-          <a:noFill/>
-          <a:ln/>
-        </p:spPr>
-        <p:txBody>
-          <a:bodyPr wrap="square" rtlCol="0" anchor="t"/>
-          <a:lstStyle/>
-          <a:p>
-            <a:pPr indent="0" marL="0">
-              <a:spcAft>
-                <a:spcPts val="1000"/>
-              </a:spcAft>
-              <a:buNone/>
-            </a:pPr>
-            <a:r>
-              <a:rPr lang="en-US" sz="1700" dirty="0">
-                <a:solidFill>
-                  <a:srgbClr val="1F2933"/>
-                </a:solidFill>
-                <a:latin typeface="Calibri" pitchFamily="34" charset="0"/>
-                <a:ea typeface="Calibri" pitchFamily="34" charset="-122"/>
-                <a:cs typeface="Calibri" pitchFamily="34" charset="-120"/>
-              </a:rPr>
-              <a:t>Sara McArdle also shaped the software directly — two of these extensions began as her Groovy scripts, and her FS2K course was the model for how the workshop pages are written.
-</a:t>
-            </a:r>
-            <a:pPr indent="0" marL="0">
-              <a:spcAft>
-                <a:spcPts val="1000"/>
-              </a:spcAft>
-              <a:buNone/>
-            </a:pPr>
-            <a:r>
-              <a:rPr lang="en-US" sz="1700" dirty="0">
-                <a:solidFill>
-                  <a:srgbClr val="1F2933"/>
-                </a:solidFill>
-                <a:latin typeface="Calibri" pitchFamily="34" charset="0"/>
-                <a:ea typeface="Calibri" pitchFamily="34" charset="-122"/>
-                <a:cs typeface="Calibri" pitchFamily="34" charset="-120"/>
-              </a:rPr>
-              <a:t>Kristin Gallick, whose concept and scripts the Confusion Matrix grew from.  ·  Pete Bankhead and the QuPath team.  ·  CT-FIRE, CurveAlign, TACS and TWOMBLI for the fibre work.  ·  CytoMAP and QuBaLab for bringing clustering into QuPath.  ·  QUAREP-LiMi for the reporting standards.  ·  The image.sc community, where several of these features were first requested.
-</a:t>
-            </a:r>
-            <a:pPr indent="0" marL="0">
-              <a:buNone/>
-            </a:pPr>
-            <a:r>
-              <a:rPr lang="en-US" sz="1700" b="1" dirty="0">
-                <a:solidFill>
-                  <a:srgbClr val="1F4C86"/>
-                </a:solidFill>
-                <a:latin typeface="Calibri" pitchFamily="34" charset="0"/>
-                <a:ea typeface="Calibri" pitchFamily="34" charset="-122"/>
-                <a:cs typeface="Calibri" pitchFamily="34" charset="-120"/>
-              </a:rPr>
-              <a:t>Full credits: michaelsnelson.github.io/BINA-I2K-2026-QuPath-Extensions/docs/acknowledgements.html</a:t>
-            </a:r>
-            <a:endParaRPr lang="en-US" sz="1700" dirty="0"/>
-          </a:p>
-        </p:txBody>
-      </p:sp>
-      <p:sp>
-        <p:nvSpPr>
-          <p:cNvPr id="11" name="Text 9"/>
           <p:cNvSpPr/>
           <p:nvPr/>
         </p:nvSpPr>
@@ -19611,14 +19675,53 @@
       </p:grpSpPr>
       <p:sp>
         <p:nvSpPr>
-          <p:cNvPr id="2" name="Shape 0"/>
-          <p:cNvSpPr/>
-          <p:nvPr/>
-        </p:nvSpPr>
-        <p:spPr>
-          <a:xfrm>
-            <a:off x="0" y="0"/>
-            <a:ext cx="274320" cy="6858000"/>
+          <p:cNvPr id="2" name="Text 0"/>
+          <p:cNvSpPr/>
+          <p:nvPr/>
+        </p:nvSpPr>
+        <p:spPr>
+          <a:xfrm>
+            <a:off x="566928" y="411480"/>
+            <a:ext cx="11055096" cy="685800"/>
+          </a:xfrm>
+          <a:prstGeom prst="rect">
+            <a:avLst/>
+          </a:prstGeom>
+          <a:noFill/>
+          <a:ln/>
+        </p:spPr>
+        <p:txBody>
+          <a:bodyPr wrap="square" rtlCol="0" anchor="ctr"/>
+          <a:lstStyle/>
+          <a:p>
+            <a:pPr indent="0" marL="0">
+              <a:buNone/>
+            </a:pPr>
+            <a:r>
+              <a:rPr lang="en-US" sz="3200" b="1" dirty="0">
+                <a:solidFill>
+                  <a:srgbClr val="1F4C86"/>
+                </a:solidFill>
+                <a:latin typeface="Trebuchet MS" pitchFamily="34" charset="0"/>
+                <a:ea typeface="Trebuchet MS" pitchFamily="34" charset="-122"/>
+                <a:cs typeface="Trebuchet MS" pitchFamily="34" charset="-120"/>
+              </a:rPr>
+              <a:t>Acknowledgements</a:t>
+            </a:r>
+            <a:endParaRPr lang="en-US" sz="3200" dirty="0"/>
+          </a:p>
+        </p:txBody>
+      </p:sp>
+      <p:sp>
+        <p:nvSpPr>
+          <p:cNvPr id="3" name="Shape 1"/>
+          <p:cNvSpPr/>
+          <p:nvPr/>
+        </p:nvSpPr>
+        <p:spPr>
+          <a:xfrm>
+            <a:off x="566928" y="1152144"/>
+            <a:ext cx="1920240" cy="50292"/>
           </a:xfrm>
           <a:prstGeom prst="rect">
             <a:avLst/>
@@ -19631,14 +19734,54 @@
       </p:sp>
       <p:sp>
         <p:nvSpPr>
-          <p:cNvPr id="3" name="Text 1"/>
-          <p:cNvSpPr/>
-          <p:nvPr/>
-        </p:nvSpPr>
-        <p:spPr>
-          <a:xfrm>
-            <a:off x="960120" y="777240"/>
-            <a:ext cx="10268712" cy="822960"/>
+          <p:cNvPr id="4" name="Shape 2"/>
+          <p:cNvSpPr/>
+          <p:nvPr/>
+        </p:nvSpPr>
+        <p:spPr>
+          <a:xfrm>
+            <a:off x="566928" y="1572768"/>
+            <a:ext cx="11055096" cy="2240280"/>
+          </a:xfrm>
+          <a:prstGeom prst="rect">
+            <a:avLst/>
+          </a:prstGeom>
+          <a:solidFill>
+            <a:srgbClr val="E8F0FA"/>
+          </a:solidFill>
+          <a:ln/>
+        </p:spPr>
+      </p:sp>
+      <p:sp>
+        <p:nvSpPr>
+          <p:cNvPr id="5" name="Shape 3"/>
+          <p:cNvSpPr/>
+          <p:nvPr/>
+        </p:nvSpPr>
+        <p:spPr>
+          <a:xfrm>
+            <a:off x="566928" y="1572768"/>
+            <a:ext cx="146304" cy="2240280"/>
+          </a:xfrm>
+          <a:prstGeom prst="rect">
+            <a:avLst/>
+          </a:prstGeom>
+          <a:solidFill>
+            <a:srgbClr val="3674C1"/>
+          </a:solidFill>
+          <a:ln/>
+        </p:spPr>
+      </p:sp>
+      <p:sp>
+        <p:nvSpPr>
+          <p:cNvPr id="6" name="Text 4"/>
+          <p:cNvSpPr/>
+          <p:nvPr/>
+        </p:nvSpPr>
+        <p:spPr>
+          <a:xfrm>
+            <a:off x="978408" y="1737360"/>
+            <a:ext cx="10232136" cy="365760"/>
           </a:xfrm>
           <a:prstGeom prst="rect">
             <a:avLst/>
@@ -19654,7 +19797,46 @@
               <a:buNone/>
             </a:pPr>
             <a:r>
-              <a:rPr lang="en-US" sz="4000" b="1" dirty="0">
+              <a:rPr lang="en-US" sz="1600" b="1" spc="150" kern="0" dirty="0">
+                <a:solidFill>
+                  <a:srgbClr val="3674C1"/>
+                </a:solidFill>
+                <a:latin typeface="Calibri" pitchFamily="34" charset="0"/>
+                <a:ea typeface="Calibri" pitchFamily="34" charset="-122"/>
+                <a:cs typeface="Calibri" pitchFamily="34" charset="-120"/>
+              </a:rPr>
+              <a:t>Sample data</a:t>
+            </a:r>
+            <a:endParaRPr lang="en-US" sz="1600" dirty="0"/>
+          </a:p>
+        </p:txBody>
+      </p:sp>
+      <p:sp>
+        <p:nvSpPr>
+          <p:cNvPr id="7" name="Text 5"/>
+          <p:cNvSpPr/>
+          <p:nvPr/>
+        </p:nvSpPr>
+        <p:spPr>
+          <a:xfrm>
+            <a:off x="978408" y="2103120"/>
+            <a:ext cx="10232136" cy="566928"/>
+          </a:xfrm>
+          <a:prstGeom prst="rect">
+            <a:avLst/>
+          </a:prstGeom>
+          <a:noFill/>
+          <a:ln/>
+        </p:spPr>
+        <p:txBody>
+          <a:bodyPr wrap="square" rtlCol="0" anchor="ctr"/>
+          <a:lstStyle/>
+          <a:p>
+            <a:pPr indent="0" marL="0">
+              <a:buNone/>
+            </a:pPr>
+            <a:r>
+              <a:rPr lang="en-US" sz="3200" b="1" dirty="0">
                 <a:solidFill>
                   <a:srgbClr val="1F4C86"/>
                 </a:solidFill>
@@ -19662,42 +19844,22 @@
                 <a:ea typeface="Trebuchet MS" pitchFamily="34" charset="-122"/>
                 <a:cs typeface="Trebuchet MS" pitchFamily="34" charset="-120"/>
               </a:rPr>
-              <a:t>Everything is here</a:t>
-            </a:r>
-            <a:endParaRPr lang="en-US" sz="4000" dirty="0"/>
-          </a:p>
-        </p:txBody>
-      </p:sp>
-      <p:sp>
-        <p:nvSpPr>
-          <p:cNvPr id="4" name="Shape 2"/>
-          <p:cNvSpPr/>
-          <p:nvPr/>
-        </p:nvSpPr>
-        <p:spPr>
-          <a:xfrm>
-            <a:off x="960120" y="1691640"/>
-            <a:ext cx="8686800" cy="713232"/>
-          </a:xfrm>
-          <a:prstGeom prst="rect">
-            <a:avLst/>
-          </a:prstGeom>
-          <a:solidFill>
-            <a:srgbClr val="E8F0FA"/>
-          </a:solidFill>
-          <a:ln/>
-        </p:spPr>
-      </p:sp>
-      <p:sp>
-        <p:nvSpPr>
-          <p:cNvPr id="5" name="Text 3"/>
-          <p:cNvSpPr/>
-          <p:nvPr/>
-        </p:nvSpPr>
-        <p:spPr>
-          <a:xfrm>
-            <a:off x="1188720" y="1691640"/>
-            <a:ext cx="8412480" cy="713232"/>
+              <a:t>Sara McArdle  ·  Zbigniew Mikulski</a:t>
+            </a:r>
+            <a:endParaRPr lang="en-US" sz="3200" dirty="0"/>
+          </a:p>
+        </p:txBody>
+      </p:sp>
+      <p:sp>
+        <p:nvSpPr>
+          <p:cNvPr id="8" name="Text 6"/>
+          <p:cNvSpPr/>
+          <p:nvPr/>
+        </p:nvSpPr>
+        <p:spPr>
+          <a:xfrm>
+            <a:off x="978408" y="2670048"/>
+            <a:ext cx="10232136" cy="384048"/>
           </a:xfrm>
           <a:prstGeom prst="rect">
             <a:avLst/>
@@ -19713,30 +19875,92 @@
               <a:buNone/>
             </a:pPr>
             <a:r>
-              <a:rPr lang="en-US" sz="2200" b="1" dirty="0">
-                <a:solidFill>
-                  <a:srgbClr val="1F4C86"/>
-                </a:solidFill>
-                <a:latin typeface="Calibri" pitchFamily="34" charset="0"/>
-                <a:ea typeface="Calibri" pitchFamily="34" charset="-122"/>
-                <a:cs typeface="Calibri" pitchFamily="34" charset="-120"/>
-              </a:rPr>
-              <a:t>michaelsnelson.github.io/BINA-I2K-2026-QuPath-Extensions</a:t>
-            </a:r>
-            <a:endParaRPr lang="en-US" sz="2200" dirty="0"/>
-          </a:p>
-        </p:txBody>
-      </p:sp>
-      <p:sp>
-        <p:nvSpPr>
-          <p:cNvPr id="6" name="Text 4"/>
-          <p:cNvSpPr/>
-          <p:nvPr/>
-        </p:nvSpPr>
-        <p:spPr>
-          <a:xfrm>
-            <a:off x="960120" y="2697480"/>
-            <a:ext cx="9811512" cy="2560320"/>
+              <a:rPr lang="en-US" sz="2100" dirty="0">
+                <a:solidFill>
+                  <a:srgbClr val="1F2933"/>
+                </a:solidFill>
+                <a:latin typeface="Calibri" pitchFamily="34" charset="0"/>
+                <a:ea typeface="Calibri" pitchFamily="34" charset="-122"/>
+                <a:cs typeface="Calibri" pitchFamily="34" charset="-120"/>
+              </a:rPr>
+              <a:t>La Jolla Institute for Immunology</a:t>
+            </a:r>
+            <a:endParaRPr lang="en-US" sz="2100" dirty="0"/>
+          </a:p>
+        </p:txBody>
+      </p:sp>
+      <p:sp>
+        <p:nvSpPr>
+          <p:cNvPr id="9" name="Text 7"/>
+          <p:cNvSpPr/>
+          <p:nvPr/>
+        </p:nvSpPr>
+        <p:spPr>
+          <a:xfrm>
+            <a:off x="978408" y="3054096"/>
+            <a:ext cx="10232136" cy="731520"/>
+          </a:xfrm>
+          <a:prstGeom prst="rect">
+            <a:avLst/>
+          </a:prstGeom>
+          <a:noFill/>
+          <a:ln/>
+        </p:spPr>
+        <p:txBody>
+          <a:bodyPr wrap="square" rtlCol="0" anchor="ctr"/>
+          <a:lstStyle/>
+          <a:p>
+            <a:pPr indent="0" marL="0">
+              <a:lnSpc>
+                <a:spcPct val="110000"/>
+              </a:lnSpc>
+              <a:buNone/>
+            </a:pPr>
+            <a:r>
+              <a:rPr lang="en-US" sz="1700" i="1" dirty="0">
+                <a:solidFill>
+                  <a:srgbClr val="5A6675"/>
+                </a:solidFill>
+                <a:latin typeface="Calibri" pitchFamily="34" charset="0"/>
+                <a:ea typeface="Calibri" pitchFamily="34" charset="-122"/>
+                <a:cs typeface="Calibri" pitchFamily="34" charset="-120"/>
+              </a:rPr>
+              <a:t>They provided the majority of the test and demonstration data behind almost every exercise you will see today.</a:t>
+            </a:r>
+            <a:endParaRPr lang="en-US" sz="1700" dirty="0"/>
+          </a:p>
+          <a:p>
+            <a:pPr indent="0" marL="0">
+              <a:lnSpc>
+                <a:spcPct val="110000"/>
+              </a:lnSpc>
+              <a:buNone/>
+            </a:pPr>
+            <a:r>
+              <a:rPr lang="en-US" sz="1700" i="1" dirty="0">
+                <a:solidFill>
+                  <a:srgbClr val="5A6675"/>
+                </a:solidFill>
+                <a:latin typeface="Calibri" pitchFamily="34" charset="0"/>
+                <a:ea typeface="Calibri" pitchFamily="34" charset="-122"/>
+                <a:cs typeface="Calibri" pitchFamily="34" charset="-120"/>
+              </a:rPr>
+              <a:t>These tools could not have been built, tested, or taught without it.</a:t>
+            </a:r>
+            <a:endParaRPr lang="en-US" sz="1700" dirty="0"/>
+          </a:p>
+        </p:txBody>
+      </p:sp>
+      <p:sp>
+        <p:nvSpPr>
+          <p:cNvPr id="10" name="Text 8"/>
+          <p:cNvSpPr/>
+          <p:nvPr/>
+        </p:nvSpPr>
+        <p:spPr>
+          <a:xfrm>
+            <a:off x="566928" y="3977640"/>
+            <a:ext cx="11055096" cy="2103120"/>
           </a:xfrm>
           <a:prstGeom prst="rect">
             <a:avLst/>
@@ -19755,6 +19979,270 @@
               <a:buNone/>
             </a:pPr>
             <a:r>
+              <a:rPr lang="en-US" sz="1700" dirty="0">
+                <a:solidFill>
+                  <a:srgbClr val="1F2933"/>
+                </a:solidFill>
+                <a:latin typeface="Calibri" pitchFamily="34" charset="0"/>
+                <a:ea typeface="Calibri" pitchFamily="34" charset="-122"/>
+                <a:cs typeface="Calibri" pitchFamily="34" charset="-120"/>
+              </a:rPr>
+              <a:t>Sara McArdle also shaped the software directly — two of these extensions began as her Groovy scripts, and her FS2K course was the model for how the workshop pages are written.
+</a:t>
+            </a:r>
+            <a:pPr indent="0" marL="0">
+              <a:spcAft>
+                <a:spcPts val="1000"/>
+              </a:spcAft>
+              <a:buNone/>
+            </a:pPr>
+            <a:r>
+              <a:rPr lang="en-US" sz="1700" dirty="0">
+                <a:solidFill>
+                  <a:srgbClr val="1F2933"/>
+                </a:solidFill>
+                <a:latin typeface="Calibri" pitchFamily="34" charset="0"/>
+                <a:ea typeface="Calibri" pitchFamily="34" charset="-122"/>
+                <a:cs typeface="Calibri" pitchFamily="34" charset="-120"/>
+              </a:rPr>
+              <a:t>Kristin Gallick, whose concept and scripts the Confusion Matrix grew from.  ·  Pete Bankhead and the QuPath team.  ·  CT-FIRE, CurveAlign, TACS and TWOMBLI for the fibre work.  ·  CytoMAP and QuBaLab for bringing clustering into QuPath.  ·  QUAREP-LiMi for the reporting standards.  ·  The image.sc community, where several of these features were first requested.
+</a:t>
+            </a:r>
+            <a:pPr indent="0" marL="0">
+              <a:buNone/>
+            </a:pPr>
+            <a:r>
+              <a:rPr lang="en-US" sz="1700" b="1" dirty="0">
+                <a:solidFill>
+                  <a:srgbClr val="1F4C86"/>
+                </a:solidFill>
+                <a:latin typeface="Calibri" pitchFamily="34" charset="0"/>
+                <a:ea typeface="Calibri" pitchFamily="34" charset="-122"/>
+                <a:cs typeface="Calibri" pitchFamily="34" charset="-120"/>
+              </a:rPr>
+              <a:t>Full credits: michaelsnelson.github.io/BINA-I2K-2026-QuPath-Extensions/docs/acknowledgements.html</a:t>
+            </a:r>
+            <a:endParaRPr lang="en-US" sz="1700" dirty="0"/>
+          </a:p>
+        </p:txBody>
+      </p:sp>
+      <p:sp>
+        <p:nvSpPr>
+          <p:cNvPr id="11" name="Text 9"/>
+          <p:cNvSpPr/>
+          <p:nvPr/>
+        </p:nvSpPr>
+        <p:spPr>
+          <a:xfrm>
+            <a:off x="11274552" y="6291072"/>
+            <a:ext cx="457200" cy="310896"/>
+          </a:xfrm>
+          <a:prstGeom prst="rect">
+            <a:avLst/>
+          </a:prstGeom>
+          <a:noFill/>
+          <a:ln/>
+        </p:spPr>
+        <p:txBody>
+          <a:bodyPr wrap="square" rtlCol="0" anchor="ctr"/>
+          <a:lstStyle/>
+          <a:p>
+            <a:pPr algn="r" indent="0" marL="0">
+              <a:buNone/>
+            </a:pPr>
+            <a:r>
+              <a:rPr lang="en-US" sz="1400" dirty="0">
+                <a:solidFill>
+                  <a:srgbClr val="A8B2BF"/>
+                </a:solidFill>
+                <a:latin typeface="Calibri" pitchFamily="34" charset="0"/>
+                <a:ea typeface="Calibri" pitchFamily="34" charset="-122"/>
+                <a:cs typeface="Calibri" pitchFamily="34" charset="-120"/>
+              </a:rPr>
+              <a:t>50</a:t>
+            </a:r>
+            <a:endParaRPr lang="en-US" sz="1400" dirty="0"/>
+          </a:p>
+        </p:txBody>
+      </p:sp>
+    </p:spTree>
+  </p:cSld>
+  <p:clrMapOvr>
+    <a:masterClrMapping/>
+  </p:clrMapOvr>
+</p:sld>
+</file>
+
+<file path=ppt/slides/slide51.xml><?xml version="1.0" encoding="utf-8"?>
+<p:sld xmlns:a="http://schemas.openxmlformats.org/drawingml/2006/main" xmlns:r="http://schemas.openxmlformats.org/officeDocument/2006/relationships" xmlns:p="http://schemas.openxmlformats.org/presentationml/2006/main">
+  <p:cSld name="Slide 51">
+    <p:bg>
+      <p:bgPr>
+        <a:solidFill>
+          <a:srgbClr val="FFFFFF"/>
+        </a:solidFill>
+      </p:bgPr>
+    </p:bg>
+    <p:spTree>
+      <p:nvGrpSpPr>
+        <p:cNvPr id="1" name=""/>
+        <p:cNvGrpSpPr/>
+        <p:nvPr/>
+      </p:nvGrpSpPr>
+      <p:grpSpPr>
+        <a:xfrm>
+          <a:off x="0" y="0"/>
+          <a:ext cx="0" cy="0"/>
+          <a:chOff x="0" y="0"/>
+          <a:chExt cx="0" cy="0"/>
+        </a:xfrm>
+      </p:grpSpPr>
+      <p:sp>
+        <p:nvSpPr>
+          <p:cNvPr id="2" name="Shape 0"/>
+          <p:cNvSpPr/>
+          <p:nvPr/>
+        </p:nvSpPr>
+        <p:spPr>
+          <a:xfrm>
+            <a:off x="0" y="0"/>
+            <a:ext cx="274320" cy="6858000"/>
+          </a:xfrm>
+          <a:prstGeom prst="rect">
+            <a:avLst/>
+          </a:prstGeom>
+          <a:solidFill>
+            <a:srgbClr val="3674C1"/>
+          </a:solidFill>
+          <a:ln/>
+        </p:spPr>
+      </p:sp>
+      <p:sp>
+        <p:nvSpPr>
+          <p:cNvPr id="3" name="Text 1"/>
+          <p:cNvSpPr/>
+          <p:nvPr/>
+        </p:nvSpPr>
+        <p:spPr>
+          <a:xfrm>
+            <a:off x="960120" y="777240"/>
+            <a:ext cx="10268712" cy="822960"/>
+          </a:xfrm>
+          <a:prstGeom prst="rect">
+            <a:avLst/>
+          </a:prstGeom>
+          <a:noFill/>
+          <a:ln/>
+        </p:spPr>
+        <p:txBody>
+          <a:bodyPr wrap="square" rtlCol="0" anchor="ctr"/>
+          <a:lstStyle/>
+          <a:p>
+            <a:pPr indent="0" marL="0">
+              <a:buNone/>
+            </a:pPr>
+            <a:r>
+              <a:rPr lang="en-US" sz="4000" b="1" dirty="0">
+                <a:solidFill>
+                  <a:srgbClr val="1F4C86"/>
+                </a:solidFill>
+                <a:latin typeface="Trebuchet MS" pitchFamily="34" charset="0"/>
+                <a:ea typeface="Trebuchet MS" pitchFamily="34" charset="-122"/>
+                <a:cs typeface="Trebuchet MS" pitchFamily="34" charset="-120"/>
+              </a:rPr>
+              <a:t>Everything is here</a:t>
+            </a:r>
+            <a:endParaRPr lang="en-US" sz="4000" dirty="0"/>
+          </a:p>
+        </p:txBody>
+      </p:sp>
+      <p:sp>
+        <p:nvSpPr>
+          <p:cNvPr id="4" name="Shape 2"/>
+          <p:cNvSpPr/>
+          <p:nvPr/>
+        </p:nvSpPr>
+        <p:spPr>
+          <a:xfrm>
+            <a:off x="960120" y="1691640"/>
+            <a:ext cx="8686800" cy="713232"/>
+          </a:xfrm>
+          <a:prstGeom prst="rect">
+            <a:avLst/>
+          </a:prstGeom>
+          <a:solidFill>
+            <a:srgbClr val="E8F0FA"/>
+          </a:solidFill>
+          <a:ln/>
+        </p:spPr>
+      </p:sp>
+      <p:sp>
+        <p:nvSpPr>
+          <p:cNvPr id="5" name="Text 3"/>
+          <p:cNvSpPr/>
+          <p:nvPr/>
+        </p:nvSpPr>
+        <p:spPr>
+          <a:xfrm>
+            <a:off x="1188720" y="1691640"/>
+            <a:ext cx="8412480" cy="713232"/>
+          </a:xfrm>
+          <a:prstGeom prst="rect">
+            <a:avLst/>
+          </a:prstGeom>
+          <a:noFill/>
+          <a:ln/>
+        </p:spPr>
+        <p:txBody>
+          <a:bodyPr wrap="square" rtlCol="0" anchor="ctr"/>
+          <a:lstStyle/>
+          <a:p>
+            <a:pPr indent="0" marL="0">
+              <a:buNone/>
+            </a:pPr>
+            <a:r>
+              <a:rPr lang="en-US" sz="2200" b="1" dirty="0">
+                <a:solidFill>
+                  <a:srgbClr val="1F4C86"/>
+                </a:solidFill>
+                <a:latin typeface="Calibri" pitchFamily="34" charset="0"/>
+                <a:ea typeface="Calibri" pitchFamily="34" charset="-122"/>
+                <a:cs typeface="Calibri" pitchFamily="34" charset="-120"/>
+              </a:rPr>
+              <a:t>michaelsnelson.github.io/BINA-I2K-2026-QuPath-Extensions</a:t>
+            </a:r>
+            <a:endParaRPr lang="en-US" sz="2200" dirty="0"/>
+          </a:p>
+        </p:txBody>
+      </p:sp>
+      <p:sp>
+        <p:nvSpPr>
+          <p:cNvPr id="6" name="Text 4"/>
+          <p:cNvSpPr/>
+          <p:nvPr/>
+        </p:nvSpPr>
+        <p:spPr>
+          <a:xfrm>
+            <a:off x="960120" y="2697480"/>
+            <a:ext cx="9811512" cy="2560320"/>
+          </a:xfrm>
+          <a:prstGeom prst="rect">
+            <a:avLst/>
+          </a:prstGeom>
+          <a:noFill/>
+          <a:ln/>
+        </p:spPr>
+        <p:txBody>
+          <a:bodyPr wrap="square" rtlCol="0" anchor="t"/>
+          <a:lstStyle/>
+          <a:p>
+            <a:pPr indent="0" marL="0">
+              <a:spcAft>
+                <a:spcPts val="1000"/>
+              </a:spcAft>
+              <a:buNone/>
+            </a:pPr>
+            <a:r>
               <a:rPr lang="en-US" sz="1900" dirty="0">
                 <a:solidFill>
                   <a:srgbClr val="1F2933"/>
@@ -19949,7 +20437,7 @@
                 <a:ea typeface="Calibri" pitchFamily="34" charset="-122"/>
                 <a:cs typeface="Calibri" pitchFamily="34" charset="-120"/>
               </a:rPr>
-              <a:t>50</a:t>
+              <a:t>51</a:t>
             </a:r>
             <a:endParaRPr lang="en-US" sz="1400" dirty="0"/>
           </a:p>

--- a/I2K_2026_QuPath_Extensions.pptx
+++ b/I2K_2026_QuPath_Extensions.pptx
@@ -55,10 +55,9 @@
     <p:sldId id="303" r:id="rId49"/>
     <p:sldId id="304" r:id="rId50"/>
     <p:sldId id="305" r:id="rId51"/>
-    <p:sldId id="306" r:id="rId52"/>
   </p:sldIdLst>
   <p:notesMasterIdLst>
-    <p:notesMasterId r:id="rId53"/>
+    <p:notesMasterId r:id="rId52"/>
   </p:notesMasterIdLst>
   <p:sldSz cx="12192000" cy="6858000"/>
   <p:notesSz cx="6858000" cy="12192000"/>
@@ -4536,94 +4535,6 @@
             <a:fld id="{F7021451-1387-4CA6-816F-3879F97B5CBC}" type="slidenum">
               <a:rPr lang="en-US"/>
               <a:t>50</a:t>
-            </a:fld>
-            <a:endParaRPr lang="en-US"/>
-          </a:p>
-        </p:txBody>
-      </p:sp>
-    </p:spTree>
-    <p:extLst>
-      <p:ext uri="{BB962C8B-B14F-4D97-AF65-F5344CB8AC3E}">
-        <p14:creationId xmlns:p14="http://schemas.microsoft.com/office/powerpoint/2010/main" val="1024086991"/>
-      </p:ext>
-    </p:extLst>
-  </p:cSld>
-  <p:clrMapOvr>
-    <a:masterClrMapping/>
-  </p:clrMapOvr>
-</p:notes>
-</file>
-
-<file path=ppt/notesSlides/notesSlide51.xml><?xml version="1.0" encoding="utf-8"?>
-<p:notes xmlns:a="http://schemas.openxmlformats.org/drawingml/2006/main" xmlns:r="http://schemas.openxmlformats.org/officeDocument/2006/relationships" xmlns:p="http://schemas.openxmlformats.org/presentationml/2006/main">
-  <p:cSld>
-    <p:spTree>
-      <p:nvGrpSpPr>
-        <p:cNvPr id="1" name=""/>
-        <p:cNvGrpSpPr/>
-        <p:nvPr/>
-      </p:nvGrpSpPr>
-      <p:grpSpPr>
-        <a:xfrm>
-          <a:off x="0" y="0"/>
-          <a:ext cx="0" cy="0"/>
-          <a:chOff x="0" y="0"/>
-          <a:chExt cx="0" cy="0"/>
-        </a:xfrm>
-      </p:grpSpPr>
-      <p:sp>
-        <p:nvSpPr>
-          <p:cNvPr id="2" name="Slide Image Placeholder 1"/>
-          <p:cNvSpPr>
-            <a:spLocks noGrp="1" noRot="1" noChangeAspect="1"/>
-          </p:cNvSpPr>
-          <p:nvPr>
-            <p:ph type="sldImg"/>
-          </p:nvPr>
-        </p:nvSpPr>
-        <p:spPr/>
-      </p:sp>
-      <p:sp>
-        <p:nvSpPr>
-          <p:cNvPr id="3" name="Notes Placeholder 2"/>
-          <p:cNvSpPr>
-            <a:spLocks noGrp="1"/>
-          </p:cNvSpPr>
-          <p:nvPr>
-            <p:ph type="body" idx="1"/>
-          </p:nvPr>
-        </p:nvSpPr>
-        <p:spPr/>
-        <p:txBody>
-          <a:bodyPr/>
-          <a:lstStyle/>
-          <a:p>
-            <a:r>
-              <a:rPr lang="en-US" dirty="0"/>
-              <a:t/>
-            </a:r>
-            <a:endParaRPr lang="en-US" dirty="0"/>
-          </a:p>
-        </p:txBody>
-      </p:sp>
-      <p:sp>
-        <p:nvSpPr>
-          <p:cNvPr id="4" name="Slide Number Placeholder 3"/>
-          <p:cNvSpPr>
-            <a:spLocks noGrp="1"/>
-          </p:cNvSpPr>
-          <p:nvPr>
-            <p:ph type="sldNum" sz="quarter" idx="10"/>
-          </p:nvPr>
-        </p:nvSpPr>
-        <p:spPr/>
-        <p:txBody>
-          <a:bodyPr/>
-          <a:lstStyle/>
-          <a:p>
-            <a:fld id="{F7021451-1387-4CA6-816F-3879F97B5CBC}" type="slidenum">
-              <a:rPr lang="en-US"/>
-              <a:t>51</a:t>
             </a:fld>
             <a:endParaRPr lang="en-US"/>
           </a:p>
@@ -7835,7 +7746,7 @@
                 <a:ea typeface="Trebuchet MS" pitchFamily="34" charset="-122"/>
                 <a:cs typeface="Trebuchet MS" pitchFamily="34" charset="-120"/>
               </a:rPr>
-              <a:t>Channel Names Viewer</a:t>
+              <a:t>Two you will see properly elsewhere</a:t>
             </a:r>
             <a:endParaRPr lang="en-US" sz="3000" dirty="0"/>
           </a:p>
@@ -7869,8 +7780,47 @@
         </p:nvSpPr>
         <p:spPr>
           <a:xfrm>
-            <a:off x="640080" y="1481328"/>
-            <a:ext cx="10963656" cy="4553712"/>
+            <a:off x="566928" y="1243584"/>
+            <a:ext cx="11055096" cy="384048"/>
+          </a:xfrm>
+          <a:prstGeom prst="rect">
+            <a:avLst/>
+          </a:prstGeom>
+          <a:noFill/>
+          <a:ln/>
+        </p:spPr>
+        <p:txBody>
+          <a:bodyPr wrap="square" rtlCol="0" anchor="ctr"/>
+          <a:lstStyle/>
+          <a:p>
+            <a:pPr indent="0" marL="0">
+              <a:buNone/>
+            </a:pPr>
+            <a:r>
+              <a:rPr lang="en-US" sz="1700" i="1" dirty="0">
+                <a:solidFill>
+                  <a:srgbClr val="5A6675"/>
+                </a:solidFill>
+                <a:latin typeface="Calibri" pitchFamily="34" charset="0"/>
+                <a:ea typeface="Calibri" pitchFamily="34" charset="-122"/>
+                <a:cs typeface="Calibri" pitchFamily="34" charset="-120"/>
+              </a:rPr>
+              <a:t>Sara McArdle is covering these two — go and see them done by the person whose scripts they are.</a:t>
+            </a:r>
+            <a:endParaRPr lang="en-US" sz="1700" dirty="0"/>
+          </a:p>
+        </p:txBody>
+      </p:sp>
+      <p:sp>
+        <p:nvSpPr>
+          <p:cNvPr id="5" name="Text 3"/>
+          <p:cNvSpPr/>
+          <p:nvPr/>
+        </p:nvSpPr>
+        <p:spPr>
+          <a:xfrm>
+            <a:off x="640080" y="1755648"/>
+            <a:ext cx="10963656" cy="4279392"/>
           </a:xfrm>
           <a:prstGeom prst="rect">
             <a:avLst/>
@@ -7901,7 +7851,7 @@
                 <a:ea typeface="Calibri" pitchFamily="34" charset="-122"/>
                 <a:cs typeface="Calibri" pitchFamily="34" charset="-120"/>
               </a:rPr>
-              <a:t>"Which one is the green one?" — answered, permanently</a:t>
+              <a:t>Channel Names Viewer — a floating, colour-coded legend of the selected channels. "Which one is the green one?", answered permanently</a:t>
             </a:r>
             <a:endParaRPr lang="en-US" sz="2000" dirty="0"/>
           </a:p>
@@ -7925,7 +7875,7 @@
                 <a:ea typeface="Calibri" pitchFamily="34" charset="-122"/>
                 <a:cs typeface="Calibri" pitchFamily="34" charset="-120"/>
               </a:rPr>
-              <a:t>A floating legend of the selected channels, each drawn in its display colour</a:t>
+              <a:t>Classify Object Subset — run a saved classifier on a chosen subset, by class, measurement or selection, with a live count before you commit</a:t>
             </a:r>
             <a:endParaRPr lang="en-US" sz="2000" dirty="0"/>
           </a:p>
@@ -7949,7 +7899,7 @@
                 <a:ea typeface="Calibri" pitchFamily="34" charset="-122"/>
                 <a:cs typeface="Calibri" pitchFamily="34" charset="-120"/>
               </a:rPr>
-              <a:t>Updates live as you toggle channels; text scales as you resize the window</a:t>
+              <a:t>Both began as Sara McArdle’s Groovy scripts, and Sara is presenting them in her session</a:t>
             </a:r>
             <a:endParaRPr lang="en-US" sz="2000" dirty="0"/>
           </a:p>
@@ -7973,7 +7923,7 @@
                 <a:ea typeface="Calibri" pitchFamily="34" charset="-122"/>
                 <a:cs typeface="Calibri" pitchFamily="34" charset="-120"/>
               </a:rPr>
-              <a:t>Shrink it away on a laptop, or make it large enough to read from the back of a room</a:t>
+              <a:t>So: a mention here rather than the same demo twice — but both install in seconds and both have a full walkthrough on the site</a:t>
             </a:r>
             <a:endParaRPr lang="en-US" sz="2000" dirty="0"/>
           </a:p>
@@ -7981,7 +7931,7 @@
       </p:sp>
       <p:sp>
         <p:nvSpPr>
-          <p:cNvPr id="5" name="Shape 3"/>
+          <p:cNvPr id="6" name="Shape 4"/>
           <p:cNvSpPr/>
           <p:nvPr/>
         </p:nvSpPr>
@@ -8006,7 +7956,7 @@
       </p:sp>
       <p:sp>
         <p:nvSpPr>
-          <p:cNvPr id="6" name="Text 4"/>
+          <p:cNvPr id="7" name="Text 5"/>
           <p:cNvSpPr/>
           <p:nvPr/>
         </p:nvSpPr>
@@ -8037,7 +7987,7 @@
                 <a:ea typeface="Calibri" pitchFamily="34" charset="-122"/>
                 <a:cs typeface="Calibri" pitchFamily="34" charset="-120"/>
               </a:rPr>
-              <a:t>Five minutes to install. Useful every time you present a multiplex image.</a:t>
+              <a:t>Nothing stops you installing them today. This is a division of labour, not a barrier.</a:t>
             </a:r>
             <a:endParaRPr lang="en-US" sz="1600" dirty="0"/>
           </a:p>
@@ -8045,7 +7995,7 @@
       </p:sp>
       <p:sp>
         <p:nvSpPr>
-          <p:cNvPr id="7" name="Text 5"/>
+          <p:cNvPr id="8" name="Text 6"/>
           <p:cNvSpPr/>
           <p:nvPr/>
         </p:nvSpPr>
@@ -8837,7 +8787,7 @@
                 <a:ea typeface="Trebuchet MS" pitchFamily="34" charset="-122"/>
                 <a:cs typeface="Trebuchet MS" pitchFamily="34" charset="-120"/>
               </a:rPr>
-              <a:t>▶  LIVE</a:t>
+              <a:t>▶  LIVE  ·  10 MIN</a:t>
             </a:r>
             <a:endParaRPr lang="en-US" sz="1600" dirty="0"/>
           </a:p>
@@ -8876,7 +8826,7 @@
                 <a:ea typeface="Trebuchet MS" pitchFamily="34" charset="-122"/>
                 <a:cs typeface="Trebuchet MS" pitchFamily="34" charset="-120"/>
               </a:rPr>
-              <a:t>Annotation, live</a:t>
+              <a:t>Both wands, live</a:t>
             </a:r>
             <a:endParaRPr lang="en-US" sz="3200" dirty="0"/>
           </a:p>
@@ -8939,7 +8889,7 @@
                 <a:ea typeface="Calibri" pitchFamily="34" charset="-122"/>
                 <a:cs typeface="Calibri" pitchFamily="34" charset="-120"/>
               </a:rPr>
-              <a:t>Wand a structure, then auto-tune from a hand-drawn example and do it again</a:t>
+              <a:t>Wizard Wand: wand a structure, then auto-tune from a hand-drawn example and do it again</a:t>
             </a:r>
             <a:endParaRPr lang="en-US" sz="2000" dirty="0"/>
           </a:p>
@@ -8960,7 +8910,7 @@
                 <a:ea typeface="Calibri" pitchFamily="34" charset="-122"/>
                 <a:cs typeface="Calibri" pitchFamily="34" charset="-120"/>
               </a:rPr>
-              <a:t>Reshape a polyline: push a section out, smooth a noisy stretch, cut it in two</a:t>
+              <a:t>Watch a selection grow on its own instead of dragging to cover it</a:t>
             </a:r>
             <a:endParaRPr lang="en-US" sz="2000" dirty="0"/>
           </a:p>
@@ -8981,7 +8931,49 @@
                 <a:ea typeface="Calibri" pitchFamily="34" charset="-122"/>
                 <a:cs typeface="Calibri" pitchFamily="34" charset="-120"/>
               </a:rPr>
-              <a:t>Compare the boundary against the built-in tools</a:t>
+              <a:t>Polyline Wand: push a traced boundary outward, smooth a noisy stretch, erase back from an endpoint</a:t>
+            </a:r>
+            <a:endParaRPr lang="en-US" sz="2000" dirty="0"/>
+          </a:p>
+          <a:p>
+            <a:pPr marL="342900" indent="-342900">
+              <a:spcAft>
+                <a:spcPts val="1400"/>
+              </a:spcAft>
+              <a:buSzPct val="100000"/>
+              <a:buChar char="•"/>
+            </a:pPr>
+            <a:r>
+              <a:rPr lang="en-US" sz="2000" dirty="0">
+                <a:solidFill>
+                  <a:srgbClr val="1F2933"/>
+                </a:solidFill>
+                <a:latin typeface="Calibri" pitchFamily="34" charset="0"/>
+                <a:ea typeface="Calibri" pitchFamily="34" charset="-122"/>
+                <a:cs typeface="Calibri" pitchFamily="34" charset="-120"/>
+              </a:rPr>
+              <a:t>Scissors mode — cut one polyline in two, both halves keeping class, name and colour</a:t>
+            </a:r>
+            <a:endParaRPr lang="en-US" sz="2000" dirty="0"/>
+          </a:p>
+          <a:p>
+            <a:pPr marL="342900" indent="-342900">
+              <a:spcAft>
+                <a:spcPts val="1400"/>
+              </a:spcAft>
+              <a:buSzPct val="100000"/>
+              <a:buChar char="•"/>
+            </a:pPr>
+            <a:r>
+              <a:rPr lang="en-US" sz="2000" dirty="0">
+                <a:solidFill>
+                  <a:srgbClr val="1F2933"/>
+                </a:solidFill>
+                <a:latin typeface="Calibri" pitchFamily="34" charset="0"/>
+                <a:ea typeface="Calibri" pitchFamily="34" charset="-122"/>
+                <a:cs typeface="Calibri" pitchFamily="34" charset="-120"/>
+              </a:rPr>
+              <a:t>Compare the result against the built-in tools</a:t>
             </a:r>
             <a:endParaRPr lang="en-US" sz="2000" dirty="0"/>
           </a:p>
@@ -9045,7 +9037,7 @@
                 <a:ea typeface="Calibri" pitchFamily="34" charset="-122"/>
                 <a:cs typeface="Calibri" pitchFamily="34" charset="-120"/>
               </a:rPr>
-              <a:t>About three minutes. Static screenshots follow if the live version misbehaves.</a:t>
+              <a:t>The two wands in one sitting — ten minutes. Static screenshots follow if the live version misbehaves.</a:t>
             </a:r>
             <a:endParaRPr lang="en-US" sz="1600" dirty="0"/>
           </a:p>
@@ -11807,14 +11799,54 @@
       </p:grpSpPr>
       <p:sp>
         <p:nvSpPr>
-          <p:cNvPr id="2" name="Text 0"/>
-          <p:cNvSpPr/>
-          <p:nvPr/>
-        </p:nvSpPr>
-        <p:spPr>
-          <a:xfrm>
-            <a:off x="566928" y="384048"/>
-            <a:ext cx="11055096" cy="658368"/>
+          <p:cNvPr id="2" name="Shape 0"/>
+          <p:cNvSpPr/>
+          <p:nvPr/>
+        </p:nvSpPr>
+        <p:spPr>
+          <a:xfrm>
+            <a:off x="0" y="1417320"/>
+            <a:ext cx="12188952" cy="3108960"/>
+          </a:xfrm>
+          <a:prstGeom prst="rect">
+            <a:avLst/>
+          </a:prstGeom>
+          <a:solidFill>
+            <a:srgbClr val="E8F0FA"/>
+          </a:solidFill>
+          <a:ln/>
+        </p:spPr>
+      </p:sp>
+      <p:sp>
+        <p:nvSpPr>
+          <p:cNvPr id="3" name="Shape 1"/>
+          <p:cNvSpPr/>
+          <p:nvPr/>
+        </p:nvSpPr>
+        <p:spPr>
+          <a:xfrm>
+            <a:off x="0" y="1417320"/>
+            <a:ext cx="201168" cy="3108960"/>
+          </a:xfrm>
+          <a:prstGeom prst="rect">
+            <a:avLst/>
+          </a:prstGeom>
+          <a:solidFill>
+            <a:srgbClr val="3674C1"/>
+          </a:solidFill>
+          <a:ln/>
+        </p:spPr>
+      </p:sp>
+      <p:sp>
+        <p:nvSpPr>
+          <p:cNvPr id="4" name="Text 2"/>
+          <p:cNvSpPr/>
+          <p:nvPr/>
+        </p:nvSpPr>
+        <p:spPr>
+          <a:xfrm>
+            <a:off x="566928" y="1691640"/>
+            <a:ext cx="1828800" cy="914400"/>
           </a:xfrm>
           <a:prstGeom prst="rect">
             <a:avLst/>
@@ -11830,50 +11862,30 @@
               <a:buNone/>
             </a:pPr>
             <a:r>
-              <a:rPr lang="en-US" sz="3000" b="1" dirty="0">
-                <a:solidFill>
-                  <a:srgbClr val="1F4C86"/>
+              <a:rPr lang="en-US" sz="5400" b="1" dirty="0">
+                <a:solidFill>
+                  <a:srgbClr val="3674C1"/>
                 </a:solidFill>
                 <a:latin typeface="Trebuchet MS" pitchFamily="34" charset="0"/>
                 <a:ea typeface="Trebuchet MS" pitchFamily="34" charset="-122"/>
                 <a:cs typeface="Trebuchet MS" pitchFamily="34" charset="-120"/>
               </a:rPr>
-              <a:t>Classify Object Subset</a:t>
-            </a:r>
-            <a:endParaRPr lang="en-US" sz="3000" dirty="0"/>
-          </a:p>
-        </p:txBody>
-      </p:sp>
-      <p:sp>
-        <p:nvSpPr>
-          <p:cNvPr id="3" name="Shape 1"/>
-          <p:cNvSpPr/>
-          <p:nvPr/>
-        </p:nvSpPr>
-        <p:spPr>
-          <a:xfrm>
-            <a:off x="566928" y="1097280"/>
-            <a:ext cx="1920240" cy="50292"/>
-          </a:xfrm>
-          <a:prstGeom prst="rect">
-            <a:avLst/>
-          </a:prstGeom>
-          <a:solidFill>
-            <a:srgbClr val="3674C1"/>
-          </a:solidFill>
-          <a:ln/>
-        </p:spPr>
-      </p:sp>
-      <p:sp>
-        <p:nvSpPr>
-          <p:cNvPr id="4" name="Text 2"/>
-          <p:cNvSpPr/>
-          <p:nvPr/>
-        </p:nvSpPr>
-        <p:spPr>
-          <a:xfrm>
-            <a:off x="566928" y="1243584"/>
-            <a:ext cx="11055096" cy="384048"/>
+              <a:t>05</a:t>
+            </a:r>
+            <a:endParaRPr lang="en-US" sz="5400" dirty="0"/>
+          </a:p>
+        </p:txBody>
+      </p:sp>
+      <p:sp>
+        <p:nvSpPr>
+          <p:cNvPr id="5" name="Text 3"/>
+          <p:cNvSpPr/>
+          <p:nvPr/>
+        </p:nvSpPr>
+        <p:spPr>
+          <a:xfrm>
+            <a:off x="566928" y="2606040"/>
+            <a:ext cx="11055096" cy="868680"/>
           </a:xfrm>
           <a:prstGeom prst="rect">
             <a:avLst/>
@@ -11889,30 +11901,30 @@
               <a:buNone/>
             </a:pPr>
             <a:r>
-              <a:rPr lang="en-US" sz="1700" i="1" dirty="0">
-                <a:solidFill>
-                  <a:srgbClr val="5A6675"/>
-                </a:solidFill>
-                <a:latin typeface="Calibri" pitchFamily="34" charset="0"/>
-                <a:ea typeface="Calibri" pitchFamily="34" charset="-122"/>
-                <a:cs typeface="Calibri" pitchFamily="34" charset="-120"/>
-              </a:rPr>
-              <a:t>A live count tells you how many objects you are about to change.</a:t>
-            </a:r>
-            <a:endParaRPr lang="en-US" sz="1700" dirty="0"/>
-          </a:p>
-        </p:txBody>
-      </p:sp>
-      <p:sp>
-        <p:nvSpPr>
-          <p:cNvPr id="5" name="Text 3"/>
-          <p:cNvSpPr/>
-          <p:nvPr/>
-        </p:nvSpPr>
-        <p:spPr>
-          <a:xfrm>
-            <a:off x="640080" y="1755648"/>
-            <a:ext cx="10963656" cy="4279392"/>
+              <a:rPr lang="en-US" sz="4000" b="1" dirty="0">
+                <a:solidFill>
+                  <a:srgbClr val="1F4C86"/>
+                </a:solidFill>
+                <a:latin typeface="Trebuchet MS" pitchFamily="34" charset="0"/>
+                <a:ea typeface="Trebuchet MS" pitchFamily="34" charset="-122"/>
+                <a:cs typeface="Trebuchet MS" pitchFamily="34" charset="-120"/>
+              </a:rPr>
+              <a:t>Did it actually work?</a:t>
+            </a:r>
+            <a:endParaRPr lang="en-US" sz="4000" dirty="0"/>
+          </a:p>
+        </p:txBody>
+      </p:sp>
+      <p:sp>
+        <p:nvSpPr>
+          <p:cNvPr id="6" name="Text 4"/>
+          <p:cNvSpPr/>
+          <p:nvPr/>
+        </p:nvSpPr>
+        <p:spPr>
+          <a:xfrm>
+            <a:off x="566928" y="3456432"/>
+            <a:ext cx="10140696" cy="731520"/>
           </a:xfrm>
           <a:prstGeom prst="rect">
             <a:avLst/>
@@ -11922,166 +11934,62 @@
         </p:spPr>
         <p:txBody>
           <a:bodyPr wrap="square" rtlCol="0" anchor="t"/>
-          <a:lstStyle/>
-          <a:p>
-            <a:pPr marL="342900" indent="-342900">
-              <a:lnSpc>
-                <a:spcPct val="105000"/>
-              </a:lnSpc>
-              <a:spcAft>
-                <a:spcPts val="1200"/>
-              </a:spcAft>
-              <a:buSzPct val="100000"/>
-              <a:buChar char="•"/>
-            </a:pPr>
-            <a:r>
-              <a:rPr lang="en-US" sz="2000" dirty="0">
-                <a:solidFill>
-                  <a:srgbClr val="1F2933"/>
-                </a:solidFill>
-                <a:latin typeface="Calibri" pitchFamily="34" charset="0"/>
-                <a:ea typeface="Calibri" pitchFamily="34" charset="-122"/>
-                <a:cs typeface="Calibri" pitchFamily="34" charset="-120"/>
-              </a:rPr>
-              <a:t>Run a saved classifier on a chosen subset instead of every object in the image</a:t>
-            </a:r>
-            <a:endParaRPr lang="en-US" sz="2000" dirty="0"/>
-          </a:p>
-          <a:p>
-            <a:pPr marL="342900" indent="-342900">
-              <a:lnSpc>
-                <a:spcPct val="105000"/>
-              </a:lnSpc>
-              <a:spcAft>
-                <a:spcPts val="1200"/>
-              </a:spcAft>
-              <a:buSzPct val="100000"/>
-              <a:buChar char="•"/>
-            </a:pPr>
-            <a:r>
-              <a:rPr lang="en-US" sz="2000" dirty="0">
-                <a:solidFill>
-                  <a:srgbClr val="1F2933"/>
-                </a:solidFill>
-                <a:latin typeface="Calibri" pitchFamily="34" charset="0"/>
-                <a:ea typeface="Calibri" pitchFamily="34" charset="-122"/>
-                <a:cs typeface="Calibri" pitchFamily="34" charset="-120"/>
-              </a:rPr>
-              <a:t>Pick by class, by measurement value, by what you have selected — or all three</a:t>
-            </a:r>
-            <a:endParaRPr lang="en-US" sz="2000" dirty="0"/>
-          </a:p>
-          <a:p>
-            <a:pPr marL="342900" indent="-342900">
-              <a:lnSpc>
-                <a:spcPct val="105000"/>
-              </a:lnSpc>
-              <a:spcAft>
-                <a:spcPts val="1200"/>
-              </a:spcAft>
-              <a:buSzPct val="100000"/>
-              <a:buChar char="•"/>
-            </a:pPr>
-            <a:r>
-              <a:rPr lang="en-US" sz="2000" dirty="0">
-                <a:solidFill>
-                  <a:srgbClr val="1F2933"/>
-                </a:solidFill>
-                <a:latin typeface="Calibri" pitchFamily="34" charset="0"/>
-                <a:ea typeface="Calibri" pitchFamily="34" charset="-122"/>
-                <a:cs typeface="Calibri" pitchFamily="34" charset="-120"/>
-              </a:rPr>
-              <a:t>Stack classifiers: run the second one only on what the first left unclassified</a:t>
-            </a:r>
-            <a:endParaRPr lang="en-US" sz="2000" dirty="0"/>
-          </a:p>
-          <a:p>
-            <a:pPr marL="342900" indent="-342900">
-              <a:lnSpc>
-                <a:spcPct val="105000"/>
-              </a:lnSpc>
-              <a:spcAft>
-                <a:spcPts val="1200"/>
-              </a:spcAft>
-              <a:buSzPct val="100000"/>
-              <a:buChar char="•"/>
-            </a:pPr>
-            <a:r>
-              <a:rPr lang="en-US" sz="2000" dirty="0">
-                <a:solidFill>
-                  <a:srgbClr val="1F2933"/>
-                </a:solidFill>
-                <a:latin typeface="Calibri" pitchFamily="34" charset="0"/>
-                <a:ea typeface="Calibri" pitchFamily="34" charset="-122"/>
-                <a:cs typeface="Calibri" pitchFamily="34" charset="-120"/>
-              </a:rPr>
-              <a:t>Every apply is recorded, so the session converts into a batch script</a:t>
-            </a:r>
-            <a:endParaRPr lang="en-US" sz="2000" dirty="0"/>
-          </a:p>
-        </p:txBody>
-      </p:sp>
-      <p:sp>
-        <p:nvSpPr>
-          <p:cNvPr id="6" name="Shape 4"/>
-          <p:cNvSpPr/>
-          <p:nvPr/>
-        </p:nvSpPr>
-        <p:spPr>
-          <a:xfrm>
-            <a:off x="566928" y="5650992"/>
-            <a:ext cx="11055096" cy="566928"/>
-          </a:xfrm>
-          <a:prstGeom prst="rect">
-            <a:avLst/>
-          </a:prstGeom>
-          <a:solidFill>
-            <a:srgbClr val="F4F8FD"/>
-          </a:solidFill>
-          <a:ln w="9525">
-            <a:solidFill>
-              <a:srgbClr val="3674C1"/>
-            </a:solidFill>
-            <a:prstDash val="solid"/>
-          </a:ln>
-        </p:spPr>
-      </p:sp>
-      <p:sp>
-        <p:nvSpPr>
-          <p:cNvPr id="7" name="Text 5"/>
-          <p:cNvSpPr/>
-          <p:nvPr/>
-        </p:nvSpPr>
-        <p:spPr>
-          <a:xfrm>
-            <a:off x="768096" y="5650992"/>
-            <a:ext cx="10652760" cy="566928"/>
-          </a:xfrm>
-          <a:prstGeom prst="rect">
-            <a:avLst/>
-          </a:prstGeom>
-          <a:noFill/>
-          <a:ln/>
-        </p:spPr>
-        <p:txBody>
-          <a:bodyPr wrap="square" rtlCol="0" anchor="ctr"/>
           <a:lstStyle/>
           <a:p>
             <a:pPr indent="0" marL="0">
               <a:buNone/>
             </a:pPr>
             <a:r>
-              <a:rPr lang="en-US" sz="1600" b="1" dirty="0">
-                <a:solidFill>
-                  <a:srgbClr val="1F4C86"/>
-                </a:solidFill>
-                <a:latin typeface="Calibri" pitchFamily="34" charset="0"/>
-                <a:ea typeface="Calibri" pitchFamily="34" charset="-122"/>
-                <a:cs typeface="Calibri" pitchFamily="34" charset="-120"/>
-              </a:rPr>
-              <a:t>That count is the guard against silently reclassifying work you already did.</a:t>
-            </a:r>
-            <a:endParaRPr lang="en-US" sz="1600" dirty="0"/>
+              <a:rPr lang="en-US" sz="1900" dirty="0">
+                <a:solidFill>
+                  <a:srgbClr val="5A6675"/>
+                </a:solidFill>
+                <a:latin typeface="Calibri" pitchFamily="34" charset="0"/>
+                <a:ea typeface="Calibri" pitchFamily="34" charset="-122"/>
+                <a:cs typeface="Calibri" pitchFamily="34" charset="-120"/>
+              </a:rPr>
+              <a:t>Classifier validation you can put in a paper</a:t>
+            </a:r>
+            <a:endParaRPr lang="en-US" sz="1900" dirty="0"/>
+          </a:p>
+        </p:txBody>
+      </p:sp>
+      <p:sp>
+        <p:nvSpPr>
+          <p:cNvPr id="7" name="Text 5"/>
+          <p:cNvSpPr/>
+          <p:nvPr/>
+        </p:nvSpPr>
+        <p:spPr>
+          <a:xfrm>
+            <a:off x="566928" y="6199632"/>
+            <a:ext cx="8229600" cy="365760"/>
+          </a:xfrm>
+          <a:prstGeom prst="rect">
+            <a:avLst/>
+          </a:prstGeom>
+          <a:noFill/>
+          <a:ln/>
+        </p:spPr>
+        <p:txBody>
+          <a:bodyPr wrap="square" rtlCol="0" anchor="ctr"/>
+          <a:lstStyle/>
+          <a:p>
+            <a:pPr indent="0" marL="0">
+              <a:buNone/>
+            </a:pPr>
+            <a:r>
+              <a:rPr lang="en-US" sz="1400" dirty="0">
+                <a:solidFill>
+                  <a:srgbClr val="A8B2BF"/>
+                </a:solidFill>
+                <a:latin typeface="Calibri" pitchFamily="34" charset="0"/>
+                <a:ea typeface="Calibri" pitchFamily="34" charset="-122"/>
+                <a:cs typeface="Calibri" pitchFamily="34" charset="-120"/>
+              </a:rPr>
+              <a:t>michaelsnelson.github.io/BINA-I2K-2026-QuPath-Extensions</a:t>
+            </a:r>
+            <a:endParaRPr lang="en-US" sz="1400" dirty="0"/>
           </a:p>
         </p:txBody>
       </p:sp>
@@ -12158,23 +12066,42 @@
       </p:grpSpPr>
       <p:sp>
         <p:nvSpPr>
-          <p:cNvPr id="2" name="Shape 0"/>
-          <p:cNvSpPr/>
-          <p:nvPr/>
-        </p:nvSpPr>
-        <p:spPr>
-          <a:xfrm>
-            <a:off x="0" y="1417320"/>
-            <a:ext cx="12188952" cy="3108960"/>
-          </a:xfrm>
-          <a:prstGeom prst="rect">
-            <a:avLst/>
-          </a:prstGeom>
-          <a:solidFill>
-            <a:srgbClr val="E8F0FA"/>
-          </a:solidFill>
-          <a:ln/>
-        </p:spPr>
+          <p:cNvPr id="2" name="Text 0"/>
+          <p:cNvSpPr/>
+          <p:nvPr/>
+        </p:nvSpPr>
+        <p:spPr>
+          <a:xfrm>
+            <a:off x="566928" y="384048"/>
+            <a:ext cx="11055096" cy="658368"/>
+          </a:xfrm>
+          <a:prstGeom prst="rect">
+            <a:avLst/>
+          </a:prstGeom>
+          <a:noFill/>
+          <a:ln/>
+        </p:spPr>
+        <p:txBody>
+          <a:bodyPr wrap="square" rtlCol="0" anchor="ctr"/>
+          <a:lstStyle/>
+          <a:p>
+            <a:pPr indent="0" marL="0">
+              <a:buNone/>
+            </a:pPr>
+            <a:r>
+              <a:rPr lang="en-US" sz="3000" b="1" dirty="0">
+                <a:solidFill>
+                  <a:srgbClr val="1F4C86"/>
+                </a:solidFill>
+                <a:latin typeface="Trebuchet MS" pitchFamily="34" charset="0"/>
+                <a:ea typeface="Trebuchet MS" pitchFamily="34" charset="-122"/>
+                <a:cs typeface="Trebuchet MS" pitchFamily="34" charset="-120"/>
+              </a:rPr>
+              <a:t>The interval, not the estimate</a:t>
+            </a:r>
+            <a:endParaRPr lang="en-US" sz="3000" dirty="0"/>
+          </a:p>
+        </p:txBody>
       </p:sp>
       <p:sp>
         <p:nvSpPr>
@@ -12184,8 +12111,8 @@
         </p:nvSpPr>
         <p:spPr>
           <a:xfrm>
-            <a:off x="0" y="1417320"/>
-            <a:ext cx="201168" cy="3108960"/>
+            <a:off x="566928" y="1097280"/>
+            <a:ext cx="1920240" cy="50292"/>
           </a:xfrm>
           <a:prstGeom prst="rect">
             <a:avLst/>
@@ -12204,8 +12131,151 @@
         </p:nvSpPr>
         <p:spPr>
           <a:xfrm>
-            <a:off x="566928" y="1691640"/>
-            <a:ext cx="1828800" cy="914400"/>
+            <a:off x="640080" y="1481328"/>
+            <a:ext cx="10963656" cy="4553712"/>
+          </a:xfrm>
+          <a:prstGeom prst="rect">
+            <a:avLst/>
+          </a:prstGeom>
+          <a:noFill/>
+          <a:ln/>
+        </p:spPr>
+        <p:txBody>
+          <a:bodyPr wrap="square" rtlCol="0" anchor="t"/>
+          <a:lstStyle/>
+          <a:p>
+            <a:pPr marL="342900" indent="-342900">
+              <a:lnSpc>
+                <a:spcPct val="105000"/>
+              </a:lnSpc>
+              <a:spcAft>
+                <a:spcPts val="1200"/>
+              </a:spcAft>
+              <a:buSzPct val="100000"/>
+              <a:buChar char="•"/>
+            </a:pPr>
+            <a:r>
+              <a:rPr lang="en-US" sz="2000" dirty="0">
+                <a:solidFill>
+                  <a:srgbClr val="1F2933"/>
+                </a:solidFill>
+                <a:latin typeface="Calibri" pitchFamily="34" charset="0"/>
+                <a:ea typeface="Calibri" pitchFamily="34" charset="-122"/>
+                <a:cs typeface="Calibri" pitchFamily="34" charset="-120"/>
+              </a:rPr>
+              <a:t>"F1 = 0.87, 95% CI [0.82, 0.91]" instead of "87% accurate"</a:t>
+            </a:r>
+            <a:endParaRPr lang="en-US" sz="2000" dirty="0"/>
+          </a:p>
+          <a:p>
+            <a:pPr marL="342900" indent="-342900">
+              <a:lnSpc>
+                <a:spcPct val="105000"/>
+              </a:lnSpc>
+              <a:spcAft>
+                <a:spcPts val="1200"/>
+              </a:spcAft>
+              <a:buSzPct val="100000"/>
+              <a:buChar char="•"/>
+            </a:pPr>
+            <a:r>
+              <a:rPr lang="en-US" sz="2000" dirty="0">
+                <a:solidFill>
+                  <a:srgbClr val="1F2933"/>
+                </a:solidFill>
+                <a:latin typeface="Calibri" pitchFamily="34" charset="0"/>
+                <a:ea typeface="Calibri" pitchFamily="34" charset="-122"/>
+                <a:cs typeface="Calibri" pitchFamily="34" charset="-120"/>
+              </a:rPr>
+              <a:t>95% from forty cells and 95% from four thousand cells are not the same claim</a:t>
+            </a:r>
+            <a:endParaRPr lang="en-US" sz="2000" dirty="0"/>
+          </a:p>
+          <a:p>
+            <a:pPr marL="342900" indent="-342900">
+              <a:lnSpc>
+                <a:spcPct val="105000"/>
+              </a:lnSpc>
+              <a:spcAft>
+                <a:spcPts val="1200"/>
+              </a:spcAft>
+              <a:buSzPct val="100000"/>
+              <a:buChar char="•"/>
+            </a:pPr>
+            <a:r>
+              <a:rPr lang="en-US" sz="2000" dirty="0">
+                <a:solidFill>
+                  <a:srgbClr val="1F2933"/>
+                </a:solidFill>
+                <a:latin typeface="Calibri" pitchFamily="34" charset="0"/>
+                <a:ea typeface="Calibri" pitchFamily="34" charset="-122"/>
+                <a:cs typeface="Calibri" pitchFamily="34" charset="-120"/>
+              </a:rPr>
+              <a:t>Bootstrap confidence intervals on every per-class metric</a:t>
+            </a:r>
+            <a:endParaRPr lang="en-US" sz="2000" dirty="0"/>
+          </a:p>
+          <a:p>
+            <a:pPr marL="342900" indent="-342900">
+              <a:lnSpc>
+                <a:spcPct val="105000"/>
+              </a:lnSpc>
+              <a:spcAft>
+                <a:spcPts val="1200"/>
+              </a:spcAft>
+              <a:buSzPct val="100000"/>
+              <a:buChar char="•"/>
+            </a:pPr>
+            <a:r>
+              <a:rPr lang="en-US" sz="2000" dirty="0">
+                <a:solidFill>
+                  <a:srgbClr val="1F2933"/>
+                </a:solidFill>
+                <a:latin typeface="Calibri" pitchFamily="34" charset="0"/>
+                <a:ea typeface="Calibri" pitchFamily="34" charset="-122"/>
+                <a:cs typeface="Calibri" pitchFamily="34" charset="-120"/>
+              </a:rPr>
+              <a:t>For probability-producing classifiers: is the confidence itself trustworthy, or just the top class?</a:t>
+            </a:r>
+            <a:endParaRPr lang="en-US" sz="2000" dirty="0"/>
+          </a:p>
+        </p:txBody>
+      </p:sp>
+      <p:sp>
+        <p:nvSpPr>
+          <p:cNvPr id="5" name="Shape 3"/>
+          <p:cNvSpPr/>
+          <p:nvPr/>
+        </p:nvSpPr>
+        <p:spPr>
+          <a:xfrm>
+            <a:off x="566928" y="5650992"/>
+            <a:ext cx="11055096" cy="566928"/>
+          </a:xfrm>
+          <a:prstGeom prst="rect">
+            <a:avLst/>
+          </a:prstGeom>
+          <a:solidFill>
+            <a:srgbClr val="F4F8FD"/>
+          </a:solidFill>
+          <a:ln w="9525">
+            <a:solidFill>
+              <a:srgbClr val="3674C1"/>
+            </a:solidFill>
+            <a:prstDash val="solid"/>
+          </a:ln>
+        </p:spPr>
+      </p:sp>
+      <p:sp>
+        <p:nvSpPr>
+          <p:cNvPr id="6" name="Text 4"/>
+          <p:cNvSpPr/>
+          <p:nvPr/>
+        </p:nvSpPr>
+        <p:spPr>
+          <a:xfrm>
+            <a:off x="768096" y="5650992"/>
+            <a:ext cx="10652760" cy="566928"/>
           </a:xfrm>
           <a:prstGeom prst="rect">
             <a:avLst/>
@@ -12221,140 +12291,23 @@
               <a:buNone/>
             </a:pPr>
             <a:r>
-              <a:rPr lang="en-US" sz="5400" b="1" dirty="0">
-                <a:solidFill>
-                  <a:srgbClr val="3674C1"/>
-                </a:solidFill>
-                <a:latin typeface="Trebuchet MS" pitchFamily="34" charset="0"/>
-                <a:ea typeface="Trebuchet MS" pitchFamily="34" charset="-122"/>
-                <a:cs typeface="Trebuchet MS" pitchFamily="34" charset="-120"/>
-              </a:rPr>
-              <a:t>05</a:t>
-            </a:r>
-            <a:endParaRPr lang="en-US" sz="5400" dirty="0"/>
-          </a:p>
-        </p:txBody>
-      </p:sp>
-      <p:sp>
-        <p:nvSpPr>
-          <p:cNvPr id="5" name="Text 3"/>
-          <p:cNvSpPr/>
-          <p:nvPr/>
-        </p:nvSpPr>
-        <p:spPr>
-          <a:xfrm>
-            <a:off x="566928" y="2606040"/>
-            <a:ext cx="11055096" cy="868680"/>
-          </a:xfrm>
-          <a:prstGeom prst="rect">
-            <a:avLst/>
-          </a:prstGeom>
-          <a:noFill/>
-          <a:ln/>
-        </p:spPr>
-        <p:txBody>
-          <a:bodyPr wrap="square" rtlCol="0" anchor="ctr"/>
-          <a:lstStyle/>
-          <a:p>
-            <a:pPr indent="0" marL="0">
-              <a:buNone/>
-            </a:pPr>
-            <a:r>
-              <a:rPr lang="en-US" sz="4000" b="1" dirty="0">
+              <a:rPr lang="en-US" sz="1600" b="1" dirty="0">
                 <a:solidFill>
                   <a:srgbClr val="1F4C86"/>
                 </a:solidFill>
-                <a:latin typeface="Trebuchet MS" pitchFamily="34" charset="0"/>
-                <a:ea typeface="Trebuchet MS" pitchFamily="34" charset="-122"/>
-                <a:cs typeface="Trebuchet MS" pitchFamily="34" charset="-120"/>
-              </a:rPr>
-              <a:t>Did it actually work?</a:t>
-            </a:r>
-            <a:endParaRPr lang="en-US" sz="4000" dirty="0"/>
-          </a:p>
-        </p:txBody>
-      </p:sp>
-      <p:sp>
-        <p:nvSpPr>
-          <p:cNvPr id="6" name="Text 4"/>
-          <p:cNvSpPr/>
-          <p:nvPr/>
-        </p:nvSpPr>
-        <p:spPr>
-          <a:xfrm>
-            <a:off x="566928" y="3456432"/>
-            <a:ext cx="10140696" cy="731520"/>
-          </a:xfrm>
-          <a:prstGeom prst="rect">
-            <a:avLst/>
-          </a:prstGeom>
-          <a:noFill/>
-          <a:ln/>
-        </p:spPr>
-        <p:txBody>
-          <a:bodyPr wrap="square" rtlCol="0" anchor="t"/>
-          <a:lstStyle/>
-          <a:p>
-            <a:pPr indent="0" marL="0">
-              <a:buNone/>
-            </a:pPr>
-            <a:r>
-              <a:rPr lang="en-US" sz="1900" dirty="0">
-                <a:solidFill>
-                  <a:srgbClr val="5A6675"/>
-                </a:solidFill>
-                <a:latin typeface="Calibri" pitchFamily="34" charset="0"/>
-                <a:ea typeface="Calibri" pitchFamily="34" charset="-122"/>
-                <a:cs typeface="Calibri" pitchFamily="34" charset="-120"/>
-              </a:rPr>
-              <a:t>Classifier validation you can put in a paper</a:t>
-            </a:r>
-            <a:endParaRPr lang="en-US" sz="1900" dirty="0"/>
+                <a:latin typeface="Calibri" pitchFamily="34" charset="0"/>
+                <a:ea typeface="Calibri" pitchFamily="34" charset="-122"/>
+                <a:cs typeface="Calibri" pitchFamily="34" charset="-120"/>
+              </a:rPr>
+              <a:t>A model that is 95% confident and 70% correct is a different problem, needing a different fix.</a:t>
+            </a:r>
+            <a:endParaRPr lang="en-US" sz="1600" dirty="0"/>
           </a:p>
         </p:txBody>
       </p:sp>
       <p:sp>
         <p:nvSpPr>
           <p:cNvPr id="7" name="Text 5"/>
-          <p:cNvSpPr/>
-          <p:nvPr/>
-        </p:nvSpPr>
-        <p:spPr>
-          <a:xfrm>
-            <a:off x="566928" y="6199632"/>
-            <a:ext cx="8229600" cy="365760"/>
-          </a:xfrm>
-          <a:prstGeom prst="rect">
-            <a:avLst/>
-          </a:prstGeom>
-          <a:noFill/>
-          <a:ln/>
-        </p:spPr>
-        <p:txBody>
-          <a:bodyPr wrap="square" rtlCol="0" anchor="ctr"/>
-          <a:lstStyle/>
-          <a:p>
-            <a:pPr indent="0" marL="0">
-              <a:buNone/>
-            </a:pPr>
-            <a:r>
-              <a:rPr lang="en-US" sz="1400" dirty="0">
-                <a:solidFill>
-                  <a:srgbClr val="A8B2BF"/>
-                </a:solidFill>
-                <a:latin typeface="Calibri" pitchFamily="34" charset="0"/>
-                <a:ea typeface="Calibri" pitchFamily="34" charset="-122"/>
-                <a:cs typeface="Calibri" pitchFamily="34" charset="-120"/>
-              </a:rPr>
-              <a:t>michaelsnelson.github.io/BINA-I2K-2026-QuPath-Extensions</a:t>
-            </a:r>
-            <a:endParaRPr lang="en-US" sz="1400" dirty="0"/>
-          </a:p>
-        </p:txBody>
-      </p:sp>
-      <p:sp>
-        <p:nvSpPr>
-          <p:cNvPr id="8" name="Text 6"/>
           <p:cNvSpPr/>
           <p:nvPr/>
         </p:nvSpPr>
@@ -12697,14 +12650,41 @@
       </p:grpSpPr>
       <p:sp>
         <p:nvSpPr>
-          <p:cNvPr id="2" name="Text 0"/>
-          <p:cNvSpPr/>
-          <p:nvPr/>
-        </p:nvSpPr>
-        <p:spPr>
-          <a:xfrm>
-            <a:off x="566928" y="384048"/>
-            <a:ext cx="11055096" cy="658368"/>
+          <p:cNvPr id="2" name="Shape 0"/>
+          <p:cNvSpPr/>
+          <p:nvPr/>
+        </p:nvSpPr>
+        <p:spPr>
+          <a:xfrm>
+            <a:off x="566928" y="411480"/>
+            <a:ext cx="2331720" cy="457200"/>
+          </a:xfrm>
+          <a:prstGeom prst="roundRect">
+            <a:avLst>
+              <a:gd name="adj" fmla="val 20000"/>
+            </a:avLst>
+          </a:prstGeom>
+          <a:solidFill>
+            <a:srgbClr val="FBF1E0"/>
+          </a:solidFill>
+          <a:ln w="12700">
+            <a:solidFill>
+              <a:srgbClr val="B26A00"/>
+            </a:solidFill>
+            <a:prstDash val="solid"/>
+          </a:ln>
+        </p:spPr>
+      </p:sp>
+      <p:sp>
+        <p:nvSpPr>
+          <p:cNvPr id="3" name="Text 1"/>
+          <p:cNvSpPr/>
+          <p:nvPr/>
+        </p:nvSpPr>
+        <p:spPr>
+          <a:xfrm>
+            <a:off x="566928" y="411480"/>
+            <a:ext cx="2331720" cy="457200"/>
           </a:xfrm>
           <a:prstGeom prst="rect">
             <a:avLst/>
@@ -12716,33 +12696,72 @@
           <a:bodyPr wrap="square" rtlCol="0" anchor="ctr"/>
           <a:lstStyle/>
           <a:p>
-            <a:pPr indent="0" marL="0">
+            <a:pPr algn="ctr" indent="0" marL="0">
               <a:buNone/>
             </a:pPr>
             <a:r>
-              <a:rPr lang="en-US" sz="3000" b="1" dirty="0">
-                <a:solidFill>
-                  <a:srgbClr val="1F4C86"/>
+              <a:rPr lang="en-US" sz="1600" b="1" dirty="0">
+                <a:solidFill>
+                  <a:srgbClr val="B26A00"/>
                 </a:solidFill>
                 <a:latin typeface="Trebuchet MS" pitchFamily="34" charset="0"/>
                 <a:ea typeface="Trebuchet MS" pitchFamily="34" charset="-122"/>
                 <a:cs typeface="Trebuchet MS" pitchFamily="34" charset="-120"/>
               </a:rPr>
-              <a:t>The interval, not the estimate</a:t>
-            </a:r>
-            <a:endParaRPr lang="en-US" sz="3000" dirty="0"/>
-          </a:p>
-        </p:txBody>
-      </p:sp>
-      <p:sp>
-        <p:nvSpPr>
-          <p:cNvPr id="3" name="Shape 1"/>
-          <p:cNvSpPr/>
-          <p:nvPr/>
-        </p:nvSpPr>
-        <p:spPr>
-          <a:xfrm>
-            <a:off x="566928" y="1097280"/>
+              <a:t>▶  DEMO ONLY</a:t>
+            </a:r>
+            <a:endParaRPr lang="en-US" sz="1600" dirty="0"/>
+          </a:p>
+        </p:txBody>
+      </p:sp>
+      <p:sp>
+        <p:nvSpPr>
+          <p:cNvPr id="4" name="Text 2"/>
+          <p:cNvSpPr/>
+          <p:nvPr/>
+        </p:nvSpPr>
+        <p:spPr>
+          <a:xfrm>
+            <a:off x="566928" y="1024128"/>
+            <a:ext cx="11055096" cy="685800"/>
+          </a:xfrm>
+          <a:prstGeom prst="rect">
+            <a:avLst/>
+          </a:prstGeom>
+          <a:noFill/>
+          <a:ln/>
+        </p:spPr>
+        <p:txBody>
+          <a:bodyPr wrap="square" rtlCol="0" anchor="ctr"/>
+          <a:lstStyle/>
+          <a:p>
+            <a:pPr indent="0" marL="0">
+              <a:buNone/>
+            </a:pPr>
+            <a:r>
+              <a:rPr lang="en-US" sz="3200" b="1" dirty="0">
+                <a:solidFill>
+                  <a:srgbClr val="1F4C86"/>
+                </a:solidFill>
+                <a:latin typeface="Trebuchet MS" pitchFamily="34" charset="0"/>
+                <a:ea typeface="Trebuchet MS" pitchFamily="34" charset="-122"/>
+                <a:cs typeface="Trebuchet MS" pitchFamily="34" charset="-120"/>
+              </a:rPr>
+              <a:t>Confusion Matrix</a:t>
+            </a:r>
+            <a:endParaRPr lang="en-US" sz="3200" dirty="0"/>
+          </a:p>
+        </p:txBody>
+      </p:sp>
+      <p:sp>
+        <p:nvSpPr>
+          <p:cNvPr id="5" name="Shape 3"/>
+          <p:cNvSpPr/>
+          <p:nvPr/>
+        </p:nvSpPr>
+        <p:spPr>
+          <a:xfrm>
+            <a:off x="566928" y="1783080"/>
             <a:ext cx="1920240" cy="50292"/>
           </a:xfrm>
           <a:prstGeom prst="rect">
@@ -12756,14 +12775,14 @@
       </p:sp>
       <p:sp>
         <p:nvSpPr>
-          <p:cNvPr id="4" name="Text 2"/>
-          <p:cNvSpPr/>
-          <p:nvPr/>
-        </p:nvSpPr>
-        <p:spPr>
-          <a:xfrm>
-            <a:off x="640080" y="1481328"/>
-            <a:ext cx="10963656" cy="4553712"/>
+          <p:cNvPr id="6" name="Text 4"/>
+          <p:cNvSpPr/>
+          <p:nvPr/>
+        </p:nvSpPr>
+        <p:spPr>
+          <a:xfrm>
+            <a:off x="640080" y="2103120"/>
+            <a:ext cx="10963656" cy="3017520"/>
           </a:xfrm>
           <a:prstGeom prst="rect">
             <a:avLst/>
@@ -12776,11 +12795,8 @@
           <a:lstStyle/>
           <a:p>
             <a:pPr marL="342900" indent="-342900">
-              <a:lnSpc>
-                <a:spcPct val="105000"/>
-              </a:lnSpc>
               <a:spcAft>
-                <a:spcPts val="1200"/>
+                <a:spcPts val="1400"/>
               </a:spcAft>
               <a:buSzPct val="100000"/>
               <a:buChar char="•"/>
@@ -12794,17 +12810,14 @@
                 <a:ea typeface="Calibri" pitchFamily="34" charset="-122"/>
                 <a:cs typeface="Calibri" pitchFamily="34" charset="-120"/>
               </a:rPr>
-              <a:t>"F1 = 0.87, 95% CI [0.82, 0.91]" instead of "87% accurate"</a:t>
+              <a:t>Click the largest off-diagonal cell — those cells highlight on the slide</a:t>
             </a:r>
             <a:endParaRPr lang="en-US" sz="2000" dirty="0"/>
           </a:p>
           <a:p>
             <a:pPr marL="342900" indent="-342900">
-              <a:lnSpc>
-                <a:spcPct val="105000"/>
-              </a:lnSpc>
               <a:spcAft>
-                <a:spcPts val="1200"/>
+                <a:spcPts val="1400"/>
               </a:spcAft>
               <a:buSzPct val="100000"/>
               <a:buChar char="•"/>
@@ -12818,17 +12831,14 @@
                 <a:ea typeface="Calibri" pitchFamily="34" charset="-122"/>
                 <a:cs typeface="Calibri" pitchFamily="34" charset="-120"/>
               </a:rPr>
-              <a:t>95% from forty cells and 95% from four thousand cells are not the same claim</a:t>
+              <a:t>"The classifier is 87% accurate" becomes "it confuses these two things, for this reason"</a:t>
             </a:r>
             <a:endParaRPr lang="en-US" sz="2000" dirty="0"/>
           </a:p>
           <a:p>
             <a:pPr marL="342900" indent="-342900">
-              <a:lnSpc>
-                <a:spcPct val="105000"/>
-              </a:lnSpc>
               <a:spcAft>
-                <a:spcPts val="1200"/>
+                <a:spcPts val="1400"/>
               </a:spcAft>
               <a:buSzPct val="100000"/>
               <a:buChar char="•"/>
@@ -12842,17 +12852,14 @@
                 <a:ea typeface="Calibri" pitchFamily="34" charset="-122"/>
                 <a:cs typeface="Calibri" pitchFamily="34" charset="-120"/>
               </a:rPr>
-              <a:t>Bootstrap confidence intervals on every per-class metric</a:t>
+              <a:t>Across a project: per-image breakdown, with divergent images flagged automatically</a:t>
             </a:r>
             <a:endParaRPr lang="en-US" sz="2000" dirty="0"/>
           </a:p>
           <a:p>
             <a:pPr marL="342900" indent="-342900">
-              <a:lnSpc>
-                <a:spcPct val="105000"/>
-              </a:lnSpc>
               <a:spcAft>
-                <a:spcPts val="1200"/>
+                <a:spcPts val="1400"/>
               </a:spcAft>
               <a:buSzPct val="100000"/>
               <a:buChar char="•"/>
@@ -12866,7 +12873,7 @@
                 <a:ea typeface="Calibri" pitchFamily="34" charset="-122"/>
                 <a:cs typeface="Calibri" pitchFamily="34" charset="-120"/>
               </a:rPr>
-              <a:t>For probability-producing classifiers: is the confidence itself trustworthy, or just the top class?</a:t>
+              <a:t>Flagged images usually mean a staining or scanning problem, not a classifier problem</a:t>
             </a:r>
             <a:endParaRPr lang="en-US" sz="2000" dirty="0"/>
           </a:p>
@@ -12874,7 +12881,7 @@
       </p:sp>
       <p:sp>
         <p:nvSpPr>
-          <p:cNvPr id="5" name="Shape 3"/>
+          <p:cNvPr id="7" name="Shape 5"/>
           <p:cNvSpPr/>
           <p:nvPr/>
         </p:nvSpPr>
@@ -12899,7 +12906,7 @@
       </p:sp>
       <p:sp>
         <p:nvSpPr>
-          <p:cNvPr id="6" name="Text 4"/>
+          <p:cNvPr id="8" name="Text 6"/>
           <p:cNvSpPr/>
           <p:nvPr/>
         </p:nvSpPr>
@@ -12930,7 +12937,7 @@
                 <a:ea typeface="Calibri" pitchFamily="34" charset="-122"/>
                 <a:cs typeface="Calibri" pitchFamily="34" charset="-120"/>
               </a:rPr>
-              <a:t>A model that is 95% confident and 70% correct is a different problem, needing a different fix.</a:t>
+              <a:t>Originated by Kristin Gallick — concept and initial scripts; built out at LOCI.  ·  Demo only: the repository is currently private.</a:t>
             </a:r>
             <a:endParaRPr lang="en-US" sz="1600" dirty="0"/>
           </a:p>
@@ -12938,7 +12945,7 @@
       </p:sp>
       <p:sp>
         <p:nvSpPr>
-          <p:cNvPr id="7" name="Text 5"/>
+          <p:cNvPr id="9" name="Text 7"/>
           <p:cNvSpPr/>
           <p:nvPr/>
         </p:nvSpPr>
@@ -13015,35 +13022,48 @@
         </p:nvSpPr>
         <p:spPr>
           <a:xfrm>
-            <a:off x="566928" y="411480"/>
-            <a:ext cx="2331720" cy="457200"/>
-          </a:xfrm>
-          <a:prstGeom prst="roundRect">
-            <a:avLst>
-              <a:gd name="adj" fmla="val 20000"/>
-            </a:avLst>
+            <a:off x="0" y="1417320"/>
+            <a:ext cx="12188952" cy="3108960"/>
+          </a:xfrm>
+          <a:prstGeom prst="rect">
+            <a:avLst/>
           </a:prstGeom>
           <a:solidFill>
-            <a:srgbClr val="FBF1E0"/>
+            <a:srgbClr val="E8F0FA"/>
           </a:solidFill>
-          <a:ln w="12700">
-            <a:solidFill>
-              <a:srgbClr val="B26A00"/>
-            </a:solidFill>
-            <a:prstDash val="solid"/>
-          </a:ln>
-        </p:spPr>
-      </p:sp>
-      <p:sp>
-        <p:nvSpPr>
-          <p:cNvPr id="3" name="Text 1"/>
-          <p:cNvSpPr/>
-          <p:nvPr/>
-        </p:nvSpPr>
-        <p:spPr>
-          <a:xfrm>
-            <a:off x="566928" y="411480"/>
-            <a:ext cx="2331720" cy="457200"/>
+          <a:ln/>
+        </p:spPr>
+      </p:sp>
+      <p:sp>
+        <p:nvSpPr>
+          <p:cNvPr id="3" name="Shape 1"/>
+          <p:cNvSpPr/>
+          <p:nvPr/>
+        </p:nvSpPr>
+        <p:spPr>
+          <a:xfrm>
+            <a:off x="0" y="1417320"/>
+            <a:ext cx="201168" cy="3108960"/>
+          </a:xfrm>
+          <a:prstGeom prst="rect">
+            <a:avLst/>
+          </a:prstGeom>
+          <a:solidFill>
+            <a:srgbClr val="3674C1"/>
+          </a:solidFill>
+          <a:ln/>
+        </p:spPr>
+      </p:sp>
+      <p:sp>
+        <p:nvSpPr>
+          <p:cNvPr id="4" name="Text 2"/>
+          <p:cNvSpPr/>
+          <p:nvPr/>
+        </p:nvSpPr>
+        <p:spPr>
+          <a:xfrm>
+            <a:off x="566928" y="1691640"/>
+            <a:ext cx="1828800" cy="914400"/>
           </a:xfrm>
           <a:prstGeom prst="rect">
             <a:avLst/>
@@ -13055,34 +13075,34 @@
           <a:bodyPr wrap="square" rtlCol="0" anchor="ctr"/>
           <a:lstStyle/>
           <a:p>
-            <a:pPr algn="ctr" indent="0" marL="0">
+            <a:pPr indent="0" marL="0">
               <a:buNone/>
             </a:pPr>
             <a:r>
-              <a:rPr lang="en-US" sz="1600" b="1" dirty="0">
-                <a:solidFill>
-                  <a:srgbClr val="B26A00"/>
+              <a:rPr lang="en-US" sz="5400" b="1" dirty="0">
+                <a:solidFill>
+                  <a:srgbClr val="3674C1"/>
                 </a:solidFill>
                 <a:latin typeface="Trebuchet MS" pitchFamily="34" charset="0"/>
                 <a:ea typeface="Trebuchet MS" pitchFamily="34" charset="-122"/>
                 <a:cs typeface="Trebuchet MS" pitchFamily="34" charset="-120"/>
               </a:rPr>
-              <a:t>▶  DEMO ONLY</a:t>
-            </a:r>
-            <a:endParaRPr lang="en-US" sz="1600" dirty="0"/>
-          </a:p>
-        </p:txBody>
-      </p:sp>
-      <p:sp>
-        <p:nvSpPr>
-          <p:cNvPr id="4" name="Text 2"/>
-          <p:cNvSpPr/>
-          <p:nvPr/>
-        </p:nvSpPr>
-        <p:spPr>
-          <a:xfrm>
-            <a:off x="566928" y="1024128"/>
-            <a:ext cx="11055096" cy="685800"/>
+              <a:t>06</a:t>
+            </a:r>
+            <a:endParaRPr lang="en-US" sz="5400" dirty="0"/>
+          </a:p>
+        </p:txBody>
+      </p:sp>
+      <p:sp>
+        <p:nvSpPr>
+          <p:cNvPr id="5" name="Text 3"/>
+          <p:cNvSpPr/>
+          <p:nvPr/>
+        </p:nvSpPr>
+        <p:spPr>
+          <a:xfrm>
+            <a:off x="566928" y="2606040"/>
+            <a:ext cx="11055096" cy="868680"/>
           </a:xfrm>
           <a:prstGeom prst="rect">
             <a:avLst/>
@@ -13098,7 +13118,7 @@
               <a:buNone/>
             </a:pPr>
             <a:r>
-              <a:rPr lang="en-US" sz="3200" b="1" dirty="0">
+              <a:rPr lang="en-US" sz="4000" b="1" dirty="0">
                 <a:solidFill>
                   <a:srgbClr val="1F4C86"/>
                 </a:solidFill>
@@ -13106,31 +13126,11 @@
                 <a:ea typeface="Trebuchet MS" pitchFamily="34" charset="-122"/>
                 <a:cs typeface="Trebuchet MS" pitchFamily="34" charset="-120"/>
               </a:rPr>
-              <a:t>Confusion Matrix</a:t>
-            </a:r>
-            <a:endParaRPr lang="en-US" sz="3200" dirty="0"/>
-          </a:p>
-        </p:txBody>
-      </p:sp>
-      <p:sp>
-        <p:nvSpPr>
-          <p:cNvPr id="5" name="Shape 3"/>
-          <p:cNvSpPr/>
-          <p:nvPr/>
-        </p:nvSpPr>
-        <p:spPr>
-          <a:xfrm>
-            <a:off x="566928" y="1783080"/>
-            <a:ext cx="1920240" cy="50292"/>
-          </a:xfrm>
-          <a:prstGeom prst="rect">
-            <a:avLst/>
-          </a:prstGeom>
-          <a:solidFill>
-            <a:srgbClr val="3674C1"/>
-          </a:solidFill>
-          <a:ln/>
-        </p:spPr>
+              <a:t>Deep learning</a:t>
+            </a:r>
+            <a:endParaRPr lang="en-US" sz="4000" dirty="0"/>
+          </a:p>
+        </p:txBody>
       </p:sp>
       <p:sp>
         <p:nvSpPr>
@@ -13140,8 +13140,8 @@
         </p:nvSpPr>
         <p:spPr>
           <a:xfrm>
-            <a:off x="640080" y="2103120"/>
-            <a:ext cx="10963656" cy="3017520"/>
+            <a:off x="566928" y="3456432"/>
+            <a:ext cx="10140696" cy="731520"/>
           </a:xfrm>
           <a:prstGeom prst="rect">
             <a:avLst/>
@@ -13151,160 +13151,68 @@
         </p:spPr>
         <p:txBody>
           <a:bodyPr wrap="square" rtlCol="0" anchor="t"/>
-          <a:lstStyle/>
-          <a:p>
-            <a:pPr marL="342900" indent="-342900">
-              <a:spcAft>
-                <a:spcPts val="1400"/>
-              </a:spcAft>
-              <a:buSzPct val="100000"/>
-              <a:buChar char="•"/>
-            </a:pPr>
-            <a:r>
-              <a:rPr lang="en-US" sz="2000" dirty="0">
-                <a:solidFill>
-                  <a:srgbClr val="1F2933"/>
-                </a:solidFill>
-                <a:latin typeface="Calibri" pitchFamily="34" charset="0"/>
-                <a:ea typeface="Calibri" pitchFamily="34" charset="-122"/>
-                <a:cs typeface="Calibri" pitchFamily="34" charset="-120"/>
-              </a:rPr>
-              <a:t>Click the largest off-diagonal cell — those cells highlight on the slide</a:t>
-            </a:r>
-            <a:endParaRPr lang="en-US" sz="2000" dirty="0"/>
-          </a:p>
-          <a:p>
-            <a:pPr marL="342900" indent="-342900">
-              <a:spcAft>
-                <a:spcPts val="1400"/>
-              </a:spcAft>
-              <a:buSzPct val="100000"/>
-              <a:buChar char="•"/>
-            </a:pPr>
-            <a:r>
-              <a:rPr lang="en-US" sz="2000" dirty="0">
-                <a:solidFill>
-                  <a:srgbClr val="1F2933"/>
-                </a:solidFill>
-                <a:latin typeface="Calibri" pitchFamily="34" charset="0"/>
-                <a:ea typeface="Calibri" pitchFamily="34" charset="-122"/>
-                <a:cs typeface="Calibri" pitchFamily="34" charset="-120"/>
-              </a:rPr>
-              <a:t>"The classifier is 87% accurate" becomes "it confuses these two things, for this reason"</a:t>
-            </a:r>
-            <a:endParaRPr lang="en-US" sz="2000" dirty="0"/>
-          </a:p>
-          <a:p>
-            <a:pPr marL="342900" indent="-342900">
-              <a:spcAft>
-                <a:spcPts val="1400"/>
-              </a:spcAft>
-              <a:buSzPct val="100000"/>
-              <a:buChar char="•"/>
-            </a:pPr>
-            <a:r>
-              <a:rPr lang="en-US" sz="2000" dirty="0">
-                <a:solidFill>
-                  <a:srgbClr val="1F2933"/>
-                </a:solidFill>
-                <a:latin typeface="Calibri" pitchFamily="34" charset="0"/>
-                <a:ea typeface="Calibri" pitchFamily="34" charset="-122"/>
-                <a:cs typeface="Calibri" pitchFamily="34" charset="-120"/>
-              </a:rPr>
-              <a:t>Across a project: per-image breakdown, with divergent images flagged automatically</a:t>
-            </a:r>
-            <a:endParaRPr lang="en-US" sz="2000" dirty="0"/>
-          </a:p>
-          <a:p>
-            <a:pPr marL="342900" indent="-342900">
-              <a:spcAft>
-                <a:spcPts val="1400"/>
-              </a:spcAft>
-              <a:buSzPct val="100000"/>
-              <a:buChar char="•"/>
-            </a:pPr>
-            <a:r>
-              <a:rPr lang="en-US" sz="2000" dirty="0">
-                <a:solidFill>
-                  <a:srgbClr val="1F2933"/>
-                </a:solidFill>
-                <a:latin typeface="Calibri" pitchFamily="34" charset="0"/>
-                <a:ea typeface="Calibri" pitchFamily="34" charset="-122"/>
-                <a:cs typeface="Calibri" pitchFamily="34" charset="-120"/>
-              </a:rPr>
-              <a:t>Flagged images usually mean a staining or scanning problem, not a classifier problem</a:t>
-            </a:r>
-            <a:endParaRPr lang="en-US" sz="2000" dirty="0"/>
-          </a:p>
-        </p:txBody>
-      </p:sp>
-      <p:sp>
-        <p:nvSpPr>
-          <p:cNvPr id="7" name="Shape 5"/>
-          <p:cNvSpPr/>
-          <p:nvPr/>
-        </p:nvSpPr>
-        <p:spPr>
-          <a:xfrm>
-            <a:off x="566928" y="5650992"/>
-            <a:ext cx="11055096" cy="566928"/>
-          </a:xfrm>
-          <a:prstGeom prst="rect">
-            <a:avLst/>
-          </a:prstGeom>
-          <a:solidFill>
-            <a:srgbClr val="F4F8FD"/>
-          </a:solidFill>
-          <a:ln w="9525">
-            <a:solidFill>
-              <a:srgbClr val="3674C1"/>
-            </a:solidFill>
-            <a:prstDash val="solid"/>
-          </a:ln>
-        </p:spPr>
-      </p:sp>
-      <p:sp>
-        <p:nvSpPr>
-          <p:cNvPr id="8" name="Text 6"/>
-          <p:cNvSpPr/>
-          <p:nvPr/>
-        </p:nvSpPr>
-        <p:spPr>
-          <a:xfrm>
-            <a:off x="768096" y="5650992"/>
-            <a:ext cx="10652760" cy="566928"/>
-          </a:xfrm>
-          <a:prstGeom prst="rect">
-            <a:avLst/>
-          </a:prstGeom>
-          <a:noFill/>
-          <a:ln/>
-        </p:spPr>
-        <p:txBody>
-          <a:bodyPr wrap="square" rtlCol="0" anchor="ctr"/>
           <a:lstStyle/>
           <a:p>
             <a:pPr indent="0" marL="0">
               <a:buNone/>
             </a:pPr>
             <a:r>
-              <a:rPr lang="en-US" sz="1600" b="1" dirty="0">
-                <a:solidFill>
-                  <a:srgbClr val="1F4C86"/>
-                </a:solidFill>
-                <a:latin typeface="Calibri" pitchFamily="34" charset="0"/>
-                <a:ea typeface="Calibri" pitchFamily="34" charset="-122"/>
-                <a:cs typeface="Calibri" pitchFamily="34" charset="-120"/>
-              </a:rPr>
-              <a:t>Originated by Kristin Gallick — concept and initial scripts; built out at LOCI.  ·  Demo only: the repository is currently private.</a:t>
-            </a:r>
-            <a:endParaRPr lang="en-US" sz="1600" dirty="0"/>
-          </a:p>
-        </p:txBody>
-      </p:sp>
-      <p:sp>
-        <p:nvSpPr>
-          <p:cNvPr id="9" name="Text 7"/>
+              <a:rPr lang="en-US" sz="1900" dirty="0">
+                <a:solidFill>
+                  <a:srgbClr val="5A6675"/>
+                </a:solidFill>
+                <a:latin typeface="Calibri" pitchFamily="34" charset="0"/>
+                <a:ea typeface="Calibri" pitchFamily="34" charset="-122"/>
+                <a:cs typeface="Calibri" pitchFamily="34" charset="-120"/>
+              </a:rPr>
+              <a:t>Pixel classifiers, cell classifiers, and knowing when not to trust them</a:t>
+            </a:r>
+            <a:endParaRPr lang="en-US" sz="1900" dirty="0"/>
+          </a:p>
+        </p:txBody>
+      </p:sp>
+      <p:sp>
+        <p:nvSpPr>
+          <p:cNvPr id="7" name="Text 5"/>
+          <p:cNvSpPr/>
+          <p:nvPr/>
+        </p:nvSpPr>
+        <p:spPr>
+          <a:xfrm>
+            <a:off x="566928" y="6199632"/>
+            <a:ext cx="8229600" cy="365760"/>
+          </a:xfrm>
+          <a:prstGeom prst="rect">
+            <a:avLst/>
+          </a:prstGeom>
+          <a:noFill/>
+          <a:ln/>
+        </p:spPr>
+        <p:txBody>
+          <a:bodyPr wrap="square" rtlCol="0" anchor="ctr"/>
+          <a:lstStyle/>
+          <a:p>
+            <a:pPr indent="0" marL="0">
+              <a:buNone/>
+            </a:pPr>
+            <a:r>
+              <a:rPr lang="en-US" sz="1400" dirty="0">
+                <a:solidFill>
+                  <a:srgbClr val="A8B2BF"/>
+                </a:solidFill>
+                <a:latin typeface="Calibri" pitchFamily="34" charset="0"/>
+                <a:ea typeface="Calibri" pitchFamily="34" charset="-122"/>
+                <a:cs typeface="Calibri" pitchFamily="34" charset="-120"/>
+              </a:rPr>
+              <a:t>michaelsnelson.github.io/BINA-I2K-2026-QuPath-Extensions</a:t>
+            </a:r>
+            <a:endParaRPr lang="en-US" sz="1400" dirty="0"/>
+          </a:p>
+        </p:txBody>
+      </p:sp>
+      <p:sp>
+        <p:nvSpPr>
+          <p:cNvPr id="8" name="Text 6"/>
           <p:cNvSpPr/>
           <p:nvPr/>
         </p:nvSpPr>
@@ -13375,23 +13283,42 @@
       </p:grpSpPr>
       <p:sp>
         <p:nvSpPr>
-          <p:cNvPr id="2" name="Shape 0"/>
-          <p:cNvSpPr/>
-          <p:nvPr/>
-        </p:nvSpPr>
-        <p:spPr>
-          <a:xfrm>
-            <a:off x="0" y="1417320"/>
-            <a:ext cx="12188952" cy="3108960"/>
-          </a:xfrm>
-          <a:prstGeom prst="rect">
-            <a:avLst/>
-          </a:prstGeom>
-          <a:solidFill>
-            <a:srgbClr val="E8F0FA"/>
-          </a:solidFill>
-          <a:ln/>
-        </p:spPr>
+          <p:cNvPr id="2" name="Text 0"/>
+          <p:cNvSpPr/>
+          <p:nvPr/>
+        </p:nvSpPr>
+        <p:spPr>
+          <a:xfrm>
+            <a:off x="566928" y="384048"/>
+            <a:ext cx="11055096" cy="658368"/>
+          </a:xfrm>
+          <a:prstGeom prst="rect">
+            <a:avLst/>
+          </a:prstGeom>
+          <a:noFill/>
+          <a:ln/>
+        </p:spPr>
+        <p:txBody>
+          <a:bodyPr wrap="square" rtlCol="0" anchor="ctr"/>
+          <a:lstStyle/>
+          <a:p>
+            <a:pPr indent="0" marL="0">
+              <a:buNone/>
+            </a:pPr>
+            <a:r>
+              <a:rPr lang="en-US" sz="3000" b="1" dirty="0">
+                <a:solidFill>
+                  <a:srgbClr val="1F4C86"/>
+                </a:solidFill>
+                <a:latin typeface="Trebuchet MS" pitchFamily="34" charset="0"/>
+                <a:ea typeface="Trebuchet MS" pitchFamily="34" charset="-122"/>
+                <a:cs typeface="Trebuchet MS" pitchFamily="34" charset="-120"/>
+              </a:rPr>
+              <a:t>Deep learning pixel classification</a:t>
+            </a:r>
+            <a:endParaRPr lang="en-US" sz="3000" dirty="0"/>
+          </a:p>
+        </p:txBody>
       </p:sp>
       <p:sp>
         <p:nvSpPr>
@@ -13401,8 +13328,8 @@
         </p:nvSpPr>
         <p:spPr>
           <a:xfrm>
-            <a:off x="0" y="1417320"/>
-            <a:ext cx="201168" cy="3108960"/>
+            <a:off x="566928" y="1097280"/>
+            <a:ext cx="1920240" cy="50292"/>
           </a:xfrm>
           <a:prstGeom prst="rect">
             <a:avLst/>
@@ -13421,8 +13348,8 @@
         </p:nvSpPr>
         <p:spPr>
           <a:xfrm>
-            <a:off x="566928" y="1691640"/>
-            <a:ext cx="1828800" cy="914400"/>
+            <a:off x="566928" y="1243584"/>
+            <a:ext cx="11055096" cy="384048"/>
           </a:xfrm>
           <a:prstGeom prst="rect">
             <a:avLst/>
@@ -13438,17 +13365,17 @@
               <a:buNone/>
             </a:pPr>
             <a:r>
-              <a:rPr lang="en-US" sz="5400" b="1" dirty="0">
-                <a:solidFill>
-                  <a:srgbClr val="3674C1"/>
-                </a:solidFill>
-                <a:latin typeface="Trebuchet MS" pitchFamily="34" charset="0"/>
-                <a:ea typeface="Trebuchet MS" pitchFamily="34" charset="-122"/>
-                <a:cs typeface="Trebuchet MS" pitchFamily="34" charset="-120"/>
-              </a:rPr>
-              <a:t>06</a:t>
-            </a:r>
-            <a:endParaRPr lang="en-US" sz="5400" dirty="0"/>
+              <a:rPr lang="en-US" sz="1700" i="1" dirty="0">
+                <a:solidFill>
+                  <a:srgbClr val="5A6675"/>
+                </a:solidFill>
+                <a:latin typeface="Calibri" pitchFamily="34" charset="0"/>
+                <a:ea typeface="Calibri" pitchFamily="34" charset="-122"/>
+                <a:cs typeface="Calibri" pitchFamily="34" charset="-120"/>
+              </a:rPr>
+              <a:t>For when the built-in classifier is not enough: subtle textures, classes that differ by architecture rather than colour.</a:t>
+            </a:r>
+            <a:endParaRPr lang="en-US" sz="1700" dirty="0"/>
           </a:p>
         </p:txBody>
       </p:sp>
@@ -13460,118 +13387,119 @@
         </p:nvSpPr>
         <p:spPr>
           <a:xfrm>
-            <a:off x="566928" y="2606040"/>
-            <a:ext cx="11055096" cy="868680"/>
-          </a:xfrm>
-          <a:prstGeom prst="rect">
-            <a:avLst/>
-          </a:prstGeom>
-          <a:noFill/>
-          <a:ln/>
-        </p:spPr>
-        <p:txBody>
-          <a:bodyPr wrap="square" rtlCol="0" anchor="ctr"/>
-          <a:lstStyle/>
-          <a:p>
-            <a:pPr indent="0" marL="0">
-              <a:buNone/>
-            </a:pPr>
-            <a:r>
-              <a:rPr lang="en-US" sz="4000" b="1" dirty="0">
-                <a:solidFill>
-                  <a:srgbClr val="1F4C86"/>
-                </a:solidFill>
-                <a:latin typeface="Trebuchet MS" pitchFamily="34" charset="0"/>
-                <a:ea typeface="Trebuchet MS" pitchFamily="34" charset="-122"/>
-                <a:cs typeface="Trebuchet MS" pitchFamily="34" charset="-120"/>
-              </a:rPr>
-              <a:t>Deep learning</a:t>
-            </a:r>
-            <a:endParaRPr lang="en-US" sz="4000" dirty="0"/>
+            <a:off x="640080" y="1755648"/>
+            <a:ext cx="10963656" cy="4279392"/>
+          </a:xfrm>
+          <a:prstGeom prst="rect">
+            <a:avLst/>
+          </a:prstGeom>
+          <a:noFill/>
+          <a:ln/>
+        </p:spPr>
+        <p:txBody>
+          <a:bodyPr wrap="square" rtlCol="0" anchor="t"/>
+          <a:lstStyle/>
+          <a:p>
+            <a:pPr marL="342900" indent="-342900">
+              <a:lnSpc>
+                <a:spcPct val="105000"/>
+              </a:lnSpc>
+              <a:spcAft>
+                <a:spcPts val="1200"/>
+              </a:spcAft>
+              <a:buSzPct val="100000"/>
+              <a:buChar char="•"/>
+            </a:pPr>
+            <a:r>
+              <a:rPr lang="en-US" sz="2000" dirty="0">
+                <a:solidFill>
+                  <a:srgbClr val="1F2933"/>
+                </a:solidFill>
+                <a:latin typeface="Calibri" pitchFamily="34" charset="0"/>
+                <a:ea typeface="Calibri" pitchFamily="34" charset="-122"/>
+                <a:cs typeface="Calibri" pitchFamily="34" charset="-120"/>
+              </a:rPr>
+              <a:t>Same interaction as the built-in classifier: draw a few sparse regions per class</a:t>
+            </a:r>
+            <a:endParaRPr lang="en-US" sz="2000" dirty="0"/>
+          </a:p>
+          <a:p>
+            <a:pPr marL="342900" indent="-342900">
+              <a:lnSpc>
+                <a:spcPct val="105000"/>
+              </a:lnSpc>
+              <a:spcAft>
+                <a:spcPts val="1200"/>
+              </a:spcAft>
+              <a:buSzPct val="100000"/>
+              <a:buChar char="•"/>
+            </a:pPr>
+            <a:r>
+              <a:rPr lang="en-US" sz="2000" dirty="0">
+                <a:solidFill>
+                  <a:srgbClr val="1F2933"/>
+                </a:solidFill>
+                <a:latin typeface="Calibri" pitchFamily="34" charset="0"/>
+                <a:ea typeface="Calibri" pitchFamily="34" charset="-122"/>
+                <a:cs typeface="Calibri" pitchFamily="34" charset="-120"/>
+              </a:rPr>
+              <a:t>The extension samples training tiles from what you marked — you are steering a sampler</a:t>
+            </a:r>
+            <a:endParaRPr lang="en-US" sz="2000" dirty="0"/>
+          </a:p>
+          <a:p>
+            <a:pPr marL="342900" indent="-342900">
+              <a:lnSpc>
+                <a:spcPct val="105000"/>
+              </a:lnSpc>
+              <a:spcAft>
+                <a:spcPts val="1200"/>
+              </a:spcAft>
+              <a:buSzPct val="100000"/>
+              <a:buChar char="•"/>
+            </a:pPr>
+            <a:r>
+              <a:rPr lang="en-US" sz="2000" dirty="0">
+                <a:solidFill>
+                  <a:srgbClr val="1F2933"/>
+                </a:solidFill>
+                <a:latin typeface="Calibri" pitchFamily="34" charset="0"/>
+                <a:ea typeface="Calibri" pitchFamily="34" charset="-122"/>
+                <a:cs typeface="Calibri" pitchFamily="34" charset="-120"/>
+              </a:rPr>
+              <a:t>Brightfield and multi-channel fluorescence, with per-channel normalisation</a:t>
+            </a:r>
+            <a:endParaRPr lang="en-US" sz="2000" dirty="0"/>
+          </a:p>
+          <a:p>
+            <a:pPr marL="342900" indent="-342900">
+              <a:lnSpc>
+                <a:spcPct val="105000"/>
+              </a:lnSpc>
+              <a:spcAft>
+                <a:spcPts val="1200"/>
+              </a:spcAft>
+              <a:buSzPct val="100000"/>
+              <a:buChar char="•"/>
+            </a:pPr>
+            <a:r>
+              <a:rPr lang="en-US" sz="2000" dirty="0">
+                <a:solidFill>
+                  <a:srgbClr val="1F2933"/>
+                </a:solidFill>
+                <a:latin typeface="Calibri" pitchFamily="34" charset="0"/>
+                <a:ea typeface="Calibri" pitchFamily="34" charset="-122"/>
+                <a:cs typeface="Calibri" pitchFamily="34" charset="-120"/>
+              </a:rPr>
+              <a:t>Train across several project images at once for representative sampling</a:t>
+            </a:r>
+            <a:endParaRPr lang="en-US" sz="2000" dirty="0"/>
           </a:p>
         </p:txBody>
       </p:sp>
       <p:sp>
         <p:nvSpPr>
           <p:cNvPr id="6" name="Text 4"/>
-          <p:cNvSpPr/>
-          <p:nvPr/>
-        </p:nvSpPr>
-        <p:spPr>
-          <a:xfrm>
-            <a:off x="566928" y="3456432"/>
-            <a:ext cx="10140696" cy="731520"/>
-          </a:xfrm>
-          <a:prstGeom prst="rect">
-            <a:avLst/>
-          </a:prstGeom>
-          <a:noFill/>
-          <a:ln/>
-        </p:spPr>
-        <p:txBody>
-          <a:bodyPr wrap="square" rtlCol="0" anchor="t"/>
-          <a:lstStyle/>
-          <a:p>
-            <a:pPr indent="0" marL="0">
-              <a:buNone/>
-            </a:pPr>
-            <a:r>
-              <a:rPr lang="en-US" sz="1900" dirty="0">
-                <a:solidFill>
-                  <a:srgbClr val="5A6675"/>
-                </a:solidFill>
-                <a:latin typeface="Calibri" pitchFamily="34" charset="0"/>
-                <a:ea typeface="Calibri" pitchFamily="34" charset="-122"/>
-                <a:cs typeface="Calibri" pitchFamily="34" charset="-120"/>
-              </a:rPr>
-              <a:t>Pixel classifiers, cell classifiers, and knowing when not to trust them</a:t>
-            </a:r>
-            <a:endParaRPr lang="en-US" sz="1900" dirty="0"/>
-          </a:p>
-        </p:txBody>
-      </p:sp>
-      <p:sp>
-        <p:nvSpPr>
-          <p:cNvPr id="7" name="Text 5"/>
-          <p:cNvSpPr/>
-          <p:nvPr/>
-        </p:nvSpPr>
-        <p:spPr>
-          <a:xfrm>
-            <a:off x="566928" y="6199632"/>
-            <a:ext cx="8229600" cy="365760"/>
-          </a:xfrm>
-          <a:prstGeom prst="rect">
-            <a:avLst/>
-          </a:prstGeom>
-          <a:noFill/>
-          <a:ln/>
-        </p:spPr>
-        <p:txBody>
-          <a:bodyPr wrap="square" rtlCol="0" anchor="ctr"/>
-          <a:lstStyle/>
-          <a:p>
-            <a:pPr indent="0" marL="0">
-              <a:buNone/>
-            </a:pPr>
-            <a:r>
-              <a:rPr lang="en-US" sz="1400" dirty="0">
-                <a:solidFill>
-                  <a:srgbClr val="A8B2BF"/>
-                </a:solidFill>
-                <a:latin typeface="Calibri" pitchFamily="34" charset="0"/>
-                <a:ea typeface="Calibri" pitchFamily="34" charset="-122"/>
-                <a:cs typeface="Calibri" pitchFamily="34" charset="-120"/>
-              </a:rPr>
-              <a:t>michaelsnelson.github.io/BINA-I2K-2026-QuPath-Extensions</a:t>
-            </a:r>
-            <a:endParaRPr lang="en-US" sz="1400" dirty="0"/>
-          </a:p>
-        </p:txBody>
-      </p:sp>
-      <p:sp>
-        <p:nvSpPr>
-          <p:cNvPr id="8" name="Text 6"/>
           <p:cNvSpPr/>
           <p:nvPr/>
         </p:nvSpPr>
@@ -13673,7 +13601,7 @@
                 <a:ea typeface="Trebuchet MS" pitchFamily="34" charset="-122"/>
                 <a:cs typeface="Trebuchet MS" pitchFamily="34" charset="-120"/>
               </a:rPr>
-              <a:t>Deep learning pixel classification</a:t>
+              <a:t>What is underneath</a:t>
             </a:r>
             <a:endParaRPr lang="en-US" sz="3000" dirty="0"/>
           </a:p>
@@ -13707,47 +13635,8 @@
         </p:nvSpPr>
         <p:spPr>
           <a:xfrm>
-            <a:off x="566928" y="1243584"/>
-            <a:ext cx="11055096" cy="384048"/>
-          </a:xfrm>
-          <a:prstGeom prst="rect">
-            <a:avLst/>
-          </a:prstGeom>
-          <a:noFill/>
-          <a:ln/>
-        </p:spPr>
-        <p:txBody>
-          <a:bodyPr wrap="square" rtlCol="0" anchor="ctr"/>
-          <a:lstStyle/>
-          <a:p>
-            <a:pPr indent="0" marL="0">
-              <a:buNone/>
-            </a:pPr>
-            <a:r>
-              <a:rPr lang="en-US" sz="1700" i="1" dirty="0">
-                <a:solidFill>
-                  <a:srgbClr val="5A6675"/>
-                </a:solidFill>
-                <a:latin typeface="Calibri" pitchFamily="34" charset="0"/>
-                <a:ea typeface="Calibri" pitchFamily="34" charset="-122"/>
-                <a:cs typeface="Calibri" pitchFamily="34" charset="-120"/>
-              </a:rPr>
-              <a:t>For when the built-in classifier is not enough: subtle textures, classes that differ by architecture rather than colour.</a:t>
-            </a:r>
-            <a:endParaRPr lang="en-US" sz="1700" dirty="0"/>
-          </a:p>
-        </p:txBody>
-      </p:sp>
-      <p:sp>
-        <p:nvSpPr>
-          <p:cNvPr id="5" name="Text 3"/>
-          <p:cNvSpPr/>
-          <p:nvPr/>
-        </p:nvSpPr>
-        <p:spPr>
-          <a:xfrm>
-            <a:off x="640080" y="1755648"/>
-            <a:ext cx="10963656" cy="4279392"/>
+            <a:off x="640080" y="1481328"/>
+            <a:ext cx="10963656" cy="4553712"/>
           </a:xfrm>
           <a:prstGeom prst="rect">
             <a:avLst/>
@@ -13778,7 +13667,7 @@
                 <a:ea typeface="Calibri" pitchFamily="34" charset="-122"/>
                 <a:cs typeface="Calibri" pitchFamily="34" charset="-120"/>
               </a:rPr>
-              <a:t>Same interaction as the built-in classifier: draw a few sparse regions per class</a:t>
+              <a:t>Your choice of encoder, from lightweight convolutional networks to vision transformers</a:t>
             </a:r>
             <a:endParaRPr lang="en-US" sz="2000" dirty="0"/>
           </a:p>
@@ -13802,7 +13691,7 @@
                 <a:ea typeface="Calibri" pitchFamily="34" charset="-122"/>
                 <a:cs typeface="Calibri" pitchFamily="34" charset="-120"/>
               </a:rPr>
-              <a:t>The extension samples training tiles from what you marked — you are steering a sampler</a:t>
+              <a:t>Start from weights pretrained on histology rather than on everyday photographs</a:t>
             </a:r>
             <a:endParaRPr lang="en-US" sz="2000" dirty="0"/>
           </a:p>
@@ -13826,7 +13715,7 @@
                 <a:ea typeface="Calibri" pitchFamily="34" charset="-122"/>
                 <a:cs typeface="Calibri" pitchFamily="34" charset="-120"/>
               </a:rPr>
-              <a:t>Brightfield and multi-channel fluorescence, with per-channel normalisation</a:t>
+              <a:t>Or from pathology foundation models, downloaded on demand</a:t>
             </a:r>
             <a:endParaRPr lang="en-US" sz="2000" dirty="0"/>
           </a:p>
@@ -13850,7 +13739,7 @@
                 <a:ea typeface="Calibri" pitchFamily="34" charset="-122"/>
                 <a:cs typeface="Calibri" pitchFamily="34" charset="-120"/>
               </a:rPr>
-              <a:t>Train across several project images at once for representative sampling</a:t>
+              <a:t>Normalisation computed over the whole image, which removes tile-boundary artefacts</a:t>
             </a:r>
             <a:endParaRPr lang="en-US" sz="2000" dirty="0"/>
           </a:p>
@@ -13858,7 +13747,71 @@
       </p:sp>
       <p:sp>
         <p:nvSpPr>
+          <p:cNvPr id="5" name="Shape 3"/>
+          <p:cNvSpPr/>
+          <p:nvPr/>
+        </p:nvSpPr>
+        <p:spPr>
+          <a:xfrm>
+            <a:off x="566928" y="5650992"/>
+            <a:ext cx="11055096" cy="566928"/>
+          </a:xfrm>
+          <a:prstGeom prst="rect">
+            <a:avLst/>
+          </a:prstGeom>
+          <a:solidFill>
+            <a:srgbClr val="F4F8FD"/>
+          </a:solidFill>
+          <a:ln w="9525">
+            <a:solidFill>
+              <a:srgbClr val="3674C1"/>
+            </a:solidFill>
+            <a:prstDash val="solid"/>
+          </a:ln>
+        </p:spPr>
+      </p:sp>
+      <p:sp>
+        <p:nvSpPr>
           <p:cNvPr id="6" name="Text 4"/>
+          <p:cNvSpPr/>
+          <p:nvPr/>
+        </p:nvSpPr>
+        <p:spPr>
+          <a:xfrm>
+            <a:off x="768096" y="5650992"/>
+            <a:ext cx="10652760" cy="566928"/>
+          </a:xfrm>
+          <a:prstGeom prst="rect">
+            <a:avLst/>
+          </a:prstGeom>
+          <a:noFill/>
+          <a:ln/>
+        </p:spPr>
+        <p:txBody>
+          <a:bodyPr wrap="square" rtlCol="0" anchor="ctr"/>
+          <a:lstStyle/>
+          <a:p>
+            <a:pPr indent="0" marL="0">
+              <a:buNone/>
+            </a:pPr>
+            <a:r>
+              <a:rPr lang="en-US" sz="1600" b="1" dirty="0">
+                <a:solidFill>
+                  <a:srgbClr val="1F4C86"/>
+                </a:solidFill>
+                <a:latin typeface="Calibri" pitchFamily="34" charset="0"/>
+                <a:ea typeface="Calibri" pitchFamily="34" charset="-122"/>
+                <a:cs typeface="Calibri" pitchFamily="34" charset="-120"/>
+              </a:rPr>
+              <a:t>Training needs a dedicated GPU. That is why training is a demonstration and inference is the exercise.</a:t>
+            </a:r>
+            <a:endParaRPr lang="en-US" sz="1600" dirty="0"/>
+          </a:p>
+        </p:txBody>
+      </p:sp>
+      <p:sp>
+        <p:nvSpPr>
+          <p:cNvPr id="7" name="Text 5"/>
           <p:cNvSpPr/>
           <p:nvPr/>
         </p:nvSpPr>
@@ -13960,7 +13913,7 @@
                 <a:ea typeface="Trebuchet MS" pitchFamily="34" charset="-122"/>
                 <a:cs typeface="Trebuchet MS" pitchFamily="34" charset="-120"/>
               </a:rPr>
-              <a:t>What is underneath</a:t>
+              <a:t>The two most important features</a:t>
             </a:r>
             <a:endParaRPr lang="en-US" sz="3000" dirty="0"/>
           </a:p>
@@ -14026,7 +13979,31 @@
                 <a:ea typeface="Calibri" pitchFamily="34" charset="-122"/>
                 <a:cs typeface="Calibri" pitchFamily="34" charset="-120"/>
               </a:rPr>
-              <a:t>Your choice of encoder, from lightweight convolutional networks to vision transformers</a:t>
+              <a:t>Full per-pixel probability maps, not just the winning class</a:t>
+            </a:r>
+            <a:endParaRPr lang="en-US" sz="2000" dirty="0"/>
+          </a:p>
+          <a:p>
+            <a:pPr lvl="1" marL="685800" indent="-342900">
+              <a:lnSpc>
+                <a:spcPct val="105000"/>
+              </a:lnSpc>
+              <a:spcAft>
+                <a:spcPts val="800"/>
+              </a:spcAft>
+              <a:buSzPct val="100000"/>
+              <a:buChar char="▪"/>
+            </a:pPr>
+            <a:r>
+              <a:rPr lang="en-US" sz="1700" dirty="0">
+                <a:solidFill>
+                  <a:srgbClr val="5A6675"/>
+                </a:solidFill>
+                <a:latin typeface="Calibri" pitchFamily="34" charset="0"/>
+                <a:ea typeface="Calibri" pitchFamily="34" charset="-122"/>
+                <a:cs typeface="Calibri" pitchFamily="34" charset="-120"/>
+              </a:rPr>
+              <a:t>The honest uncertainty is at the boundaries between classes — go and look at it</a:t>
             </a:r>
             <a:endParaRPr lang="en-US" sz="2000" dirty="0"/>
           </a:p>
@@ -14050,55 +14027,31 @@
                 <a:ea typeface="Calibri" pitchFamily="34" charset="-122"/>
                 <a:cs typeface="Calibri" pitchFamily="34" charset="-120"/>
               </a:rPr>
-              <a:t>Start from weights pretrained on histology rather than on everyday photographs</a:t>
+              <a:t>An out-of-distribution warning before inference, when an image no longer resembles the training data</a:t>
             </a:r>
             <a:endParaRPr lang="en-US" sz="2000" dirty="0"/>
           </a:p>
           <a:p>
-            <a:pPr marL="342900" indent="-342900">
+            <a:pPr lvl="1" marL="685800" indent="-342900">
               <a:lnSpc>
                 <a:spcPct val="105000"/>
               </a:lnSpc>
               <a:spcAft>
-                <a:spcPts val="1200"/>
+                <a:spcPts val="800"/>
               </a:spcAft>
               <a:buSzPct val="100000"/>
-              <a:buChar char="•"/>
-            </a:pPr>
-            <a:r>
-              <a:rPr lang="en-US" sz="2000" dirty="0">
-                <a:solidFill>
-                  <a:srgbClr val="1F2933"/>
-                </a:solidFill>
-                <a:latin typeface="Calibri" pitchFamily="34" charset="0"/>
-                <a:ea typeface="Calibri" pitchFamily="34" charset="-122"/>
-                <a:cs typeface="Calibri" pitchFamily="34" charset="-120"/>
-              </a:rPr>
-              <a:t>Or from pathology foundation models, downloaded on demand</a:t>
-            </a:r>
-            <a:endParaRPr lang="en-US" sz="2000" dirty="0"/>
-          </a:p>
-          <a:p>
-            <a:pPr marL="342900" indent="-342900">
-              <a:lnSpc>
-                <a:spcPct val="105000"/>
-              </a:lnSpc>
-              <a:spcAft>
-                <a:spcPts val="1200"/>
-              </a:spcAft>
-              <a:buSzPct val="100000"/>
-              <a:buChar char="•"/>
-            </a:pPr>
-            <a:r>
-              <a:rPr lang="en-US" sz="2000" dirty="0">
-                <a:solidFill>
-                  <a:srgbClr val="1F2933"/>
-                </a:solidFill>
-                <a:latin typeface="Calibri" pitchFamily="34" charset="0"/>
-                <a:ea typeface="Calibri" pitchFamily="34" charset="-122"/>
-                <a:cs typeface="Calibri" pitchFamily="34" charset="-120"/>
-              </a:rPr>
-              <a:t>Normalisation computed over the whole image, which removes tile-boundary artefacts</a:t>
+              <a:buChar char="▪"/>
+            </a:pPr>
+            <a:r>
+              <a:rPr lang="en-US" sz="1700" dirty="0">
+                <a:solidFill>
+                  <a:srgbClr val="5A6675"/>
+                </a:solidFill>
+                <a:latin typeface="Calibri" pitchFamily="34" charset="0"/>
+                <a:ea typeface="Calibri" pitchFamily="34" charset="-122"/>
+                <a:cs typeface="Calibri" pitchFamily="34" charset="-120"/>
+              </a:rPr>
+              <a:t>Catches stain, exposure and sensor changes that would quietly degrade predictions</a:t>
             </a:r>
             <a:endParaRPr lang="en-US" sz="2000" dirty="0"/>
           </a:p>
@@ -14162,7 +14115,7 @@
                 <a:ea typeface="Calibri" pitchFamily="34" charset="-122"/>
                 <a:cs typeface="Calibri" pitchFamily="34" charset="-120"/>
               </a:rPr>
-              <a:t>Training needs a dedicated GPU. That is why training is a demonstration and inference is the exercise.</a:t>
+              <a:t>These are the features that tell you when not to trust the output, and the easiest to ignore.</a:t>
             </a:r>
             <a:endParaRPr lang="en-US" sz="1600" dirty="0"/>
           </a:p>
@@ -14272,7 +14225,7 @@
                 <a:ea typeface="Trebuchet MS" pitchFamily="34" charset="-122"/>
                 <a:cs typeface="Trebuchet MS" pitchFamily="34" charset="-120"/>
               </a:rPr>
-              <a:t>The two most important features</a:t>
+              <a:t>When the model stops working</a:t>
             </a:r>
             <a:endParaRPr lang="en-US" sz="3000" dirty="0"/>
           </a:p>
@@ -14306,8 +14259,47 @@
         </p:nvSpPr>
         <p:spPr>
           <a:xfrm>
-            <a:off x="640080" y="1481328"/>
-            <a:ext cx="10963656" cy="4553712"/>
+            <a:off x="566928" y="1243584"/>
+            <a:ext cx="11055096" cy="384048"/>
+          </a:xfrm>
+          <a:prstGeom prst="rect">
+            <a:avLst/>
+          </a:prstGeom>
+          <a:noFill/>
+          <a:ln/>
+        </p:spPr>
+        <p:txBody>
+          <a:bodyPr wrap="square" rtlCol="0" anchor="ctr"/>
+          <a:lstStyle/>
+          <a:p>
+            <a:pPr indent="0" marL="0">
+              <a:buNone/>
+            </a:pPr>
+            <a:r>
+              <a:rPr lang="en-US" sz="1700" i="1" dirty="0">
+                <a:solidFill>
+                  <a:srgbClr val="5A6675"/>
+                </a:solidFill>
+                <a:latin typeface="Calibri" pitchFamily="34" charset="0"/>
+                <a:ea typeface="Calibri" pitchFamily="34" charset="-122"/>
+                <a:cs typeface="Calibri" pitchFamily="34" charset="-120"/>
+              </a:rPr>
+              <a:t>Domain shift is the practical problem, far more often than model architecture.</a:t>
+            </a:r>
+            <a:endParaRPr lang="en-US" sz="1700" dirty="0"/>
+          </a:p>
+        </p:txBody>
+      </p:sp>
+      <p:sp>
+        <p:nvSpPr>
+          <p:cNvPr id="5" name="Text 3"/>
+          <p:cNvSpPr/>
+          <p:nvPr/>
+        </p:nvSpPr>
+        <p:spPr>
+          <a:xfrm>
+            <a:off x="640080" y="1755648"/>
+            <a:ext cx="10963656" cy="4279392"/>
           </a:xfrm>
           <a:prstGeom prst="rect">
             <a:avLst/>
@@ -14338,31 +14330,7 @@
                 <a:ea typeface="Calibri" pitchFamily="34" charset="-122"/>
                 <a:cs typeface="Calibri" pitchFamily="34" charset="-120"/>
               </a:rPr>
-              <a:t>Full per-pixel probability maps, not just the winning class</a:t>
-            </a:r>
-            <a:endParaRPr lang="en-US" sz="2000" dirty="0"/>
-          </a:p>
-          <a:p>
-            <a:pPr lvl="1" marL="685800" indent="-342900">
-              <a:lnSpc>
-                <a:spcPct val="105000"/>
-              </a:lnSpc>
-              <a:spcAft>
-                <a:spcPts val="800"/>
-              </a:spcAft>
-              <a:buSzPct val="100000"/>
-              <a:buChar char="▪"/>
-            </a:pPr>
-            <a:r>
-              <a:rPr lang="en-US" sz="1700" dirty="0">
-                <a:solidFill>
-                  <a:srgbClr val="5A6675"/>
-                </a:solidFill>
-                <a:latin typeface="Calibri" pitchFamily="34" charset="0"/>
-                <a:ea typeface="Calibri" pitchFamily="34" charset="-122"/>
-                <a:cs typeface="Calibri" pitchFamily="34" charset="-120"/>
-              </a:rPr>
-              <a:t>The honest uncertainty is at the boundaries between classes — go and look at it</a:t>
+              <a:t>A new scanner, a new stain, a new batch — and last month’s model degrades</a:t>
             </a:r>
             <a:endParaRPr lang="en-US" sz="2000" dirty="0"/>
           </a:p>
@@ -14386,31 +14354,31 @@
                 <a:ea typeface="Calibri" pitchFamily="34" charset="-122"/>
                 <a:cs typeface="Calibri" pitchFamily="34" charset="-120"/>
               </a:rPr>
-              <a:t>An out-of-distribution warning before inference, when an image no longer resembles the training data</a:t>
+              <a:t>Recalibrating to the current image takes seconds and no retraining at all</a:t>
             </a:r>
             <a:endParaRPr lang="en-US" sz="2000" dirty="0"/>
           </a:p>
           <a:p>
-            <a:pPr lvl="1" marL="685800" indent="-342900">
+            <a:pPr marL="342900" indent="-342900">
               <a:lnSpc>
                 <a:spcPct val="105000"/>
               </a:lnSpc>
               <a:spcAft>
-                <a:spcPts val="800"/>
+                <a:spcPts val="1200"/>
               </a:spcAft>
               <a:buSzPct val="100000"/>
-              <a:buChar char="▪"/>
-            </a:pPr>
-            <a:r>
-              <a:rPr lang="en-US" sz="1700" dirty="0">
-                <a:solidFill>
-                  <a:srgbClr val="5A6675"/>
-                </a:solidFill>
-                <a:latin typeface="Calibri" pitchFamily="34" charset="0"/>
-                <a:ea typeface="Calibri" pitchFamily="34" charset="-122"/>
-                <a:cs typeface="Calibri" pitchFamily="34" charset="-120"/>
-              </a:rPr>
-              <a:t>Catches stain, exposure and sensor changes that would quietly degrade predictions</a:t>
+              <a:buChar char="•"/>
+            </a:pPr>
+            <a:r>
+              <a:rPr lang="en-US" sz="2000" dirty="0">
+                <a:solidFill>
+                  <a:srgbClr val="1F2933"/>
+                </a:solidFill>
+                <a:latin typeface="Calibri" pitchFamily="34" charset="0"/>
+                <a:ea typeface="Calibri" pitchFamily="34" charset="-122"/>
+                <a:cs typeface="Calibri" pitchFamily="34" charset="-120"/>
+              </a:rPr>
+              <a:t>Or adapt the model to your own unlabelled data before committing to a full retrain</a:t>
             </a:r>
             <a:endParaRPr lang="en-US" sz="2000" dirty="0"/>
           </a:p>
@@ -14418,7 +14386,7 @@
       </p:sp>
       <p:sp>
         <p:nvSpPr>
-          <p:cNvPr id="5" name="Shape 3"/>
+          <p:cNvPr id="6" name="Shape 4"/>
           <p:cNvSpPr/>
           <p:nvPr/>
         </p:nvSpPr>
@@ -14443,7 +14411,7 @@
       </p:sp>
       <p:sp>
         <p:nvSpPr>
-          <p:cNvPr id="6" name="Text 4"/>
+          <p:cNvPr id="7" name="Text 5"/>
           <p:cNvSpPr/>
           <p:nvPr/>
         </p:nvSpPr>
@@ -14474,7 +14442,7 @@
                 <a:ea typeface="Calibri" pitchFamily="34" charset="-122"/>
                 <a:cs typeface="Calibri" pitchFamily="34" charset="-120"/>
               </a:rPr>
-              <a:t>These are the features that tell you when not to trust the output, and the easiest to ignore.</a:t>
+              <a:t>Try recalibration before you consider retraining. It usually recovers most of the loss.</a:t>
             </a:r>
             <a:endParaRPr lang="en-US" sz="1600" dirty="0"/>
           </a:p>
@@ -14482,7 +14450,7 @@
       </p:sp>
       <p:sp>
         <p:nvSpPr>
-          <p:cNvPr id="7" name="Text 5"/>
+          <p:cNvPr id="8" name="Text 6"/>
           <p:cNvSpPr/>
           <p:nvPr/>
         </p:nvSpPr>
@@ -14584,7 +14552,7 @@
                 <a:ea typeface="Trebuchet MS" pitchFamily="34" charset="-122"/>
                 <a:cs typeface="Trebuchet MS" pitchFamily="34" charset="-120"/>
               </a:rPr>
-              <a:t>When the model stops working</a:t>
+              <a:t>QP-CAT — multiplexed cell analysis</a:t>
             </a:r>
             <a:endParaRPr lang="en-US" sz="3000" dirty="0"/>
           </a:p>
@@ -14643,7 +14611,7 @@
                 <a:ea typeface="Calibri" pitchFamily="34" charset="-122"/>
                 <a:cs typeface="Calibri" pitchFamily="34" charset="-120"/>
               </a:rPr>
-              <a:t>Domain shift is the practical problem, far more often than model architecture.</a:t>
+              <a:t>The usual workflow loses the link back to the tissue. This keeps it.</a:t>
             </a:r>
             <a:endParaRPr lang="en-US" sz="1700" dirty="0"/>
           </a:p>
@@ -14689,7 +14657,7 @@
                 <a:ea typeface="Calibri" pitchFamily="34" charset="-122"/>
                 <a:cs typeface="Calibri" pitchFamily="34" charset="-120"/>
               </a:rPr>
-              <a:t>A new scanner, a new stain, a new batch — and last month’s model degrades</a:t>
+              <a:t>The full scientific Python stack embedded in QuPath. No environments to manage</a:t>
             </a:r>
             <a:endParaRPr lang="en-US" sz="2000" dirty="0"/>
           </a:p>
@@ -14713,7 +14681,7 @@
                 <a:ea typeface="Calibri" pitchFamily="34" charset="-122"/>
                 <a:cs typeface="Calibri" pitchFamily="34" charset="-120"/>
               </a:rPr>
-              <a:t>Recalibrating to the current image takes seconds and no retraining at all</a:t>
+              <a:t>Clustering, marker gating with suggested thresholds, spatial statistics, batch correction</a:t>
             </a:r>
             <a:endParaRPr lang="en-US" sz="2000" dirty="0"/>
           </a:p>
@@ -14737,7 +14705,55 @@
                 <a:ea typeface="Calibri" pitchFamily="34" charset="-122"/>
                 <a:cs typeface="Calibri" pitchFamily="34" charset="-120"/>
               </a:rPr>
-              <a:t>Or adapt the model to your own unlabelled data before committing to a full retrain</a:t>
+              <a:t>Label a small subset by hand and have the rest of the project labelled for you</a:t>
+            </a:r>
+            <a:endParaRPr lang="en-US" sz="2000" dirty="0"/>
+          </a:p>
+          <a:p>
+            <a:pPr marL="342900" indent="-342900">
+              <a:lnSpc>
+                <a:spcPct val="105000"/>
+              </a:lnSpc>
+              <a:spcAft>
+                <a:spcPts val="1200"/>
+              </a:spcAft>
+              <a:buSzPct val="100000"/>
+              <a:buChar char="•"/>
+            </a:pPr>
+            <a:r>
+              <a:rPr lang="en-US" sz="2000" dirty="0">
+                <a:solidFill>
+                  <a:srgbClr val="1F2933"/>
+                </a:solidFill>
+                <a:latin typeface="Calibri" pitchFamily="34" charset="0"/>
+                <a:ea typeface="Calibri" pitchFamily="34" charset="-122"/>
+                <a:cs typeface="Calibri" pitchFamily="34" charset="-120"/>
+              </a:rPr>
+              <a:t>Brush a region of the embedding and those cells highlight on the slide</a:t>
+            </a:r>
+            <a:endParaRPr lang="en-US" sz="2000" dirty="0"/>
+          </a:p>
+          <a:p>
+            <a:pPr marL="342900" indent="-342900">
+              <a:lnSpc>
+                <a:spcPct val="105000"/>
+              </a:lnSpc>
+              <a:spcAft>
+                <a:spcPts val="1200"/>
+              </a:spcAft>
+              <a:buSzPct val="100000"/>
+              <a:buChar char="•"/>
+            </a:pPr>
+            <a:r>
+              <a:rPr lang="en-US" sz="2000" dirty="0">
+                <a:solidFill>
+                  <a:srgbClr val="1F2933"/>
+                </a:solidFill>
+                <a:latin typeface="Calibri" pitchFamily="34" charset="0"/>
+                <a:ea typeface="Calibri" pitchFamily="34" charset="-122"/>
+                <a:cs typeface="Calibri" pitchFamily="34" charset="-120"/>
+              </a:rPr>
+              <a:t>Separate tissue stays separate — no spatial graph edge ever crosses two TMA cores</a:t>
             </a:r>
             <a:endParaRPr lang="en-US" sz="2000" dirty="0"/>
           </a:p>
@@ -14801,7 +14817,7 @@
                 <a:ea typeface="Calibri" pitchFamily="34" charset="-122"/>
                 <a:cs typeface="Calibri" pitchFamily="34" charset="-120"/>
               </a:rPr>
-              <a:t>Try recalibration before you consider retraining. It usually recovers most of the loss.</a:t>
+              <a:t>Author’s own warning: many features are lightly tested. Treat results as a starting point.</a:t>
             </a:r>
             <a:endParaRPr lang="en-US" sz="1600" dirty="0"/>
           </a:p>
@@ -14911,7 +14927,7 @@
                 <a:ea typeface="Trebuchet MS" pitchFamily="34" charset="-122"/>
                 <a:cs typeface="Trebuchet MS" pitchFamily="34" charset="-120"/>
               </a:rPr>
-              <a:t>QP-CAT — multiplexed cell analysis</a:t>
+              <a:t>You can check the answer</a:t>
             </a:r>
             <a:endParaRPr lang="en-US" sz="3000" dirty="0"/>
           </a:p>
@@ -14970,7 +14986,7 @@
                 <a:ea typeface="Calibri" pitchFamily="34" charset="-122"/>
                 <a:cs typeface="Calibri" pitchFamily="34" charset="-120"/>
               </a:rPr>
-              <a:t>The usual workflow loses the link back to the tissue. This keeps it.</a:t>
+              <a:t>Learn what a correct result looks like, so you can recognise a wrong one later.</a:t>
             </a:r>
             <a:endParaRPr lang="en-US" sz="1700" dirty="0"/>
           </a:p>
@@ -15016,7 +15032,7 @@
                 <a:ea typeface="Calibri" pitchFamily="34" charset="-122"/>
                 <a:cs typeface="Calibri" pitchFamily="34" charset="-120"/>
               </a:rPr>
-              <a:t>The full scientific Python stack embedded in QuPath. No environments to manage</a:t>
+              <a:t>Real multiplexed tissue has no ground truth — you never know which cell is really which type</a:t>
             </a:r>
             <a:endParaRPr lang="en-US" sz="2000" dirty="0"/>
           </a:p>
@@ -15040,7 +15056,7 @@
                 <a:ea typeface="Calibri" pitchFamily="34" charset="-122"/>
                 <a:cs typeface="Calibri" pitchFamily="34" charset="-120"/>
               </a:rPr>
-              <a:t>Clustering, marker gating with suggested thresholds, spatial statistics, batch correction</a:t>
+              <a:t>So the exercise uses a synthetic tumour microenvironment where every cell is labelled</a:t>
             </a:r>
             <a:endParaRPr lang="en-US" sz="2000" dirty="0"/>
           </a:p>
@@ -15064,7 +15080,7 @@
                 <a:ea typeface="Calibri" pitchFamily="34" charset="-122"/>
                 <a:cs typeface="Calibri" pitchFamily="34" charset="-120"/>
               </a:rPr>
-              <a:t>Label a small subset by hand and have the rest of the project labelled for you</a:t>
+              <a:t>Six cell types, tumour nests, an immune-infiltrated boundary, B-cell follicles, a proliferation gradient</a:t>
             </a:r>
             <a:endParaRPr lang="en-US" sz="2000" dirty="0"/>
           </a:p>
@@ -15088,7 +15104,7 @@
                 <a:ea typeface="Calibri" pitchFamily="34" charset="-122"/>
                 <a:cs typeface="Calibri" pitchFamily="34" charset="-120"/>
               </a:rPr>
-              <a:t>Brush a region of the embedding and those cells highlight on the slide</a:t>
+              <a:t>Inflamed versus desert: one image is 55% lymphoid, another 14% with no follicles at all</a:t>
             </a:r>
             <a:endParaRPr lang="en-US" sz="2000" dirty="0"/>
           </a:p>
@@ -15112,7 +15128,7 @@
                 <a:ea typeface="Calibri" pitchFamily="34" charset="-122"/>
                 <a:cs typeface="Calibri" pitchFamily="34" charset="-120"/>
               </a:rPr>
-              <a:t>Separate tissue stays separate — no spatial graph edge ever crosses two TMA cores</a:t>
+              <a:t>20 MB, public domain, and it downloads straight from GitHub</a:t>
             </a:r>
             <a:endParaRPr lang="en-US" sz="2000" dirty="0"/>
           </a:p>
@@ -15176,7 +15192,7 @@
                 <a:ea typeface="Calibri" pitchFamily="34" charset="-122"/>
                 <a:cs typeface="Calibri" pitchFamily="34" charset="-120"/>
               </a:rPr>
-              <a:t>Author’s own warning: many features are lightly tested. Treat results as a starting point.</a:t>
+              <a:t>Cluster it, then click a boundary cell and find out whether the cluster was telling the truth.</a:t>
             </a:r>
             <a:endParaRPr lang="en-US" sz="1600" dirty="0"/>
           </a:p>
@@ -15286,7 +15302,7 @@
                 <a:ea typeface="Trebuchet MS" pitchFamily="34" charset="-122"/>
                 <a:cs typeface="Trebuchet MS" pitchFamily="34" charset="-120"/>
               </a:rPr>
-              <a:t>You can check the answer</a:t>
+              <a:t>And getting back to the tissue</a:t>
             </a:r>
             <a:endParaRPr lang="en-US" sz="3000" dirty="0"/>
           </a:p>
@@ -15345,7 +15361,7 @@
                 <a:ea typeface="Calibri" pitchFamily="34" charset="-122"/>
                 <a:cs typeface="Calibri" pitchFamily="34" charset="-120"/>
               </a:rPr>
-              <a:t>Learn what a correct result looks like, so you can recognise a wrong one later.</a:t>
+              <a:t>A mention rather than a demo — it is the navigation half of the clustering you just saw.</a:t>
             </a:r>
             <a:endParaRPr lang="en-US" sz="1700" dirty="0"/>
           </a:p>
@@ -15391,7 +15407,7 @@
                 <a:ea typeface="Calibri" pitchFamily="34" charset="-122"/>
                 <a:cs typeface="Calibri" pitchFamily="34" charset="-120"/>
               </a:rPr>
-              <a:t>Real multiplexed tissue has no ground truth — you never know which cell is really which type</a:t>
+              <a:t>Clustering answers "which cells group together". It does not answer "which cell is that"</a:t>
             </a:r>
             <a:endParaRPr lang="en-US" sz="2000" dirty="0"/>
           </a:p>
@@ -15415,7 +15431,7 @@
                 <a:ea typeface="Calibri" pitchFamily="34" charset="-122"/>
                 <a:cs typeface="Calibri" pitchFamily="34" charset="-120"/>
               </a:rPr>
-              <a:t>So the exercise uses a synthetic tumour microenvironment where every cell is labelled</a:t>
+              <a:t>Cluster 3D Navigator: a rotatable point cloud, one point per cell, coloured by class</a:t>
             </a:r>
             <a:endParaRPr lang="en-US" sz="2000" dirty="0"/>
           </a:p>
@@ -15439,7 +15455,7 @@
                 <a:ea typeface="Calibri" pitchFamily="34" charset="-122"/>
                 <a:cs typeface="Calibri" pitchFamily="34" charset="-120"/>
               </a:rPr>
-              <a:t>Six cell types, tumour nests, an immune-infiltrated boundary, B-cell follicles, a proliferation gradient</a:t>
+              <a:t>Click a point in cluster space and land on that cell in the viewer</a:t>
             </a:r>
             <a:endParaRPr lang="en-US" sz="2000" dirty="0"/>
           </a:p>
@@ -15463,31 +15479,7 @@
                 <a:ea typeface="Calibri" pitchFamily="34" charset="-122"/>
                 <a:cs typeface="Calibri" pitchFamily="34" charset="-120"/>
               </a:rPr>
-              <a:t>Inflamed versus desert: one image is 55% lymphoid, another 14% with no follicles at all</a:t>
-            </a:r>
-            <a:endParaRPr lang="en-US" sz="2000" dirty="0"/>
-          </a:p>
-          <a:p>
-            <a:pPr marL="342900" indent="-342900">
-              <a:lnSpc>
-                <a:spcPct val="105000"/>
-              </a:lnSpc>
-              <a:spcAft>
-                <a:spcPts val="1200"/>
-              </a:spcAft>
-              <a:buSzPct val="100000"/>
-              <a:buChar char="•"/>
-            </a:pPr>
-            <a:r>
-              <a:rPr lang="en-US" sz="2000" dirty="0">
-                <a:solidFill>
-                  <a:srgbClr val="1F2933"/>
-                </a:solidFill>
-                <a:latin typeface="Calibri" pitchFamily="34" charset="0"/>
-                <a:ea typeface="Calibri" pitchFamily="34" charset="-122"/>
-                <a:cs typeface="Calibri" pitchFamily="34" charset="-120"/>
-              </a:rPr>
-              <a:t>20 MB, public domain, and it downloads straight from GitHub</a:t>
+              <a:t>Boundary cells are where classification errors live — this makes them one click away</a:t>
             </a:r>
             <a:endParaRPr lang="en-US" sz="2000" dirty="0"/>
           </a:p>
@@ -15551,7 +15543,7 @@
                 <a:ea typeface="Calibri" pitchFamily="34" charset="-122"/>
                 <a:cs typeface="Calibri" pitchFamily="34" charset="-120"/>
               </a:rPr>
-              <a:t>Cluster it, then click a boundary cell and find out whether the cluster was telling the truth.</a:t>
+              <a:t>Works with any clustering tool’s output, not just QP-CAT’s. It only reads; it writes nothing.</a:t>
             </a:r>
             <a:endParaRPr lang="en-US" sz="1600" dirty="0"/>
           </a:p>
@@ -15630,14 +15622,54 @@
       </p:grpSpPr>
       <p:sp>
         <p:nvSpPr>
-          <p:cNvPr id="2" name="Text 0"/>
-          <p:cNvSpPr/>
-          <p:nvPr/>
-        </p:nvSpPr>
-        <p:spPr>
-          <a:xfrm>
-            <a:off x="566928" y="384048"/>
-            <a:ext cx="11055096" cy="658368"/>
+          <p:cNvPr id="2" name="Shape 0"/>
+          <p:cNvSpPr/>
+          <p:nvPr/>
+        </p:nvSpPr>
+        <p:spPr>
+          <a:xfrm>
+            <a:off x="0" y="1417320"/>
+            <a:ext cx="12188952" cy="3108960"/>
+          </a:xfrm>
+          <a:prstGeom prst="rect">
+            <a:avLst/>
+          </a:prstGeom>
+          <a:solidFill>
+            <a:srgbClr val="E8F0FA"/>
+          </a:solidFill>
+          <a:ln/>
+        </p:spPr>
+      </p:sp>
+      <p:sp>
+        <p:nvSpPr>
+          <p:cNvPr id="3" name="Shape 1"/>
+          <p:cNvSpPr/>
+          <p:nvPr/>
+        </p:nvSpPr>
+        <p:spPr>
+          <a:xfrm>
+            <a:off x="0" y="1417320"/>
+            <a:ext cx="201168" cy="3108960"/>
+          </a:xfrm>
+          <a:prstGeom prst="rect">
+            <a:avLst/>
+          </a:prstGeom>
+          <a:solidFill>
+            <a:srgbClr val="3674C1"/>
+          </a:solidFill>
+          <a:ln/>
+        </p:spPr>
+      </p:sp>
+      <p:sp>
+        <p:nvSpPr>
+          <p:cNvPr id="4" name="Text 2"/>
+          <p:cNvSpPr/>
+          <p:nvPr/>
+        </p:nvSpPr>
+        <p:spPr>
+          <a:xfrm>
+            <a:off x="566928" y="1691640"/>
+            <a:ext cx="1828800" cy="914400"/>
           </a:xfrm>
           <a:prstGeom prst="rect">
             <a:avLst/>
@@ -15653,193 +15685,30 @@
               <a:buNone/>
             </a:pPr>
             <a:r>
-              <a:rPr lang="en-US" sz="3000" b="1" dirty="0">
-                <a:solidFill>
-                  <a:srgbClr val="1F4C86"/>
+              <a:rPr lang="en-US" sz="5400" b="1" dirty="0">
+                <a:solidFill>
+                  <a:srgbClr val="3674C1"/>
                 </a:solidFill>
                 <a:latin typeface="Trebuchet MS" pitchFamily="34" charset="0"/>
                 <a:ea typeface="Trebuchet MS" pitchFamily="34" charset="-122"/>
                 <a:cs typeface="Trebuchet MS" pitchFamily="34" charset="-120"/>
               </a:rPr>
-              <a:t>Cluster 3D Navigator</a:t>
-            </a:r>
-            <a:endParaRPr lang="en-US" sz="3000" dirty="0"/>
-          </a:p>
-        </p:txBody>
-      </p:sp>
-      <p:sp>
-        <p:nvSpPr>
-          <p:cNvPr id="3" name="Shape 1"/>
-          <p:cNvSpPr/>
-          <p:nvPr/>
-        </p:nvSpPr>
-        <p:spPr>
-          <a:xfrm>
-            <a:off x="566928" y="1097280"/>
-            <a:ext cx="1920240" cy="50292"/>
-          </a:xfrm>
-          <a:prstGeom prst="rect">
-            <a:avLst/>
-          </a:prstGeom>
-          <a:solidFill>
-            <a:srgbClr val="3674C1"/>
-          </a:solidFill>
-          <a:ln/>
-        </p:spPr>
-      </p:sp>
-      <p:sp>
-        <p:nvSpPr>
-          <p:cNvPr id="4" name="Text 2"/>
-          <p:cNvSpPr/>
-          <p:nvPr/>
-        </p:nvSpPr>
-        <p:spPr>
-          <a:xfrm>
-            <a:off x="640080" y="1481328"/>
-            <a:ext cx="10963656" cy="4553712"/>
-          </a:xfrm>
-          <a:prstGeom prst="rect">
-            <a:avLst/>
-          </a:prstGeom>
-          <a:noFill/>
-          <a:ln/>
-        </p:spPr>
-        <p:txBody>
-          <a:bodyPr wrap="square" rtlCol="0" anchor="t"/>
-          <a:lstStyle/>
-          <a:p>
-            <a:pPr marL="342900" indent="-342900">
-              <a:lnSpc>
-                <a:spcPct val="105000"/>
-              </a:lnSpc>
-              <a:spcAft>
-                <a:spcPts val="1200"/>
-              </a:spcAft>
-              <a:buSzPct val="100000"/>
-              <a:buChar char="•"/>
-            </a:pPr>
-            <a:r>
-              <a:rPr lang="en-US" sz="2000" dirty="0">
-                <a:solidFill>
-                  <a:srgbClr val="1F2933"/>
-                </a:solidFill>
-                <a:latin typeface="Calibri" pitchFamily="34" charset="0"/>
-                <a:ea typeface="Calibri" pitchFamily="34" charset="-122"/>
-                <a:cs typeface="Calibri" pitchFamily="34" charset="-120"/>
-              </a:rPr>
-              <a:t>A rotatable point cloud of your cells, one point per detection, coloured by class</a:t>
-            </a:r>
-            <a:endParaRPr lang="en-US" sz="2000" dirty="0"/>
-          </a:p>
-          <a:p>
-            <a:pPr marL="342900" indent="-342900">
-              <a:lnSpc>
-                <a:spcPct val="105000"/>
-              </a:lnSpc>
-              <a:spcAft>
-                <a:spcPts val="1200"/>
-              </a:spcAft>
-              <a:buSzPct val="100000"/>
-              <a:buChar char="•"/>
-            </a:pPr>
-            <a:r>
-              <a:rPr lang="en-US" sz="2000" dirty="0">
-                <a:solidFill>
-                  <a:srgbClr val="1F2933"/>
-                </a:solidFill>
-                <a:latin typeface="Calibri" pitchFamily="34" charset="0"/>
-                <a:ea typeface="Calibri" pitchFamily="34" charset="-122"/>
-                <a:cs typeface="Calibri" pitchFamily="34" charset="-120"/>
-              </a:rPr>
-              <a:t>Click a point and land on that cell in the viewer</a:t>
-            </a:r>
-            <a:endParaRPr lang="en-US" sz="2000" dirty="0"/>
-          </a:p>
-          <a:p>
-            <a:pPr marL="342900" indent="-342900">
-              <a:lnSpc>
-                <a:spcPct val="105000"/>
-              </a:lnSpc>
-              <a:spcAft>
-                <a:spcPts val="1200"/>
-              </a:spcAft>
-              <a:buSzPct val="100000"/>
-              <a:buChar char="•"/>
-            </a:pPr>
-            <a:r>
-              <a:rPr lang="en-US" sz="2000" dirty="0">
-                <a:solidFill>
-                  <a:srgbClr val="1F2933"/>
-                </a:solidFill>
-                <a:latin typeface="Calibri" pitchFamily="34" charset="0"/>
-                <a:ea typeface="Calibri" pitchFamily="34" charset="-122"/>
-                <a:cs typeface="Calibri" pitchFamily="34" charset="-120"/>
-              </a:rPr>
-              <a:t>Structure that two dimensions hide is often obvious the moment you rotate</a:t>
-            </a:r>
-            <a:endParaRPr lang="en-US" sz="2000" dirty="0"/>
-          </a:p>
-          <a:p>
-            <a:pPr marL="342900" indent="-342900">
-              <a:lnSpc>
-                <a:spcPct val="105000"/>
-              </a:lnSpc>
-              <a:spcAft>
-                <a:spcPts val="1200"/>
-              </a:spcAft>
-              <a:buSzPct val="100000"/>
-              <a:buChar char="•"/>
-            </a:pPr>
-            <a:r>
-              <a:rPr lang="en-US" sz="2000" dirty="0">
-                <a:solidFill>
-                  <a:srgbClr val="1F2933"/>
-                </a:solidFill>
-                <a:latin typeface="Calibri" pitchFamily="34" charset="0"/>
-                <a:ea typeface="Calibri" pitchFamily="34" charset="-122"/>
-                <a:cs typeface="Calibri" pitchFamily="34" charset="-120"/>
-              </a:rPr>
-              <a:t>Works with any clustering tool’s output, not just ours. It only reads — it writes nothing</a:t>
-            </a:r>
-            <a:endParaRPr lang="en-US" sz="2000" dirty="0"/>
-          </a:p>
-        </p:txBody>
-      </p:sp>
-      <p:sp>
-        <p:nvSpPr>
-          <p:cNvPr id="5" name="Shape 3"/>
-          <p:cNvSpPr/>
-          <p:nvPr/>
-        </p:nvSpPr>
-        <p:spPr>
-          <a:xfrm>
-            <a:off x="566928" y="5650992"/>
-            <a:ext cx="11055096" cy="566928"/>
-          </a:xfrm>
-          <a:prstGeom prst="rect">
-            <a:avLst/>
-          </a:prstGeom>
-          <a:solidFill>
-            <a:srgbClr val="F4F8FD"/>
-          </a:solidFill>
-          <a:ln w="9525">
-            <a:solidFill>
-              <a:srgbClr val="3674C1"/>
-            </a:solidFill>
-            <a:prstDash val="solid"/>
-          </a:ln>
-        </p:spPr>
-      </p:sp>
-      <p:sp>
-        <p:nvSpPr>
-          <p:cNvPr id="6" name="Text 4"/>
-          <p:cNvSpPr/>
-          <p:nvPr/>
-        </p:nvSpPr>
-        <p:spPr>
-          <a:xfrm>
-            <a:off x="768096" y="5650992"/>
-            <a:ext cx="10652760" cy="566928"/>
+              <a:t>07</a:t>
+            </a:r>
+            <a:endParaRPr lang="en-US" sz="5400" dirty="0"/>
+          </a:p>
+        </p:txBody>
+      </p:sp>
+      <p:sp>
+        <p:nvSpPr>
+          <p:cNvPr id="5" name="Text 3"/>
+          <p:cNvSpPr/>
+          <p:nvPr/>
+        </p:nvSpPr>
+        <p:spPr>
+          <a:xfrm>
+            <a:off x="566928" y="2606040"/>
+            <a:ext cx="11055096" cy="868680"/>
           </a:xfrm>
           <a:prstGeom prst="rect">
             <a:avLst/>
@@ -15855,23 +15724,101 @@
               <a:buNone/>
             </a:pPr>
             <a:r>
-              <a:rPr lang="en-US" sz="1600" b="1" dirty="0">
+              <a:rPr lang="en-US" sz="4000" b="1" dirty="0">
                 <a:solidFill>
                   <a:srgbClr val="1F4C86"/>
                 </a:solidFill>
-                <a:latin typeface="Calibri" pitchFamily="34" charset="0"/>
-                <a:ea typeface="Calibri" pitchFamily="34" charset="-122"/>
-                <a:cs typeface="Calibri" pitchFamily="34" charset="-120"/>
-              </a:rPr>
-              <a:t>Boundary cells are where classification errors live. This makes them one click away.</a:t>
-            </a:r>
-            <a:endParaRPr lang="en-US" sz="1600" dirty="0"/>
+                <a:latin typeface="Trebuchet MS" pitchFamily="34" charset="0"/>
+                <a:ea typeface="Trebuchet MS" pitchFamily="34" charset="-122"/>
+                <a:cs typeface="Trebuchet MS" pitchFamily="34" charset="-120"/>
+              </a:rPr>
+              <a:t>Collagen fibre and texture</a:t>
+            </a:r>
+            <a:endParaRPr lang="en-US" sz="4000" dirty="0"/>
+          </a:p>
+        </p:txBody>
+      </p:sp>
+      <p:sp>
+        <p:nvSpPr>
+          <p:cNvPr id="6" name="Text 4"/>
+          <p:cNvSpPr/>
+          <p:nvPr/>
+        </p:nvSpPr>
+        <p:spPr>
+          <a:xfrm>
+            <a:off x="566928" y="3456432"/>
+            <a:ext cx="10140696" cy="731520"/>
+          </a:xfrm>
+          <a:prstGeom prst="rect">
+            <a:avLst/>
+          </a:prstGeom>
+          <a:noFill/>
+          <a:ln/>
+        </p:spPr>
+        <p:txBody>
+          <a:bodyPr wrap="square" rtlCol="0" anchor="t"/>
+          <a:lstStyle/>
+          <a:p>
+            <a:pPr indent="0" marL="0">
+              <a:buNone/>
+            </a:pPr>
+            <a:r>
+              <a:rPr lang="en-US" sz="1900" dirty="0">
+                <a:solidFill>
+                  <a:srgbClr val="5A6675"/>
+                </a:solidFill>
+                <a:latin typeface="Calibri" pitchFamily="34" charset="0"/>
+                <a:ea typeface="Calibri" pitchFamily="34" charset="-122"/>
+                <a:cs typeface="Calibri" pitchFamily="34" charset="-120"/>
+              </a:rPr>
+              <a:t>Architecture, not just presence</a:t>
+            </a:r>
+            <a:endParaRPr lang="en-US" sz="1900" dirty="0"/>
           </a:p>
         </p:txBody>
       </p:sp>
       <p:sp>
         <p:nvSpPr>
           <p:cNvPr id="7" name="Text 5"/>
+          <p:cNvSpPr/>
+          <p:nvPr/>
+        </p:nvSpPr>
+        <p:spPr>
+          <a:xfrm>
+            <a:off x="566928" y="6199632"/>
+            <a:ext cx="8229600" cy="365760"/>
+          </a:xfrm>
+          <a:prstGeom prst="rect">
+            <a:avLst/>
+          </a:prstGeom>
+          <a:noFill/>
+          <a:ln/>
+        </p:spPr>
+        <p:txBody>
+          <a:bodyPr wrap="square" rtlCol="0" anchor="ctr"/>
+          <a:lstStyle/>
+          <a:p>
+            <a:pPr indent="0" marL="0">
+              <a:buNone/>
+            </a:pPr>
+            <a:r>
+              <a:rPr lang="en-US" sz="1400" dirty="0">
+                <a:solidFill>
+                  <a:srgbClr val="A8B2BF"/>
+                </a:solidFill>
+                <a:latin typeface="Calibri" pitchFamily="34" charset="0"/>
+                <a:ea typeface="Calibri" pitchFamily="34" charset="-122"/>
+                <a:cs typeface="Calibri" pitchFamily="34" charset="-120"/>
+              </a:rPr>
+              <a:t>michaelsnelson.github.io/BINA-I2K-2026-QuPath-Extensions</a:t>
+            </a:r>
+            <a:endParaRPr lang="en-US" sz="1400" dirty="0"/>
+          </a:p>
+        </p:txBody>
+      </p:sp>
+      <p:sp>
+        <p:nvSpPr>
+          <p:cNvPr id="8" name="Text 6"/>
           <p:cNvSpPr/>
           <p:nvPr/>
         </p:nvSpPr>
@@ -16254,23 +16201,42 @@
       </p:grpSpPr>
       <p:sp>
         <p:nvSpPr>
-          <p:cNvPr id="2" name="Shape 0"/>
-          <p:cNvSpPr/>
-          <p:nvPr/>
-        </p:nvSpPr>
-        <p:spPr>
-          <a:xfrm>
-            <a:off x="0" y="1417320"/>
-            <a:ext cx="12188952" cy="3108960"/>
-          </a:xfrm>
-          <a:prstGeom prst="rect">
-            <a:avLst/>
-          </a:prstGeom>
-          <a:solidFill>
-            <a:srgbClr val="E8F0FA"/>
-          </a:solidFill>
-          <a:ln/>
-        </p:spPr>
+          <p:cNvPr id="2" name="Text 0"/>
+          <p:cNvSpPr/>
+          <p:nvPr/>
+        </p:nvSpPr>
+        <p:spPr>
+          <a:xfrm>
+            <a:off x="566928" y="384048"/>
+            <a:ext cx="11055096" cy="658368"/>
+          </a:xfrm>
+          <a:prstGeom prst="rect">
+            <a:avLst/>
+          </a:prstGeom>
+          <a:noFill/>
+          <a:ln/>
+        </p:spPr>
+        <p:txBody>
+          <a:bodyPr wrap="square" rtlCol="0" anchor="ctr"/>
+          <a:lstStyle/>
+          <a:p>
+            <a:pPr indent="0" marL="0">
+              <a:buNone/>
+            </a:pPr>
+            <a:r>
+              <a:rPr lang="en-US" sz="3000" b="1" dirty="0">
+                <a:solidFill>
+                  <a:srgbClr val="1F4C86"/>
+                </a:solidFill>
+                <a:latin typeface="Trebuchet MS" pitchFamily="34" charset="0"/>
+                <a:ea typeface="Trebuchet MS" pitchFamily="34" charset="-122"/>
+                <a:cs typeface="Trebuchet MS" pitchFamily="34" charset="-120"/>
+              </a:rPr>
+              <a:t>Why fibre architecture</a:t>
+            </a:r>
+            <a:endParaRPr lang="en-US" sz="3000" dirty="0"/>
+          </a:p>
+        </p:txBody>
       </p:sp>
       <p:sp>
         <p:nvSpPr>
@@ -16280,8 +16246,8 @@
         </p:nvSpPr>
         <p:spPr>
           <a:xfrm>
-            <a:off x="0" y="1417320"/>
-            <a:ext cx="201168" cy="3108960"/>
+            <a:off x="566928" y="1097280"/>
+            <a:ext cx="1920240" cy="50292"/>
           </a:xfrm>
           <a:prstGeom prst="rect">
             <a:avLst/>
@@ -16300,8 +16266,8 @@
         </p:nvSpPr>
         <p:spPr>
           <a:xfrm>
-            <a:off x="566928" y="1691640"/>
-            <a:ext cx="1828800" cy="914400"/>
+            <a:off x="566928" y="1243584"/>
+            <a:ext cx="11055096" cy="384048"/>
           </a:xfrm>
           <a:prstGeom prst="rect">
             <a:avLst/>
@@ -16317,17 +16283,17 @@
               <a:buNone/>
             </a:pPr>
             <a:r>
-              <a:rPr lang="en-US" sz="5400" b="1" dirty="0">
-                <a:solidFill>
-                  <a:srgbClr val="3674C1"/>
-                </a:solidFill>
-                <a:latin typeface="Trebuchet MS" pitchFamily="34" charset="0"/>
-                <a:ea typeface="Trebuchet MS" pitchFamily="34" charset="-122"/>
-                <a:cs typeface="Trebuchet MS" pitchFamily="34" charset="-120"/>
-              </a:rPr>
-              <a:t>07</a:t>
-            </a:r>
-            <a:endParaRPr lang="en-US" sz="5400" dirty="0"/>
+              <a:rPr lang="en-US" sz="1700" i="1" dirty="0">
+                <a:solidFill>
+                  <a:srgbClr val="5A6675"/>
+                </a:solidFill>
+                <a:latin typeface="Calibri" pitchFamily="34" charset="0"/>
+                <a:ea typeface="Calibri" pitchFamily="34" charset="-122"/>
+                <a:cs typeface="Calibri" pitchFamily="34" charset="-120"/>
+              </a:rPr>
+              <a:t>Conklin et al. 2011, American Journal of Pathology 178:1221.</a:t>
+            </a:r>
+            <a:endParaRPr lang="en-US" sz="1700" dirty="0"/>
           </a:p>
         </p:txBody>
       </p:sp>
@@ -16339,8 +16305,151 @@
         </p:nvSpPr>
         <p:spPr>
           <a:xfrm>
-            <a:off x="566928" y="2606040"/>
-            <a:ext cx="11055096" cy="868680"/>
+            <a:off x="640080" y="1755648"/>
+            <a:ext cx="10963656" cy="4279392"/>
+          </a:xfrm>
+          <a:prstGeom prst="rect">
+            <a:avLst/>
+          </a:prstGeom>
+          <a:noFill/>
+          <a:ln/>
+        </p:spPr>
+        <p:txBody>
+          <a:bodyPr wrap="square" rtlCol="0" anchor="t"/>
+          <a:lstStyle/>
+          <a:p>
+            <a:pPr marL="342900" indent="-342900">
+              <a:lnSpc>
+                <a:spcPct val="105000"/>
+              </a:lnSpc>
+              <a:spcAft>
+                <a:spcPts val="1200"/>
+              </a:spcAft>
+              <a:buSzPct val="100000"/>
+              <a:buChar char="•"/>
+            </a:pPr>
+            <a:r>
+              <a:rPr lang="en-US" sz="2000" dirty="0">
+                <a:solidFill>
+                  <a:srgbClr val="1F2933"/>
+                </a:solidFill>
+                <a:latin typeface="Calibri" pitchFamily="34" charset="0"/>
+                <a:ea typeface="Calibri" pitchFamily="34" charset="-122"/>
+                <a:cs typeface="Calibri" pitchFamily="34" charset="-120"/>
+              </a:rPr>
+              <a:t>Collagen is not simply present or absent — the arrangement carries the biology</a:t>
+            </a:r>
+            <a:endParaRPr lang="en-US" sz="2000" dirty="0"/>
+          </a:p>
+          <a:p>
+            <a:pPr marL="342900" indent="-342900">
+              <a:lnSpc>
+                <a:spcPct val="105000"/>
+              </a:lnSpc>
+              <a:spcAft>
+                <a:spcPts val="1200"/>
+              </a:spcAft>
+              <a:buSzPct val="100000"/>
+              <a:buChar char="•"/>
+            </a:pPr>
+            <a:r>
+              <a:rPr lang="en-US" sz="2000" dirty="0">
+                <a:solidFill>
+                  <a:srgbClr val="1F2933"/>
+                </a:solidFill>
+                <a:latin typeface="Calibri" pitchFamily="34" charset="0"/>
+                <a:ea typeface="Calibri" pitchFamily="34" charset="-122"/>
+                <a:cs typeface="Calibri" pitchFamily="34" charset="-120"/>
+              </a:rPr>
+              <a:t>Wavy versus straightened; aligned versus isotropic; and how that changes at a boundary</a:t>
+            </a:r>
+            <a:endParaRPr lang="en-US" sz="2000" dirty="0"/>
+          </a:p>
+          <a:p>
+            <a:pPr marL="342900" indent="-342900">
+              <a:lnSpc>
+                <a:spcPct val="105000"/>
+              </a:lnSpc>
+              <a:spcAft>
+                <a:spcPts val="1200"/>
+              </a:spcAft>
+              <a:buSzPct val="100000"/>
+              <a:buChar char="•"/>
+            </a:pPr>
+            <a:r>
+              <a:rPr lang="en-US" sz="2000" dirty="0">
+                <a:solidFill>
+                  <a:srgbClr val="1F2933"/>
+                </a:solidFill>
+                <a:latin typeface="Calibri" pitchFamily="34" charset="0"/>
+                <a:ea typeface="Calibri" pitchFamily="34" charset="-122"/>
+                <a:cs typeface="Calibri" pitchFamily="34" charset="-120"/>
+              </a:rPr>
+              <a:t>In breast pathology, straightened fibres running perpendicular to the tumour boundary act as tracks for invading cells</a:t>
+            </a:r>
+            <a:endParaRPr lang="en-US" sz="2000" dirty="0"/>
+          </a:p>
+          <a:p>
+            <a:pPr marL="342900" indent="-342900">
+              <a:lnSpc>
+                <a:spcPct val="105000"/>
+              </a:lnSpc>
+              <a:spcAft>
+                <a:spcPts val="1200"/>
+              </a:spcAft>
+              <a:buSzPct val="100000"/>
+              <a:buChar char="•"/>
+            </a:pPr>
+            <a:r>
+              <a:rPr lang="en-US" sz="2000" dirty="0">
+                <a:solidFill>
+                  <a:srgbClr val="1F2933"/>
+                </a:solidFill>
+                <a:latin typeface="Calibri" pitchFamily="34" charset="0"/>
+                <a:ea typeface="Calibri" pitchFamily="34" charset="-122"/>
+                <a:cs typeface="Calibri" pitchFamily="34" charset="-120"/>
+              </a:rPr>
+              <a:t>Hazard ratio 3.0–3.9 for disease-free survival, independent of grade, size and receptor status</a:t>
+            </a:r>
+            <a:endParaRPr lang="en-US" sz="2000" dirty="0"/>
+          </a:p>
+        </p:txBody>
+      </p:sp>
+      <p:sp>
+        <p:nvSpPr>
+          <p:cNvPr id="6" name="Shape 4"/>
+          <p:cNvSpPr/>
+          <p:nvPr/>
+        </p:nvSpPr>
+        <p:spPr>
+          <a:xfrm>
+            <a:off x="566928" y="5650992"/>
+            <a:ext cx="11055096" cy="566928"/>
+          </a:xfrm>
+          <a:prstGeom prst="rect">
+            <a:avLst/>
+          </a:prstGeom>
+          <a:solidFill>
+            <a:srgbClr val="F4F8FD"/>
+          </a:solidFill>
+          <a:ln w="9525">
+            <a:solidFill>
+              <a:srgbClr val="3674C1"/>
+            </a:solidFill>
+            <a:prstDash val="solid"/>
+          </a:ln>
+        </p:spPr>
+      </p:sp>
+      <p:sp>
+        <p:nvSpPr>
+          <p:cNvPr id="7" name="Text 5"/>
+          <p:cNvSpPr/>
+          <p:nvPr/>
+        </p:nvSpPr>
+        <p:spPr>
+          <a:xfrm>
+            <a:off x="768096" y="5650992"/>
+            <a:ext cx="10652760" cy="566928"/>
           </a:xfrm>
           <a:prstGeom prst="rect">
             <a:avLst/>
@@ -16356,95 +16465,17 @@
               <a:buNone/>
             </a:pPr>
             <a:r>
-              <a:rPr lang="en-US" sz="4000" b="1" dirty="0">
+              <a:rPr lang="en-US" sz="1600" b="1" dirty="0">
                 <a:solidFill>
                   <a:srgbClr val="1F4C86"/>
                 </a:solidFill>
-                <a:latin typeface="Trebuchet MS" pitchFamily="34" charset="0"/>
-                <a:ea typeface="Trebuchet MS" pitchFamily="34" charset="-122"/>
-                <a:cs typeface="Trebuchet MS" pitchFamily="34" charset="-120"/>
-              </a:rPr>
-              <a:t>Collagen fibre and texture</a:t>
-            </a:r>
-            <a:endParaRPr lang="en-US" sz="4000" dirty="0"/>
-          </a:p>
-        </p:txBody>
-      </p:sp>
-      <p:sp>
-        <p:nvSpPr>
-          <p:cNvPr id="6" name="Text 4"/>
-          <p:cNvSpPr/>
-          <p:nvPr/>
-        </p:nvSpPr>
-        <p:spPr>
-          <a:xfrm>
-            <a:off x="566928" y="3456432"/>
-            <a:ext cx="10140696" cy="731520"/>
-          </a:xfrm>
-          <a:prstGeom prst="rect">
-            <a:avLst/>
-          </a:prstGeom>
-          <a:noFill/>
-          <a:ln/>
-        </p:spPr>
-        <p:txBody>
-          <a:bodyPr wrap="square" rtlCol="0" anchor="t"/>
-          <a:lstStyle/>
-          <a:p>
-            <a:pPr indent="0" marL="0">
-              <a:buNone/>
-            </a:pPr>
-            <a:r>
-              <a:rPr lang="en-US" sz="1900" dirty="0">
-                <a:solidFill>
-                  <a:srgbClr val="5A6675"/>
-                </a:solidFill>
-                <a:latin typeface="Calibri" pitchFamily="34" charset="0"/>
-                <a:ea typeface="Calibri" pitchFamily="34" charset="-122"/>
-                <a:cs typeface="Calibri" pitchFamily="34" charset="-120"/>
-              </a:rPr>
-              <a:t>Architecture, not just presence</a:t>
-            </a:r>
-            <a:endParaRPr lang="en-US" sz="1900" dirty="0"/>
-          </a:p>
-        </p:txBody>
-      </p:sp>
-      <p:sp>
-        <p:nvSpPr>
-          <p:cNvPr id="7" name="Text 5"/>
-          <p:cNvSpPr/>
-          <p:nvPr/>
-        </p:nvSpPr>
-        <p:spPr>
-          <a:xfrm>
-            <a:off x="566928" y="6199632"/>
-            <a:ext cx="8229600" cy="365760"/>
-          </a:xfrm>
-          <a:prstGeom prst="rect">
-            <a:avLst/>
-          </a:prstGeom>
-          <a:noFill/>
-          <a:ln/>
-        </p:spPr>
-        <p:txBody>
-          <a:bodyPr wrap="square" rtlCol="0" anchor="ctr"/>
-          <a:lstStyle/>
-          <a:p>
-            <a:pPr indent="0" marL="0">
-              <a:buNone/>
-            </a:pPr>
-            <a:r>
-              <a:rPr lang="en-US" sz="1400" dirty="0">
-                <a:solidFill>
-                  <a:srgbClr val="A8B2BF"/>
-                </a:solidFill>
-                <a:latin typeface="Calibri" pitchFamily="34" charset="0"/>
-                <a:ea typeface="Calibri" pitchFamily="34" charset="-122"/>
-                <a:cs typeface="Calibri" pitchFamily="34" charset="-120"/>
-              </a:rPr>
-              <a:t>michaelsnelson.github.io/BINA-I2K-2026-QuPath-Extensions</a:t>
-            </a:r>
-            <a:endParaRPr lang="en-US" sz="1400" dirty="0"/>
+                <a:latin typeface="Calibri" pitchFamily="34" charset="0"/>
+                <a:ea typeface="Calibri" pitchFamily="34" charset="-122"/>
+                <a:cs typeface="Calibri" pitchFamily="34" charset="-120"/>
+              </a:rPr>
+              <a:t>The same wavy-to-straight axis recurs in arterial adventitia, sclera, alveolar wall, and cardiac fibrosis.</a:t>
+            </a:r>
+            <a:endParaRPr lang="en-US" sz="1600" dirty="0"/>
           </a:p>
         </p:txBody>
       </p:sp>
@@ -16552,7 +16583,7 @@
                 <a:ea typeface="Trebuchet MS" pitchFamily="34" charset="-122"/>
                 <a:cs typeface="Trebuchet MS" pitchFamily="34" charset="-120"/>
               </a:rPr>
-              <a:t>Why fibre architecture</a:t>
+              <a:t>Two complementary tools</a:t>
             </a:r>
             <a:endParaRPr lang="en-US" sz="3000" dirty="0"/>
           </a:p>
@@ -16580,14 +16611,34 @@
       </p:sp>
       <p:sp>
         <p:nvSpPr>
-          <p:cNvPr id="4" name="Text 2"/>
-          <p:cNvSpPr/>
-          <p:nvPr/>
-        </p:nvSpPr>
-        <p:spPr>
-          <a:xfrm>
-            <a:off x="566928" y="1243584"/>
-            <a:ext cx="11055096" cy="384048"/>
+          <p:cNvPr id="4" name="Shape 2"/>
+          <p:cNvSpPr/>
+          <p:nvPr/>
+        </p:nvSpPr>
+        <p:spPr>
+          <a:xfrm>
+            <a:off x="566928" y="1554480"/>
+            <a:ext cx="5298948" cy="530352"/>
+          </a:xfrm>
+          <a:prstGeom prst="rect">
+            <a:avLst/>
+          </a:prstGeom>
+          <a:solidFill>
+            <a:srgbClr val="E8F0FA"/>
+          </a:solidFill>
+          <a:ln/>
+        </p:spPr>
+      </p:sp>
+      <p:sp>
+        <p:nvSpPr>
+          <p:cNvPr id="5" name="Text 3"/>
+          <p:cNvSpPr/>
+          <p:nvPr/>
+        </p:nvSpPr>
+        <p:spPr>
+          <a:xfrm>
+            <a:off x="731520" y="1554480"/>
+            <a:ext cx="4969764" cy="530352"/>
           </a:xfrm>
           <a:prstGeom prst="rect">
             <a:avLst/>
@@ -16603,30 +16654,30 @@
               <a:buNone/>
             </a:pPr>
             <a:r>
-              <a:rPr lang="en-US" sz="1700" i="1" dirty="0">
-                <a:solidFill>
-                  <a:srgbClr val="5A6675"/>
-                </a:solidFill>
-                <a:latin typeface="Calibri" pitchFamily="34" charset="0"/>
-                <a:ea typeface="Calibri" pitchFamily="34" charset="-122"/>
-                <a:cs typeface="Calibri" pitchFamily="34" charset="-120"/>
-              </a:rPr>
-              <a:t>Conklin et al. 2011, American Journal of Pathology 178:1221.</a:t>
-            </a:r>
-            <a:endParaRPr lang="en-US" sz="1700" dirty="0"/>
-          </a:p>
-        </p:txBody>
-      </p:sp>
-      <p:sp>
-        <p:nvSpPr>
-          <p:cNvPr id="5" name="Text 3"/>
-          <p:cNvSpPr/>
-          <p:nvPr/>
-        </p:nvSpPr>
-        <p:spPr>
-          <a:xfrm>
-            <a:off x="640080" y="1755648"/>
-            <a:ext cx="10963656" cy="4279392"/>
+              <a:rPr lang="en-US" sz="2000" b="1" dirty="0">
+                <a:solidFill>
+                  <a:srgbClr val="1F4C86"/>
+                </a:solidFill>
+                <a:latin typeface="Trebuchet MS" pitchFamily="34" charset="0"/>
+                <a:ea typeface="Trebuchet MS" pitchFamily="34" charset="-122"/>
+                <a:cs typeface="Trebuchet MS" pitchFamily="34" charset="-120"/>
+              </a:rPr>
+              <a:t>Fiber Analysis — measure a zone</a:t>
+            </a:r>
+            <a:endParaRPr lang="en-US" sz="2000" dirty="0"/>
+          </a:p>
+        </p:txBody>
+      </p:sp>
+      <p:sp>
+        <p:nvSpPr>
+          <p:cNvPr id="6" name="Text 4"/>
+          <p:cNvSpPr/>
+          <p:nvPr/>
+        </p:nvSpPr>
+        <p:spPr>
+          <a:xfrm>
+            <a:off x="658368" y="2240280"/>
+            <a:ext cx="5116068" cy="3566160"/>
           </a:xfrm>
           <a:prstGeom prst="rect">
             <a:avLst/>
@@ -16639,17 +16690,14 @@
           <a:lstStyle/>
           <a:p>
             <a:pPr marL="342900" indent="-342900">
-              <a:lnSpc>
-                <a:spcPct val="105000"/>
-              </a:lnSpc>
               <a:spcAft>
-                <a:spcPts val="1200"/>
+                <a:spcPts val="1100"/>
               </a:spcAft>
               <a:buSzPct val="100000"/>
               <a:buChar char="•"/>
             </a:pPr>
             <a:r>
-              <a:rPr lang="en-US" sz="2000" dirty="0">
+              <a:rPr lang="en-US" sz="1800" dirty="0">
                 <a:solidFill>
                   <a:srgbClr val="1F2933"/>
                 </a:solidFill>
@@ -16657,23 +16705,20 @@
                 <a:ea typeface="Calibri" pitchFamily="34" charset="-122"/>
                 <a:cs typeface="Calibri" pitchFamily="34" charset="-120"/>
               </a:rPr>
-              <a:t>Collagen is not simply present or absent — the arrangement carries the biology</a:t>
-            </a:r>
-            <a:endParaRPr lang="en-US" sz="2000" dirty="0"/>
+              <a:t>A band of chosen width inside, outside, or across an annotation boundary</a:t>
+            </a:r>
+            <a:endParaRPr lang="en-US" sz="1800" dirty="0"/>
           </a:p>
           <a:p>
             <a:pPr marL="342900" indent="-342900">
-              <a:lnSpc>
-                <a:spcPct val="105000"/>
-              </a:lnSpc>
               <a:spcAft>
-                <a:spcPts val="1200"/>
+                <a:spcPts val="1100"/>
               </a:spcAft>
               <a:buSzPct val="100000"/>
               <a:buChar char="•"/>
             </a:pPr>
             <a:r>
-              <a:rPr lang="en-US" sz="2000" dirty="0">
+              <a:rPr lang="en-US" sz="1800" dirty="0">
                 <a:solidFill>
                   <a:srgbClr val="1F2933"/>
                 </a:solidFill>
@@ -16681,23 +16726,20 @@
                 <a:ea typeface="Calibri" pitchFamily="34" charset="-122"/>
                 <a:cs typeface="Calibri" pitchFamily="34" charset="-120"/>
               </a:rPr>
-              <a:t>Wavy versus straightened; aligned versus isotropic; and how that changes at a boundary</a:t>
-            </a:r>
-            <a:endParaRPr lang="en-US" sz="2000" dirty="0"/>
+              <a:t>Straightness and persistence: wavy versus straightened fibres</a:t>
+            </a:r>
+            <a:endParaRPr lang="en-US" sz="1800" dirty="0"/>
           </a:p>
           <a:p>
             <a:pPr marL="342900" indent="-342900">
-              <a:lnSpc>
-                <a:spcPct val="105000"/>
-              </a:lnSpc>
               <a:spcAft>
-                <a:spcPts val="1200"/>
+                <a:spcPts val="1100"/>
               </a:spcAft>
               <a:buSzPct val="100000"/>
               <a:buChar char="•"/>
             </a:pPr>
             <a:r>
-              <a:rPr lang="en-US" sz="2000" dirty="0">
+              <a:rPr lang="en-US" sz="1800" dirty="0">
                 <a:solidFill>
                   <a:srgbClr val="1F2933"/>
                 </a:solidFill>
@@ -16705,23 +16747,20 @@
                 <a:ea typeface="Calibri" pitchFamily="34" charset="-122"/>
                 <a:cs typeface="Calibri" pitchFamily="34" charset="-120"/>
               </a:rPr>
-              <a:t>In breast pathology, straightened fibres running perpendicular to the tumour boundary act as tracks for invading cells</a:t>
-            </a:r>
-            <a:endParaRPr lang="en-US" sz="2000" dirty="0"/>
+              <a:t>Morphometrics: coverage, length, branching, fractal dimension, gaps</a:t>
+            </a:r>
+            <a:endParaRPr lang="en-US" sz="1800" dirty="0"/>
           </a:p>
           <a:p>
             <a:pPr marL="342900" indent="-342900">
-              <a:lnSpc>
-                <a:spcPct val="105000"/>
-              </a:lnSpc>
               <a:spcAft>
-                <a:spcPts val="1200"/>
+                <a:spcPts val="1100"/>
               </a:spcAft>
               <a:buSzPct val="100000"/>
               <a:buChar char="•"/>
             </a:pPr>
             <a:r>
-              <a:rPr lang="en-US" sz="2000" dirty="0">
+              <a:rPr lang="en-US" sz="1800" dirty="0">
                 <a:solidFill>
                   <a:srgbClr val="1F2933"/>
                 </a:solidFill>
@@ -16729,47 +16768,42 @@
                 <a:ea typeface="Calibri" pitchFamily="34" charset="-122"/>
                 <a:cs typeface="Calibri" pitchFamily="34" charset="-120"/>
               </a:rPr>
-              <a:t>Hazard ratio 3.0–3.9 for disease-free survival, independent of grade, size and receptor status</a:t>
-            </a:r>
-            <a:endParaRPr lang="en-US" sz="2000" dirty="0"/>
-          </a:p>
-        </p:txBody>
-      </p:sp>
-      <p:sp>
-        <p:nvSpPr>
-          <p:cNvPr id="6" name="Shape 4"/>
-          <p:cNvSpPr/>
-          <p:nvPr/>
-        </p:nvSpPr>
-        <p:spPr>
-          <a:xfrm>
-            <a:off x="566928" y="5650992"/>
-            <a:ext cx="11055096" cy="566928"/>
+              <a:t>Texture: the information fibre-tracing misses entirely</a:t>
+            </a:r>
+            <a:endParaRPr lang="en-US" sz="1800" dirty="0"/>
+          </a:p>
+        </p:txBody>
+      </p:sp>
+      <p:sp>
+        <p:nvSpPr>
+          <p:cNvPr id="7" name="Shape 5"/>
+          <p:cNvSpPr/>
+          <p:nvPr/>
+        </p:nvSpPr>
+        <p:spPr>
+          <a:xfrm>
+            <a:off x="6323076" y="1554480"/>
+            <a:ext cx="5298948" cy="530352"/>
           </a:xfrm>
           <a:prstGeom prst="rect">
             <a:avLst/>
           </a:prstGeom>
           <a:solidFill>
-            <a:srgbClr val="F4F8FD"/>
+            <a:srgbClr val="E8F0FA"/>
           </a:solidFill>
-          <a:ln w="9525">
-            <a:solidFill>
-              <a:srgbClr val="3674C1"/>
-            </a:solidFill>
-            <a:prstDash val="solid"/>
-          </a:ln>
-        </p:spPr>
-      </p:sp>
-      <p:sp>
-        <p:nvSpPr>
-          <p:cNvPr id="7" name="Text 5"/>
-          <p:cNvSpPr/>
-          <p:nvPr/>
-        </p:nvSpPr>
-        <p:spPr>
-          <a:xfrm>
-            <a:off x="768096" y="5650992"/>
-            <a:ext cx="10652760" cy="566928"/>
+          <a:ln/>
+        </p:spPr>
+      </p:sp>
+      <p:sp>
+        <p:nvSpPr>
+          <p:cNvPr id="8" name="Text 6"/>
+          <p:cNvSpPr/>
+          <p:nvPr/>
+        </p:nvSpPr>
+        <p:spPr>
+          <a:xfrm>
+            <a:off x="6487668" y="1554480"/>
+            <a:ext cx="4969764" cy="530352"/>
           </a:xfrm>
           <a:prstGeom prst="rect">
             <a:avLst/>
@@ -16785,23 +16819,129 @@
               <a:buNone/>
             </a:pPr>
             <a:r>
-              <a:rPr lang="en-US" sz="1600" b="1" dirty="0">
-                <a:solidFill>
-                  <a:srgbClr val="1F4C86"/>
-                </a:solidFill>
-                <a:latin typeface="Calibri" pitchFamily="34" charset="0"/>
-                <a:ea typeface="Calibri" pitchFamily="34" charset="-122"/>
-                <a:cs typeface="Calibri" pitchFamily="34" charset="-120"/>
-              </a:rPr>
-              <a:t>The same wavy-to-straight axis recurs in arterial adventitia, sclera, alveolar wall, and cardiac fibrosis.</a:t>
-            </a:r>
-            <a:endParaRPr lang="en-US" sz="1600" dirty="0"/>
-          </a:p>
-        </p:txBody>
-      </p:sp>
-      <p:sp>
-        <p:nvSpPr>
-          <p:cNvPr id="8" name="Text 6"/>
+              <a:rPr lang="en-US" sz="2000" b="1" dirty="0">
+                <a:solidFill>
+                  <a:srgbClr val="B26A00"/>
+                </a:solidFill>
+                <a:latin typeface="Trebuchet MS" pitchFamily="34" charset="0"/>
+                <a:ea typeface="Trebuchet MS" pitchFamily="34" charset="-122"/>
+                <a:cs typeface="Trebuchet MS" pitchFamily="34" charset="-120"/>
+              </a:rPr>
+              <a:t>TME-Quant — trace the fibres</a:t>
+            </a:r>
+            <a:endParaRPr lang="en-US" sz="2000" dirty="0"/>
+          </a:p>
+        </p:txBody>
+      </p:sp>
+      <p:sp>
+        <p:nvSpPr>
+          <p:cNvPr id="9" name="Text 7"/>
+          <p:cNvSpPr/>
+          <p:nvPr/>
+        </p:nvSpPr>
+        <p:spPr>
+          <a:xfrm>
+            <a:off x="6414516" y="2240280"/>
+            <a:ext cx="5116068" cy="3566160"/>
+          </a:xfrm>
+          <a:prstGeom prst="rect">
+            <a:avLst/>
+          </a:prstGeom>
+          <a:noFill/>
+          <a:ln/>
+        </p:spPr>
+        <p:txBody>
+          <a:bodyPr wrap="square" rtlCol="0" anchor="t"/>
+          <a:lstStyle/>
+          <a:p>
+            <a:pPr marL="342900" indent="-342900">
+              <a:spcAft>
+                <a:spcPts val="1100"/>
+              </a:spcAft>
+              <a:buSzPct val="100000"/>
+              <a:buChar char="•"/>
+            </a:pPr>
+            <a:r>
+              <a:rPr lang="en-US" sz="1800" dirty="0">
+                <a:solidFill>
+                  <a:srgbClr val="1F2933"/>
+                </a:solidFill>
+                <a:latin typeface="Calibri" pitchFamily="34" charset="0"/>
+                <a:ea typeface="Calibri" pitchFamily="34" charset="-122"/>
+                <a:cs typeface="Calibri" pitchFamily="34" charset="-120"/>
+              </a:rPr>
+              <a:t>Individual fibres extracted and committed back as objects</a:t>
+            </a:r>
+            <a:endParaRPr lang="en-US" sz="1800" dirty="0"/>
+          </a:p>
+          <a:p>
+            <a:pPr marL="342900" indent="-342900">
+              <a:spcAft>
+                <a:spcPts val="1100"/>
+              </a:spcAft>
+              <a:buSzPct val="100000"/>
+              <a:buChar char="•"/>
+            </a:pPr>
+            <a:r>
+              <a:rPr lang="en-US" sz="1800" dirty="0">
+                <a:solidFill>
+                  <a:srgbClr val="1F2933"/>
+                </a:solidFill>
+                <a:latin typeface="Calibri" pitchFamily="34" charset="0"/>
+                <a:ea typeface="Calibri" pitchFamily="34" charset="-122"/>
+                <a:cs typeface="Calibri" pitchFamily="34" charset="-120"/>
+              </a:rPr>
+              <a:t>Set the threshold by eye, with the mask shown before you commit</a:t>
+            </a:r>
+            <a:endParaRPr lang="en-US" sz="1800" dirty="0"/>
+          </a:p>
+          <a:p>
+            <a:pPr marL="342900" indent="-342900">
+              <a:spcAft>
+                <a:spcPts val="1100"/>
+              </a:spcAft>
+              <a:buSzPct val="100000"/>
+              <a:buChar char="•"/>
+            </a:pPr>
+            <a:r>
+              <a:rPr lang="en-US" sz="1800" dirty="0">
+                <a:solidFill>
+                  <a:srgbClr val="1F2933"/>
+                </a:solidFill>
+                <a:latin typeface="Calibri" pitchFamily="34" charset="0"/>
+                <a:ea typeface="Calibri" pitchFamily="34" charset="-122"/>
+                <a:cs typeface="Calibri" pitchFamily="34" charset="-120"/>
+              </a:rPr>
+              <a:t>Trace a few real fibres yourself, and it tunes its own parameters to match</a:t>
+            </a:r>
+            <a:endParaRPr lang="en-US" sz="1800" dirty="0"/>
+          </a:p>
+          <a:p>
+            <a:pPr marL="342900" indent="-342900">
+              <a:spcAft>
+                <a:spcPts val="1100"/>
+              </a:spcAft>
+              <a:buSzPct val="100000"/>
+              <a:buChar char="•"/>
+            </a:pPr>
+            <a:r>
+              <a:rPr lang="en-US" sz="1800" dirty="0">
+                <a:solidFill>
+                  <a:srgbClr val="1F2933"/>
+                </a:solidFill>
+                <a:latin typeface="Calibri" pitchFamily="34" charset="0"/>
+                <a:ea typeface="Calibri" pitchFamily="34" charset="-122"/>
+                <a:cs typeface="Calibri" pitchFamily="34" charset="-120"/>
+              </a:rPr>
+              <a:t>Fibres classified by orientation relative to a tumour boundary</a:t>
+            </a:r>
+            <a:endParaRPr lang="en-US" sz="1800" dirty="0"/>
+          </a:p>
+        </p:txBody>
+      </p:sp>
+      <p:sp>
+        <p:nvSpPr>
+          <p:cNvPr id="10" name="Text 8"/>
           <p:cNvSpPr/>
           <p:nvPr/>
         </p:nvSpPr>
@@ -16903,7 +17043,7 @@
                 <a:ea typeface="Trebuchet MS" pitchFamily="34" charset="-122"/>
                 <a:cs typeface="Trebuchet MS" pitchFamily="34" charset="-120"/>
               </a:rPr>
-              <a:t>Two complementary tools</a:t>
+              <a:t>A dense mat and a sparse clump</a:t>
             </a:r>
             <a:endParaRPr lang="en-US" sz="3000" dirty="0"/>
           </a:p>
@@ -16931,73 +17071,14 @@
       </p:sp>
       <p:sp>
         <p:nvSpPr>
-          <p:cNvPr id="4" name="Shape 2"/>
-          <p:cNvSpPr/>
-          <p:nvPr/>
-        </p:nvSpPr>
-        <p:spPr>
-          <a:xfrm>
-            <a:off x="566928" y="1554480"/>
-            <a:ext cx="5298948" cy="530352"/>
-          </a:xfrm>
-          <a:prstGeom prst="rect">
-            <a:avLst/>
-          </a:prstGeom>
-          <a:solidFill>
-            <a:srgbClr val="E8F0FA"/>
-          </a:solidFill>
-          <a:ln/>
-        </p:spPr>
-      </p:sp>
-      <p:sp>
-        <p:nvSpPr>
-          <p:cNvPr id="5" name="Text 3"/>
-          <p:cNvSpPr/>
-          <p:nvPr/>
-        </p:nvSpPr>
-        <p:spPr>
-          <a:xfrm>
-            <a:off x="731520" y="1554480"/>
-            <a:ext cx="4969764" cy="530352"/>
-          </a:xfrm>
-          <a:prstGeom prst="rect">
-            <a:avLst/>
-          </a:prstGeom>
-          <a:noFill/>
-          <a:ln/>
-        </p:spPr>
-        <p:txBody>
-          <a:bodyPr wrap="square" rtlCol="0" anchor="ctr"/>
-          <a:lstStyle/>
-          <a:p>
-            <a:pPr indent="0" marL="0">
-              <a:buNone/>
-            </a:pPr>
-            <a:r>
-              <a:rPr lang="en-US" sz="2000" b="1" dirty="0">
-                <a:solidFill>
-                  <a:srgbClr val="1F4C86"/>
-                </a:solidFill>
-                <a:latin typeface="Trebuchet MS" pitchFamily="34" charset="0"/>
-                <a:ea typeface="Trebuchet MS" pitchFamily="34" charset="-122"/>
-                <a:cs typeface="Trebuchet MS" pitchFamily="34" charset="-120"/>
-              </a:rPr>
-              <a:t>Fiber Analysis — measure a zone</a:t>
-            </a:r>
-            <a:endParaRPr lang="en-US" sz="2000" dirty="0"/>
-          </a:p>
-        </p:txBody>
-      </p:sp>
-      <p:sp>
-        <p:nvSpPr>
-          <p:cNvPr id="6" name="Text 4"/>
-          <p:cNvSpPr/>
-          <p:nvPr/>
-        </p:nvSpPr>
-        <p:spPr>
-          <a:xfrm>
-            <a:off x="658368" y="2240280"/>
-            <a:ext cx="5116068" cy="3566160"/>
+          <p:cNvPr id="4" name="Text 2"/>
+          <p:cNvSpPr/>
+          <p:nvPr/>
+        </p:nvSpPr>
+        <p:spPr>
+          <a:xfrm>
+            <a:off x="640080" y="1481328"/>
+            <a:ext cx="10963656" cy="4553712"/>
           </a:xfrm>
           <a:prstGeom prst="rect">
             <a:avLst/>
@@ -17010,14 +17091,17 @@
           <a:lstStyle/>
           <a:p>
             <a:pPr marL="342900" indent="-342900">
+              <a:lnSpc>
+                <a:spcPct val="105000"/>
+              </a:lnSpc>
               <a:spcAft>
-                <a:spcPts val="1100"/>
+                <a:spcPts val="1200"/>
               </a:spcAft>
               <a:buSzPct val="100000"/>
               <a:buChar char="•"/>
             </a:pPr>
             <a:r>
-              <a:rPr lang="en-US" sz="1800" dirty="0">
+              <a:rPr lang="en-US" sz="2000" dirty="0">
                 <a:solidFill>
                   <a:srgbClr val="1F2933"/>
                 </a:solidFill>
@@ -17025,20 +17109,23 @@
                 <a:ea typeface="Calibri" pitchFamily="34" charset="-122"/>
                 <a:cs typeface="Calibri" pitchFamily="34" charset="-120"/>
               </a:rPr>
-              <a:t>A band of chosen width inside, outside, or across an annotation boundary</a:t>
-            </a:r>
-            <a:endParaRPr lang="en-US" sz="1800" dirty="0"/>
+              <a:t>Two fields can share the same mean fibre alignment and be completely different tissue</a:t>
+            </a:r>
+            <a:endParaRPr lang="en-US" sz="2000" dirty="0"/>
           </a:p>
           <a:p>
             <a:pPr marL="342900" indent="-342900">
+              <a:lnSpc>
+                <a:spcPct val="105000"/>
+              </a:lnSpc>
               <a:spcAft>
-                <a:spcPts val="1100"/>
+                <a:spcPts val="1200"/>
               </a:spcAft>
               <a:buSzPct val="100000"/>
               <a:buChar char="•"/>
             </a:pPr>
             <a:r>
-              <a:rPr lang="en-US" sz="1800" dirty="0">
+              <a:rPr lang="en-US" sz="2000" dirty="0">
                 <a:solidFill>
                   <a:srgbClr val="1F2933"/>
                 </a:solidFill>
@@ -17046,20 +17133,23 @@
                 <a:ea typeface="Calibri" pitchFamily="34" charset="-122"/>
                 <a:cs typeface="Calibri" pitchFamily="34" charset="-120"/>
               </a:rPr>
-              <a:t>Straightness and persistence: wavy versus straightened fibres</a:t>
-            </a:r>
-            <a:endParaRPr lang="en-US" sz="1800" dirty="0"/>
+              <a:t>Texture measures the spatial heterogeneity that alignment averages away</a:t>
+            </a:r>
+            <a:endParaRPr lang="en-US" sz="2000" dirty="0"/>
           </a:p>
           <a:p>
             <a:pPr marL="342900" indent="-342900">
+              <a:lnSpc>
+                <a:spcPct val="105000"/>
+              </a:lnSpc>
               <a:spcAft>
-                <a:spcPts val="1100"/>
+                <a:spcPts val="1200"/>
               </a:spcAft>
               <a:buSzPct val="100000"/>
               <a:buChar char="•"/>
             </a:pPr>
             <a:r>
-              <a:rPr lang="en-US" sz="1800" dirty="0">
+              <a:rPr lang="en-US" sz="2000" dirty="0">
                 <a:solidFill>
                   <a:srgbClr val="1F2933"/>
                 </a:solidFill>
@@ -17067,63 +17157,47 @@
                 <a:ea typeface="Calibri" pitchFamily="34" charset="-122"/>
                 <a:cs typeface="Calibri" pitchFamily="34" charset="-120"/>
               </a:rPr>
-              <a:t>Morphometrics: coverage, length, branching, fractal dimension, gaps</a:t>
-            </a:r>
-            <a:endParaRPr lang="en-US" sz="1800" dirty="0"/>
-          </a:p>
-          <a:p>
-            <a:pPr marL="342900" indent="-342900">
-              <a:spcAft>
-                <a:spcPts val="1100"/>
-              </a:spcAft>
-              <a:buSzPct val="100000"/>
-              <a:buChar char="•"/>
-            </a:pPr>
-            <a:r>
-              <a:rPr lang="en-US" sz="1800" dirty="0">
-                <a:solidFill>
-                  <a:srgbClr val="1F2933"/>
-                </a:solidFill>
-                <a:latin typeface="Calibri" pitchFamily="34" charset="0"/>
-                <a:ea typeface="Calibri" pitchFamily="34" charset="-122"/>
-                <a:cs typeface="Calibri" pitchFamily="34" charset="-120"/>
-              </a:rPr>
-              <a:t>Texture: the information fibre-tracing misses entirely</a:t>
-            </a:r>
-            <a:endParaRPr lang="en-US" sz="1800" dirty="0"/>
-          </a:p>
-        </p:txBody>
-      </p:sp>
-      <p:sp>
-        <p:nvSpPr>
-          <p:cNvPr id="7" name="Shape 5"/>
-          <p:cNvSpPr/>
-          <p:nvPr/>
-        </p:nvSpPr>
-        <p:spPr>
-          <a:xfrm>
-            <a:off x="6323076" y="1554480"/>
-            <a:ext cx="5298948" cy="530352"/>
+              <a:t>Which is why both tools are worth running, on the same region</a:t>
+            </a:r>
+            <a:endParaRPr lang="en-US" sz="2000" dirty="0"/>
+          </a:p>
+        </p:txBody>
+      </p:sp>
+      <p:sp>
+        <p:nvSpPr>
+          <p:cNvPr id="5" name="Shape 3"/>
+          <p:cNvSpPr/>
+          <p:nvPr/>
+        </p:nvSpPr>
+        <p:spPr>
+          <a:xfrm>
+            <a:off x="566928" y="5650992"/>
+            <a:ext cx="11055096" cy="566928"/>
           </a:xfrm>
           <a:prstGeom prst="rect">
             <a:avLst/>
           </a:prstGeom>
           <a:solidFill>
-            <a:srgbClr val="E8F0FA"/>
+            <a:srgbClr val="F4F8FD"/>
           </a:solidFill>
-          <a:ln/>
-        </p:spPr>
-      </p:sp>
-      <p:sp>
-        <p:nvSpPr>
-          <p:cNvPr id="8" name="Text 6"/>
-          <p:cNvSpPr/>
-          <p:nvPr/>
-        </p:nvSpPr>
-        <p:spPr>
-          <a:xfrm>
-            <a:off x="6487668" y="1554480"/>
-            <a:ext cx="4969764" cy="530352"/>
+          <a:ln w="9525">
+            <a:solidFill>
+              <a:srgbClr val="3674C1"/>
+            </a:solidFill>
+            <a:prstDash val="solid"/>
+          </a:ln>
+        </p:spPr>
+      </p:sp>
+      <p:sp>
+        <p:nvSpPr>
+          <p:cNvPr id="6" name="Text 4"/>
+          <p:cNvSpPr/>
+          <p:nvPr/>
+        </p:nvSpPr>
+        <p:spPr>
+          <a:xfrm>
+            <a:off x="768096" y="5650992"/>
+            <a:ext cx="10652760" cy="566928"/>
           </a:xfrm>
           <a:prstGeom prst="rect">
             <a:avLst/>
@@ -17139,129 +17213,23 @@
               <a:buNone/>
             </a:pPr>
             <a:r>
-              <a:rPr lang="en-US" sz="2000" b="1" dirty="0">
-                <a:solidFill>
-                  <a:srgbClr val="B26A00"/>
-                </a:solidFill>
-                <a:latin typeface="Trebuchet MS" pitchFamily="34" charset="0"/>
-                <a:ea typeface="Trebuchet MS" pitchFamily="34" charset="-122"/>
-                <a:cs typeface="Trebuchet MS" pitchFamily="34" charset="-120"/>
-              </a:rPr>
-              <a:t>TME-Quant — trace the fibres</a:t>
-            </a:r>
-            <a:endParaRPr lang="en-US" sz="2000" dirty="0"/>
-          </a:p>
-        </p:txBody>
-      </p:sp>
-      <p:sp>
-        <p:nvSpPr>
-          <p:cNvPr id="9" name="Text 7"/>
-          <p:cNvSpPr/>
-          <p:nvPr/>
-        </p:nvSpPr>
-        <p:spPr>
-          <a:xfrm>
-            <a:off x="6414516" y="2240280"/>
-            <a:ext cx="5116068" cy="3566160"/>
-          </a:xfrm>
-          <a:prstGeom prst="rect">
-            <a:avLst/>
-          </a:prstGeom>
-          <a:noFill/>
-          <a:ln/>
-        </p:spPr>
-        <p:txBody>
-          <a:bodyPr wrap="square" rtlCol="0" anchor="t"/>
-          <a:lstStyle/>
-          <a:p>
-            <a:pPr marL="342900" indent="-342900">
-              <a:spcAft>
-                <a:spcPts val="1100"/>
-              </a:spcAft>
-              <a:buSzPct val="100000"/>
-              <a:buChar char="•"/>
-            </a:pPr>
-            <a:r>
-              <a:rPr lang="en-US" sz="1800" dirty="0">
-                <a:solidFill>
-                  <a:srgbClr val="1F2933"/>
-                </a:solidFill>
-                <a:latin typeface="Calibri" pitchFamily="34" charset="0"/>
-                <a:ea typeface="Calibri" pitchFamily="34" charset="-122"/>
-                <a:cs typeface="Calibri" pitchFamily="34" charset="-120"/>
-              </a:rPr>
-              <a:t>Individual fibres extracted and committed back as objects</a:t>
-            </a:r>
-            <a:endParaRPr lang="en-US" sz="1800" dirty="0"/>
-          </a:p>
-          <a:p>
-            <a:pPr marL="342900" indent="-342900">
-              <a:spcAft>
-                <a:spcPts val="1100"/>
-              </a:spcAft>
-              <a:buSzPct val="100000"/>
-              <a:buChar char="•"/>
-            </a:pPr>
-            <a:r>
-              <a:rPr lang="en-US" sz="1800" dirty="0">
-                <a:solidFill>
-                  <a:srgbClr val="1F2933"/>
-                </a:solidFill>
-                <a:latin typeface="Calibri" pitchFamily="34" charset="0"/>
-                <a:ea typeface="Calibri" pitchFamily="34" charset="-122"/>
-                <a:cs typeface="Calibri" pitchFamily="34" charset="-120"/>
-              </a:rPr>
-              <a:t>Set the threshold by eye, with the mask shown before you commit</a:t>
-            </a:r>
-            <a:endParaRPr lang="en-US" sz="1800" dirty="0"/>
-          </a:p>
-          <a:p>
-            <a:pPr marL="342900" indent="-342900">
-              <a:spcAft>
-                <a:spcPts val="1100"/>
-              </a:spcAft>
-              <a:buSzPct val="100000"/>
-              <a:buChar char="•"/>
-            </a:pPr>
-            <a:r>
-              <a:rPr lang="en-US" sz="1800" dirty="0">
-                <a:solidFill>
-                  <a:srgbClr val="1F2933"/>
-                </a:solidFill>
-                <a:latin typeface="Calibri" pitchFamily="34" charset="0"/>
-                <a:ea typeface="Calibri" pitchFamily="34" charset="-122"/>
-                <a:cs typeface="Calibri" pitchFamily="34" charset="-120"/>
-              </a:rPr>
-              <a:t>Trace a few real fibres yourself, and it tunes its own parameters to match</a:t>
-            </a:r>
-            <a:endParaRPr lang="en-US" sz="1800" dirty="0"/>
-          </a:p>
-          <a:p>
-            <a:pPr marL="342900" indent="-342900">
-              <a:spcAft>
-                <a:spcPts val="1100"/>
-              </a:spcAft>
-              <a:buSzPct val="100000"/>
-              <a:buChar char="•"/>
-            </a:pPr>
-            <a:r>
-              <a:rPr lang="en-US" sz="1800" dirty="0">
-                <a:solidFill>
-                  <a:srgbClr val="1F2933"/>
-                </a:solidFill>
-                <a:latin typeface="Calibri" pitchFamily="34" charset="0"/>
-                <a:ea typeface="Calibri" pitchFamily="34" charset="-122"/>
-                <a:cs typeface="Calibri" pitchFamily="34" charset="-120"/>
-              </a:rPr>
-              <a:t>Fibres classified by orientation relative to a tumour boundary</a:t>
-            </a:r>
-            <a:endParaRPr lang="en-US" sz="1800" dirty="0"/>
-          </a:p>
-        </p:txBody>
-      </p:sp>
-      <p:sp>
-        <p:nvSpPr>
-          <p:cNvPr id="10" name="Text 8"/>
+              <a:rPr lang="en-US" sz="1600" b="1" dirty="0">
+                <a:solidFill>
+                  <a:srgbClr val="1F4C86"/>
+                </a:solidFill>
+                <a:latin typeface="Calibri" pitchFamily="34" charset="0"/>
+                <a:ea typeface="Calibri" pitchFamily="34" charset="-122"/>
+                <a:cs typeface="Calibri" pitchFamily="34" charset="-120"/>
+              </a:rPr>
+              <a:t>Demo only today: one needs a long environment build, the other a dedicated analysis server.</a:t>
+            </a:r>
+            <a:endParaRPr lang="en-US" sz="1600" dirty="0"/>
+          </a:p>
+        </p:txBody>
+      </p:sp>
+      <p:sp>
+        <p:nvSpPr>
+          <p:cNvPr id="7" name="Text 5"/>
           <p:cNvSpPr/>
           <p:nvPr/>
         </p:nvSpPr>
@@ -17363,7 +17331,7 @@
                 <a:ea typeface="Trebuchet MS" pitchFamily="34" charset="-122"/>
                 <a:cs typeface="Trebuchet MS" pitchFamily="34" charset="-120"/>
               </a:rPr>
-              <a:t>A dense mat and a sparse clump</a:t>
+              <a:t>Please cite the methods</a:t>
             </a:r>
             <a:endParaRPr lang="en-US" sz="3000" dirty="0"/>
           </a:p>
@@ -17429,7 +17397,7 @@
                 <a:ea typeface="Calibri" pitchFamily="34" charset="-122"/>
                 <a:cs typeface="Calibri" pitchFamily="34" charset="-120"/>
               </a:rPr>
-              <a:t>Two fields can share the same mean fibre alignment and be completely different tissue</a:t>
+              <a:t>Both tools are thin wrappers over other people’s science</a:t>
             </a:r>
             <a:endParaRPr lang="en-US" sz="2000" dirty="0"/>
           </a:p>
@@ -17453,7 +17421,7 @@
                 <a:ea typeface="Calibri" pitchFamily="34" charset="-122"/>
                 <a:cs typeface="Calibri" pitchFamily="34" charset="-120"/>
               </a:rPr>
-              <a:t>Texture measures the spatial heterogeneity that alignment averages away</a:t>
+              <a:t>CT-FIRE — Bredfeldt et al. 2014, Journal of Biomedical Optics 19(1):016007</a:t>
             </a:r>
             <a:endParaRPr lang="en-US" sz="2000" dirty="0"/>
           </a:p>
@@ -17477,79 +17445,63 @@
                 <a:ea typeface="Calibri" pitchFamily="34" charset="-122"/>
                 <a:cs typeface="Calibri" pitchFamily="34" charset="-120"/>
               </a:rPr>
-              <a:t>Which is why both tools are worth running, on the same region</a:t>
+              <a:t>CurveAlign — LOCI, University of Wisconsin–Madison</a:t>
             </a:r>
             <a:endParaRPr lang="en-US" sz="2000" dirty="0"/>
           </a:p>
-        </p:txBody>
-      </p:sp>
-      <p:sp>
-        <p:nvSpPr>
-          <p:cNvPr id="5" name="Shape 3"/>
-          <p:cNvSpPr/>
-          <p:nvPr/>
-        </p:nvSpPr>
-        <p:spPr>
-          <a:xfrm>
-            <a:off x="566928" y="5650992"/>
-            <a:ext cx="11055096" cy="566928"/>
-          </a:xfrm>
-          <a:prstGeom prst="rect">
-            <a:avLst/>
-          </a:prstGeom>
-          <a:solidFill>
-            <a:srgbClr val="F4F8FD"/>
-          </a:solidFill>
-          <a:ln w="9525">
-            <a:solidFill>
-              <a:srgbClr val="3674C1"/>
-            </a:solidFill>
-            <a:prstDash val="solid"/>
-          </a:ln>
-        </p:spPr>
-      </p:sp>
-      <p:sp>
-        <p:nvSpPr>
-          <p:cNvPr id="6" name="Text 4"/>
-          <p:cNvSpPr/>
-          <p:nvPr/>
-        </p:nvSpPr>
-        <p:spPr>
-          <a:xfrm>
-            <a:off x="768096" y="5650992"/>
-            <a:ext cx="10652760" cy="566928"/>
-          </a:xfrm>
-          <a:prstGeom prst="rect">
-            <a:avLst/>
-          </a:prstGeom>
-          <a:noFill/>
-          <a:ln/>
-        </p:spPr>
-        <p:txBody>
-          <a:bodyPr wrap="square" rtlCol="0" anchor="ctr"/>
-          <a:lstStyle/>
-          <a:p>
-            <a:pPr indent="0" marL="0">
-              <a:buNone/>
-            </a:pPr>
-            <a:r>
-              <a:rPr lang="en-US" sz="1600" b="1" dirty="0">
-                <a:solidFill>
-                  <a:srgbClr val="1F4C86"/>
-                </a:solidFill>
-                <a:latin typeface="Calibri" pitchFamily="34" charset="0"/>
-                <a:ea typeface="Calibri" pitchFamily="34" charset="-122"/>
-                <a:cs typeface="Calibri" pitchFamily="34" charset="-120"/>
-              </a:rPr>
-              <a:t>Demo only today: one needs a long environment build, the other a dedicated analysis server.</a:t>
-            </a:r>
-            <a:endParaRPr lang="en-US" sz="1600" dirty="0"/>
-          </a:p>
-        </p:txBody>
-      </p:sp>
-      <p:sp>
-        <p:nvSpPr>
-          <p:cNvPr id="7" name="Text 5"/>
+          <a:p>
+            <a:pPr marL="342900" indent="-342900">
+              <a:lnSpc>
+                <a:spcPct val="105000"/>
+              </a:lnSpc>
+              <a:spcAft>
+                <a:spcPts val="1200"/>
+              </a:spcAft>
+              <a:buSzPct val="100000"/>
+              <a:buChar char="•"/>
+            </a:pPr>
+            <a:r>
+              <a:rPr lang="en-US" sz="2000" dirty="0">
+                <a:solidFill>
+                  <a:srgbClr val="1F2933"/>
+                </a:solidFill>
+                <a:latin typeface="Calibri" pitchFamily="34" charset="0"/>
+                <a:ea typeface="Calibri" pitchFamily="34" charset="-122"/>
+                <a:cs typeface="Calibri" pitchFamily="34" charset="-120"/>
+              </a:rPr>
+              <a:t>TACS — Conklin et al. 2011; Provenzano et al. 2008, BMC Medicine 6:11</a:t>
+            </a:r>
+            <a:endParaRPr lang="en-US" sz="2000" dirty="0"/>
+          </a:p>
+          <a:p>
+            <a:pPr marL="342900" indent="-342900">
+              <a:lnSpc>
+                <a:spcPct val="105000"/>
+              </a:lnSpc>
+              <a:spcAft>
+                <a:spcPts val="1200"/>
+              </a:spcAft>
+              <a:buSzPct val="100000"/>
+              <a:buChar char="•"/>
+            </a:pPr>
+            <a:r>
+              <a:rPr lang="en-US" sz="2000" dirty="0">
+                <a:solidFill>
+                  <a:srgbClr val="1F2933"/>
+                </a:solidFill>
+                <a:latin typeface="Calibri" pitchFamily="34" charset="0"/>
+                <a:ea typeface="Calibri" pitchFamily="34" charset="-122"/>
+                <a:cs typeface="Calibri" pitchFamily="34" charset="-120"/>
+              </a:rPr>
+              <a:t>TWOMBLI — Wershof et al. 2021, Life Science Alliance 4(3)</a:t>
+            </a:r>
+            <a:endParaRPr lang="en-US" sz="2000" dirty="0"/>
+          </a:p>
+        </p:txBody>
+      </p:sp>
+      <p:sp>
+        <p:nvSpPr>
+          <p:cNvPr id="5" name="Text 3"/>
           <p:cNvSpPr/>
           <p:nvPr/>
         </p:nvSpPr>
@@ -17620,14 +17572,54 @@
       </p:grpSpPr>
       <p:sp>
         <p:nvSpPr>
-          <p:cNvPr id="2" name="Text 0"/>
-          <p:cNvSpPr/>
-          <p:nvPr/>
-        </p:nvSpPr>
-        <p:spPr>
-          <a:xfrm>
-            <a:off x="566928" y="384048"/>
-            <a:ext cx="11055096" cy="658368"/>
+          <p:cNvPr id="2" name="Shape 0"/>
+          <p:cNvSpPr/>
+          <p:nvPr/>
+        </p:nvSpPr>
+        <p:spPr>
+          <a:xfrm>
+            <a:off x="0" y="1417320"/>
+            <a:ext cx="12188952" cy="3108960"/>
+          </a:xfrm>
+          <a:prstGeom prst="rect">
+            <a:avLst/>
+          </a:prstGeom>
+          <a:solidFill>
+            <a:srgbClr val="E8F0FA"/>
+          </a:solidFill>
+          <a:ln/>
+        </p:spPr>
+      </p:sp>
+      <p:sp>
+        <p:nvSpPr>
+          <p:cNvPr id="3" name="Shape 1"/>
+          <p:cNvSpPr/>
+          <p:nvPr/>
+        </p:nvSpPr>
+        <p:spPr>
+          <a:xfrm>
+            <a:off x="0" y="1417320"/>
+            <a:ext cx="201168" cy="3108960"/>
+          </a:xfrm>
+          <a:prstGeom prst="rect">
+            <a:avLst/>
+          </a:prstGeom>
+          <a:solidFill>
+            <a:srgbClr val="3674C1"/>
+          </a:solidFill>
+          <a:ln/>
+        </p:spPr>
+      </p:sp>
+      <p:sp>
+        <p:nvSpPr>
+          <p:cNvPr id="4" name="Text 2"/>
+          <p:cNvSpPr/>
+          <p:nvPr/>
+        </p:nvSpPr>
+        <p:spPr>
+          <a:xfrm>
+            <a:off x="566928" y="1691640"/>
+            <a:ext cx="1828800" cy="914400"/>
           </a:xfrm>
           <a:prstGeom prst="rect">
             <a:avLst/>
@@ -17643,50 +17635,69 @@
               <a:buNone/>
             </a:pPr>
             <a:r>
-              <a:rPr lang="en-US" sz="3000" b="1" dirty="0">
-                <a:solidFill>
-                  <a:srgbClr val="1F4C86"/>
+              <a:rPr lang="en-US" sz="5400" b="1" dirty="0">
+                <a:solidFill>
+                  <a:srgbClr val="3674C1"/>
                 </a:solidFill>
                 <a:latin typeface="Trebuchet MS" pitchFamily="34" charset="0"/>
                 <a:ea typeface="Trebuchet MS" pitchFamily="34" charset="-122"/>
                 <a:cs typeface="Trebuchet MS" pitchFamily="34" charset="-120"/>
               </a:rPr>
-              <a:t>Please cite the methods</a:t>
-            </a:r>
-            <a:endParaRPr lang="en-US" sz="3000" dirty="0"/>
-          </a:p>
-        </p:txBody>
-      </p:sp>
-      <p:sp>
-        <p:nvSpPr>
-          <p:cNvPr id="3" name="Shape 1"/>
-          <p:cNvSpPr/>
-          <p:nvPr/>
-        </p:nvSpPr>
-        <p:spPr>
-          <a:xfrm>
-            <a:off x="566928" y="1097280"/>
-            <a:ext cx="1920240" cy="50292"/>
-          </a:xfrm>
-          <a:prstGeom prst="rect">
-            <a:avLst/>
-          </a:prstGeom>
-          <a:solidFill>
-            <a:srgbClr val="3674C1"/>
-          </a:solidFill>
-          <a:ln/>
-        </p:spPr>
-      </p:sp>
-      <p:sp>
-        <p:nvSpPr>
-          <p:cNvPr id="4" name="Text 2"/>
-          <p:cNvSpPr/>
-          <p:nvPr/>
-        </p:nvSpPr>
-        <p:spPr>
-          <a:xfrm>
-            <a:off x="640080" y="1481328"/>
-            <a:ext cx="10963656" cy="4553712"/>
+              <a:t>08</a:t>
+            </a:r>
+            <a:endParaRPr lang="en-US" sz="5400" dirty="0"/>
+          </a:p>
+        </p:txBody>
+      </p:sp>
+      <p:sp>
+        <p:nvSpPr>
+          <p:cNvPr id="5" name="Text 3"/>
+          <p:cNvSpPr/>
+          <p:nvPr/>
+        </p:nvSpPr>
+        <p:spPr>
+          <a:xfrm>
+            <a:off x="566928" y="2606040"/>
+            <a:ext cx="11055096" cy="868680"/>
+          </a:xfrm>
+          <a:prstGeom prst="rect">
+            <a:avLst/>
+          </a:prstGeom>
+          <a:noFill/>
+          <a:ln/>
+        </p:spPr>
+        <p:txBody>
+          <a:bodyPr wrap="square" rtlCol="0" anchor="ctr"/>
+          <a:lstStyle/>
+          <a:p>
+            <a:pPr indent="0" marL="0">
+              <a:buNone/>
+            </a:pPr>
+            <a:r>
+              <a:rPr lang="en-US" sz="4000" b="1" dirty="0">
+                <a:solidFill>
+                  <a:srgbClr val="1F4C86"/>
+                </a:solidFill>
+                <a:latin typeface="Trebuchet MS" pitchFamily="34" charset="0"/>
+                <a:ea typeface="Trebuchet MS" pitchFamily="34" charset="-122"/>
+                <a:cs typeface="Trebuchet MS" pitchFamily="34" charset="-120"/>
+              </a:rPr>
+              <a:t>Microscope control</a:t>
+            </a:r>
+            <a:endParaRPr lang="en-US" sz="4000" dirty="0"/>
+          </a:p>
+        </p:txBody>
+      </p:sp>
+      <p:sp>
+        <p:nvSpPr>
+          <p:cNvPr id="6" name="Text 4"/>
+          <p:cNvSpPr/>
+          <p:nvPr/>
+        </p:nvSpPr>
+        <p:spPr>
+          <a:xfrm>
+            <a:off x="566928" y="3456432"/>
+            <a:ext cx="10140696" cy="731520"/>
           </a:xfrm>
           <a:prstGeom prst="rect">
             <a:avLst/>
@@ -17698,130 +17709,66 @@
           <a:bodyPr wrap="square" rtlCol="0" anchor="t"/>
           <a:lstStyle/>
           <a:p>
-            <a:pPr marL="342900" indent="-342900">
-              <a:lnSpc>
-                <a:spcPct val="105000"/>
-              </a:lnSpc>
-              <a:spcAft>
-                <a:spcPts val="1200"/>
-              </a:spcAft>
-              <a:buSzPct val="100000"/>
-              <a:buChar char="•"/>
-            </a:pPr>
-            <a:r>
-              <a:rPr lang="en-US" sz="2000" dirty="0">
-                <a:solidFill>
-                  <a:srgbClr val="1F2933"/>
-                </a:solidFill>
-                <a:latin typeface="Calibri" pitchFamily="34" charset="0"/>
-                <a:ea typeface="Calibri" pitchFamily="34" charset="-122"/>
-                <a:cs typeface="Calibri" pitchFamily="34" charset="-120"/>
-              </a:rPr>
-              <a:t>Both tools are thin wrappers over other people’s science</a:t>
-            </a:r>
-            <a:endParaRPr lang="en-US" sz="2000" dirty="0"/>
-          </a:p>
-          <a:p>
-            <a:pPr marL="342900" indent="-342900">
-              <a:lnSpc>
-                <a:spcPct val="105000"/>
-              </a:lnSpc>
-              <a:spcAft>
-                <a:spcPts val="1200"/>
-              </a:spcAft>
-              <a:buSzPct val="100000"/>
-              <a:buChar char="•"/>
-            </a:pPr>
-            <a:r>
-              <a:rPr lang="en-US" sz="2000" dirty="0">
-                <a:solidFill>
-                  <a:srgbClr val="1F2933"/>
-                </a:solidFill>
-                <a:latin typeface="Calibri" pitchFamily="34" charset="0"/>
-                <a:ea typeface="Calibri" pitchFamily="34" charset="-122"/>
-                <a:cs typeface="Calibri" pitchFamily="34" charset="-120"/>
-              </a:rPr>
-              <a:t>CT-FIRE — Bredfeldt et al. 2014, Journal of Biomedical Optics 19(1):016007</a:t>
-            </a:r>
-            <a:endParaRPr lang="en-US" sz="2000" dirty="0"/>
-          </a:p>
-          <a:p>
-            <a:pPr marL="342900" indent="-342900">
-              <a:lnSpc>
-                <a:spcPct val="105000"/>
-              </a:lnSpc>
-              <a:spcAft>
-                <a:spcPts val="1200"/>
-              </a:spcAft>
-              <a:buSzPct val="100000"/>
-              <a:buChar char="•"/>
-            </a:pPr>
-            <a:r>
-              <a:rPr lang="en-US" sz="2000" dirty="0">
-                <a:solidFill>
-                  <a:srgbClr val="1F2933"/>
-                </a:solidFill>
-                <a:latin typeface="Calibri" pitchFamily="34" charset="0"/>
-                <a:ea typeface="Calibri" pitchFamily="34" charset="-122"/>
-                <a:cs typeface="Calibri" pitchFamily="34" charset="-120"/>
-              </a:rPr>
-              <a:t>CurveAlign — LOCI, University of Wisconsin–Madison</a:t>
-            </a:r>
-            <a:endParaRPr lang="en-US" sz="2000" dirty="0"/>
-          </a:p>
-          <a:p>
-            <a:pPr marL="342900" indent="-342900">
-              <a:lnSpc>
-                <a:spcPct val="105000"/>
-              </a:lnSpc>
-              <a:spcAft>
-                <a:spcPts val="1200"/>
-              </a:spcAft>
-              <a:buSzPct val="100000"/>
-              <a:buChar char="•"/>
-            </a:pPr>
-            <a:r>
-              <a:rPr lang="en-US" sz="2000" dirty="0">
-                <a:solidFill>
-                  <a:srgbClr val="1F2933"/>
-                </a:solidFill>
-                <a:latin typeface="Calibri" pitchFamily="34" charset="0"/>
-                <a:ea typeface="Calibri" pitchFamily="34" charset="-122"/>
-                <a:cs typeface="Calibri" pitchFamily="34" charset="-120"/>
-              </a:rPr>
-              <a:t>TACS — Conklin et al. 2011; Provenzano et al. 2008, BMC Medicine 6:11</a:t>
-            </a:r>
-            <a:endParaRPr lang="en-US" sz="2000" dirty="0"/>
-          </a:p>
-          <a:p>
-            <a:pPr marL="342900" indent="-342900">
-              <a:lnSpc>
-                <a:spcPct val="105000"/>
-              </a:lnSpc>
-              <a:spcAft>
-                <a:spcPts val="1200"/>
-              </a:spcAft>
-              <a:buSzPct val="100000"/>
-              <a:buChar char="•"/>
-            </a:pPr>
-            <a:r>
-              <a:rPr lang="en-US" sz="2000" dirty="0">
-                <a:solidFill>
-                  <a:srgbClr val="1F2933"/>
-                </a:solidFill>
-                <a:latin typeface="Calibri" pitchFamily="34" charset="0"/>
-                <a:ea typeface="Calibri" pitchFamily="34" charset="-122"/>
-                <a:cs typeface="Calibri" pitchFamily="34" charset="-120"/>
-              </a:rPr>
-              <a:t>TWOMBLI — Wershof et al. 2021, Life Science Alliance 4(3)</a:t>
-            </a:r>
-            <a:endParaRPr lang="en-US" sz="2000" dirty="0"/>
-          </a:p>
-        </p:txBody>
-      </p:sp>
-      <p:sp>
-        <p:nvSpPr>
-          <p:cNvPr id="5" name="Text 3"/>
+            <a:pPr indent="0" marL="0">
+              <a:buNone/>
+            </a:pPr>
+            <a:r>
+              <a:rPr lang="en-US" sz="1900" dirty="0">
+                <a:solidFill>
+                  <a:srgbClr val="5A6675"/>
+                </a:solidFill>
+                <a:latin typeface="Calibri" pitchFamily="34" charset="0"/>
+                <a:ea typeface="Calibri" pitchFamily="34" charset="-122"/>
+                <a:cs typeface="Calibri" pitchFamily="34" charset="-120"/>
+              </a:rPr>
+              <a:t>The most complex thing here, and the reason for the rest</a:t>
+            </a:r>
+            <a:endParaRPr lang="en-US" sz="1900" dirty="0"/>
+          </a:p>
+        </p:txBody>
+      </p:sp>
+      <p:sp>
+        <p:nvSpPr>
+          <p:cNvPr id="7" name="Text 5"/>
+          <p:cNvSpPr/>
+          <p:nvPr/>
+        </p:nvSpPr>
+        <p:spPr>
+          <a:xfrm>
+            <a:off x="566928" y="6199632"/>
+            <a:ext cx="8229600" cy="365760"/>
+          </a:xfrm>
+          <a:prstGeom prst="rect">
+            <a:avLst/>
+          </a:prstGeom>
+          <a:noFill/>
+          <a:ln/>
+        </p:spPr>
+        <p:txBody>
+          <a:bodyPr wrap="square" rtlCol="0" anchor="ctr"/>
+          <a:lstStyle/>
+          <a:p>
+            <a:pPr indent="0" marL="0">
+              <a:buNone/>
+            </a:pPr>
+            <a:r>
+              <a:rPr lang="en-US" sz="1400" dirty="0">
+                <a:solidFill>
+                  <a:srgbClr val="A8B2BF"/>
+                </a:solidFill>
+                <a:latin typeface="Calibri" pitchFamily="34" charset="0"/>
+                <a:ea typeface="Calibri" pitchFamily="34" charset="-122"/>
+                <a:cs typeface="Calibri" pitchFamily="34" charset="-120"/>
+              </a:rPr>
+              <a:t>michaelsnelson.github.io/BINA-I2K-2026-QuPath-Extensions</a:t>
+            </a:r>
+            <a:endParaRPr lang="en-US" sz="1400" dirty="0"/>
+          </a:p>
+        </p:txBody>
+      </p:sp>
+      <p:sp>
+        <p:nvSpPr>
+          <p:cNvPr id="8" name="Text 6"/>
           <p:cNvSpPr/>
           <p:nvPr/>
         </p:nvSpPr>
@@ -17892,23 +17839,42 @@
       </p:grpSpPr>
       <p:sp>
         <p:nvSpPr>
-          <p:cNvPr id="2" name="Shape 0"/>
-          <p:cNvSpPr/>
-          <p:nvPr/>
-        </p:nvSpPr>
-        <p:spPr>
-          <a:xfrm>
-            <a:off x="0" y="1417320"/>
-            <a:ext cx="12188952" cy="3108960"/>
-          </a:xfrm>
-          <a:prstGeom prst="rect">
-            <a:avLst/>
-          </a:prstGeom>
-          <a:solidFill>
-            <a:srgbClr val="E8F0FA"/>
-          </a:solidFill>
-          <a:ln/>
-        </p:spPr>
+          <p:cNvPr id="2" name="Text 0"/>
+          <p:cNvSpPr/>
+          <p:nvPr/>
+        </p:nvSpPr>
+        <p:spPr>
+          <a:xfrm>
+            <a:off x="566928" y="384048"/>
+            <a:ext cx="11055096" cy="658368"/>
+          </a:xfrm>
+          <a:prstGeom prst="rect">
+            <a:avLst/>
+          </a:prstGeom>
+          <a:noFill/>
+          <a:ln/>
+        </p:spPr>
+        <p:txBody>
+          <a:bodyPr wrap="square" rtlCol="0" anchor="ctr"/>
+          <a:lstStyle/>
+          <a:p>
+            <a:pPr indent="0" marL="0">
+              <a:buNone/>
+            </a:pPr>
+            <a:r>
+              <a:rPr lang="en-US" sz="3000" b="1" dirty="0">
+                <a:solidFill>
+                  <a:srgbClr val="1F4C86"/>
+                </a:solidFill>
+                <a:latin typeface="Trebuchet MS" pitchFamily="34" charset="0"/>
+                <a:ea typeface="Trebuchet MS" pitchFamily="34" charset="-122"/>
+                <a:cs typeface="Trebuchet MS" pitchFamily="34" charset="-120"/>
+              </a:rPr>
+              <a:t>QPSC — QuPath Scope Control</a:t>
+            </a:r>
+            <a:endParaRPr lang="en-US" sz="3000" dirty="0"/>
+          </a:p>
+        </p:txBody>
       </p:sp>
       <p:sp>
         <p:nvSpPr>
@@ -17918,8 +17884,8 @@
         </p:nvSpPr>
         <p:spPr>
           <a:xfrm>
-            <a:off x="0" y="1417320"/>
-            <a:ext cx="201168" cy="3108960"/>
+            <a:off x="566928" y="1097280"/>
+            <a:ext cx="1920240" cy="50292"/>
           </a:xfrm>
           <a:prstGeom prst="rect">
             <a:avLst/>
@@ -17938,157 +17904,119 @@
         </p:nvSpPr>
         <p:spPr>
           <a:xfrm>
-            <a:off x="566928" y="1691640"/>
-            <a:ext cx="1828800" cy="914400"/>
-          </a:xfrm>
-          <a:prstGeom prst="rect">
-            <a:avLst/>
-          </a:prstGeom>
-          <a:noFill/>
-          <a:ln/>
-        </p:spPr>
-        <p:txBody>
-          <a:bodyPr wrap="square" rtlCol="0" anchor="ctr"/>
-          <a:lstStyle/>
-          <a:p>
-            <a:pPr indent="0" marL="0">
-              <a:buNone/>
-            </a:pPr>
-            <a:r>
-              <a:rPr lang="en-US" sz="5400" b="1" dirty="0">
-                <a:solidFill>
-                  <a:srgbClr val="3674C1"/>
-                </a:solidFill>
-                <a:latin typeface="Trebuchet MS" pitchFamily="34" charset="0"/>
-                <a:ea typeface="Trebuchet MS" pitchFamily="34" charset="-122"/>
-                <a:cs typeface="Trebuchet MS" pitchFamily="34" charset="-120"/>
-              </a:rPr>
-              <a:t>08</a:t>
-            </a:r>
-            <a:endParaRPr lang="en-US" sz="5400" dirty="0"/>
+            <a:off x="640080" y="1481328"/>
+            <a:ext cx="10963656" cy="4553712"/>
+          </a:xfrm>
+          <a:prstGeom prst="rect">
+            <a:avLst/>
+          </a:prstGeom>
+          <a:noFill/>
+          <a:ln/>
+        </p:spPr>
+        <p:txBody>
+          <a:bodyPr wrap="square" rtlCol="0" anchor="t"/>
+          <a:lstStyle/>
+          <a:p>
+            <a:pPr marL="342900" indent="-342900">
+              <a:lnSpc>
+                <a:spcPct val="105000"/>
+              </a:lnSpc>
+              <a:spcAft>
+                <a:spcPts val="1200"/>
+              </a:spcAft>
+              <a:buSzPct val="100000"/>
+              <a:buChar char="•"/>
+            </a:pPr>
+            <a:r>
+              <a:rPr lang="en-US" sz="2000" dirty="0">
+                <a:solidFill>
+                  <a:srgbClr val="1F2933"/>
+                </a:solidFill>
+                <a:latin typeface="Calibri" pitchFamily="34" charset="0"/>
+                <a:ea typeface="Calibri" pitchFamily="34" charset="-122"/>
+                <a:cs typeface="Calibri" pitchFamily="34" charset="-120"/>
+              </a:rPr>
+              <a:t>Draw a box around a region in QuPath. The stage moves, the tiles are captured and stitched, and the image appears back in your project</a:t>
+            </a:r>
+            <a:endParaRPr lang="en-US" sz="2000" dirty="0"/>
+          </a:p>
+          <a:p>
+            <a:pPr marL="342900" indent="-342900">
+              <a:lnSpc>
+                <a:spcPct val="105000"/>
+              </a:lnSpc>
+              <a:spcAft>
+                <a:spcPts val="1200"/>
+              </a:spcAft>
+              <a:buSzPct val="100000"/>
+              <a:buChar char="•"/>
+            </a:pPr>
+            <a:r>
+              <a:rPr lang="en-US" sz="2000" dirty="0">
+                <a:solidFill>
+                  <a:srgbClr val="1F2933"/>
+                </a:solidFill>
+                <a:latin typeface="Calibri" pitchFamily="34" charset="0"/>
+                <a:ea typeface="Calibri" pitchFamily="34" charset="-122"/>
+                <a:cs typeface="Calibri" pitchFamily="34" charset="-120"/>
+              </a:rPr>
+              <a:t>Target specific annotations on a slide you already scanned</a:t>
+            </a:r>
+            <a:endParaRPr lang="en-US" sz="2000" dirty="0"/>
+          </a:p>
+          <a:p>
+            <a:pPr marL="342900" indent="-342900">
+              <a:lnSpc>
+                <a:spcPct val="105000"/>
+              </a:lnSpc>
+              <a:spcAft>
+                <a:spcPts val="1200"/>
+              </a:spcAft>
+              <a:buSzPct val="100000"/>
+              <a:buChar char="•"/>
+            </a:pPr>
+            <a:r>
+              <a:rPr lang="en-US" sz="2000" dirty="0">
+                <a:solidFill>
+                  <a:srgbClr val="1F2933"/>
+                </a:solidFill>
+                <a:latin typeface="Calibri" pitchFamily="34" charset="0"/>
+                <a:ea typeface="Calibri" pitchFamily="34" charset="-122"/>
+                <a:cs typeface="Calibri" pitchFamily="34" charset="-120"/>
+              </a:rPr>
+              <a:t>Live camera view, stage map, saved positions, and a virtual joystick</a:t>
+            </a:r>
+            <a:endParaRPr lang="en-US" sz="2000" dirty="0"/>
+          </a:p>
+          <a:p>
+            <a:pPr marL="342900" indent="-342900">
+              <a:lnSpc>
+                <a:spcPct val="105000"/>
+              </a:lnSpc>
+              <a:spcAft>
+                <a:spcPts val="1200"/>
+              </a:spcAft>
+              <a:buSzPct val="100000"/>
+              <a:buChar char="•"/>
+            </a:pPr>
+            <a:r>
+              <a:rPr lang="en-US" sz="2000" dirty="0">
+                <a:solidFill>
+                  <a:srgbClr val="1F2933"/>
+                </a:solidFill>
+                <a:latin typeface="Calibri" pitchFamily="34" charset="0"/>
+                <a:ea typeface="Calibri" pitchFamily="34" charset="-122"/>
+                <a:cs typeface="Calibri" pitchFamily="34" charset="-120"/>
+              </a:rPr>
+              <a:t>Brightfield, multi-channel fluorescence, and combined passes on a single-camera scope</a:t>
+            </a:r>
+            <a:endParaRPr lang="en-US" sz="2000" dirty="0"/>
           </a:p>
         </p:txBody>
       </p:sp>
       <p:sp>
         <p:nvSpPr>
           <p:cNvPr id="5" name="Text 3"/>
-          <p:cNvSpPr/>
-          <p:nvPr/>
-        </p:nvSpPr>
-        <p:spPr>
-          <a:xfrm>
-            <a:off x="566928" y="2606040"/>
-            <a:ext cx="11055096" cy="868680"/>
-          </a:xfrm>
-          <a:prstGeom prst="rect">
-            <a:avLst/>
-          </a:prstGeom>
-          <a:noFill/>
-          <a:ln/>
-        </p:spPr>
-        <p:txBody>
-          <a:bodyPr wrap="square" rtlCol="0" anchor="ctr"/>
-          <a:lstStyle/>
-          <a:p>
-            <a:pPr indent="0" marL="0">
-              <a:buNone/>
-            </a:pPr>
-            <a:r>
-              <a:rPr lang="en-US" sz="4000" b="1" dirty="0">
-                <a:solidFill>
-                  <a:srgbClr val="1F4C86"/>
-                </a:solidFill>
-                <a:latin typeface="Trebuchet MS" pitchFamily="34" charset="0"/>
-                <a:ea typeface="Trebuchet MS" pitchFamily="34" charset="-122"/>
-                <a:cs typeface="Trebuchet MS" pitchFamily="34" charset="-120"/>
-              </a:rPr>
-              <a:t>Microscope control</a:t>
-            </a:r>
-            <a:endParaRPr lang="en-US" sz="4000" dirty="0"/>
-          </a:p>
-        </p:txBody>
-      </p:sp>
-      <p:sp>
-        <p:nvSpPr>
-          <p:cNvPr id="6" name="Text 4"/>
-          <p:cNvSpPr/>
-          <p:nvPr/>
-        </p:nvSpPr>
-        <p:spPr>
-          <a:xfrm>
-            <a:off x="566928" y="3456432"/>
-            <a:ext cx="10140696" cy="731520"/>
-          </a:xfrm>
-          <a:prstGeom prst="rect">
-            <a:avLst/>
-          </a:prstGeom>
-          <a:noFill/>
-          <a:ln/>
-        </p:spPr>
-        <p:txBody>
-          <a:bodyPr wrap="square" rtlCol="0" anchor="t"/>
-          <a:lstStyle/>
-          <a:p>
-            <a:pPr indent="0" marL="0">
-              <a:buNone/>
-            </a:pPr>
-            <a:r>
-              <a:rPr lang="en-US" sz="1900" dirty="0">
-                <a:solidFill>
-                  <a:srgbClr val="5A6675"/>
-                </a:solidFill>
-                <a:latin typeface="Calibri" pitchFamily="34" charset="0"/>
-                <a:ea typeface="Calibri" pitchFamily="34" charset="-122"/>
-                <a:cs typeface="Calibri" pitchFamily="34" charset="-120"/>
-              </a:rPr>
-              <a:t>The most complex thing here, and the reason for the rest</a:t>
-            </a:r>
-            <a:endParaRPr lang="en-US" sz="1900" dirty="0"/>
-          </a:p>
-        </p:txBody>
-      </p:sp>
-      <p:sp>
-        <p:nvSpPr>
-          <p:cNvPr id="7" name="Text 5"/>
-          <p:cNvSpPr/>
-          <p:nvPr/>
-        </p:nvSpPr>
-        <p:spPr>
-          <a:xfrm>
-            <a:off x="566928" y="6199632"/>
-            <a:ext cx="8229600" cy="365760"/>
-          </a:xfrm>
-          <a:prstGeom prst="rect">
-            <a:avLst/>
-          </a:prstGeom>
-          <a:noFill/>
-          <a:ln/>
-        </p:spPr>
-        <p:txBody>
-          <a:bodyPr wrap="square" rtlCol="0" anchor="ctr"/>
-          <a:lstStyle/>
-          <a:p>
-            <a:pPr indent="0" marL="0">
-              <a:buNone/>
-            </a:pPr>
-            <a:r>
-              <a:rPr lang="en-US" sz="1400" dirty="0">
-                <a:solidFill>
-                  <a:srgbClr val="A8B2BF"/>
-                </a:solidFill>
-                <a:latin typeface="Calibri" pitchFamily="34" charset="0"/>
-                <a:ea typeface="Calibri" pitchFamily="34" charset="-122"/>
-                <a:cs typeface="Calibri" pitchFamily="34" charset="-120"/>
-              </a:rPr>
-              <a:t>michaelsnelson.github.io/BINA-I2K-2026-QuPath-Extensions</a:t>
-            </a:r>
-            <a:endParaRPr lang="en-US" sz="1400" dirty="0"/>
-          </a:p>
-        </p:txBody>
-      </p:sp>
-      <p:sp>
-        <p:nvSpPr>
-          <p:cNvPr id="8" name="Text 6"/>
           <p:cNvSpPr/>
           <p:nvPr/>
         </p:nvSpPr>
@@ -18190,7 +18118,7 @@
                 <a:ea typeface="Trebuchet MS" pitchFamily="34" charset="-122"/>
                 <a:cs typeface="Trebuchet MS" pitchFamily="34" charset="-120"/>
               </a:rPr>
-              <a:t>QPSC — QuPath Scope Control</a:t>
+              <a:t>Why this changes the rest</a:t>
             </a:r>
             <a:endParaRPr lang="en-US" sz="3000" dirty="0"/>
           </a:p>
@@ -18256,7 +18184,7 @@
                 <a:ea typeface="Calibri" pitchFamily="34" charset="-122"/>
                 <a:cs typeface="Calibri" pitchFamily="34" charset="-120"/>
               </a:rPr>
-              <a:t>Draw a box around a region in QuPath. The stage moves, the tiles are captured and stitched, and the image appears back in your project</a:t>
+              <a:t>The region you analysed is the region you acquire at high resolution</a:t>
             </a:r>
             <a:endParaRPr lang="en-US" sz="2000" dirty="0"/>
           </a:p>
@@ -18280,7 +18208,7 @@
                 <a:ea typeface="Calibri" pitchFamily="34" charset="-122"/>
                 <a:cs typeface="Calibri" pitchFamily="34" charset="-120"/>
               </a:rPr>
-              <a:t>Target specific annotations on a slide you already scanned</a:t>
+              <a:t>Acquisition metadata arrives in the project, not in a folder that gets separated from the images</a:t>
             </a:r>
             <a:endParaRPr lang="en-US" sz="2000" dirty="0"/>
           </a:p>
@@ -18304,39 +18232,79 @@
                 <a:ea typeface="Calibri" pitchFamily="34" charset="-122"/>
                 <a:cs typeface="Calibri" pitchFamily="34" charset="-120"/>
               </a:rPr>
-              <a:t>Live camera view, stage map, saved positions, and a virtual joystick</a:t>
+              <a:t>Stitching is a step in this pipeline — and it works perfectly well on its own, which is why it is in your hands-on hour</a:t>
             </a:r>
             <a:endParaRPr lang="en-US" sz="2000" dirty="0"/>
           </a:p>
-          <a:p>
-            <a:pPr marL="342900" indent="-342900">
-              <a:lnSpc>
-                <a:spcPct val="105000"/>
-              </a:lnSpc>
-              <a:spcAft>
-                <a:spcPts val="1200"/>
-              </a:spcAft>
-              <a:buSzPct val="100000"/>
-              <a:buChar char="•"/>
-            </a:pPr>
-            <a:r>
-              <a:rPr lang="en-US" sz="2000" dirty="0">
-                <a:solidFill>
-                  <a:srgbClr val="1F2933"/>
-                </a:solidFill>
-                <a:latin typeface="Calibri" pitchFamily="34" charset="0"/>
-                <a:ea typeface="Calibri" pitchFamily="34" charset="-122"/>
-                <a:cs typeface="Calibri" pitchFamily="34" charset="-120"/>
-              </a:rPr>
-              <a:t>Brightfield, multi-channel fluorescence, and combined passes on a single-camera scope</a:t>
-            </a:r>
-            <a:endParaRPr lang="en-US" sz="2000" dirty="0"/>
-          </a:p>
-        </p:txBody>
-      </p:sp>
-      <p:sp>
-        <p:nvSpPr>
-          <p:cNvPr id="5" name="Text 3"/>
+        </p:txBody>
+      </p:sp>
+      <p:sp>
+        <p:nvSpPr>
+          <p:cNvPr id="5" name="Shape 3"/>
+          <p:cNvSpPr/>
+          <p:nvPr/>
+        </p:nvSpPr>
+        <p:spPr>
+          <a:xfrm>
+            <a:off x="566928" y="5650992"/>
+            <a:ext cx="11055096" cy="566928"/>
+          </a:xfrm>
+          <a:prstGeom prst="rect">
+            <a:avLst/>
+          </a:prstGeom>
+          <a:solidFill>
+            <a:srgbClr val="F4F8FD"/>
+          </a:solidFill>
+          <a:ln w="9525">
+            <a:solidFill>
+              <a:srgbClr val="3674C1"/>
+            </a:solidFill>
+            <a:prstDash val="solid"/>
+          </a:ln>
+        </p:spPr>
+      </p:sp>
+      <p:sp>
+        <p:nvSpPr>
+          <p:cNvPr id="6" name="Text 4"/>
+          <p:cNvSpPr/>
+          <p:nvPr/>
+        </p:nvSpPr>
+        <p:spPr>
+          <a:xfrm>
+            <a:off x="768096" y="5650992"/>
+            <a:ext cx="10652760" cy="566928"/>
+          </a:xfrm>
+          <a:prstGeom prst="rect">
+            <a:avLst/>
+          </a:prstGeom>
+          <a:noFill/>
+          <a:ln/>
+        </p:spPr>
+        <p:txBody>
+          <a:bodyPr wrap="square" rtlCol="0" anchor="ctr"/>
+          <a:lstStyle/>
+          <a:p>
+            <a:pPr indent="0" marL="0">
+              <a:buNone/>
+            </a:pPr>
+            <a:r>
+              <a:rPr lang="en-US" sz="1600" b="1" dirty="0">
+                <a:solidFill>
+                  <a:srgbClr val="1F4C86"/>
+                </a:solidFill>
+                <a:latin typeface="Calibri" pitchFamily="34" charset="0"/>
+                <a:ea typeface="Calibri" pitchFamily="34" charset="-122"/>
+                <a:cs typeface="Calibri" pitchFamily="34" charset="-120"/>
+              </a:rPr>
+              <a:t>Once acquisition is driven from QuPath, "acquisition software" and "analysis software" stop being separate places your data lives.</a:t>
+            </a:r>
+            <a:endParaRPr lang="en-US" sz="1600" dirty="0"/>
+          </a:p>
+        </p:txBody>
+      </p:sp>
+      <p:sp>
+        <p:nvSpPr>
+          <p:cNvPr id="7" name="Text 5"/>
           <p:cNvSpPr/>
           <p:nvPr/>
         </p:nvSpPr>
@@ -18438,7 +18406,7 @@
                 <a:ea typeface="Trebuchet MS" pitchFamily="34" charset="-122"/>
                 <a:cs typeface="Trebuchet MS" pitchFamily="34" charset="-120"/>
               </a:rPr>
-              <a:t>Why this changes the rest</a:t>
+              <a:t>How it is put together</a:t>
             </a:r>
             <a:endParaRPr lang="en-US" sz="3000" dirty="0"/>
           </a:p>
@@ -18472,8 +18440,47 @@
         </p:nvSpPr>
         <p:spPr>
           <a:xfrm>
-            <a:off x="640080" y="1481328"/>
-            <a:ext cx="10963656" cy="4553712"/>
+            <a:off x="566928" y="1243584"/>
+            <a:ext cx="11055096" cy="384048"/>
+          </a:xfrm>
+          <a:prstGeom prst="rect">
+            <a:avLst/>
+          </a:prstGeom>
+          <a:noFill/>
+          <a:ln/>
+        </p:spPr>
+        <p:txBody>
+          <a:bodyPr wrap="square" rtlCol="0" anchor="ctr"/>
+          <a:lstStyle/>
+          <a:p>
+            <a:pPr indent="0" marL="0">
+              <a:buNone/>
+            </a:pPr>
+            <a:r>
+              <a:rPr lang="en-US" sz="1700" i="1" dirty="0">
+                <a:solidFill>
+                  <a:srgbClr val="5A6675"/>
+                </a:solidFill>
+                <a:latin typeface="Calibri" pitchFamily="34" charset="0"/>
+                <a:ea typeface="Calibri" pitchFamily="34" charset="-122"/>
+                <a:cs typeface="Calibri" pitchFamily="34" charset="-120"/>
+              </a:rPr>
+              <a:t>The easy part is the QuPath extension. Budget your time for the microscope side.</a:t>
+            </a:r>
+            <a:endParaRPr lang="en-US" sz="1700" dirty="0"/>
+          </a:p>
+        </p:txBody>
+      </p:sp>
+      <p:sp>
+        <p:nvSpPr>
+          <p:cNvPr id="5" name="Text 3"/>
+          <p:cNvSpPr/>
+          <p:nvPr/>
+        </p:nvSpPr>
+        <p:spPr>
+          <a:xfrm>
+            <a:off x="640080" y="1755648"/>
+            <a:ext cx="10963656" cy="4279392"/>
           </a:xfrm>
           <a:prstGeom prst="rect">
             <a:avLst/>
@@ -18504,7 +18511,7 @@
                 <a:ea typeface="Calibri" pitchFamily="34" charset="-122"/>
                 <a:cs typeface="Calibri" pitchFamily="34" charset="-120"/>
               </a:rPr>
-              <a:t>The region you analysed is the region you acquire at high resolution</a:t>
+              <a:t>QuPath talks to a small command server, which drives Micro-Manager, which drives the hardware</a:t>
             </a:r>
             <a:endParaRPr lang="en-US" sz="2000" dirty="0"/>
           </a:p>
@@ -18528,7 +18535,7 @@
                 <a:ea typeface="Calibri" pitchFamily="34" charset="-122"/>
                 <a:cs typeface="Calibri" pitchFamily="34" charset="-120"/>
               </a:rPr>
-              <a:t>Acquisition metadata arrives in the project, not in a folder that gets separated from the images</a:t>
+              <a:t>Each instrument is described by its own configuration — the QuPath side does not know what kind of microscope it is</a:t>
             </a:r>
             <a:endParaRPr lang="en-US" sz="2000" dirty="0"/>
           </a:p>
@@ -18552,7 +18559,7 @@
                 <a:ea typeface="Calibri" pitchFamily="34" charset="-122"/>
                 <a:cs typeface="Calibri" pitchFamily="34" charset="-120"/>
               </a:rPr>
-              <a:t>Stitching is a step in this pipeline — and it works perfectly well on its own, which is why it is in your hands-on hour</a:t>
+              <a:t>Micro-Manager remains the device layer. We did not reinvent it</a:t>
             </a:r>
             <a:endParaRPr lang="en-US" sz="2000" dirty="0"/>
           </a:p>
@@ -18560,71 +18567,7 @@
       </p:sp>
       <p:sp>
         <p:nvSpPr>
-          <p:cNvPr id="5" name="Shape 3"/>
-          <p:cNvSpPr/>
-          <p:nvPr/>
-        </p:nvSpPr>
-        <p:spPr>
-          <a:xfrm>
-            <a:off x="566928" y="5650992"/>
-            <a:ext cx="11055096" cy="566928"/>
-          </a:xfrm>
-          <a:prstGeom prst="rect">
-            <a:avLst/>
-          </a:prstGeom>
-          <a:solidFill>
-            <a:srgbClr val="F4F8FD"/>
-          </a:solidFill>
-          <a:ln w="9525">
-            <a:solidFill>
-              <a:srgbClr val="3674C1"/>
-            </a:solidFill>
-            <a:prstDash val="solid"/>
-          </a:ln>
-        </p:spPr>
-      </p:sp>
-      <p:sp>
-        <p:nvSpPr>
           <p:cNvPr id="6" name="Text 4"/>
-          <p:cNvSpPr/>
-          <p:nvPr/>
-        </p:nvSpPr>
-        <p:spPr>
-          <a:xfrm>
-            <a:off x="768096" y="5650992"/>
-            <a:ext cx="10652760" cy="566928"/>
-          </a:xfrm>
-          <a:prstGeom prst="rect">
-            <a:avLst/>
-          </a:prstGeom>
-          <a:noFill/>
-          <a:ln/>
-        </p:spPr>
-        <p:txBody>
-          <a:bodyPr wrap="square" rtlCol="0" anchor="ctr"/>
-          <a:lstStyle/>
-          <a:p>
-            <a:pPr indent="0" marL="0">
-              <a:buNone/>
-            </a:pPr>
-            <a:r>
-              <a:rPr lang="en-US" sz="1600" b="1" dirty="0">
-                <a:solidFill>
-                  <a:srgbClr val="1F4C86"/>
-                </a:solidFill>
-                <a:latin typeface="Calibri" pitchFamily="34" charset="0"/>
-                <a:ea typeface="Calibri" pitchFamily="34" charset="-122"/>
-                <a:cs typeface="Calibri" pitchFamily="34" charset="-120"/>
-              </a:rPr>
-              <a:t>Once acquisition is driven from QuPath, "acquisition software" and "analysis software" stop being separate places your data lives.</a:t>
-            </a:r>
-            <a:endParaRPr lang="en-US" sz="1600" dirty="0"/>
-          </a:p>
-        </p:txBody>
-      </p:sp>
-      <p:sp>
-        <p:nvSpPr>
-          <p:cNvPr id="7" name="Text 5"/>
           <p:cNvSpPr/>
           <p:nvPr/>
         </p:nvSpPr>
@@ -18695,14 +18638,41 @@
       </p:grpSpPr>
       <p:sp>
         <p:nvSpPr>
-          <p:cNvPr id="2" name="Text 0"/>
-          <p:cNvSpPr/>
-          <p:nvPr/>
-        </p:nvSpPr>
-        <p:spPr>
-          <a:xfrm>
-            <a:off x="566928" y="384048"/>
-            <a:ext cx="11055096" cy="658368"/>
+          <p:cNvPr id="2" name="Shape 0"/>
+          <p:cNvSpPr/>
+          <p:nvPr/>
+        </p:nvSpPr>
+        <p:spPr>
+          <a:xfrm>
+            <a:off x="566928" y="411480"/>
+            <a:ext cx="2331720" cy="457200"/>
+          </a:xfrm>
+          <a:prstGeom prst="roundRect">
+            <a:avLst>
+              <a:gd name="adj" fmla="val 20000"/>
+            </a:avLst>
+          </a:prstGeom>
+          <a:solidFill>
+            <a:srgbClr val="FBF1E0"/>
+          </a:solidFill>
+          <a:ln w="12700">
+            <a:solidFill>
+              <a:srgbClr val="B26A00"/>
+            </a:solidFill>
+            <a:prstDash val="solid"/>
+          </a:ln>
+        </p:spPr>
+      </p:sp>
+      <p:sp>
+        <p:nvSpPr>
+          <p:cNvPr id="3" name="Text 1"/>
+          <p:cNvSpPr/>
+          <p:nvPr/>
+        </p:nvSpPr>
+        <p:spPr>
+          <a:xfrm>
+            <a:off x="566928" y="411480"/>
+            <a:ext cx="2331720" cy="457200"/>
           </a:xfrm>
           <a:prstGeom prst="rect">
             <a:avLst/>
@@ -18714,33 +18684,72 @@
           <a:bodyPr wrap="square" rtlCol="0" anchor="ctr"/>
           <a:lstStyle/>
           <a:p>
-            <a:pPr indent="0" marL="0">
+            <a:pPr algn="ctr" indent="0" marL="0">
               <a:buNone/>
             </a:pPr>
             <a:r>
-              <a:rPr lang="en-US" sz="3000" b="1" dirty="0">
-                <a:solidFill>
-                  <a:srgbClr val="1F4C86"/>
+              <a:rPr lang="en-US" sz="1600" b="1" dirty="0">
+                <a:solidFill>
+                  <a:srgbClr val="B26A00"/>
                 </a:solidFill>
                 <a:latin typeface="Trebuchet MS" pitchFamily="34" charset="0"/>
                 <a:ea typeface="Trebuchet MS" pitchFamily="34" charset="-122"/>
                 <a:cs typeface="Trebuchet MS" pitchFamily="34" charset="-120"/>
               </a:rPr>
-              <a:t>How it is put together</a:t>
-            </a:r>
-            <a:endParaRPr lang="en-US" sz="3000" dirty="0"/>
-          </a:p>
-        </p:txBody>
-      </p:sp>
-      <p:sp>
-        <p:nvSpPr>
-          <p:cNvPr id="3" name="Shape 1"/>
-          <p:cNvSpPr/>
-          <p:nvPr/>
-        </p:nvSpPr>
-        <p:spPr>
-          <a:xfrm>
-            <a:off x="566928" y="1097280"/>
+              <a:t>▶  SHOWN  ·  NOT YOURS TO RUN</a:t>
+            </a:r>
+            <a:endParaRPr lang="en-US" sz="1600" dirty="0"/>
+          </a:p>
+        </p:txBody>
+      </p:sp>
+      <p:sp>
+        <p:nvSpPr>
+          <p:cNvPr id="4" name="Text 2"/>
+          <p:cNvSpPr/>
+          <p:nvPr/>
+        </p:nvSpPr>
+        <p:spPr>
+          <a:xfrm>
+            <a:off x="566928" y="1024128"/>
+            <a:ext cx="11055096" cy="685800"/>
+          </a:xfrm>
+          <a:prstGeom prst="rect">
+            <a:avLst/>
+          </a:prstGeom>
+          <a:noFill/>
+          <a:ln/>
+        </p:spPr>
+        <p:txBody>
+          <a:bodyPr wrap="square" rtlCol="0" anchor="ctr"/>
+          <a:lstStyle/>
+          <a:p>
+            <a:pPr indent="0" marL="0">
+              <a:buNone/>
+            </a:pPr>
+            <a:r>
+              <a:rPr lang="en-US" sz="3200" b="1" dirty="0">
+                <a:solidFill>
+                  <a:srgbClr val="1F4C86"/>
+                </a:solidFill>
+                <a:latin typeface="Trebuchet MS" pitchFamily="34" charset="0"/>
+                <a:ea typeface="Trebuchet MS" pitchFamily="34" charset="-122"/>
+                <a:cs typeface="Trebuchet MS" pitchFamily="34" charset="-120"/>
+              </a:rPr>
+              <a:t>Acquisition, live</a:t>
+            </a:r>
+            <a:endParaRPr lang="en-US" sz="3200" dirty="0"/>
+          </a:p>
+        </p:txBody>
+      </p:sp>
+      <p:sp>
+        <p:nvSpPr>
+          <p:cNvPr id="5" name="Shape 3"/>
+          <p:cNvSpPr/>
+          <p:nvPr/>
+        </p:nvSpPr>
+        <p:spPr>
+          <a:xfrm>
+            <a:off x="566928" y="1783080"/>
             <a:ext cx="1920240" cy="50292"/>
           </a:xfrm>
           <a:prstGeom prst="rect">
@@ -18754,53 +18763,14 @@
       </p:sp>
       <p:sp>
         <p:nvSpPr>
-          <p:cNvPr id="4" name="Text 2"/>
-          <p:cNvSpPr/>
-          <p:nvPr/>
-        </p:nvSpPr>
-        <p:spPr>
-          <a:xfrm>
-            <a:off x="566928" y="1243584"/>
-            <a:ext cx="11055096" cy="384048"/>
-          </a:xfrm>
-          <a:prstGeom prst="rect">
-            <a:avLst/>
-          </a:prstGeom>
-          <a:noFill/>
-          <a:ln/>
-        </p:spPr>
-        <p:txBody>
-          <a:bodyPr wrap="square" rtlCol="0" anchor="ctr"/>
-          <a:lstStyle/>
-          <a:p>
-            <a:pPr indent="0" marL="0">
-              <a:buNone/>
-            </a:pPr>
-            <a:r>
-              <a:rPr lang="en-US" sz="1700" i="1" dirty="0">
-                <a:solidFill>
-                  <a:srgbClr val="5A6675"/>
-                </a:solidFill>
-                <a:latin typeface="Calibri" pitchFamily="34" charset="0"/>
-                <a:ea typeface="Calibri" pitchFamily="34" charset="-122"/>
-                <a:cs typeface="Calibri" pitchFamily="34" charset="-120"/>
-              </a:rPr>
-              <a:t>The easy part is the QuPath extension. Budget your time for the microscope side.</a:t>
-            </a:r>
-            <a:endParaRPr lang="en-US" sz="1700" dirty="0"/>
-          </a:p>
-        </p:txBody>
-      </p:sp>
-      <p:sp>
-        <p:nvSpPr>
-          <p:cNvPr id="5" name="Text 3"/>
-          <p:cNvSpPr/>
-          <p:nvPr/>
-        </p:nvSpPr>
-        <p:spPr>
-          <a:xfrm>
-            <a:off x="640080" y="1755648"/>
-            <a:ext cx="10963656" cy="4279392"/>
+          <p:cNvPr id="6" name="Text 4"/>
+          <p:cNvSpPr/>
+          <p:nvPr/>
+        </p:nvSpPr>
+        <p:spPr>
+          <a:xfrm>
+            <a:off x="640080" y="2103120"/>
+            <a:ext cx="10963656" cy="3017520"/>
           </a:xfrm>
           <a:prstGeom prst="rect">
             <a:avLst/>
@@ -18813,11 +18783,8 @@
           <a:lstStyle/>
           <a:p>
             <a:pPr marL="342900" indent="-342900">
-              <a:lnSpc>
-                <a:spcPct val="105000"/>
-              </a:lnSpc>
               <a:spcAft>
-                <a:spcPts val="1200"/>
+                <a:spcPts val="1400"/>
               </a:spcAft>
               <a:buSzPct val="100000"/>
               <a:buChar char="•"/>
@@ -18831,17 +18798,14 @@
                 <a:ea typeface="Calibri" pitchFamily="34" charset="-122"/>
                 <a:cs typeface="Calibri" pitchFamily="34" charset="-120"/>
               </a:rPr>
-              <a:t>QuPath talks to a small command server, which drives Micro-Manager, which drives the hardware</a:t>
+              <a:t>Draw a bounding box on a slide overview</a:t>
             </a:r>
             <a:endParaRPr lang="en-US" sz="2000" dirty="0"/>
           </a:p>
           <a:p>
             <a:pPr marL="342900" indent="-342900">
-              <a:lnSpc>
-                <a:spcPct val="105000"/>
-              </a:lnSpc>
               <a:spcAft>
-                <a:spcPts val="1200"/>
+                <a:spcPts val="1400"/>
               </a:spcAft>
               <a:buSzPct val="100000"/>
               <a:buChar char="•"/>
@@ -18855,17 +18819,14 @@
                 <a:ea typeface="Calibri" pitchFamily="34" charset="-122"/>
                 <a:cs typeface="Calibri" pitchFamily="34" charset="-120"/>
               </a:rPr>
-              <a:t>Each instrument is described by its own configuration — the QuPath side does not know what kind of microscope it is</a:t>
+              <a:t>Watch the stage move and the tiles come in</a:t>
             </a:r>
             <a:endParaRPr lang="en-US" sz="2000" dirty="0"/>
           </a:p>
           <a:p>
             <a:pPr marL="342900" indent="-342900">
-              <a:lnSpc>
-                <a:spcPct val="105000"/>
-              </a:lnSpc>
               <a:spcAft>
-                <a:spcPts val="1200"/>
+                <a:spcPts val="1400"/>
               </a:spcAft>
               <a:buSzPct val="100000"/>
               <a:buChar char="•"/>
@@ -18879,15 +18840,121 @@
                 <a:ea typeface="Calibri" pitchFamily="34" charset="-122"/>
                 <a:cs typeface="Calibri" pitchFamily="34" charset="-120"/>
               </a:rPr>
-              <a:t>Micro-Manager remains the device layer. We did not reinvent it</a:t>
+              <a:t>Stitched pyramidal image lands back in the project, with its metadata</a:t>
             </a:r>
             <a:endParaRPr lang="en-US" sz="2000" dirty="0"/>
           </a:p>
-        </p:txBody>
-      </p:sp>
-      <p:sp>
-        <p:nvSpPr>
-          <p:cNvPr id="6" name="Text 4"/>
+          <a:p>
+            <a:pPr marL="342900" indent="-342900">
+              <a:spcAft>
+                <a:spcPts val="1400"/>
+              </a:spcAft>
+              <a:buSzPct val="100000"/>
+              <a:buChar char="•"/>
+            </a:pPr>
+            <a:r>
+              <a:rPr lang="en-US" sz="2000" dirty="0">
+                <a:solidFill>
+                  <a:srgbClr val="1F2933"/>
+                </a:solidFill>
+                <a:latin typeface="Calibri" pitchFamily="34" charset="0"/>
+                <a:ea typeface="Calibri" pitchFamily="34" charset="-122"/>
+                <a:cs typeface="Calibri" pitchFamily="34" charset="-120"/>
+              </a:rPr>
+              <a:t>Then open it and annotate it — the loop closes</a:t>
+            </a:r>
+            <a:endParaRPr lang="en-US" sz="2000" dirty="0"/>
+          </a:p>
+          <a:p>
+            <a:pPr marL="342900" indent="-342900">
+              <a:spcAft>
+                <a:spcPts val="1400"/>
+              </a:spcAft>
+              <a:buSzPct val="100000"/>
+              <a:buChar char="•"/>
+            </a:pPr>
+            <a:r>
+              <a:rPr lang="en-US" sz="2000" dirty="0">
+                <a:solidFill>
+                  <a:srgbClr val="1F2933"/>
+                </a:solidFill>
+                <a:latin typeface="Calibri" pitchFamily="34" charset="0"/>
+                <a:ea typeface="Calibri" pitchFamily="34" charset="-122"/>
+                <a:cs typeface="Calibri" pitchFamily="34" charset="-120"/>
+              </a:rPr>
+              <a:t>The stitching half — Tiles to Pyramid — you can install and use today, no microscope needed</a:t>
+            </a:r>
+            <a:endParaRPr lang="en-US" sz="2000" dirty="0"/>
+          </a:p>
+        </p:txBody>
+      </p:sp>
+      <p:sp>
+        <p:nvSpPr>
+          <p:cNvPr id="7" name="Shape 5"/>
+          <p:cNvSpPr/>
+          <p:nvPr/>
+        </p:nvSpPr>
+        <p:spPr>
+          <a:xfrm>
+            <a:off x="566928" y="5650992"/>
+            <a:ext cx="11055096" cy="566928"/>
+          </a:xfrm>
+          <a:prstGeom prst="rect">
+            <a:avLst/>
+          </a:prstGeom>
+          <a:solidFill>
+            <a:srgbClr val="F4F8FD"/>
+          </a:solidFill>
+          <a:ln w="9525">
+            <a:solidFill>
+              <a:srgbClr val="3674C1"/>
+            </a:solidFill>
+            <a:prstDash val="solid"/>
+          </a:ln>
+        </p:spPr>
+      </p:sp>
+      <p:sp>
+        <p:nvSpPr>
+          <p:cNvPr id="8" name="Text 6"/>
+          <p:cNvSpPr/>
+          <p:nvPr/>
+        </p:nvSpPr>
+        <p:spPr>
+          <a:xfrm>
+            <a:off x="768096" y="5650992"/>
+            <a:ext cx="10652760" cy="566928"/>
+          </a:xfrm>
+          <a:prstGeom prst="rect">
+            <a:avLst/>
+          </a:prstGeom>
+          <a:noFill/>
+          <a:ln/>
+        </p:spPr>
+        <p:txBody>
+          <a:bodyPr wrap="square" rtlCol="0" anchor="ctr"/>
+          <a:lstStyle/>
+          <a:p>
+            <a:pPr indent="0" marL="0">
+              <a:buNone/>
+            </a:pPr>
+            <a:r>
+              <a:rPr lang="en-US" sz="1600" b="1" dirty="0">
+                <a:solidFill>
+                  <a:srgbClr val="1F4C86"/>
+                </a:solidFill>
+                <a:latin typeface="Calibri" pitchFamily="34" charset="0"/>
+                <a:ea typeface="Calibri" pitchFamily="34" charset="-122"/>
+                <a:cs typeface="Calibri" pitchFamily="34" charset="-120"/>
+              </a:rPr>
+              <a:t>You watch this one: it needs a microscope, so nobody in the room runs it. About five minutes, with a recorded fallback if the network or the hardware disagrees.</a:t>
+            </a:r>
+            <a:endParaRPr lang="en-US" sz="1600" dirty="0"/>
+          </a:p>
+        </p:txBody>
+      </p:sp>
+      <p:sp>
+        <p:nvSpPr>
+          <p:cNvPr id="9" name="Text 7"/>
           <p:cNvSpPr/>
           <p:nvPr/>
         </p:nvSpPr>
@@ -18958,41 +19025,14 @@
       </p:grpSpPr>
       <p:sp>
         <p:nvSpPr>
-          <p:cNvPr id="2" name="Shape 0"/>
+          <p:cNvPr id="2" name="Text 0"/>
           <p:cNvSpPr/>
           <p:nvPr/>
         </p:nvSpPr>
         <p:spPr>
           <a:xfrm>
             <a:off x="566928" y="411480"/>
-            <a:ext cx="2331720" cy="457200"/>
-          </a:xfrm>
-          <a:prstGeom prst="roundRect">
-            <a:avLst>
-              <a:gd name="adj" fmla="val 20000"/>
-            </a:avLst>
-          </a:prstGeom>
-          <a:solidFill>
-            <a:srgbClr val="FBF1E0"/>
-          </a:solidFill>
-          <a:ln w="12700">
-            <a:solidFill>
-              <a:srgbClr val="B26A00"/>
-            </a:solidFill>
-            <a:prstDash val="solid"/>
-          </a:ln>
-        </p:spPr>
-      </p:sp>
-      <p:sp>
-        <p:nvSpPr>
-          <p:cNvPr id="3" name="Text 1"/>
-          <p:cNvSpPr/>
-          <p:nvPr/>
-        </p:nvSpPr>
-        <p:spPr>
-          <a:xfrm>
-            <a:off x="566928" y="411480"/>
-            <a:ext cx="2331720" cy="457200"/>
+            <a:ext cx="11055096" cy="685800"/>
           </a:xfrm>
           <a:prstGeom prst="rect">
             <a:avLst/>
@@ -19004,19 +19044,118 @@
           <a:bodyPr wrap="square" rtlCol="0" anchor="ctr"/>
           <a:lstStyle/>
           <a:p>
-            <a:pPr algn="ctr" indent="0" marL="0">
+            <a:pPr indent="0" marL="0">
               <a:buNone/>
             </a:pPr>
             <a:r>
-              <a:rPr lang="en-US" sz="1600" b="1" dirty="0">
-                <a:solidFill>
-                  <a:srgbClr val="B26A00"/>
+              <a:rPr lang="en-US" sz="3200" b="1" dirty="0">
+                <a:solidFill>
+                  <a:srgbClr val="1F4C86"/>
                 </a:solidFill>
                 <a:latin typeface="Trebuchet MS" pitchFamily="34" charset="0"/>
                 <a:ea typeface="Trebuchet MS" pitchFamily="34" charset="-122"/>
                 <a:cs typeface="Trebuchet MS" pitchFamily="34" charset="-120"/>
               </a:rPr>
-              <a:t>▶  LIVE</a:t>
+              <a:t>Acknowledgements</a:t>
+            </a:r>
+            <a:endParaRPr lang="en-US" sz="3200" dirty="0"/>
+          </a:p>
+        </p:txBody>
+      </p:sp>
+      <p:sp>
+        <p:nvSpPr>
+          <p:cNvPr id="3" name="Shape 1"/>
+          <p:cNvSpPr/>
+          <p:nvPr/>
+        </p:nvSpPr>
+        <p:spPr>
+          <a:xfrm>
+            <a:off x="566928" y="1152144"/>
+            <a:ext cx="1920240" cy="50292"/>
+          </a:xfrm>
+          <a:prstGeom prst="rect">
+            <a:avLst/>
+          </a:prstGeom>
+          <a:solidFill>
+            <a:srgbClr val="3674C1"/>
+          </a:solidFill>
+          <a:ln/>
+        </p:spPr>
+      </p:sp>
+      <p:sp>
+        <p:nvSpPr>
+          <p:cNvPr id="4" name="Shape 2"/>
+          <p:cNvSpPr/>
+          <p:nvPr/>
+        </p:nvSpPr>
+        <p:spPr>
+          <a:xfrm>
+            <a:off x="566928" y="1572768"/>
+            <a:ext cx="11055096" cy="2240280"/>
+          </a:xfrm>
+          <a:prstGeom prst="rect">
+            <a:avLst/>
+          </a:prstGeom>
+          <a:solidFill>
+            <a:srgbClr val="E8F0FA"/>
+          </a:solidFill>
+          <a:ln/>
+        </p:spPr>
+      </p:sp>
+      <p:sp>
+        <p:nvSpPr>
+          <p:cNvPr id="5" name="Shape 3"/>
+          <p:cNvSpPr/>
+          <p:nvPr/>
+        </p:nvSpPr>
+        <p:spPr>
+          <a:xfrm>
+            <a:off x="566928" y="1572768"/>
+            <a:ext cx="146304" cy="2240280"/>
+          </a:xfrm>
+          <a:prstGeom prst="rect">
+            <a:avLst/>
+          </a:prstGeom>
+          <a:solidFill>
+            <a:srgbClr val="3674C1"/>
+          </a:solidFill>
+          <a:ln/>
+        </p:spPr>
+      </p:sp>
+      <p:sp>
+        <p:nvSpPr>
+          <p:cNvPr id="6" name="Text 4"/>
+          <p:cNvSpPr/>
+          <p:nvPr/>
+        </p:nvSpPr>
+        <p:spPr>
+          <a:xfrm>
+            <a:off x="978408" y="1737360"/>
+            <a:ext cx="10232136" cy="365760"/>
+          </a:xfrm>
+          <a:prstGeom prst="rect">
+            <a:avLst/>
+          </a:prstGeom>
+          <a:noFill/>
+          <a:ln/>
+        </p:spPr>
+        <p:txBody>
+          <a:bodyPr wrap="square" rtlCol="0" anchor="ctr"/>
+          <a:lstStyle/>
+          <a:p>
+            <a:pPr indent="0" marL="0">
+              <a:buNone/>
+            </a:pPr>
+            <a:r>
+              <a:rPr lang="en-US" sz="1600" b="1" spc="150" kern="0" dirty="0">
+                <a:solidFill>
+                  <a:srgbClr val="3674C1"/>
+                </a:solidFill>
+                <a:latin typeface="Calibri" pitchFamily="34" charset="0"/>
+                <a:ea typeface="Calibri" pitchFamily="34" charset="-122"/>
+                <a:cs typeface="Calibri" pitchFamily="34" charset="-120"/>
+              </a:rPr>
+              <a:t>Sample data</a:t>
             </a:r>
             <a:endParaRPr lang="en-US" sz="1600" dirty="0"/>
           </a:p>
@@ -19024,14 +19163,14 @@
       </p:sp>
       <p:sp>
         <p:nvSpPr>
-          <p:cNvPr id="4" name="Text 2"/>
-          <p:cNvSpPr/>
-          <p:nvPr/>
-        </p:nvSpPr>
-        <p:spPr>
-          <a:xfrm>
-            <a:off x="566928" y="1024128"/>
-            <a:ext cx="11055096" cy="685800"/>
+          <p:cNvPr id="7" name="Text 5"/>
+          <p:cNvSpPr/>
+          <p:nvPr/>
+        </p:nvSpPr>
+        <p:spPr>
+          <a:xfrm>
+            <a:off x="978408" y="2103120"/>
+            <a:ext cx="10232136" cy="566928"/>
           </a:xfrm>
           <a:prstGeom prst="rect">
             <a:avLst/>
@@ -19055,7 +19194,7 @@
                 <a:ea typeface="Trebuchet MS" pitchFamily="34" charset="-122"/>
                 <a:cs typeface="Trebuchet MS" pitchFamily="34" charset="-120"/>
               </a:rPr>
-              <a:t>Acquisition, live</a:t>
+              <a:t>Sara McArdle  ·  Zbigniew Mikulski</a:t>
             </a:r>
             <a:endParaRPr lang="en-US" sz="3200" dirty="0"/>
           </a:p>
@@ -19063,165 +19202,14 @@
       </p:sp>
       <p:sp>
         <p:nvSpPr>
-          <p:cNvPr id="5" name="Shape 3"/>
-          <p:cNvSpPr/>
-          <p:nvPr/>
-        </p:nvSpPr>
-        <p:spPr>
-          <a:xfrm>
-            <a:off x="566928" y="1783080"/>
-            <a:ext cx="1920240" cy="50292"/>
-          </a:xfrm>
-          <a:prstGeom prst="rect">
-            <a:avLst/>
-          </a:prstGeom>
-          <a:solidFill>
-            <a:srgbClr val="3674C1"/>
-          </a:solidFill>
-          <a:ln/>
-        </p:spPr>
-      </p:sp>
-      <p:sp>
-        <p:nvSpPr>
-          <p:cNvPr id="6" name="Text 4"/>
-          <p:cNvSpPr/>
-          <p:nvPr/>
-        </p:nvSpPr>
-        <p:spPr>
-          <a:xfrm>
-            <a:off x="640080" y="2103120"/>
-            <a:ext cx="10963656" cy="3017520"/>
-          </a:xfrm>
-          <a:prstGeom prst="rect">
-            <a:avLst/>
-          </a:prstGeom>
-          <a:noFill/>
-          <a:ln/>
-        </p:spPr>
-        <p:txBody>
-          <a:bodyPr wrap="square" rtlCol="0" anchor="t"/>
-          <a:lstStyle/>
-          <a:p>
-            <a:pPr marL="342900" indent="-342900">
-              <a:spcAft>
-                <a:spcPts val="1400"/>
-              </a:spcAft>
-              <a:buSzPct val="100000"/>
-              <a:buChar char="•"/>
-            </a:pPr>
-            <a:r>
-              <a:rPr lang="en-US" sz="2000" dirty="0">
-                <a:solidFill>
-                  <a:srgbClr val="1F2933"/>
-                </a:solidFill>
-                <a:latin typeface="Calibri" pitchFamily="34" charset="0"/>
-                <a:ea typeface="Calibri" pitchFamily="34" charset="-122"/>
-                <a:cs typeface="Calibri" pitchFamily="34" charset="-120"/>
-              </a:rPr>
-              <a:t>Draw a bounding box on a slide overview</a:t>
-            </a:r>
-            <a:endParaRPr lang="en-US" sz="2000" dirty="0"/>
-          </a:p>
-          <a:p>
-            <a:pPr marL="342900" indent="-342900">
-              <a:spcAft>
-                <a:spcPts val="1400"/>
-              </a:spcAft>
-              <a:buSzPct val="100000"/>
-              <a:buChar char="•"/>
-            </a:pPr>
-            <a:r>
-              <a:rPr lang="en-US" sz="2000" dirty="0">
-                <a:solidFill>
-                  <a:srgbClr val="1F2933"/>
-                </a:solidFill>
-                <a:latin typeface="Calibri" pitchFamily="34" charset="0"/>
-                <a:ea typeface="Calibri" pitchFamily="34" charset="-122"/>
-                <a:cs typeface="Calibri" pitchFamily="34" charset="-120"/>
-              </a:rPr>
-              <a:t>Watch the stage move and the tiles come in</a:t>
-            </a:r>
-            <a:endParaRPr lang="en-US" sz="2000" dirty="0"/>
-          </a:p>
-          <a:p>
-            <a:pPr marL="342900" indent="-342900">
-              <a:spcAft>
-                <a:spcPts val="1400"/>
-              </a:spcAft>
-              <a:buSzPct val="100000"/>
-              <a:buChar char="•"/>
-            </a:pPr>
-            <a:r>
-              <a:rPr lang="en-US" sz="2000" dirty="0">
-                <a:solidFill>
-                  <a:srgbClr val="1F2933"/>
-                </a:solidFill>
-                <a:latin typeface="Calibri" pitchFamily="34" charset="0"/>
-                <a:ea typeface="Calibri" pitchFamily="34" charset="-122"/>
-                <a:cs typeface="Calibri" pitchFamily="34" charset="-120"/>
-              </a:rPr>
-              <a:t>Stitched pyramidal image lands back in the project, with its metadata</a:t>
-            </a:r>
-            <a:endParaRPr lang="en-US" sz="2000" dirty="0"/>
-          </a:p>
-          <a:p>
-            <a:pPr marL="342900" indent="-342900">
-              <a:spcAft>
-                <a:spcPts val="1400"/>
-              </a:spcAft>
-              <a:buSzPct val="100000"/>
-              <a:buChar char="•"/>
-            </a:pPr>
-            <a:r>
-              <a:rPr lang="en-US" sz="2000" dirty="0">
-                <a:solidFill>
-                  <a:srgbClr val="1F2933"/>
-                </a:solidFill>
-                <a:latin typeface="Calibri" pitchFamily="34" charset="0"/>
-                <a:ea typeface="Calibri" pitchFamily="34" charset="-122"/>
-                <a:cs typeface="Calibri" pitchFamily="34" charset="-120"/>
-              </a:rPr>
-              <a:t>Then open it and annotate it — the loop closes</a:t>
-            </a:r>
-            <a:endParaRPr lang="en-US" sz="2000" dirty="0"/>
-          </a:p>
-        </p:txBody>
-      </p:sp>
-      <p:sp>
-        <p:nvSpPr>
-          <p:cNvPr id="7" name="Shape 5"/>
-          <p:cNvSpPr/>
-          <p:nvPr/>
-        </p:nvSpPr>
-        <p:spPr>
-          <a:xfrm>
-            <a:off x="566928" y="5650992"/>
-            <a:ext cx="11055096" cy="566928"/>
-          </a:xfrm>
-          <a:prstGeom prst="rect">
-            <a:avLst/>
-          </a:prstGeom>
-          <a:solidFill>
-            <a:srgbClr val="F4F8FD"/>
-          </a:solidFill>
-          <a:ln w="9525">
-            <a:solidFill>
-              <a:srgbClr val="3674C1"/>
-            </a:solidFill>
-            <a:prstDash val="solid"/>
-          </a:ln>
-        </p:spPr>
-      </p:sp>
-      <p:sp>
-        <p:nvSpPr>
           <p:cNvPr id="8" name="Text 6"/>
           <p:cNvSpPr/>
           <p:nvPr/>
         </p:nvSpPr>
         <p:spPr>
           <a:xfrm>
-            <a:off x="768096" y="5650992"/>
-            <a:ext cx="10652760" cy="566928"/>
+            <a:off x="978408" y="2670048"/>
+            <a:ext cx="10232136" cy="384048"/>
           </a:xfrm>
           <a:prstGeom prst="rect">
             <a:avLst/>
@@ -19237,7 +19225,144 @@
               <a:buNone/>
             </a:pPr>
             <a:r>
-              <a:rPr lang="en-US" sz="1600" b="1" dirty="0">
+              <a:rPr lang="en-US" sz="2100" dirty="0">
+                <a:solidFill>
+                  <a:srgbClr val="1F2933"/>
+                </a:solidFill>
+                <a:latin typeface="Calibri" pitchFamily="34" charset="0"/>
+                <a:ea typeface="Calibri" pitchFamily="34" charset="-122"/>
+                <a:cs typeface="Calibri" pitchFamily="34" charset="-120"/>
+              </a:rPr>
+              <a:t>La Jolla Institute for Immunology</a:t>
+            </a:r>
+            <a:endParaRPr lang="en-US" sz="2100" dirty="0"/>
+          </a:p>
+        </p:txBody>
+      </p:sp>
+      <p:sp>
+        <p:nvSpPr>
+          <p:cNvPr id="9" name="Text 7"/>
+          <p:cNvSpPr/>
+          <p:nvPr/>
+        </p:nvSpPr>
+        <p:spPr>
+          <a:xfrm>
+            <a:off x="978408" y="3054096"/>
+            <a:ext cx="10232136" cy="731520"/>
+          </a:xfrm>
+          <a:prstGeom prst="rect">
+            <a:avLst/>
+          </a:prstGeom>
+          <a:noFill/>
+          <a:ln/>
+        </p:spPr>
+        <p:txBody>
+          <a:bodyPr wrap="square" rtlCol="0" anchor="ctr"/>
+          <a:lstStyle/>
+          <a:p>
+            <a:pPr indent="0" marL="0">
+              <a:lnSpc>
+                <a:spcPct val="110000"/>
+              </a:lnSpc>
+              <a:buNone/>
+            </a:pPr>
+            <a:r>
+              <a:rPr lang="en-US" sz="1700" i="1" dirty="0">
+                <a:solidFill>
+                  <a:srgbClr val="5A6675"/>
+                </a:solidFill>
+                <a:latin typeface="Calibri" pitchFamily="34" charset="0"/>
+                <a:ea typeface="Calibri" pitchFamily="34" charset="-122"/>
+                <a:cs typeface="Calibri" pitchFamily="34" charset="-120"/>
+              </a:rPr>
+              <a:t>They provided the majority of the test and demonstration data behind almost every exercise you will see today.</a:t>
+            </a:r>
+            <a:endParaRPr lang="en-US" sz="1700" dirty="0"/>
+          </a:p>
+          <a:p>
+            <a:pPr indent="0" marL="0">
+              <a:lnSpc>
+                <a:spcPct val="110000"/>
+              </a:lnSpc>
+              <a:buNone/>
+            </a:pPr>
+            <a:r>
+              <a:rPr lang="en-US" sz="1700" i="1" dirty="0">
+                <a:solidFill>
+                  <a:srgbClr val="5A6675"/>
+                </a:solidFill>
+                <a:latin typeface="Calibri" pitchFamily="34" charset="0"/>
+                <a:ea typeface="Calibri" pitchFamily="34" charset="-122"/>
+                <a:cs typeface="Calibri" pitchFamily="34" charset="-120"/>
+              </a:rPr>
+              <a:t>These tools could not have been built, tested, or taught without it.</a:t>
+            </a:r>
+            <a:endParaRPr lang="en-US" sz="1700" dirty="0"/>
+          </a:p>
+        </p:txBody>
+      </p:sp>
+      <p:sp>
+        <p:nvSpPr>
+          <p:cNvPr id="10" name="Text 8"/>
+          <p:cNvSpPr/>
+          <p:nvPr/>
+        </p:nvSpPr>
+        <p:spPr>
+          <a:xfrm>
+            <a:off x="566928" y="3977640"/>
+            <a:ext cx="11055096" cy="2103120"/>
+          </a:xfrm>
+          <a:prstGeom prst="rect">
+            <a:avLst/>
+          </a:prstGeom>
+          <a:noFill/>
+          <a:ln/>
+        </p:spPr>
+        <p:txBody>
+          <a:bodyPr wrap="square" rtlCol="0" anchor="t"/>
+          <a:lstStyle/>
+          <a:p>
+            <a:pPr indent="0" marL="0">
+              <a:spcAft>
+                <a:spcPts val="1000"/>
+              </a:spcAft>
+              <a:buNone/>
+            </a:pPr>
+            <a:r>
+              <a:rPr lang="en-US" sz="1700" dirty="0">
+                <a:solidFill>
+                  <a:srgbClr val="1F2933"/>
+                </a:solidFill>
+                <a:latin typeface="Calibri" pitchFamily="34" charset="0"/>
+                <a:ea typeface="Calibri" pitchFamily="34" charset="-122"/>
+                <a:cs typeface="Calibri" pitchFamily="34" charset="-120"/>
+              </a:rPr>
+              <a:t>Sara McArdle also shaped the software directly — two of these extensions began as her Groovy scripts, and her FS2K course was the model for how the workshop pages are written.
+</a:t>
+            </a:r>
+            <a:pPr indent="0" marL="0">
+              <a:spcAft>
+                <a:spcPts val="1000"/>
+              </a:spcAft>
+              <a:buNone/>
+            </a:pPr>
+            <a:r>
+              <a:rPr lang="en-US" sz="1700" dirty="0">
+                <a:solidFill>
+                  <a:srgbClr val="1F2933"/>
+                </a:solidFill>
+                <a:latin typeface="Calibri" pitchFamily="34" charset="0"/>
+                <a:ea typeface="Calibri" pitchFamily="34" charset="-122"/>
+                <a:cs typeface="Calibri" pitchFamily="34" charset="-120"/>
+              </a:rPr>
+              <a:t>Kristin Gallick, whose concept and scripts the Confusion Matrix grew from.  ·  Pete Bankhead and the QuPath team.  ·  CT-FIRE, CurveAlign, TACS and TWOMBLI for the fibre work.  ·  CytoMAP and QuBaLab for bringing clustering into QuPath.  ·  QUAREP-LiMi for the reporting standards.  ·  The image.sc community, where several of these features were first requested.
+</a:t>
+            </a:r>
+            <a:pPr indent="0" marL="0">
+              <a:buNone/>
+            </a:pPr>
+            <a:r>
+              <a:rPr lang="en-US" sz="1700" b="1" dirty="0">
                 <a:solidFill>
                   <a:srgbClr val="1F4C86"/>
                 </a:solidFill>
@@ -19245,15 +19370,15 @@
                 <a:ea typeface="Calibri" pitchFamily="34" charset="-122"/>
                 <a:cs typeface="Calibri" pitchFamily="34" charset="-120"/>
               </a:rPr>
-              <a:t>About five minutes. Recorded fallback ready if the network or the hardware disagrees.</a:t>
-            </a:r>
-            <a:endParaRPr lang="en-US" sz="1600" dirty="0"/>
-          </a:p>
-        </p:txBody>
-      </p:sp>
-      <p:sp>
-        <p:nvSpPr>
-          <p:cNvPr id="9" name="Text 7"/>
+              <a:t>Full credits: michaelsnelson.github.io/BINA-I2K-2026-QuPath-Extensions/docs/acknowledgements.html</a:t>
+            </a:r>
+            <a:endParaRPr lang="en-US" sz="1700" dirty="0"/>
+          </a:p>
+        </p:txBody>
+      </p:sp>
+      <p:sp>
+        <p:nvSpPr>
+          <p:cNvPr id="11" name="Text 9"/>
           <p:cNvSpPr/>
           <p:nvPr/>
         </p:nvSpPr>
@@ -19532,7 +19657,31 @@
                 <a:ea typeface="Calibri" pitchFamily="34" charset="-122"/>
                 <a:cs typeface="Calibri" pitchFamily="34" charset="-120"/>
               </a:rPr>
-              <a:t>Which ones we demo live is up to you — vote on the next slide</a:t>
+              <a:t>A few slots are fixed; Sara McArdle presents two of them in her session</a:t>
+            </a:r>
+            <a:endParaRPr lang="en-US" sz="2000" dirty="0"/>
+          </a:p>
+          <a:p>
+            <a:pPr marL="342900" indent="-342900">
+              <a:lnSpc>
+                <a:spcPct val="105000"/>
+              </a:lnSpc>
+              <a:spcAft>
+                <a:spcPts val="1200"/>
+              </a:spcAft>
+              <a:buSzPct val="100000"/>
+              <a:buChar char="•"/>
+            </a:pPr>
+            <a:r>
+              <a:rPr lang="en-US" sz="2000" dirty="0">
+                <a:solidFill>
+                  <a:srgbClr val="1F2933"/>
+                </a:solidFill>
+                <a:latin typeface="Calibri" pitchFamily="34" charset="0"/>
+                <a:ea typeface="Calibri" pitchFamily="34" charset="-122"/>
+                <a:cs typeface="Calibri" pitchFamily="34" charset="-120"/>
+              </a:rPr>
+              <a:t>The rest is up to you — vote on the next slide</a:t>
             </a:r>
             <a:endParaRPr lang="en-US" sz="2000" dirty="0"/>
           </a:p>
@@ -19675,14 +19824,34 @@
       </p:grpSpPr>
       <p:sp>
         <p:nvSpPr>
-          <p:cNvPr id="2" name="Text 0"/>
-          <p:cNvSpPr/>
-          <p:nvPr/>
-        </p:nvSpPr>
-        <p:spPr>
-          <a:xfrm>
-            <a:off x="566928" y="411480"/>
-            <a:ext cx="11055096" cy="685800"/>
+          <p:cNvPr id="2" name="Shape 0"/>
+          <p:cNvSpPr/>
+          <p:nvPr/>
+        </p:nvSpPr>
+        <p:spPr>
+          <a:xfrm>
+            <a:off x="0" y="0"/>
+            <a:ext cx="274320" cy="6858000"/>
+          </a:xfrm>
+          <a:prstGeom prst="rect">
+            <a:avLst/>
+          </a:prstGeom>
+          <a:solidFill>
+            <a:srgbClr val="3674C1"/>
+          </a:solidFill>
+          <a:ln/>
+        </p:spPr>
+      </p:sp>
+      <p:sp>
+        <p:nvSpPr>
+          <p:cNvPr id="3" name="Text 1"/>
+          <p:cNvSpPr/>
+          <p:nvPr/>
+        </p:nvSpPr>
+        <p:spPr>
+          <a:xfrm>
+            <a:off x="960120" y="777240"/>
+            <a:ext cx="10268712" cy="822960"/>
           </a:xfrm>
           <a:prstGeom prst="rect">
             <a:avLst/>
@@ -19698,7 +19867,7 @@
               <a:buNone/>
             </a:pPr>
             <a:r>
-              <a:rPr lang="en-US" sz="3200" b="1" dirty="0">
+              <a:rPr lang="en-US" sz="4000" b="1" dirty="0">
                 <a:solidFill>
                   <a:srgbClr val="1F4C86"/>
                 </a:solidFill>
@@ -19706,31 +19875,11 @@
                 <a:ea typeface="Trebuchet MS" pitchFamily="34" charset="-122"/>
                 <a:cs typeface="Trebuchet MS" pitchFamily="34" charset="-120"/>
               </a:rPr>
-              <a:t>Acknowledgements</a:t>
-            </a:r>
-            <a:endParaRPr lang="en-US" sz="3200" dirty="0"/>
-          </a:p>
-        </p:txBody>
-      </p:sp>
-      <p:sp>
-        <p:nvSpPr>
-          <p:cNvPr id="3" name="Shape 1"/>
-          <p:cNvSpPr/>
-          <p:nvPr/>
-        </p:nvSpPr>
-        <p:spPr>
-          <a:xfrm>
-            <a:off x="566928" y="1152144"/>
-            <a:ext cx="1920240" cy="50292"/>
-          </a:xfrm>
-          <a:prstGeom prst="rect">
-            <a:avLst/>
-          </a:prstGeom>
-          <a:solidFill>
-            <a:srgbClr val="3674C1"/>
-          </a:solidFill>
-          <a:ln/>
-        </p:spPr>
+              <a:t>Everything is here</a:t>
+            </a:r>
+            <a:endParaRPr lang="en-US" sz="4000" dirty="0"/>
+          </a:p>
+        </p:txBody>
       </p:sp>
       <p:sp>
         <p:nvSpPr>
@@ -19740,8 +19889,8 @@
         </p:nvSpPr>
         <p:spPr>
           <a:xfrm>
-            <a:off x="566928" y="1572768"/>
-            <a:ext cx="11055096" cy="2240280"/>
+            <a:off x="960120" y="1691640"/>
+            <a:ext cx="8686800" cy="713232"/>
           </a:xfrm>
           <a:prstGeom prst="rect">
             <a:avLst/>
@@ -19754,34 +19903,14 @@
       </p:sp>
       <p:sp>
         <p:nvSpPr>
-          <p:cNvPr id="5" name="Shape 3"/>
-          <p:cNvSpPr/>
-          <p:nvPr/>
-        </p:nvSpPr>
-        <p:spPr>
-          <a:xfrm>
-            <a:off x="566928" y="1572768"/>
-            <a:ext cx="146304" cy="2240280"/>
-          </a:xfrm>
-          <a:prstGeom prst="rect">
-            <a:avLst/>
-          </a:prstGeom>
-          <a:solidFill>
-            <a:srgbClr val="3674C1"/>
-          </a:solidFill>
-          <a:ln/>
-        </p:spPr>
-      </p:sp>
-      <p:sp>
-        <p:nvSpPr>
-          <p:cNvPr id="6" name="Text 4"/>
-          <p:cNvSpPr/>
-          <p:nvPr/>
-        </p:nvSpPr>
-        <p:spPr>
-          <a:xfrm>
-            <a:off x="978408" y="1737360"/>
-            <a:ext cx="10232136" cy="365760"/>
+          <p:cNvPr id="5" name="Text 3"/>
+          <p:cNvSpPr/>
+          <p:nvPr/>
+        </p:nvSpPr>
+        <p:spPr>
+          <a:xfrm>
+            <a:off x="1188720" y="1691640"/>
+            <a:ext cx="8412480" cy="713232"/>
           </a:xfrm>
           <a:prstGeom prst="rect">
             <a:avLst/>
@@ -19797,170 +19926,30 @@
               <a:buNone/>
             </a:pPr>
             <a:r>
-              <a:rPr lang="en-US" sz="1600" b="1" spc="150" kern="0" dirty="0">
-                <a:solidFill>
-                  <a:srgbClr val="3674C1"/>
-                </a:solidFill>
-                <a:latin typeface="Calibri" pitchFamily="34" charset="0"/>
-                <a:ea typeface="Calibri" pitchFamily="34" charset="-122"/>
-                <a:cs typeface="Calibri" pitchFamily="34" charset="-120"/>
-              </a:rPr>
-              <a:t>Sample data</a:t>
-            </a:r>
-            <a:endParaRPr lang="en-US" sz="1600" dirty="0"/>
-          </a:p>
-        </p:txBody>
-      </p:sp>
-      <p:sp>
-        <p:nvSpPr>
-          <p:cNvPr id="7" name="Text 5"/>
-          <p:cNvSpPr/>
-          <p:nvPr/>
-        </p:nvSpPr>
-        <p:spPr>
-          <a:xfrm>
-            <a:off x="978408" y="2103120"/>
-            <a:ext cx="10232136" cy="566928"/>
-          </a:xfrm>
-          <a:prstGeom prst="rect">
-            <a:avLst/>
-          </a:prstGeom>
-          <a:noFill/>
-          <a:ln/>
-        </p:spPr>
-        <p:txBody>
-          <a:bodyPr wrap="square" rtlCol="0" anchor="ctr"/>
-          <a:lstStyle/>
-          <a:p>
-            <a:pPr indent="0" marL="0">
-              <a:buNone/>
-            </a:pPr>
-            <a:r>
-              <a:rPr lang="en-US" sz="3200" b="1" dirty="0">
+              <a:rPr lang="en-US" sz="2200" b="1" dirty="0">
                 <a:solidFill>
                   <a:srgbClr val="1F4C86"/>
                 </a:solidFill>
-                <a:latin typeface="Trebuchet MS" pitchFamily="34" charset="0"/>
-                <a:ea typeface="Trebuchet MS" pitchFamily="34" charset="-122"/>
-                <a:cs typeface="Trebuchet MS" pitchFamily="34" charset="-120"/>
-              </a:rPr>
-              <a:t>Sara McArdle  ·  Zbigniew Mikulski</a:t>
-            </a:r>
-            <a:endParaRPr lang="en-US" sz="3200" dirty="0"/>
-          </a:p>
-        </p:txBody>
-      </p:sp>
-      <p:sp>
-        <p:nvSpPr>
-          <p:cNvPr id="8" name="Text 6"/>
-          <p:cNvSpPr/>
-          <p:nvPr/>
-        </p:nvSpPr>
-        <p:spPr>
-          <a:xfrm>
-            <a:off x="978408" y="2670048"/>
-            <a:ext cx="10232136" cy="384048"/>
-          </a:xfrm>
-          <a:prstGeom prst="rect">
-            <a:avLst/>
-          </a:prstGeom>
-          <a:noFill/>
-          <a:ln/>
-        </p:spPr>
-        <p:txBody>
-          <a:bodyPr wrap="square" rtlCol="0" anchor="ctr"/>
-          <a:lstStyle/>
-          <a:p>
-            <a:pPr indent="0" marL="0">
-              <a:buNone/>
-            </a:pPr>
-            <a:r>
-              <a:rPr lang="en-US" sz="2100" dirty="0">
-                <a:solidFill>
-                  <a:srgbClr val="1F2933"/>
-                </a:solidFill>
-                <a:latin typeface="Calibri" pitchFamily="34" charset="0"/>
-                <a:ea typeface="Calibri" pitchFamily="34" charset="-122"/>
-                <a:cs typeface="Calibri" pitchFamily="34" charset="-120"/>
-              </a:rPr>
-              <a:t>La Jolla Institute for Immunology</a:t>
-            </a:r>
-            <a:endParaRPr lang="en-US" sz="2100" dirty="0"/>
-          </a:p>
-        </p:txBody>
-      </p:sp>
-      <p:sp>
-        <p:nvSpPr>
-          <p:cNvPr id="9" name="Text 7"/>
-          <p:cNvSpPr/>
-          <p:nvPr/>
-        </p:nvSpPr>
-        <p:spPr>
-          <a:xfrm>
-            <a:off x="978408" y="3054096"/>
-            <a:ext cx="10232136" cy="731520"/>
-          </a:xfrm>
-          <a:prstGeom prst="rect">
-            <a:avLst/>
-          </a:prstGeom>
-          <a:noFill/>
-          <a:ln/>
-        </p:spPr>
-        <p:txBody>
-          <a:bodyPr wrap="square" rtlCol="0" anchor="ctr"/>
-          <a:lstStyle/>
-          <a:p>
-            <a:pPr indent="0" marL="0">
-              <a:lnSpc>
-                <a:spcPct val="110000"/>
-              </a:lnSpc>
-              <a:buNone/>
-            </a:pPr>
-            <a:r>
-              <a:rPr lang="en-US" sz="1700" i="1" dirty="0">
-                <a:solidFill>
-                  <a:srgbClr val="5A6675"/>
-                </a:solidFill>
-                <a:latin typeface="Calibri" pitchFamily="34" charset="0"/>
-                <a:ea typeface="Calibri" pitchFamily="34" charset="-122"/>
-                <a:cs typeface="Calibri" pitchFamily="34" charset="-120"/>
-              </a:rPr>
-              <a:t>They provided the majority of the test and demonstration data behind almost every exercise you will see today.</a:t>
-            </a:r>
-            <a:endParaRPr lang="en-US" sz="1700" dirty="0"/>
-          </a:p>
-          <a:p>
-            <a:pPr indent="0" marL="0">
-              <a:lnSpc>
-                <a:spcPct val="110000"/>
-              </a:lnSpc>
-              <a:buNone/>
-            </a:pPr>
-            <a:r>
-              <a:rPr lang="en-US" sz="1700" i="1" dirty="0">
-                <a:solidFill>
-                  <a:srgbClr val="5A6675"/>
-                </a:solidFill>
-                <a:latin typeface="Calibri" pitchFamily="34" charset="0"/>
-                <a:ea typeface="Calibri" pitchFamily="34" charset="-122"/>
-                <a:cs typeface="Calibri" pitchFamily="34" charset="-120"/>
-              </a:rPr>
-              <a:t>These tools could not have been built, tested, or taught without it.</a:t>
-            </a:r>
-            <a:endParaRPr lang="en-US" sz="1700" dirty="0"/>
-          </a:p>
-        </p:txBody>
-      </p:sp>
-      <p:sp>
-        <p:nvSpPr>
-          <p:cNvPr id="10" name="Text 8"/>
-          <p:cNvSpPr/>
-          <p:nvPr/>
-        </p:nvSpPr>
-        <p:spPr>
-          <a:xfrm>
-            <a:off x="566928" y="3977640"/>
-            <a:ext cx="11055096" cy="2103120"/>
+                <a:latin typeface="Calibri" pitchFamily="34" charset="0"/>
+                <a:ea typeface="Calibri" pitchFamily="34" charset="-122"/>
+                <a:cs typeface="Calibri" pitchFamily="34" charset="-120"/>
+              </a:rPr>
+              <a:t>michaelsnelson.github.io/BINA-I2K-2026-QuPath-Extensions</a:t>
+            </a:r>
+            <a:endParaRPr lang="en-US" sz="2200" dirty="0"/>
+          </a:p>
+        </p:txBody>
+      </p:sp>
+      <p:sp>
+        <p:nvSpPr>
+          <p:cNvPr id="6" name="Text 4"/>
+          <p:cNvSpPr/>
+          <p:nvPr/>
+        </p:nvSpPr>
+        <p:spPr>
+          <a:xfrm>
+            <a:off x="960120" y="2697480"/>
+            <a:ext cx="9811512" cy="2560320"/>
           </a:xfrm>
           <a:prstGeom prst="rect">
             <a:avLst/>
@@ -19979,270 +19968,6 @@
               <a:buNone/>
             </a:pPr>
             <a:r>
-              <a:rPr lang="en-US" sz="1700" dirty="0">
-                <a:solidFill>
-                  <a:srgbClr val="1F2933"/>
-                </a:solidFill>
-                <a:latin typeface="Calibri" pitchFamily="34" charset="0"/>
-                <a:ea typeface="Calibri" pitchFamily="34" charset="-122"/>
-                <a:cs typeface="Calibri" pitchFamily="34" charset="-120"/>
-              </a:rPr>
-              <a:t>Sara McArdle also shaped the software directly — two of these extensions began as her Groovy scripts, and her FS2K course was the model for how the workshop pages are written.
-</a:t>
-            </a:r>
-            <a:pPr indent="0" marL="0">
-              <a:spcAft>
-                <a:spcPts val="1000"/>
-              </a:spcAft>
-              <a:buNone/>
-            </a:pPr>
-            <a:r>
-              <a:rPr lang="en-US" sz="1700" dirty="0">
-                <a:solidFill>
-                  <a:srgbClr val="1F2933"/>
-                </a:solidFill>
-                <a:latin typeface="Calibri" pitchFamily="34" charset="0"/>
-                <a:ea typeface="Calibri" pitchFamily="34" charset="-122"/>
-                <a:cs typeface="Calibri" pitchFamily="34" charset="-120"/>
-              </a:rPr>
-              <a:t>Kristin Gallick, whose concept and scripts the Confusion Matrix grew from.  ·  Pete Bankhead and the QuPath team.  ·  CT-FIRE, CurveAlign, TACS and TWOMBLI for the fibre work.  ·  CytoMAP and QuBaLab for bringing clustering into QuPath.  ·  QUAREP-LiMi for the reporting standards.  ·  The image.sc community, where several of these features were first requested.
-</a:t>
-            </a:r>
-            <a:pPr indent="0" marL="0">
-              <a:buNone/>
-            </a:pPr>
-            <a:r>
-              <a:rPr lang="en-US" sz="1700" b="1" dirty="0">
-                <a:solidFill>
-                  <a:srgbClr val="1F4C86"/>
-                </a:solidFill>
-                <a:latin typeface="Calibri" pitchFamily="34" charset="0"/>
-                <a:ea typeface="Calibri" pitchFamily="34" charset="-122"/>
-                <a:cs typeface="Calibri" pitchFamily="34" charset="-120"/>
-              </a:rPr>
-              <a:t>Full credits: michaelsnelson.github.io/BINA-I2K-2026-QuPath-Extensions/docs/acknowledgements.html</a:t>
-            </a:r>
-            <a:endParaRPr lang="en-US" sz="1700" dirty="0"/>
-          </a:p>
-        </p:txBody>
-      </p:sp>
-      <p:sp>
-        <p:nvSpPr>
-          <p:cNvPr id="11" name="Text 9"/>
-          <p:cNvSpPr/>
-          <p:nvPr/>
-        </p:nvSpPr>
-        <p:spPr>
-          <a:xfrm>
-            <a:off x="11274552" y="6291072"/>
-            <a:ext cx="457200" cy="310896"/>
-          </a:xfrm>
-          <a:prstGeom prst="rect">
-            <a:avLst/>
-          </a:prstGeom>
-          <a:noFill/>
-          <a:ln/>
-        </p:spPr>
-        <p:txBody>
-          <a:bodyPr wrap="square" rtlCol="0" anchor="ctr"/>
-          <a:lstStyle/>
-          <a:p>
-            <a:pPr algn="r" indent="0" marL="0">
-              <a:buNone/>
-            </a:pPr>
-            <a:r>
-              <a:rPr lang="en-US" sz="1400" dirty="0">
-                <a:solidFill>
-                  <a:srgbClr val="A8B2BF"/>
-                </a:solidFill>
-                <a:latin typeface="Calibri" pitchFamily="34" charset="0"/>
-                <a:ea typeface="Calibri" pitchFamily="34" charset="-122"/>
-                <a:cs typeface="Calibri" pitchFamily="34" charset="-120"/>
-              </a:rPr>
-              <a:t>50</a:t>
-            </a:r>
-            <a:endParaRPr lang="en-US" sz="1400" dirty="0"/>
-          </a:p>
-        </p:txBody>
-      </p:sp>
-    </p:spTree>
-  </p:cSld>
-  <p:clrMapOvr>
-    <a:masterClrMapping/>
-  </p:clrMapOvr>
-</p:sld>
-</file>
-
-<file path=ppt/slides/slide51.xml><?xml version="1.0" encoding="utf-8"?>
-<p:sld xmlns:a="http://schemas.openxmlformats.org/drawingml/2006/main" xmlns:r="http://schemas.openxmlformats.org/officeDocument/2006/relationships" xmlns:p="http://schemas.openxmlformats.org/presentationml/2006/main">
-  <p:cSld name="Slide 51">
-    <p:bg>
-      <p:bgPr>
-        <a:solidFill>
-          <a:srgbClr val="FFFFFF"/>
-        </a:solidFill>
-      </p:bgPr>
-    </p:bg>
-    <p:spTree>
-      <p:nvGrpSpPr>
-        <p:cNvPr id="1" name=""/>
-        <p:cNvGrpSpPr/>
-        <p:nvPr/>
-      </p:nvGrpSpPr>
-      <p:grpSpPr>
-        <a:xfrm>
-          <a:off x="0" y="0"/>
-          <a:ext cx="0" cy="0"/>
-          <a:chOff x="0" y="0"/>
-          <a:chExt cx="0" cy="0"/>
-        </a:xfrm>
-      </p:grpSpPr>
-      <p:sp>
-        <p:nvSpPr>
-          <p:cNvPr id="2" name="Shape 0"/>
-          <p:cNvSpPr/>
-          <p:nvPr/>
-        </p:nvSpPr>
-        <p:spPr>
-          <a:xfrm>
-            <a:off x="0" y="0"/>
-            <a:ext cx="274320" cy="6858000"/>
-          </a:xfrm>
-          <a:prstGeom prst="rect">
-            <a:avLst/>
-          </a:prstGeom>
-          <a:solidFill>
-            <a:srgbClr val="3674C1"/>
-          </a:solidFill>
-          <a:ln/>
-        </p:spPr>
-      </p:sp>
-      <p:sp>
-        <p:nvSpPr>
-          <p:cNvPr id="3" name="Text 1"/>
-          <p:cNvSpPr/>
-          <p:nvPr/>
-        </p:nvSpPr>
-        <p:spPr>
-          <a:xfrm>
-            <a:off x="960120" y="777240"/>
-            <a:ext cx="10268712" cy="822960"/>
-          </a:xfrm>
-          <a:prstGeom prst="rect">
-            <a:avLst/>
-          </a:prstGeom>
-          <a:noFill/>
-          <a:ln/>
-        </p:spPr>
-        <p:txBody>
-          <a:bodyPr wrap="square" rtlCol="0" anchor="ctr"/>
-          <a:lstStyle/>
-          <a:p>
-            <a:pPr indent="0" marL="0">
-              <a:buNone/>
-            </a:pPr>
-            <a:r>
-              <a:rPr lang="en-US" sz="4000" b="1" dirty="0">
-                <a:solidFill>
-                  <a:srgbClr val="1F4C86"/>
-                </a:solidFill>
-                <a:latin typeface="Trebuchet MS" pitchFamily="34" charset="0"/>
-                <a:ea typeface="Trebuchet MS" pitchFamily="34" charset="-122"/>
-                <a:cs typeface="Trebuchet MS" pitchFamily="34" charset="-120"/>
-              </a:rPr>
-              <a:t>Everything is here</a:t>
-            </a:r>
-            <a:endParaRPr lang="en-US" sz="4000" dirty="0"/>
-          </a:p>
-        </p:txBody>
-      </p:sp>
-      <p:sp>
-        <p:nvSpPr>
-          <p:cNvPr id="4" name="Shape 2"/>
-          <p:cNvSpPr/>
-          <p:nvPr/>
-        </p:nvSpPr>
-        <p:spPr>
-          <a:xfrm>
-            <a:off x="960120" y="1691640"/>
-            <a:ext cx="8686800" cy="713232"/>
-          </a:xfrm>
-          <a:prstGeom prst="rect">
-            <a:avLst/>
-          </a:prstGeom>
-          <a:solidFill>
-            <a:srgbClr val="E8F0FA"/>
-          </a:solidFill>
-          <a:ln/>
-        </p:spPr>
-      </p:sp>
-      <p:sp>
-        <p:nvSpPr>
-          <p:cNvPr id="5" name="Text 3"/>
-          <p:cNvSpPr/>
-          <p:nvPr/>
-        </p:nvSpPr>
-        <p:spPr>
-          <a:xfrm>
-            <a:off x="1188720" y="1691640"/>
-            <a:ext cx="8412480" cy="713232"/>
-          </a:xfrm>
-          <a:prstGeom prst="rect">
-            <a:avLst/>
-          </a:prstGeom>
-          <a:noFill/>
-          <a:ln/>
-        </p:spPr>
-        <p:txBody>
-          <a:bodyPr wrap="square" rtlCol="0" anchor="ctr"/>
-          <a:lstStyle/>
-          <a:p>
-            <a:pPr indent="0" marL="0">
-              <a:buNone/>
-            </a:pPr>
-            <a:r>
-              <a:rPr lang="en-US" sz="2200" b="1" dirty="0">
-                <a:solidFill>
-                  <a:srgbClr val="1F4C86"/>
-                </a:solidFill>
-                <a:latin typeface="Calibri" pitchFamily="34" charset="0"/>
-                <a:ea typeface="Calibri" pitchFamily="34" charset="-122"/>
-                <a:cs typeface="Calibri" pitchFamily="34" charset="-120"/>
-              </a:rPr>
-              <a:t>michaelsnelson.github.io/BINA-I2K-2026-QuPath-Extensions</a:t>
-            </a:r>
-            <a:endParaRPr lang="en-US" sz="2200" dirty="0"/>
-          </a:p>
-        </p:txBody>
-      </p:sp>
-      <p:sp>
-        <p:nvSpPr>
-          <p:cNvPr id="6" name="Text 4"/>
-          <p:cNvSpPr/>
-          <p:nvPr/>
-        </p:nvSpPr>
-        <p:spPr>
-          <a:xfrm>
-            <a:off x="960120" y="2697480"/>
-            <a:ext cx="9811512" cy="2560320"/>
-          </a:xfrm>
-          <a:prstGeom prst="rect">
-            <a:avLst/>
-          </a:prstGeom>
-          <a:noFill/>
-          <a:ln/>
-        </p:spPr>
-        <p:txBody>
-          <a:bodyPr wrap="square" rtlCol="0" anchor="t"/>
-          <a:lstStyle/>
-          <a:p>
-            <a:pPr indent="0" marL="0">
-              <a:spcAft>
-                <a:spcPts val="1000"/>
-              </a:spcAft>
-              <a:buNone/>
-            </a:pPr>
-            <a:r>
               <a:rPr lang="en-US" sz="1900" dirty="0">
                 <a:solidFill>
                   <a:srgbClr val="1F2933"/>
@@ -20437,7 +20162,7 @@
                 <a:ea typeface="Calibri" pitchFamily="34" charset="-122"/>
                 <a:cs typeface="Calibri" pitchFamily="34" charset="-120"/>
               </a:rPr>
-              <a:t>51</a:t>
+              <a:t>50</a:t>
             </a:r>
             <a:endParaRPr lang="en-US" sz="1400" dirty="0"/>
           </a:p>
@@ -20630,6 +20355,24 @@
                 <a:cs typeface="Calibri" pitchFamily="34" charset="-120"/>
               </a:rPr>
               <a:t>Vote for as many as you like. Add a comment if you have a specific question, or a dataset you are stuck on.
+</a:t>
+            </a:r>
+            <a:pPr indent="0" marL="0">
+              <a:spcAft>
+                <a:spcPts val="1200"/>
+              </a:spcAft>
+              <a:buNone/>
+            </a:pPr>
+            <a:r>
+              <a:rPr lang="en-US" sz="1800" i="1" dirty="0">
+                <a:solidFill>
+                  <a:srgbClr val="5A6675"/>
+                </a:solidFill>
+                <a:latin typeface="Calibri" pitchFamily="34" charset="0"/>
+                <a:ea typeface="Calibri" pitchFamily="34" charset="-122"/>
+                <a:cs typeface="Calibri" pitchFamily="34" charset="-120"/>
+              </a:rPr>
+              <a:t>Already fixed: QPSC, the Confusion Matrix and the fibre tools are shown regardless — and Channel Names Viewer and Classify Object Subset belong to Sara McArdle’s session.
 </a:t>
             </a:r>
             <a:pPr indent="0" marL="0">

--- a/I2K_2026_QuPath_Extensions.pptx
+++ b/I2K_2026_QuPath_Extensions.pptx
@@ -55,9 +55,10 @@
     <p:sldId id="303" r:id="rId49"/>
     <p:sldId id="304" r:id="rId50"/>
     <p:sldId id="305" r:id="rId51"/>
+    <p:sldId id="306" r:id="rId52"/>
   </p:sldIdLst>
   <p:notesMasterIdLst>
-    <p:notesMasterId r:id="rId52"/>
+    <p:notesMasterId r:id="rId53"/>
   </p:notesMasterIdLst>
   <p:sldSz cx="12192000" cy="6858000"/>
   <p:notesSz cx="6858000" cy="12192000"/>
@@ -4535,6 +4536,94 @@
             <a:fld id="{F7021451-1387-4CA6-816F-3879F97B5CBC}" type="slidenum">
               <a:rPr lang="en-US"/>
               <a:t>50</a:t>
+            </a:fld>
+            <a:endParaRPr lang="en-US"/>
+          </a:p>
+        </p:txBody>
+      </p:sp>
+    </p:spTree>
+    <p:extLst>
+      <p:ext uri="{BB962C8B-B14F-4D97-AF65-F5344CB8AC3E}">
+        <p14:creationId xmlns:p14="http://schemas.microsoft.com/office/powerpoint/2010/main" val="1024086991"/>
+      </p:ext>
+    </p:extLst>
+  </p:cSld>
+  <p:clrMapOvr>
+    <a:masterClrMapping/>
+  </p:clrMapOvr>
+</p:notes>
+</file>
+
+<file path=ppt/notesSlides/notesSlide51.xml><?xml version="1.0" encoding="utf-8"?>
+<p:notes xmlns:a="http://schemas.openxmlformats.org/drawingml/2006/main" xmlns:r="http://schemas.openxmlformats.org/officeDocument/2006/relationships" xmlns:p="http://schemas.openxmlformats.org/presentationml/2006/main">
+  <p:cSld>
+    <p:spTree>
+      <p:nvGrpSpPr>
+        <p:cNvPr id="1" name=""/>
+        <p:cNvGrpSpPr/>
+        <p:nvPr/>
+      </p:nvGrpSpPr>
+      <p:grpSpPr>
+        <a:xfrm>
+          <a:off x="0" y="0"/>
+          <a:ext cx="0" cy="0"/>
+          <a:chOff x="0" y="0"/>
+          <a:chExt cx="0" cy="0"/>
+        </a:xfrm>
+      </p:grpSpPr>
+      <p:sp>
+        <p:nvSpPr>
+          <p:cNvPr id="2" name="Slide Image Placeholder 1"/>
+          <p:cNvSpPr>
+            <a:spLocks noGrp="1" noRot="1" noChangeAspect="1"/>
+          </p:cNvSpPr>
+          <p:nvPr>
+            <p:ph type="sldImg"/>
+          </p:nvPr>
+        </p:nvSpPr>
+        <p:spPr/>
+      </p:sp>
+      <p:sp>
+        <p:nvSpPr>
+          <p:cNvPr id="3" name="Notes Placeholder 2"/>
+          <p:cNvSpPr>
+            <a:spLocks noGrp="1"/>
+          </p:cNvSpPr>
+          <p:nvPr>
+            <p:ph type="body" idx="1"/>
+          </p:nvPr>
+        </p:nvSpPr>
+        <p:spPr/>
+        <p:txBody>
+          <a:bodyPr/>
+          <a:lstStyle/>
+          <a:p>
+            <a:r>
+              <a:rPr lang="en-US" dirty="0"/>
+              <a:t/>
+            </a:r>
+            <a:endParaRPr lang="en-US" dirty="0"/>
+          </a:p>
+        </p:txBody>
+      </p:sp>
+      <p:sp>
+        <p:nvSpPr>
+          <p:cNvPr id="4" name="Slide Number Placeholder 3"/>
+          <p:cNvSpPr>
+            <a:spLocks noGrp="1"/>
+          </p:cNvSpPr>
+          <p:nvPr>
+            <p:ph type="sldNum" sz="quarter" idx="10"/>
+          </p:nvPr>
+        </p:nvSpPr>
+        <p:spPr/>
+        <p:txBody>
+          <a:bodyPr/>
+          <a:lstStyle/>
+          <a:p>
+            <a:fld id="{F7021451-1387-4CA6-816F-3879F97B5CBC}" type="slidenum">
+              <a:rPr lang="en-US"/>
+              <a:t>51</a:t>
             </a:fld>
             <a:endParaRPr lang="en-US"/>
           </a:p>
@@ -7746,7 +7835,7 @@
                 <a:ea typeface="Trebuchet MS" pitchFamily="34" charset="-122"/>
                 <a:cs typeface="Trebuchet MS" pitchFamily="34" charset="-120"/>
               </a:rPr>
-              <a:t>Two you will see properly elsewhere</a:t>
+              <a:t>Two you already saw this morning</a:t>
             </a:r>
             <a:endParaRPr lang="en-US" sz="3000" dirty="0"/>
           </a:p>
@@ -7805,7 +7894,7 @@
                 <a:ea typeface="Calibri" pitchFamily="34" charset="-122"/>
                 <a:cs typeface="Calibri" pitchFamily="34" charset="-120"/>
               </a:rPr>
-              <a:t>Sara McArdle is covering these two — go and see them done by the person whose scripts they are.</a:t>
+              <a:t>From “Tips and tricks for maintaining sanity during hi-plex classification in QuPath”, earlier today.</a:t>
             </a:r>
             <a:endParaRPr lang="en-US" sz="1700" dirty="0"/>
           </a:p>
@@ -7899,7 +7988,7 @@
                 <a:ea typeface="Calibri" pitchFamily="34" charset="-122"/>
                 <a:cs typeface="Calibri" pitchFamily="34" charset="-120"/>
               </a:rPr>
-              <a:t>Both began as Sara McArdle’s Groovy scripts, and Sara is presenting them in her session</a:t>
+              <a:t>Both began as Sara McArdle’s Groovy scripts, and Sara demonstrated both in the session before this one</a:t>
             </a:r>
             <a:endParaRPr lang="en-US" sz="2000" dirty="0"/>
           </a:p>
@@ -7923,7 +8012,7 @@
                 <a:ea typeface="Calibri" pitchFamily="34" charset="-122"/>
                 <a:cs typeface="Calibri" pitchFamily="34" charset="-120"/>
               </a:rPr>
-              <a:t>So: a mention here rather than the same demo twice — but both install in seconds and both have a full walkthrough on the site</a:t>
+              <a:t>So: a pointer rather than the same demo twice — both install in seconds, and both have a full walkthrough on the site</a:t>
             </a:r>
             <a:endParaRPr lang="en-US" sz="2000" dirty="0"/>
           </a:p>
@@ -7987,7 +8076,7 @@
                 <a:ea typeface="Calibri" pitchFamily="34" charset="-122"/>
                 <a:cs typeface="Calibri" pitchFamily="34" charset="-120"/>
               </a:rPr>
-              <a:t>Nothing stops you installing them today. This is a division of labour, not a barrier.</a:t>
+              <a:t>Nothing stops you installing them. This is a division of labour, not a barrier.</a:t>
             </a:r>
             <a:endParaRPr lang="en-US" sz="1600" dirty="0"/>
           </a:p>
@@ -14552,7 +14641,7 @@
                 <a:ea typeface="Trebuchet MS" pitchFamily="34" charset="-122"/>
                 <a:cs typeface="Trebuchet MS" pitchFamily="34" charset="-120"/>
               </a:rPr>
-              <a:t>QP-CAT — multiplexed cell analysis</a:t>
+              <a:t>Where Sara’s session leads next</a:t>
             </a:r>
             <a:endParaRPr lang="en-US" sz="3000" dirty="0"/>
           </a:p>
@@ -14611,7 +14700,7 @@
                 <a:ea typeface="Calibri" pitchFamily="34" charset="-122"/>
                 <a:cs typeface="Calibri" pitchFamily="34" charset="-120"/>
               </a:rPr>
-              <a:t>The usual workflow loses the link back to the tissue. This keeps it.</a:t>
+              <a:t>Sara’s session and this one are two halves of the same workflow, in the right order.</a:t>
             </a:r>
             <a:endParaRPr lang="en-US" sz="1700" dirty="0"/>
           </a:p>
@@ -14657,7 +14746,7 @@
                 <a:ea typeface="Calibri" pitchFamily="34" charset="-122"/>
                 <a:cs typeface="Calibri" pitchFamily="34" charset="-120"/>
               </a:rPr>
-              <a:t>The full scientific Python stack embedded in QuPath. No environments to manage</a:t>
+              <a:t>Hi-plex classification, kept sane — that was this morning’s other QuPath session</a:t>
             </a:r>
             <a:endParaRPr lang="en-US" sz="2000" dirty="0"/>
           </a:p>
@@ -14681,7 +14770,7 @@
                 <a:ea typeface="Calibri" pitchFamily="34" charset="-122"/>
                 <a:cs typeface="Calibri" pitchFamily="34" charset="-120"/>
               </a:rPr>
-              <a:t>Clustering, marker gating with suggested thresholds, spatial statistics, batch correction</a:t>
+              <a:t>The next question is what the classified cells are actually telling you</a:t>
             </a:r>
             <a:endParaRPr lang="en-US" sz="2000" dirty="0"/>
           </a:p>
@@ -14705,7 +14794,7 @@
                 <a:ea typeface="Calibri" pitchFamily="34" charset="-122"/>
                 <a:cs typeface="Calibri" pitchFamily="34" charset="-120"/>
               </a:rPr>
-              <a:t>Label a small subset by hand and have the rest of the project labelled for you</a:t>
+              <a:t>Which populations group together, which sit next to which, and whether that differs between images</a:t>
             </a:r>
             <a:endParaRPr lang="en-US" sz="2000" dirty="0"/>
           </a:p>
@@ -14729,31 +14818,7 @@
                 <a:ea typeface="Calibri" pitchFamily="34" charset="-122"/>
                 <a:cs typeface="Calibri" pitchFamily="34" charset="-120"/>
               </a:rPr>
-              <a:t>Brush a region of the embedding and those cells highlight on the slide</a:t>
-            </a:r>
-            <a:endParaRPr lang="en-US" sz="2000" dirty="0"/>
-          </a:p>
-          <a:p>
-            <a:pPr marL="342900" indent="-342900">
-              <a:lnSpc>
-                <a:spcPct val="105000"/>
-              </a:lnSpc>
-              <a:spcAft>
-                <a:spcPts val="1200"/>
-              </a:spcAft>
-              <a:buSzPct val="100000"/>
-              <a:buChar char="•"/>
-            </a:pPr>
-            <a:r>
-              <a:rPr lang="en-US" sz="2000" dirty="0">
-                <a:solidFill>
-                  <a:srgbClr val="1F2933"/>
-                </a:solidFill>
-                <a:latin typeface="Calibri" pitchFamily="34" charset="0"/>
-                <a:ea typeface="Calibri" pitchFamily="34" charset="-122"/>
-                <a:cs typeface="Calibri" pitchFamily="34" charset="-120"/>
-              </a:rPr>
-              <a:t>Separate tissue stays separate — no spatial graph edge ever crosses two TMA cores</a:t>
+              <a:t>That is clustering, phenotyping and spatial statistics — and it is the rest of this section</a:t>
             </a:r>
             <a:endParaRPr lang="en-US" sz="2000" dirty="0"/>
           </a:p>
@@ -14817,7 +14882,7 @@
                 <a:ea typeface="Calibri" pitchFamily="34" charset="-122"/>
                 <a:cs typeface="Calibri" pitchFamily="34" charset="-120"/>
               </a:rPr>
-              <a:t>Author’s own warning: many features are lightly tested. Treat results as a starting point.</a:t>
+              <a:t>If you missed hers, the two extensions she demonstrated are documented on our site too.</a:t>
             </a:r>
             <a:endParaRPr lang="en-US" sz="1600" dirty="0"/>
           </a:p>
@@ -14927,7 +14992,7 @@
                 <a:ea typeface="Trebuchet MS" pitchFamily="34" charset="-122"/>
                 <a:cs typeface="Trebuchet MS" pitchFamily="34" charset="-120"/>
               </a:rPr>
-              <a:t>You can check the answer</a:t>
+              <a:t>QP-CAT — multiplexed cell analysis</a:t>
             </a:r>
             <a:endParaRPr lang="en-US" sz="3000" dirty="0"/>
           </a:p>
@@ -14986,7 +15051,7 @@
                 <a:ea typeface="Calibri" pitchFamily="34" charset="-122"/>
                 <a:cs typeface="Calibri" pitchFamily="34" charset="-120"/>
               </a:rPr>
-              <a:t>Learn what a correct result looks like, so you can recognise a wrong one later.</a:t>
+              <a:t>The usual workflow loses the link back to the tissue. This keeps it.</a:t>
             </a:r>
             <a:endParaRPr lang="en-US" sz="1700" dirty="0"/>
           </a:p>
@@ -15032,7 +15097,7 @@
                 <a:ea typeface="Calibri" pitchFamily="34" charset="-122"/>
                 <a:cs typeface="Calibri" pitchFamily="34" charset="-120"/>
               </a:rPr>
-              <a:t>Real multiplexed tissue has no ground truth — you never know which cell is really which type</a:t>
+              <a:t>The full scientific Python stack embedded in QuPath. No environments to manage</a:t>
             </a:r>
             <a:endParaRPr lang="en-US" sz="2000" dirty="0"/>
           </a:p>
@@ -15056,7 +15121,7 @@
                 <a:ea typeface="Calibri" pitchFamily="34" charset="-122"/>
                 <a:cs typeface="Calibri" pitchFamily="34" charset="-120"/>
               </a:rPr>
-              <a:t>So the exercise uses a synthetic tumour microenvironment where every cell is labelled</a:t>
+              <a:t>Clustering, marker gating with suggested thresholds, spatial statistics, batch correction</a:t>
             </a:r>
             <a:endParaRPr lang="en-US" sz="2000" dirty="0"/>
           </a:p>
@@ -15080,7 +15145,7 @@
                 <a:ea typeface="Calibri" pitchFamily="34" charset="-122"/>
                 <a:cs typeface="Calibri" pitchFamily="34" charset="-120"/>
               </a:rPr>
-              <a:t>Six cell types, tumour nests, an immune-infiltrated boundary, B-cell follicles, a proliferation gradient</a:t>
+              <a:t>Label a small subset by hand and have the rest of the project labelled for you</a:t>
             </a:r>
             <a:endParaRPr lang="en-US" sz="2000" dirty="0"/>
           </a:p>
@@ -15104,7 +15169,7 @@
                 <a:ea typeface="Calibri" pitchFamily="34" charset="-122"/>
                 <a:cs typeface="Calibri" pitchFamily="34" charset="-120"/>
               </a:rPr>
-              <a:t>Inflamed versus desert: one image is 55% lymphoid, another 14% with no follicles at all</a:t>
+              <a:t>Brush a region of the embedding and those cells highlight on the slide</a:t>
             </a:r>
             <a:endParaRPr lang="en-US" sz="2000" dirty="0"/>
           </a:p>
@@ -15128,7 +15193,7 @@
                 <a:ea typeface="Calibri" pitchFamily="34" charset="-122"/>
                 <a:cs typeface="Calibri" pitchFamily="34" charset="-120"/>
               </a:rPr>
-              <a:t>20 MB, public domain, and it downloads straight from GitHub</a:t>
+              <a:t>Separate tissue stays separate — no spatial graph edge ever crosses two TMA cores</a:t>
             </a:r>
             <a:endParaRPr lang="en-US" sz="2000" dirty="0"/>
           </a:p>
@@ -15192,7 +15257,7 @@
                 <a:ea typeface="Calibri" pitchFamily="34" charset="-122"/>
                 <a:cs typeface="Calibri" pitchFamily="34" charset="-120"/>
               </a:rPr>
-              <a:t>Cluster it, then click a boundary cell and find out whether the cluster was telling the truth.</a:t>
+              <a:t>Author’s own warning: many features are lightly tested. Treat results as a starting point.</a:t>
             </a:r>
             <a:endParaRPr lang="en-US" sz="1600" dirty="0"/>
           </a:p>
@@ -15302,7 +15367,7 @@
                 <a:ea typeface="Trebuchet MS" pitchFamily="34" charset="-122"/>
                 <a:cs typeface="Trebuchet MS" pitchFamily="34" charset="-120"/>
               </a:rPr>
-              <a:t>And getting back to the tissue</a:t>
+              <a:t>You can check the answer</a:t>
             </a:r>
             <a:endParaRPr lang="en-US" sz="3000" dirty="0"/>
           </a:p>
@@ -15361,7 +15426,7 @@
                 <a:ea typeface="Calibri" pitchFamily="34" charset="-122"/>
                 <a:cs typeface="Calibri" pitchFamily="34" charset="-120"/>
               </a:rPr>
-              <a:t>A mention rather than a demo — it is the navigation half of the clustering you just saw.</a:t>
+              <a:t>Learn what a correct result looks like, so you can recognise a wrong one later.</a:t>
             </a:r>
             <a:endParaRPr lang="en-US" sz="1700" dirty="0"/>
           </a:p>
@@ -15407,7 +15472,7 @@
                 <a:ea typeface="Calibri" pitchFamily="34" charset="-122"/>
                 <a:cs typeface="Calibri" pitchFamily="34" charset="-120"/>
               </a:rPr>
-              <a:t>Clustering answers "which cells group together". It does not answer "which cell is that"</a:t>
+              <a:t>Real multiplexed tissue has no ground truth — you never know which cell is really which type</a:t>
             </a:r>
             <a:endParaRPr lang="en-US" sz="2000" dirty="0"/>
           </a:p>
@@ -15431,7 +15496,7 @@
                 <a:ea typeface="Calibri" pitchFamily="34" charset="-122"/>
                 <a:cs typeface="Calibri" pitchFamily="34" charset="-120"/>
               </a:rPr>
-              <a:t>Cluster 3D Navigator: a rotatable point cloud, one point per cell, coloured by class</a:t>
+              <a:t>So the exercise uses a synthetic tumour microenvironment where every cell is labelled</a:t>
             </a:r>
             <a:endParaRPr lang="en-US" sz="2000" dirty="0"/>
           </a:p>
@@ -15455,7 +15520,7 @@
                 <a:ea typeface="Calibri" pitchFamily="34" charset="-122"/>
                 <a:cs typeface="Calibri" pitchFamily="34" charset="-120"/>
               </a:rPr>
-              <a:t>Click a point in cluster space and land on that cell in the viewer</a:t>
+              <a:t>Six cell types, tumour nests, an immune-infiltrated boundary, B-cell follicles, a proliferation gradient</a:t>
             </a:r>
             <a:endParaRPr lang="en-US" sz="2000" dirty="0"/>
           </a:p>
@@ -15479,7 +15544,31 @@
                 <a:ea typeface="Calibri" pitchFamily="34" charset="-122"/>
                 <a:cs typeface="Calibri" pitchFamily="34" charset="-120"/>
               </a:rPr>
-              <a:t>Boundary cells are where classification errors live — this makes them one click away</a:t>
+              <a:t>Inflamed versus desert: one image is 55% lymphoid, another 14% with no follicles at all</a:t>
+            </a:r>
+            <a:endParaRPr lang="en-US" sz="2000" dirty="0"/>
+          </a:p>
+          <a:p>
+            <a:pPr marL="342900" indent="-342900">
+              <a:lnSpc>
+                <a:spcPct val="105000"/>
+              </a:lnSpc>
+              <a:spcAft>
+                <a:spcPts val="1200"/>
+              </a:spcAft>
+              <a:buSzPct val="100000"/>
+              <a:buChar char="•"/>
+            </a:pPr>
+            <a:r>
+              <a:rPr lang="en-US" sz="2000" dirty="0">
+                <a:solidFill>
+                  <a:srgbClr val="1F2933"/>
+                </a:solidFill>
+                <a:latin typeface="Calibri" pitchFamily="34" charset="0"/>
+                <a:ea typeface="Calibri" pitchFamily="34" charset="-122"/>
+                <a:cs typeface="Calibri" pitchFamily="34" charset="-120"/>
+              </a:rPr>
+              <a:t>20 MB, public domain, and it downloads straight from GitHub</a:t>
             </a:r>
             <a:endParaRPr lang="en-US" sz="2000" dirty="0"/>
           </a:p>
@@ -15543,7 +15632,7 @@
                 <a:ea typeface="Calibri" pitchFamily="34" charset="-122"/>
                 <a:cs typeface="Calibri" pitchFamily="34" charset="-120"/>
               </a:rPr>
-              <a:t>Works with any clustering tool’s output, not just QP-CAT’s. It only reads; it writes nothing.</a:t>
+              <a:t>Cluster it, then click a boundary cell and find out whether the cluster was telling the truth.</a:t>
             </a:r>
             <a:endParaRPr lang="en-US" sz="1600" dirty="0"/>
           </a:p>
@@ -15622,23 +15711,42 @@
       </p:grpSpPr>
       <p:sp>
         <p:nvSpPr>
-          <p:cNvPr id="2" name="Shape 0"/>
-          <p:cNvSpPr/>
-          <p:nvPr/>
-        </p:nvSpPr>
-        <p:spPr>
-          <a:xfrm>
-            <a:off x="0" y="1417320"/>
-            <a:ext cx="12188952" cy="3108960"/>
-          </a:xfrm>
-          <a:prstGeom prst="rect">
-            <a:avLst/>
-          </a:prstGeom>
-          <a:solidFill>
-            <a:srgbClr val="E8F0FA"/>
-          </a:solidFill>
-          <a:ln/>
-        </p:spPr>
+          <p:cNvPr id="2" name="Text 0"/>
+          <p:cNvSpPr/>
+          <p:nvPr/>
+        </p:nvSpPr>
+        <p:spPr>
+          <a:xfrm>
+            <a:off x="566928" y="384048"/>
+            <a:ext cx="11055096" cy="658368"/>
+          </a:xfrm>
+          <a:prstGeom prst="rect">
+            <a:avLst/>
+          </a:prstGeom>
+          <a:noFill/>
+          <a:ln/>
+        </p:spPr>
+        <p:txBody>
+          <a:bodyPr wrap="square" rtlCol="0" anchor="ctr"/>
+          <a:lstStyle/>
+          <a:p>
+            <a:pPr indent="0" marL="0">
+              <a:buNone/>
+            </a:pPr>
+            <a:r>
+              <a:rPr lang="en-US" sz="3000" b="1" dirty="0">
+                <a:solidFill>
+                  <a:srgbClr val="1F4C86"/>
+                </a:solidFill>
+                <a:latin typeface="Trebuchet MS" pitchFamily="34" charset="0"/>
+                <a:ea typeface="Trebuchet MS" pitchFamily="34" charset="-122"/>
+                <a:cs typeface="Trebuchet MS" pitchFamily="34" charset="-120"/>
+              </a:rPr>
+              <a:t>And getting back to the tissue</a:t>
+            </a:r>
+            <a:endParaRPr lang="en-US" sz="3000" dirty="0"/>
+          </a:p>
+        </p:txBody>
       </p:sp>
       <p:sp>
         <p:nvSpPr>
@@ -15648,8 +15756,8 @@
         </p:nvSpPr>
         <p:spPr>
           <a:xfrm>
-            <a:off x="0" y="1417320"/>
-            <a:ext cx="201168" cy="3108960"/>
+            <a:off x="566928" y="1097280"/>
+            <a:ext cx="1920240" cy="50292"/>
           </a:xfrm>
           <a:prstGeom prst="rect">
             <a:avLst/>
@@ -15668,8 +15776,8 @@
         </p:nvSpPr>
         <p:spPr>
           <a:xfrm>
-            <a:off x="566928" y="1691640"/>
-            <a:ext cx="1828800" cy="914400"/>
+            <a:off x="566928" y="1243584"/>
+            <a:ext cx="11055096" cy="384048"/>
           </a:xfrm>
           <a:prstGeom prst="rect">
             <a:avLst/>
@@ -15685,17 +15793,17 @@
               <a:buNone/>
             </a:pPr>
             <a:r>
-              <a:rPr lang="en-US" sz="5400" b="1" dirty="0">
-                <a:solidFill>
-                  <a:srgbClr val="3674C1"/>
-                </a:solidFill>
-                <a:latin typeface="Trebuchet MS" pitchFamily="34" charset="0"/>
-                <a:ea typeface="Trebuchet MS" pitchFamily="34" charset="-122"/>
-                <a:cs typeface="Trebuchet MS" pitchFamily="34" charset="-120"/>
-              </a:rPr>
-              <a:t>07</a:t>
-            </a:r>
-            <a:endParaRPr lang="en-US" sz="5400" dirty="0"/>
+              <a:rPr lang="en-US" sz="1700" i="1" dirty="0">
+                <a:solidFill>
+                  <a:srgbClr val="5A6675"/>
+                </a:solidFill>
+                <a:latin typeface="Calibri" pitchFamily="34" charset="0"/>
+                <a:ea typeface="Calibri" pitchFamily="34" charset="-122"/>
+                <a:cs typeface="Calibri" pitchFamily="34" charset="-120"/>
+              </a:rPr>
+              <a:t>A mention rather than a demo — it is the navigation half of the clustering you just saw.</a:t>
+            </a:r>
+            <a:endParaRPr lang="en-US" sz="1700" dirty="0"/>
           </a:p>
         </p:txBody>
       </p:sp>
@@ -15707,8 +15815,151 @@
         </p:nvSpPr>
         <p:spPr>
           <a:xfrm>
-            <a:off x="566928" y="2606040"/>
-            <a:ext cx="11055096" cy="868680"/>
+            <a:off x="640080" y="1755648"/>
+            <a:ext cx="10963656" cy="4279392"/>
+          </a:xfrm>
+          <a:prstGeom prst="rect">
+            <a:avLst/>
+          </a:prstGeom>
+          <a:noFill/>
+          <a:ln/>
+        </p:spPr>
+        <p:txBody>
+          <a:bodyPr wrap="square" rtlCol="0" anchor="t"/>
+          <a:lstStyle/>
+          <a:p>
+            <a:pPr marL="342900" indent="-342900">
+              <a:lnSpc>
+                <a:spcPct val="105000"/>
+              </a:lnSpc>
+              <a:spcAft>
+                <a:spcPts val="1200"/>
+              </a:spcAft>
+              <a:buSzPct val="100000"/>
+              <a:buChar char="•"/>
+            </a:pPr>
+            <a:r>
+              <a:rPr lang="en-US" sz="2000" dirty="0">
+                <a:solidFill>
+                  <a:srgbClr val="1F2933"/>
+                </a:solidFill>
+                <a:latin typeface="Calibri" pitchFamily="34" charset="0"/>
+                <a:ea typeface="Calibri" pitchFamily="34" charset="-122"/>
+                <a:cs typeface="Calibri" pitchFamily="34" charset="-120"/>
+              </a:rPr>
+              <a:t>Clustering answers "which cells group together". It does not answer "which cell is that"</a:t>
+            </a:r>
+            <a:endParaRPr lang="en-US" sz="2000" dirty="0"/>
+          </a:p>
+          <a:p>
+            <a:pPr marL="342900" indent="-342900">
+              <a:lnSpc>
+                <a:spcPct val="105000"/>
+              </a:lnSpc>
+              <a:spcAft>
+                <a:spcPts val="1200"/>
+              </a:spcAft>
+              <a:buSzPct val="100000"/>
+              <a:buChar char="•"/>
+            </a:pPr>
+            <a:r>
+              <a:rPr lang="en-US" sz="2000" dirty="0">
+                <a:solidFill>
+                  <a:srgbClr val="1F2933"/>
+                </a:solidFill>
+                <a:latin typeface="Calibri" pitchFamily="34" charset="0"/>
+                <a:ea typeface="Calibri" pitchFamily="34" charset="-122"/>
+                <a:cs typeface="Calibri" pitchFamily="34" charset="-120"/>
+              </a:rPr>
+              <a:t>Cluster 3D Navigator: a rotatable point cloud, one point per cell, coloured by class</a:t>
+            </a:r>
+            <a:endParaRPr lang="en-US" sz="2000" dirty="0"/>
+          </a:p>
+          <a:p>
+            <a:pPr marL="342900" indent="-342900">
+              <a:lnSpc>
+                <a:spcPct val="105000"/>
+              </a:lnSpc>
+              <a:spcAft>
+                <a:spcPts val="1200"/>
+              </a:spcAft>
+              <a:buSzPct val="100000"/>
+              <a:buChar char="•"/>
+            </a:pPr>
+            <a:r>
+              <a:rPr lang="en-US" sz="2000" dirty="0">
+                <a:solidFill>
+                  <a:srgbClr val="1F2933"/>
+                </a:solidFill>
+                <a:latin typeface="Calibri" pitchFamily="34" charset="0"/>
+                <a:ea typeface="Calibri" pitchFamily="34" charset="-122"/>
+                <a:cs typeface="Calibri" pitchFamily="34" charset="-120"/>
+              </a:rPr>
+              <a:t>Click a point in cluster space and land on that cell in the viewer</a:t>
+            </a:r>
+            <a:endParaRPr lang="en-US" sz="2000" dirty="0"/>
+          </a:p>
+          <a:p>
+            <a:pPr marL="342900" indent="-342900">
+              <a:lnSpc>
+                <a:spcPct val="105000"/>
+              </a:lnSpc>
+              <a:spcAft>
+                <a:spcPts val="1200"/>
+              </a:spcAft>
+              <a:buSzPct val="100000"/>
+              <a:buChar char="•"/>
+            </a:pPr>
+            <a:r>
+              <a:rPr lang="en-US" sz="2000" dirty="0">
+                <a:solidFill>
+                  <a:srgbClr val="1F2933"/>
+                </a:solidFill>
+                <a:latin typeface="Calibri" pitchFamily="34" charset="0"/>
+                <a:ea typeface="Calibri" pitchFamily="34" charset="-122"/>
+                <a:cs typeface="Calibri" pitchFamily="34" charset="-120"/>
+              </a:rPr>
+              <a:t>Boundary cells are where classification errors live — this makes them one click away</a:t>
+            </a:r>
+            <a:endParaRPr lang="en-US" sz="2000" dirty="0"/>
+          </a:p>
+        </p:txBody>
+      </p:sp>
+      <p:sp>
+        <p:nvSpPr>
+          <p:cNvPr id="6" name="Shape 4"/>
+          <p:cNvSpPr/>
+          <p:nvPr/>
+        </p:nvSpPr>
+        <p:spPr>
+          <a:xfrm>
+            <a:off x="566928" y="5650992"/>
+            <a:ext cx="11055096" cy="566928"/>
+          </a:xfrm>
+          <a:prstGeom prst="rect">
+            <a:avLst/>
+          </a:prstGeom>
+          <a:solidFill>
+            <a:srgbClr val="F4F8FD"/>
+          </a:solidFill>
+          <a:ln w="9525">
+            <a:solidFill>
+              <a:srgbClr val="3674C1"/>
+            </a:solidFill>
+            <a:prstDash val="solid"/>
+          </a:ln>
+        </p:spPr>
+      </p:sp>
+      <p:sp>
+        <p:nvSpPr>
+          <p:cNvPr id="7" name="Text 5"/>
+          <p:cNvSpPr/>
+          <p:nvPr/>
+        </p:nvSpPr>
+        <p:spPr>
+          <a:xfrm>
+            <a:off x="768096" y="5650992"/>
+            <a:ext cx="10652760" cy="566928"/>
           </a:xfrm>
           <a:prstGeom prst="rect">
             <a:avLst/>
@@ -15724,95 +15975,17 @@
               <a:buNone/>
             </a:pPr>
             <a:r>
-              <a:rPr lang="en-US" sz="4000" b="1" dirty="0">
+              <a:rPr lang="en-US" sz="1600" b="1" dirty="0">
                 <a:solidFill>
                   <a:srgbClr val="1F4C86"/>
                 </a:solidFill>
-                <a:latin typeface="Trebuchet MS" pitchFamily="34" charset="0"/>
-                <a:ea typeface="Trebuchet MS" pitchFamily="34" charset="-122"/>
-                <a:cs typeface="Trebuchet MS" pitchFamily="34" charset="-120"/>
-              </a:rPr>
-              <a:t>Collagen fibre and texture</a:t>
-            </a:r>
-            <a:endParaRPr lang="en-US" sz="4000" dirty="0"/>
-          </a:p>
-        </p:txBody>
-      </p:sp>
-      <p:sp>
-        <p:nvSpPr>
-          <p:cNvPr id="6" name="Text 4"/>
-          <p:cNvSpPr/>
-          <p:nvPr/>
-        </p:nvSpPr>
-        <p:spPr>
-          <a:xfrm>
-            <a:off x="566928" y="3456432"/>
-            <a:ext cx="10140696" cy="731520"/>
-          </a:xfrm>
-          <a:prstGeom prst="rect">
-            <a:avLst/>
-          </a:prstGeom>
-          <a:noFill/>
-          <a:ln/>
-        </p:spPr>
-        <p:txBody>
-          <a:bodyPr wrap="square" rtlCol="0" anchor="t"/>
-          <a:lstStyle/>
-          <a:p>
-            <a:pPr indent="0" marL="0">
-              <a:buNone/>
-            </a:pPr>
-            <a:r>
-              <a:rPr lang="en-US" sz="1900" dirty="0">
-                <a:solidFill>
-                  <a:srgbClr val="5A6675"/>
-                </a:solidFill>
-                <a:latin typeface="Calibri" pitchFamily="34" charset="0"/>
-                <a:ea typeface="Calibri" pitchFamily="34" charset="-122"/>
-                <a:cs typeface="Calibri" pitchFamily="34" charset="-120"/>
-              </a:rPr>
-              <a:t>Architecture, not just presence</a:t>
-            </a:r>
-            <a:endParaRPr lang="en-US" sz="1900" dirty="0"/>
-          </a:p>
-        </p:txBody>
-      </p:sp>
-      <p:sp>
-        <p:nvSpPr>
-          <p:cNvPr id="7" name="Text 5"/>
-          <p:cNvSpPr/>
-          <p:nvPr/>
-        </p:nvSpPr>
-        <p:spPr>
-          <a:xfrm>
-            <a:off x="566928" y="6199632"/>
-            <a:ext cx="8229600" cy="365760"/>
-          </a:xfrm>
-          <a:prstGeom prst="rect">
-            <a:avLst/>
-          </a:prstGeom>
-          <a:noFill/>
-          <a:ln/>
-        </p:spPr>
-        <p:txBody>
-          <a:bodyPr wrap="square" rtlCol="0" anchor="ctr"/>
-          <a:lstStyle/>
-          <a:p>
-            <a:pPr indent="0" marL="0">
-              <a:buNone/>
-            </a:pPr>
-            <a:r>
-              <a:rPr lang="en-US" sz="1400" dirty="0">
-                <a:solidFill>
-                  <a:srgbClr val="A8B2BF"/>
-                </a:solidFill>
-                <a:latin typeface="Calibri" pitchFamily="34" charset="0"/>
-                <a:ea typeface="Calibri" pitchFamily="34" charset="-122"/>
-                <a:cs typeface="Calibri" pitchFamily="34" charset="-120"/>
-              </a:rPr>
-              <a:t>michaelsnelson.github.io/BINA-I2K-2026-QuPath-Extensions</a:t>
-            </a:r>
-            <a:endParaRPr lang="en-US" sz="1400" dirty="0"/>
+                <a:latin typeface="Calibri" pitchFamily="34" charset="0"/>
+                <a:ea typeface="Calibri" pitchFamily="34" charset="-122"/>
+                <a:cs typeface="Calibri" pitchFamily="34" charset="-120"/>
+              </a:rPr>
+              <a:t>Works with any clustering tool’s output, not just QP-CAT’s. It only reads; it writes nothing.</a:t>
+            </a:r>
+            <a:endParaRPr lang="en-US" sz="1600" dirty="0"/>
           </a:p>
         </p:txBody>
       </p:sp>
@@ -16201,14 +16374,54 @@
       </p:grpSpPr>
       <p:sp>
         <p:nvSpPr>
-          <p:cNvPr id="2" name="Text 0"/>
-          <p:cNvSpPr/>
-          <p:nvPr/>
-        </p:nvSpPr>
-        <p:spPr>
-          <a:xfrm>
-            <a:off x="566928" y="384048"/>
-            <a:ext cx="11055096" cy="658368"/>
+          <p:cNvPr id="2" name="Shape 0"/>
+          <p:cNvSpPr/>
+          <p:nvPr/>
+        </p:nvSpPr>
+        <p:spPr>
+          <a:xfrm>
+            <a:off x="0" y="1417320"/>
+            <a:ext cx="12188952" cy="3108960"/>
+          </a:xfrm>
+          <a:prstGeom prst="rect">
+            <a:avLst/>
+          </a:prstGeom>
+          <a:solidFill>
+            <a:srgbClr val="E8F0FA"/>
+          </a:solidFill>
+          <a:ln/>
+        </p:spPr>
+      </p:sp>
+      <p:sp>
+        <p:nvSpPr>
+          <p:cNvPr id="3" name="Shape 1"/>
+          <p:cNvSpPr/>
+          <p:nvPr/>
+        </p:nvSpPr>
+        <p:spPr>
+          <a:xfrm>
+            <a:off x="0" y="1417320"/>
+            <a:ext cx="201168" cy="3108960"/>
+          </a:xfrm>
+          <a:prstGeom prst="rect">
+            <a:avLst/>
+          </a:prstGeom>
+          <a:solidFill>
+            <a:srgbClr val="3674C1"/>
+          </a:solidFill>
+          <a:ln/>
+        </p:spPr>
+      </p:sp>
+      <p:sp>
+        <p:nvSpPr>
+          <p:cNvPr id="4" name="Text 2"/>
+          <p:cNvSpPr/>
+          <p:nvPr/>
+        </p:nvSpPr>
+        <p:spPr>
+          <a:xfrm>
+            <a:off x="566928" y="1691640"/>
+            <a:ext cx="1828800" cy="914400"/>
           </a:xfrm>
           <a:prstGeom prst="rect">
             <a:avLst/>
@@ -16224,50 +16437,30 @@
               <a:buNone/>
             </a:pPr>
             <a:r>
-              <a:rPr lang="en-US" sz="3000" b="1" dirty="0">
-                <a:solidFill>
-                  <a:srgbClr val="1F4C86"/>
+              <a:rPr lang="en-US" sz="5400" b="1" dirty="0">
+                <a:solidFill>
+                  <a:srgbClr val="3674C1"/>
                 </a:solidFill>
                 <a:latin typeface="Trebuchet MS" pitchFamily="34" charset="0"/>
                 <a:ea typeface="Trebuchet MS" pitchFamily="34" charset="-122"/>
                 <a:cs typeface="Trebuchet MS" pitchFamily="34" charset="-120"/>
               </a:rPr>
-              <a:t>Why fibre architecture</a:t>
-            </a:r>
-            <a:endParaRPr lang="en-US" sz="3000" dirty="0"/>
-          </a:p>
-        </p:txBody>
-      </p:sp>
-      <p:sp>
-        <p:nvSpPr>
-          <p:cNvPr id="3" name="Shape 1"/>
-          <p:cNvSpPr/>
-          <p:nvPr/>
-        </p:nvSpPr>
-        <p:spPr>
-          <a:xfrm>
-            <a:off x="566928" y="1097280"/>
-            <a:ext cx="1920240" cy="50292"/>
-          </a:xfrm>
-          <a:prstGeom prst="rect">
-            <a:avLst/>
-          </a:prstGeom>
-          <a:solidFill>
-            <a:srgbClr val="3674C1"/>
-          </a:solidFill>
-          <a:ln/>
-        </p:spPr>
-      </p:sp>
-      <p:sp>
-        <p:nvSpPr>
-          <p:cNvPr id="4" name="Text 2"/>
-          <p:cNvSpPr/>
-          <p:nvPr/>
-        </p:nvSpPr>
-        <p:spPr>
-          <a:xfrm>
-            <a:off x="566928" y="1243584"/>
-            <a:ext cx="11055096" cy="384048"/>
+              <a:t>07</a:t>
+            </a:r>
+            <a:endParaRPr lang="en-US" sz="5400" dirty="0"/>
+          </a:p>
+        </p:txBody>
+      </p:sp>
+      <p:sp>
+        <p:nvSpPr>
+          <p:cNvPr id="5" name="Text 3"/>
+          <p:cNvSpPr/>
+          <p:nvPr/>
+        </p:nvSpPr>
+        <p:spPr>
+          <a:xfrm>
+            <a:off x="566928" y="2606040"/>
+            <a:ext cx="11055096" cy="868680"/>
           </a:xfrm>
           <a:prstGeom prst="rect">
             <a:avLst/>
@@ -16283,30 +16476,30 @@
               <a:buNone/>
             </a:pPr>
             <a:r>
-              <a:rPr lang="en-US" sz="1700" i="1" dirty="0">
-                <a:solidFill>
-                  <a:srgbClr val="5A6675"/>
-                </a:solidFill>
-                <a:latin typeface="Calibri" pitchFamily="34" charset="0"/>
-                <a:ea typeface="Calibri" pitchFamily="34" charset="-122"/>
-                <a:cs typeface="Calibri" pitchFamily="34" charset="-120"/>
-              </a:rPr>
-              <a:t>Conklin et al. 2011, American Journal of Pathology 178:1221.</a:t>
-            </a:r>
-            <a:endParaRPr lang="en-US" sz="1700" dirty="0"/>
-          </a:p>
-        </p:txBody>
-      </p:sp>
-      <p:sp>
-        <p:nvSpPr>
-          <p:cNvPr id="5" name="Text 3"/>
-          <p:cNvSpPr/>
-          <p:nvPr/>
-        </p:nvSpPr>
-        <p:spPr>
-          <a:xfrm>
-            <a:off x="640080" y="1755648"/>
-            <a:ext cx="10963656" cy="4279392"/>
+              <a:rPr lang="en-US" sz="4000" b="1" dirty="0">
+                <a:solidFill>
+                  <a:srgbClr val="1F4C86"/>
+                </a:solidFill>
+                <a:latin typeface="Trebuchet MS" pitchFamily="34" charset="0"/>
+                <a:ea typeface="Trebuchet MS" pitchFamily="34" charset="-122"/>
+                <a:cs typeface="Trebuchet MS" pitchFamily="34" charset="-120"/>
+              </a:rPr>
+              <a:t>Collagen fibre and texture</a:t>
+            </a:r>
+            <a:endParaRPr lang="en-US" sz="4000" dirty="0"/>
+          </a:p>
+        </p:txBody>
+      </p:sp>
+      <p:sp>
+        <p:nvSpPr>
+          <p:cNvPr id="6" name="Text 4"/>
+          <p:cNvSpPr/>
+          <p:nvPr/>
+        </p:nvSpPr>
+        <p:spPr>
+          <a:xfrm>
+            <a:off x="566928" y="3456432"/>
+            <a:ext cx="10140696" cy="731520"/>
           </a:xfrm>
           <a:prstGeom prst="rect">
             <a:avLst/>
@@ -16316,166 +16509,62 @@
         </p:spPr>
         <p:txBody>
           <a:bodyPr wrap="square" rtlCol="0" anchor="t"/>
-          <a:lstStyle/>
-          <a:p>
-            <a:pPr marL="342900" indent="-342900">
-              <a:lnSpc>
-                <a:spcPct val="105000"/>
-              </a:lnSpc>
-              <a:spcAft>
-                <a:spcPts val="1200"/>
-              </a:spcAft>
-              <a:buSzPct val="100000"/>
-              <a:buChar char="•"/>
-            </a:pPr>
-            <a:r>
-              <a:rPr lang="en-US" sz="2000" dirty="0">
-                <a:solidFill>
-                  <a:srgbClr val="1F2933"/>
-                </a:solidFill>
-                <a:latin typeface="Calibri" pitchFamily="34" charset="0"/>
-                <a:ea typeface="Calibri" pitchFamily="34" charset="-122"/>
-                <a:cs typeface="Calibri" pitchFamily="34" charset="-120"/>
-              </a:rPr>
-              <a:t>Collagen is not simply present or absent — the arrangement carries the biology</a:t>
-            </a:r>
-            <a:endParaRPr lang="en-US" sz="2000" dirty="0"/>
-          </a:p>
-          <a:p>
-            <a:pPr marL="342900" indent="-342900">
-              <a:lnSpc>
-                <a:spcPct val="105000"/>
-              </a:lnSpc>
-              <a:spcAft>
-                <a:spcPts val="1200"/>
-              </a:spcAft>
-              <a:buSzPct val="100000"/>
-              <a:buChar char="•"/>
-            </a:pPr>
-            <a:r>
-              <a:rPr lang="en-US" sz="2000" dirty="0">
-                <a:solidFill>
-                  <a:srgbClr val="1F2933"/>
-                </a:solidFill>
-                <a:latin typeface="Calibri" pitchFamily="34" charset="0"/>
-                <a:ea typeface="Calibri" pitchFamily="34" charset="-122"/>
-                <a:cs typeface="Calibri" pitchFamily="34" charset="-120"/>
-              </a:rPr>
-              <a:t>Wavy versus straightened; aligned versus isotropic; and how that changes at a boundary</a:t>
-            </a:r>
-            <a:endParaRPr lang="en-US" sz="2000" dirty="0"/>
-          </a:p>
-          <a:p>
-            <a:pPr marL="342900" indent="-342900">
-              <a:lnSpc>
-                <a:spcPct val="105000"/>
-              </a:lnSpc>
-              <a:spcAft>
-                <a:spcPts val="1200"/>
-              </a:spcAft>
-              <a:buSzPct val="100000"/>
-              <a:buChar char="•"/>
-            </a:pPr>
-            <a:r>
-              <a:rPr lang="en-US" sz="2000" dirty="0">
-                <a:solidFill>
-                  <a:srgbClr val="1F2933"/>
-                </a:solidFill>
-                <a:latin typeface="Calibri" pitchFamily="34" charset="0"/>
-                <a:ea typeface="Calibri" pitchFamily="34" charset="-122"/>
-                <a:cs typeface="Calibri" pitchFamily="34" charset="-120"/>
-              </a:rPr>
-              <a:t>In breast pathology, straightened fibres running perpendicular to the tumour boundary act as tracks for invading cells</a:t>
-            </a:r>
-            <a:endParaRPr lang="en-US" sz="2000" dirty="0"/>
-          </a:p>
-          <a:p>
-            <a:pPr marL="342900" indent="-342900">
-              <a:lnSpc>
-                <a:spcPct val="105000"/>
-              </a:lnSpc>
-              <a:spcAft>
-                <a:spcPts val="1200"/>
-              </a:spcAft>
-              <a:buSzPct val="100000"/>
-              <a:buChar char="•"/>
-            </a:pPr>
-            <a:r>
-              <a:rPr lang="en-US" sz="2000" dirty="0">
-                <a:solidFill>
-                  <a:srgbClr val="1F2933"/>
-                </a:solidFill>
-                <a:latin typeface="Calibri" pitchFamily="34" charset="0"/>
-                <a:ea typeface="Calibri" pitchFamily="34" charset="-122"/>
-                <a:cs typeface="Calibri" pitchFamily="34" charset="-120"/>
-              </a:rPr>
-              <a:t>Hazard ratio 3.0–3.9 for disease-free survival, independent of grade, size and receptor status</a:t>
-            </a:r>
-            <a:endParaRPr lang="en-US" sz="2000" dirty="0"/>
-          </a:p>
-        </p:txBody>
-      </p:sp>
-      <p:sp>
-        <p:nvSpPr>
-          <p:cNvPr id="6" name="Shape 4"/>
-          <p:cNvSpPr/>
-          <p:nvPr/>
-        </p:nvSpPr>
-        <p:spPr>
-          <a:xfrm>
-            <a:off x="566928" y="5650992"/>
-            <a:ext cx="11055096" cy="566928"/>
-          </a:xfrm>
-          <a:prstGeom prst="rect">
-            <a:avLst/>
-          </a:prstGeom>
-          <a:solidFill>
-            <a:srgbClr val="F4F8FD"/>
-          </a:solidFill>
-          <a:ln w="9525">
-            <a:solidFill>
-              <a:srgbClr val="3674C1"/>
-            </a:solidFill>
-            <a:prstDash val="solid"/>
-          </a:ln>
-        </p:spPr>
-      </p:sp>
-      <p:sp>
-        <p:nvSpPr>
-          <p:cNvPr id="7" name="Text 5"/>
-          <p:cNvSpPr/>
-          <p:nvPr/>
-        </p:nvSpPr>
-        <p:spPr>
-          <a:xfrm>
-            <a:off x="768096" y="5650992"/>
-            <a:ext cx="10652760" cy="566928"/>
-          </a:xfrm>
-          <a:prstGeom prst="rect">
-            <a:avLst/>
-          </a:prstGeom>
-          <a:noFill/>
-          <a:ln/>
-        </p:spPr>
-        <p:txBody>
-          <a:bodyPr wrap="square" rtlCol="0" anchor="ctr"/>
           <a:lstStyle/>
           <a:p>
             <a:pPr indent="0" marL="0">
               <a:buNone/>
             </a:pPr>
             <a:r>
-              <a:rPr lang="en-US" sz="1600" b="1" dirty="0">
-                <a:solidFill>
-                  <a:srgbClr val="1F4C86"/>
-                </a:solidFill>
-                <a:latin typeface="Calibri" pitchFamily="34" charset="0"/>
-                <a:ea typeface="Calibri" pitchFamily="34" charset="-122"/>
-                <a:cs typeface="Calibri" pitchFamily="34" charset="-120"/>
-              </a:rPr>
-              <a:t>The same wavy-to-straight axis recurs in arterial adventitia, sclera, alveolar wall, and cardiac fibrosis.</a:t>
-            </a:r>
-            <a:endParaRPr lang="en-US" sz="1600" dirty="0"/>
+              <a:rPr lang="en-US" sz="1900" dirty="0">
+                <a:solidFill>
+                  <a:srgbClr val="5A6675"/>
+                </a:solidFill>
+                <a:latin typeface="Calibri" pitchFamily="34" charset="0"/>
+                <a:ea typeface="Calibri" pitchFamily="34" charset="-122"/>
+                <a:cs typeface="Calibri" pitchFamily="34" charset="-120"/>
+              </a:rPr>
+              <a:t>Architecture, not just presence</a:t>
+            </a:r>
+            <a:endParaRPr lang="en-US" sz="1900" dirty="0"/>
+          </a:p>
+        </p:txBody>
+      </p:sp>
+      <p:sp>
+        <p:nvSpPr>
+          <p:cNvPr id="7" name="Text 5"/>
+          <p:cNvSpPr/>
+          <p:nvPr/>
+        </p:nvSpPr>
+        <p:spPr>
+          <a:xfrm>
+            <a:off x="566928" y="6199632"/>
+            <a:ext cx="8229600" cy="365760"/>
+          </a:xfrm>
+          <a:prstGeom prst="rect">
+            <a:avLst/>
+          </a:prstGeom>
+          <a:noFill/>
+          <a:ln/>
+        </p:spPr>
+        <p:txBody>
+          <a:bodyPr wrap="square" rtlCol="0" anchor="ctr"/>
+          <a:lstStyle/>
+          <a:p>
+            <a:pPr indent="0" marL="0">
+              <a:buNone/>
+            </a:pPr>
+            <a:r>
+              <a:rPr lang="en-US" sz="1400" dirty="0">
+                <a:solidFill>
+                  <a:srgbClr val="A8B2BF"/>
+                </a:solidFill>
+                <a:latin typeface="Calibri" pitchFamily="34" charset="0"/>
+                <a:ea typeface="Calibri" pitchFamily="34" charset="-122"/>
+                <a:cs typeface="Calibri" pitchFamily="34" charset="-120"/>
+              </a:rPr>
+              <a:t>michaelsnelson.github.io/BINA-I2K-2026-QuPath-Extensions</a:t>
+            </a:r>
+            <a:endParaRPr lang="en-US" sz="1400" dirty="0"/>
           </a:p>
         </p:txBody>
       </p:sp>
@@ -16583,7 +16672,7 @@
                 <a:ea typeface="Trebuchet MS" pitchFamily="34" charset="-122"/>
                 <a:cs typeface="Trebuchet MS" pitchFamily="34" charset="-120"/>
               </a:rPr>
-              <a:t>Two complementary tools</a:t>
+              <a:t>Why fibre architecture</a:t>
             </a:r>
             <a:endParaRPr lang="en-US" sz="3000" dirty="0"/>
           </a:p>
@@ -16611,34 +16700,14 @@
       </p:sp>
       <p:sp>
         <p:nvSpPr>
-          <p:cNvPr id="4" name="Shape 2"/>
-          <p:cNvSpPr/>
-          <p:nvPr/>
-        </p:nvSpPr>
-        <p:spPr>
-          <a:xfrm>
-            <a:off x="566928" y="1554480"/>
-            <a:ext cx="5298948" cy="530352"/>
-          </a:xfrm>
-          <a:prstGeom prst="rect">
-            <a:avLst/>
-          </a:prstGeom>
-          <a:solidFill>
-            <a:srgbClr val="E8F0FA"/>
-          </a:solidFill>
-          <a:ln/>
-        </p:spPr>
-      </p:sp>
-      <p:sp>
-        <p:nvSpPr>
-          <p:cNvPr id="5" name="Text 3"/>
-          <p:cNvSpPr/>
-          <p:nvPr/>
-        </p:nvSpPr>
-        <p:spPr>
-          <a:xfrm>
-            <a:off x="731520" y="1554480"/>
-            <a:ext cx="4969764" cy="530352"/>
+          <p:cNvPr id="4" name="Text 2"/>
+          <p:cNvSpPr/>
+          <p:nvPr/>
+        </p:nvSpPr>
+        <p:spPr>
+          <a:xfrm>
+            <a:off x="566928" y="1243584"/>
+            <a:ext cx="11055096" cy="384048"/>
           </a:xfrm>
           <a:prstGeom prst="rect">
             <a:avLst/>
@@ -16654,30 +16723,30 @@
               <a:buNone/>
             </a:pPr>
             <a:r>
-              <a:rPr lang="en-US" sz="2000" b="1" dirty="0">
-                <a:solidFill>
-                  <a:srgbClr val="1F4C86"/>
-                </a:solidFill>
-                <a:latin typeface="Trebuchet MS" pitchFamily="34" charset="0"/>
-                <a:ea typeface="Trebuchet MS" pitchFamily="34" charset="-122"/>
-                <a:cs typeface="Trebuchet MS" pitchFamily="34" charset="-120"/>
-              </a:rPr>
-              <a:t>Fiber Analysis — measure a zone</a:t>
-            </a:r>
-            <a:endParaRPr lang="en-US" sz="2000" dirty="0"/>
-          </a:p>
-        </p:txBody>
-      </p:sp>
-      <p:sp>
-        <p:nvSpPr>
-          <p:cNvPr id="6" name="Text 4"/>
-          <p:cNvSpPr/>
-          <p:nvPr/>
-        </p:nvSpPr>
-        <p:spPr>
-          <a:xfrm>
-            <a:off x="658368" y="2240280"/>
-            <a:ext cx="5116068" cy="3566160"/>
+              <a:rPr lang="en-US" sz="1700" i="1" dirty="0">
+                <a:solidFill>
+                  <a:srgbClr val="5A6675"/>
+                </a:solidFill>
+                <a:latin typeface="Calibri" pitchFamily="34" charset="0"/>
+                <a:ea typeface="Calibri" pitchFamily="34" charset="-122"/>
+                <a:cs typeface="Calibri" pitchFamily="34" charset="-120"/>
+              </a:rPr>
+              <a:t>Conklin et al. 2011, American Journal of Pathology 178:1221.</a:t>
+            </a:r>
+            <a:endParaRPr lang="en-US" sz="1700" dirty="0"/>
+          </a:p>
+        </p:txBody>
+      </p:sp>
+      <p:sp>
+        <p:nvSpPr>
+          <p:cNvPr id="5" name="Text 3"/>
+          <p:cNvSpPr/>
+          <p:nvPr/>
+        </p:nvSpPr>
+        <p:spPr>
+          <a:xfrm>
+            <a:off x="640080" y="1755648"/>
+            <a:ext cx="10963656" cy="4279392"/>
           </a:xfrm>
           <a:prstGeom prst="rect">
             <a:avLst/>
@@ -16690,14 +16759,17 @@
           <a:lstStyle/>
           <a:p>
             <a:pPr marL="342900" indent="-342900">
+              <a:lnSpc>
+                <a:spcPct val="105000"/>
+              </a:lnSpc>
               <a:spcAft>
-                <a:spcPts val="1100"/>
+                <a:spcPts val="1200"/>
               </a:spcAft>
               <a:buSzPct val="100000"/>
               <a:buChar char="•"/>
             </a:pPr>
             <a:r>
-              <a:rPr lang="en-US" sz="1800" dirty="0">
+              <a:rPr lang="en-US" sz="2000" dirty="0">
                 <a:solidFill>
                   <a:srgbClr val="1F2933"/>
                 </a:solidFill>
@@ -16705,20 +16777,23 @@
                 <a:ea typeface="Calibri" pitchFamily="34" charset="-122"/>
                 <a:cs typeface="Calibri" pitchFamily="34" charset="-120"/>
               </a:rPr>
-              <a:t>A band of chosen width inside, outside, or across an annotation boundary</a:t>
-            </a:r>
-            <a:endParaRPr lang="en-US" sz="1800" dirty="0"/>
+              <a:t>Collagen is not simply present or absent — the arrangement carries the biology</a:t>
+            </a:r>
+            <a:endParaRPr lang="en-US" sz="2000" dirty="0"/>
           </a:p>
           <a:p>
             <a:pPr marL="342900" indent="-342900">
+              <a:lnSpc>
+                <a:spcPct val="105000"/>
+              </a:lnSpc>
               <a:spcAft>
-                <a:spcPts val="1100"/>
+                <a:spcPts val="1200"/>
               </a:spcAft>
               <a:buSzPct val="100000"/>
               <a:buChar char="•"/>
             </a:pPr>
             <a:r>
-              <a:rPr lang="en-US" sz="1800" dirty="0">
+              <a:rPr lang="en-US" sz="2000" dirty="0">
                 <a:solidFill>
                   <a:srgbClr val="1F2933"/>
                 </a:solidFill>
@@ -16726,20 +16801,23 @@
                 <a:ea typeface="Calibri" pitchFamily="34" charset="-122"/>
                 <a:cs typeface="Calibri" pitchFamily="34" charset="-120"/>
               </a:rPr>
-              <a:t>Straightness and persistence: wavy versus straightened fibres</a:t>
-            </a:r>
-            <a:endParaRPr lang="en-US" sz="1800" dirty="0"/>
+              <a:t>Wavy versus straightened; aligned versus isotropic; and how that changes at a boundary</a:t>
+            </a:r>
+            <a:endParaRPr lang="en-US" sz="2000" dirty="0"/>
           </a:p>
           <a:p>
             <a:pPr marL="342900" indent="-342900">
+              <a:lnSpc>
+                <a:spcPct val="105000"/>
+              </a:lnSpc>
               <a:spcAft>
-                <a:spcPts val="1100"/>
+                <a:spcPts val="1200"/>
               </a:spcAft>
               <a:buSzPct val="100000"/>
               <a:buChar char="•"/>
             </a:pPr>
             <a:r>
-              <a:rPr lang="en-US" sz="1800" dirty="0">
+              <a:rPr lang="en-US" sz="2000" dirty="0">
                 <a:solidFill>
                   <a:srgbClr val="1F2933"/>
                 </a:solidFill>
@@ -16747,20 +16825,23 @@
                 <a:ea typeface="Calibri" pitchFamily="34" charset="-122"/>
                 <a:cs typeface="Calibri" pitchFamily="34" charset="-120"/>
               </a:rPr>
-              <a:t>Morphometrics: coverage, length, branching, fractal dimension, gaps</a:t>
-            </a:r>
-            <a:endParaRPr lang="en-US" sz="1800" dirty="0"/>
+              <a:t>In breast pathology, straightened fibres running perpendicular to the tumour boundary act as tracks for invading cells</a:t>
+            </a:r>
+            <a:endParaRPr lang="en-US" sz="2000" dirty="0"/>
           </a:p>
           <a:p>
             <a:pPr marL="342900" indent="-342900">
+              <a:lnSpc>
+                <a:spcPct val="105000"/>
+              </a:lnSpc>
               <a:spcAft>
-                <a:spcPts val="1100"/>
+                <a:spcPts val="1200"/>
               </a:spcAft>
               <a:buSzPct val="100000"/>
               <a:buChar char="•"/>
             </a:pPr>
             <a:r>
-              <a:rPr lang="en-US" sz="1800" dirty="0">
+              <a:rPr lang="en-US" sz="2000" dirty="0">
                 <a:solidFill>
                   <a:srgbClr val="1F2933"/>
                 </a:solidFill>
@@ -16768,42 +16849,47 @@
                 <a:ea typeface="Calibri" pitchFamily="34" charset="-122"/>
                 <a:cs typeface="Calibri" pitchFamily="34" charset="-120"/>
               </a:rPr>
-              <a:t>Texture: the information fibre-tracing misses entirely</a:t>
-            </a:r>
-            <a:endParaRPr lang="en-US" sz="1800" dirty="0"/>
-          </a:p>
-        </p:txBody>
-      </p:sp>
-      <p:sp>
-        <p:nvSpPr>
-          <p:cNvPr id="7" name="Shape 5"/>
-          <p:cNvSpPr/>
-          <p:nvPr/>
-        </p:nvSpPr>
-        <p:spPr>
-          <a:xfrm>
-            <a:off x="6323076" y="1554480"/>
-            <a:ext cx="5298948" cy="530352"/>
+              <a:t>Hazard ratio 3.0–3.9 for disease-free survival, independent of grade, size and receptor status</a:t>
+            </a:r>
+            <a:endParaRPr lang="en-US" sz="2000" dirty="0"/>
+          </a:p>
+        </p:txBody>
+      </p:sp>
+      <p:sp>
+        <p:nvSpPr>
+          <p:cNvPr id="6" name="Shape 4"/>
+          <p:cNvSpPr/>
+          <p:nvPr/>
+        </p:nvSpPr>
+        <p:spPr>
+          <a:xfrm>
+            <a:off x="566928" y="5650992"/>
+            <a:ext cx="11055096" cy="566928"/>
           </a:xfrm>
           <a:prstGeom prst="rect">
             <a:avLst/>
           </a:prstGeom>
           <a:solidFill>
-            <a:srgbClr val="E8F0FA"/>
+            <a:srgbClr val="F4F8FD"/>
           </a:solidFill>
-          <a:ln/>
-        </p:spPr>
-      </p:sp>
-      <p:sp>
-        <p:nvSpPr>
-          <p:cNvPr id="8" name="Text 6"/>
-          <p:cNvSpPr/>
-          <p:nvPr/>
-        </p:nvSpPr>
-        <p:spPr>
-          <a:xfrm>
-            <a:off x="6487668" y="1554480"/>
-            <a:ext cx="4969764" cy="530352"/>
+          <a:ln w="9525">
+            <a:solidFill>
+              <a:srgbClr val="3674C1"/>
+            </a:solidFill>
+            <a:prstDash val="solid"/>
+          </a:ln>
+        </p:spPr>
+      </p:sp>
+      <p:sp>
+        <p:nvSpPr>
+          <p:cNvPr id="7" name="Text 5"/>
+          <p:cNvSpPr/>
+          <p:nvPr/>
+        </p:nvSpPr>
+        <p:spPr>
+          <a:xfrm>
+            <a:off x="768096" y="5650992"/>
+            <a:ext cx="10652760" cy="566928"/>
           </a:xfrm>
           <a:prstGeom prst="rect">
             <a:avLst/>
@@ -16819,129 +16905,23 @@
               <a:buNone/>
             </a:pPr>
             <a:r>
-              <a:rPr lang="en-US" sz="2000" b="1" dirty="0">
-                <a:solidFill>
-                  <a:srgbClr val="B26A00"/>
-                </a:solidFill>
-                <a:latin typeface="Trebuchet MS" pitchFamily="34" charset="0"/>
-                <a:ea typeface="Trebuchet MS" pitchFamily="34" charset="-122"/>
-                <a:cs typeface="Trebuchet MS" pitchFamily="34" charset="-120"/>
-              </a:rPr>
-              <a:t>TME-Quant — trace the fibres</a:t>
-            </a:r>
-            <a:endParaRPr lang="en-US" sz="2000" dirty="0"/>
-          </a:p>
-        </p:txBody>
-      </p:sp>
-      <p:sp>
-        <p:nvSpPr>
-          <p:cNvPr id="9" name="Text 7"/>
-          <p:cNvSpPr/>
-          <p:nvPr/>
-        </p:nvSpPr>
-        <p:spPr>
-          <a:xfrm>
-            <a:off x="6414516" y="2240280"/>
-            <a:ext cx="5116068" cy="3566160"/>
-          </a:xfrm>
-          <a:prstGeom prst="rect">
-            <a:avLst/>
-          </a:prstGeom>
-          <a:noFill/>
-          <a:ln/>
-        </p:spPr>
-        <p:txBody>
-          <a:bodyPr wrap="square" rtlCol="0" anchor="t"/>
-          <a:lstStyle/>
-          <a:p>
-            <a:pPr marL="342900" indent="-342900">
-              <a:spcAft>
-                <a:spcPts val="1100"/>
-              </a:spcAft>
-              <a:buSzPct val="100000"/>
-              <a:buChar char="•"/>
-            </a:pPr>
-            <a:r>
-              <a:rPr lang="en-US" sz="1800" dirty="0">
-                <a:solidFill>
-                  <a:srgbClr val="1F2933"/>
-                </a:solidFill>
-                <a:latin typeface="Calibri" pitchFamily="34" charset="0"/>
-                <a:ea typeface="Calibri" pitchFamily="34" charset="-122"/>
-                <a:cs typeface="Calibri" pitchFamily="34" charset="-120"/>
-              </a:rPr>
-              <a:t>Individual fibres extracted and committed back as objects</a:t>
-            </a:r>
-            <a:endParaRPr lang="en-US" sz="1800" dirty="0"/>
-          </a:p>
-          <a:p>
-            <a:pPr marL="342900" indent="-342900">
-              <a:spcAft>
-                <a:spcPts val="1100"/>
-              </a:spcAft>
-              <a:buSzPct val="100000"/>
-              <a:buChar char="•"/>
-            </a:pPr>
-            <a:r>
-              <a:rPr lang="en-US" sz="1800" dirty="0">
-                <a:solidFill>
-                  <a:srgbClr val="1F2933"/>
-                </a:solidFill>
-                <a:latin typeface="Calibri" pitchFamily="34" charset="0"/>
-                <a:ea typeface="Calibri" pitchFamily="34" charset="-122"/>
-                <a:cs typeface="Calibri" pitchFamily="34" charset="-120"/>
-              </a:rPr>
-              <a:t>Set the threshold by eye, with the mask shown before you commit</a:t>
-            </a:r>
-            <a:endParaRPr lang="en-US" sz="1800" dirty="0"/>
-          </a:p>
-          <a:p>
-            <a:pPr marL="342900" indent="-342900">
-              <a:spcAft>
-                <a:spcPts val="1100"/>
-              </a:spcAft>
-              <a:buSzPct val="100000"/>
-              <a:buChar char="•"/>
-            </a:pPr>
-            <a:r>
-              <a:rPr lang="en-US" sz="1800" dirty="0">
-                <a:solidFill>
-                  <a:srgbClr val="1F2933"/>
-                </a:solidFill>
-                <a:latin typeface="Calibri" pitchFamily="34" charset="0"/>
-                <a:ea typeface="Calibri" pitchFamily="34" charset="-122"/>
-                <a:cs typeface="Calibri" pitchFamily="34" charset="-120"/>
-              </a:rPr>
-              <a:t>Trace a few real fibres yourself, and it tunes its own parameters to match</a:t>
-            </a:r>
-            <a:endParaRPr lang="en-US" sz="1800" dirty="0"/>
-          </a:p>
-          <a:p>
-            <a:pPr marL="342900" indent="-342900">
-              <a:spcAft>
-                <a:spcPts val="1100"/>
-              </a:spcAft>
-              <a:buSzPct val="100000"/>
-              <a:buChar char="•"/>
-            </a:pPr>
-            <a:r>
-              <a:rPr lang="en-US" sz="1800" dirty="0">
-                <a:solidFill>
-                  <a:srgbClr val="1F2933"/>
-                </a:solidFill>
-                <a:latin typeface="Calibri" pitchFamily="34" charset="0"/>
-                <a:ea typeface="Calibri" pitchFamily="34" charset="-122"/>
-                <a:cs typeface="Calibri" pitchFamily="34" charset="-120"/>
-              </a:rPr>
-              <a:t>Fibres classified by orientation relative to a tumour boundary</a:t>
-            </a:r>
-            <a:endParaRPr lang="en-US" sz="1800" dirty="0"/>
-          </a:p>
-        </p:txBody>
-      </p:sp>
-      <p:sp>
-        <p:nvSpPr>
-          <p:cNvPr id="10" name="Text 8"/>
+              <a:rPr lang="en-US" sz="1600" b="1" dirty="0">
+                <a:solidFill>
+                  <a:srgbClr val="1F4C86"/>
+                </a:solidFill>
+                <a:latin typeface="Calibri" pitchFamily="34" charset="0"/>
+                <a:ea typeface="Calibri" pitchFamily="34" charset="-122"/>
+                <a:cs typeface="Calibri" pitchFamily="34" charset="-120"/>
+              </a:rPr>
+              <a:t>The same wavy-to-straight axis recurs in arterial adventitia, sclera, alveolar wall, and cardiac fibrosis.</a:t>
+            </a:r>
+            <a:endParaRPr lang="en-US" sz="1600" dirty="0"/>
+          </a:p>
+        </p:txBody>
+      </p:sp>
+      <p:sp>
+        <p:nvSpPr>
+          <p:cNvPr id="8" name="Text 6"/>
           <p:cNvSpPr/>
           <p:nvPr/>
         </p:nvSpPr>
@@ -17043,7 +17023,7 @@
                 <a:ea typeface="Trebuchet MS" pitchFamily="34" charset="-122"/>
                 <a:cs typeface="Trebuchet MS" pitchFamily="34" charset="-120"/>
               </a:rPr>
-              <a:t>A dense mat and a sparse clump</a:t>
+              <a:t>Two complementary tools</a:t>
             </a:r>
             <a:endParaRPr lang="en-US" sz="3000" dirty="0"/>
           </a:p>
@@ -17071,14 +17051,73 @@
       </p:sp>
       <p:sp>
         <p:nvSpPr>
-          <p:cNvPr id="4" name="Text 2"/>
-          <p:cNvSpPr/>
-          <p:nvPr/>
-        </p:nvSpPr>
-        <p:spPr>
-          <a:xfrm>
-            <a:off x="640080" y="1481328"/>
-            <a:ext cx="10963656" cy="4553712"/>
+          <p:cNvPr id="4" name="Shape 2"/>
+          <p:cNvSpPr/>
+          <p:nvPr/>
+        </p:nvSpPr>
+        <p:spPr>
+          <a:xfrm>
+            <a:off x="566928" y="1554480"/>
+            <a:ext cx="5298948" cy="530352"/>
+          </a:xfrm>
+          <a:prstGeom prst="rect">
+            <a:avLst/>
+          </a:prstGeom>
+          <a:solidFill>
+            <a:srgbClr val="E8F0FA"/>
+          </a:solidFill>
+          <a:ln/>
+        </p:spPr>
+      </p:sp>
+      <p:sp>
+        <p:nvSpPr>
+          <p:cNvPr id="5" name="Text 3"/>
+          <p:cNvSpPr/>
+          <p:nvPr/>
+        </p:nvSpPr>
+        <p:spPr>
+          <a:xfrm>
+            <a:off x="731520" y="1554480"/>
+            <a:ext cx="4969764" cy="530352"/>
+          </a:xfrm>
+          <a:prstGeom prst="rect">
+            <a:avLst/>
+          </a:prstGeom>
+          <a:noFill/>
+          <a:ln/>
+        </p:spPr>
+        <p:txBody>
+          <a:bodyPr wrap="square" rtlCol="0" anchor="ctr"/>
+          <a:lstStyle/>
+          <a:p>
+            <a:pPr indent="0" marL="0">
+              <a:buNone/>
+            </a:pPr>
+            <a:r>
+              <a:rPr lang="en-US" sz="2000" b="1" dirty="0">
+                <a:solidFill>
+                  <a:srgbClr val="1F4C86"/>
+                </a:solidFill>
+                <a:latin typeface="Trebuchet MS" pitchFamily="34" charset="0"/>
+                <a:ea typeface="Trebuchet MS" pitchFamily="34" charset="-122"/>
+                <a:cs typeface="Trebuchet MS" pitchFamily="34" charset="-120"/>
+              </a:rPr>
+              <a:t>Fiber Analysis — measure a zone</a:t>
+            </a:r>
+            <a:endParaRPr lang="en-US" sz="2000" dirty="0"/>
+          </a:p>
+        </p:txBody>
+      </p:sp>
+      <p:sp>
+        <p:nvSpPr>
+          <p:cNvPr id="6" name="Text 4"/>
+          <p:cNvSpPr/>
+          <p:nvPr/>
+        </p:nvSpPr>
+        <p:spPr>
+          <a:xfrm>
+            <a:off x="658368" y="2240280"/>
+            <a:ext cx="5116068" cy="3566160"/>
           </a:xfrm>
           <a:prstGeom prst="rect">
             <a:avLst/>
@@ -17091,17 +17130,14 @@
           <a:lstStyle/>
           <a:p>
             <a:pPr marL="342900" indent="-342900">
-              <a:lnSpc>
-                <a:spcPct val="105000"/>
-              </a:lnSpc>
               <a:spcAft>
-                <a:spcPts val="1200"/>
+                <a:spcPts val="1100"/>
               </a:spcAft>
               <a:buSzPct val="100000"/>
               <a:buChar char="•"/>
             </a:pPr>
             <a:r>
-              <a:rPr lang="en-US" sz="2000" dirty="0">
+              <a:rPr lang="en-US" sz="1800" dirty="0">
                 <a:solidFill>
                   <a:srgbClr val="1F2933"/>
                 </a:solidFill>
@@ -17109,23 +17145,20 @@
                 <a:ea typeface="Calibri" pitchFamily="34" charset="-122"/>
                 <a:cs typeface="Calibri" pitchFamily="34" charset="-120"/>
               </a:rPr>
-              <a:t>Two fields can share the same mean fibre alignment and be completely different tissue</a:t>
-            </a:r>
-            <a:endParaRPr lang="en-US" sz="2000" dirty="0"/>
+              <a:t>A band of chosen width inside, outside, or across an annotation boundary</a:t>
+            </a:r>
+            <a:endParaRPr lang="en-US" sz="1800" dirty="0"/>
           </a:p>
           <a:p>
             <a:pPr marL="342900" indent="-342900">
-              <a:lnSpc>
-                <a:spcPct val="105000"/>
-              </a:lnSpc>
               <a:spcAft>
-                <a:spcPts val="1200"/>
+                <a:spcPts val="1100"/>
               </a:spcAft>
               <a:buSzPct val="100000"/>
               <a:buChar char="•"/>
             </a:pPr>
             <a:r>
-              <a:rPr lang="en-US" sz="2000" dirty="0">
+              <a:rPr lang="en-US" sz="1800" dirty="0">
                 <a:solidFill>
                   <a:srgbClr val="1F2933"/>
                 </a:solidFill>
@@ -17133,23 +17166,20 @@
                 <a:ea typeface="Calibri" pitchFamily="34" charset="-122"/>
                 <a:cs typeface="Calibri" pitchFamily="34" charset="-120"/>
               </a:rPr>
-              <a:t>Texture measures the spatial heterogeneity that alignment averages away</a:t>
-            </a:r>
-            <a:endParaRPr lang="en-US" sz="2000" dirty="0"/>
+              <a:t>Straightness and persistence: wavy versus straightened fibres</a:t>
+            </a:r>
+            <a:endParaRPr lang="en-US" sz="1800" dirty="0"/>
           </a:p>
           <a:p>
             <a:pPr marL="342900" indent="-342900">
-              <a:lnSpc>
-                <a:spcPct val="105000"/>
-              </a:lnSpc>
               <a:spcAft>
-                <a:spcPts val="1200"/>
+                <a:spcPts val="1100"/>
               </a:spcAft>
               <a:buSzPct val="100000"/>
               <a:buChar char="•"/>
             </a:pPr>
             <a:r>
-              <a:rPr lang="en-US" sz="2000" dirty="0">
+              <a:rPr lang="en-US" sz="1800" dirty="0">
                 <a:solidFill>
                   <a:srgbClr val="1F2933"/>
                 </a:solidFill>
@@ -17157,47 +17187,63 @@
                 <a:ea typeface="Calibri" pitchFamily="34" charset="-122"/>
                 <a:cs typeface="Calibri" pitchFamily="34" charset="-120"/>
               </a:rPr>
-              <a:t>Which is why both tools are worth running, on the same region</a:t>
-            </a:r>
-            <a:endParaRPr lang="en-US" sz="2000" dirty="0"/>
-          </a:p>
-        </p:txBody>
-      </p:sp>
-      <p:sp>
-        <p:nvSpPr>
-          <p:cNvPr id="5" name="Shape 3"/>
-          <p:cNvSpPr/>
-          <p:nvPr/>
-        </p:nvSpPr>
-        <p:spPr>
-          <a:xfrm>
-            <a:off x="566928" y="5650992"/>
-            <a:ext cx="11055096" cy="566928"/>
+              <a:t>Morphometrics: coverage, length, branching, fractal dimension, gaps</a:t>
+            </a:r>
+            <a:endParaRPr lang="en-US" sz="1800" dirty="0"/>
+          </a:p>
+          <a:p>
+            <a:pPr marL="342900" indent="-342900">
+              <a:spcAft>
+                <a:spcPts val="1100"/>
+              </a:spcAft>
+              <a:buSzPct val="100000"/>
+              <a:buChar char="•"/>
+            </a:pPr>
+            <a:r>
+              <a:rPr lang="en-US" sz="1800" dirty="0">
+                <a:solidFill>
+                  <a:srgbClr val="1F2933"/>
+                </a:solidFill>
+                <a:latin typeface="Calibri" pitchFamily="34" charset="0"/>
+                <a:ea typeface="Calibri" pitchFamily="34" charset="-122"/>
+                <a:cs typeface="Calibri" pitchFamily="34" charset="-120"/>
+              </a:rPr>
+              <a:t>Texture: the information fibre-tracing misses entirely</a:t>
+            </a:r>
+            <a:endParaRPr lang="en-US" sz="1800" dirty="0"/>
+          </a:p>
+        </p:txBody>
+      </p:sp>
+      <p:sp>
+        <p:nvSpPr>
+          <p:cNvPr id="7" name="Shape 5"/>
+          <p:cNvSpPr/>
+          <p:nvPr/>
+        </p:nvSpPr>
+        <p:spPr>
+          <a:xfrm>
+            <a:off x="6323076" y="1554480"/>
+            <a:ext cx="5298948" cy="530352"/>
           </a:xfrm>
           <a:prstGeom prst="rect">
             <a:avLst/>
           </a:prstGeom>
           <a:solidFill>
-            <a:srgbClr val="F4F8FD"/>
+            <a:srgbClr val="E8F0FA"/>
           </a:solidFill>
-          <a:ln w="9525">
-            <a:solidFill>
-              <a:srgbClr val="3674C1"/>
-            </a:solidFill>
-            <a:prstDash val="solid"/>
-          </a:ln>
-        </p:spPr>
-      </p:sp>
-      <p:sp>
-        <p:nvSpPr>
-          <p:cNvPr id="6" name="Text 4"/>
-          <p:cNvSpPr/>
-          <p:nvPr/>
-        </p:nvSpPr>
-        <p:spPr>
-          <a:xfrm>
-            <a:off x="768096" y="5650992"/>
-            <a:ext cx="10652760" cy="566928"/>
+          <a:ln/>
+        </p:spPr>
+      </p:sp>
+      <p:sp>
+        <p:nvSpPr>
+          <p:cNvPr id="8" name="Text 6"/>
+          <p:cNvSpPr/>
+          <p:nvPr/>
+        </p:nvSpPr>
+        <p:spPr>
+          <a:xfrm>
+            <a:off x="6487668" y="1554480"/>
+            <a:ext cx="4969764" cy="530352"/>
           </a:xfrm>
           <a:prstGeom prst="rect">
             <a:avLst/>
@@ -17213,23 +17259,129 @@
               <a:buNone/>
             </a:pPr>
             <a:r>
-              <a:rPr lang="en-US" sz="1600" b="1" dirty="0">
-                <a:solidFill>
-                  <a:srgbClr val="1F4C86"/>
-                </a:solidFill>
-                <a:latin typeface="Calibri" pitchFamily="34" charset="0"/>
-                <a:ea typeface="Calibri" pitchFamily="34" charset="-122"/>
-                <a:cs typeface="Calibri" pitchFamily="34" charset="-120"/>
-              </a:rPr>
-              <a:t>Demo only today: one needs a long environment build, the other a dedicated analysis server.</a:t>
-            </a:r>
-            <a:endParaRPr lang="en-US" sz="1600" dirty="0"/>
-          </a:p>
-        </p:txBody>
-      </p:sp>
-      <p:sp>
-        <p:nvSpPr>
-          <p:cNvPr id="7" name="Text 5"/>
+              <a:rPr lang="en-US" sz="2000" b="1" dirty="0">
+                <a:solidFill>
+                  <a:srgbClr val="B26A00"/>
+                </a:solidFill>
+                <a:latin typeface="Trebuchet MS" pitchFamily="34" charset="0"/>
+                <a:ea typeface="Trebuchet MS" pitchFamily="34" charset="-122"/>
+                <a:cs typeface="Trebuchet MS" pitchFamily="34" charset="-120"/>
+              </a:rPr>
+              <a:t>TME-Quant — trace the fibres</a:t>
+            </a:r>
+            <a:endParaRPr lang="en-US" sz="2000" dirty="0"/>
+          </a:p>
+        </p:txBody>
+      </p:sp>
+      <p:sp>
+        <p:nvSpPr>
+          <p:cNvPr id="9" name="Text 7"/>
+          <p:cNvSpPr/>
+          <p:nvPr/>
+        </p:nvSpPr>
+        <p:spPr>
+          <a:xfrm>
+            <a:off x="6414516" y="2240280"/>
+            <a:ext cx="5116068" cy="3566160"/>
+          </a:xfrm>
+          <a:prstGeom prst="rect">
+            <a:avLst/>
+          </a:prstGeom>
+          <a:noFill/>
+          <a:ln/>
+        </p:spPr>
+        <p:txBody>
+          <a:bodyPr wrap="square" rtlCol="0" anchor="t"/>
+          <a:lstStyle/>
+          <a:p>
+            <a:pPr marL="342900" indent="-342900">
+              <a:spcAft>
+                <a:spcPts val="1100"/>
+              </a:spcAft>
+              <a:buSzPct val="100000"/>
+              <a:buChar char="•"/>
+            </a:pPr>
+            <a:r>
+              <a:rPr lang="en-US" sz="1800" dirty="0">
+                <a:solidFill>
+                  <a:srgbClr val="1F2933"/>
+                </a:solidFill>
+                <a:latin typeface="Calibri" pitchFamily="34" charset="0"/>
+                <a:ea typeface="Calibri" pitchFamily="34" charset="-122"/>
+                <a:cs typeface="Calibri" pitchFamily="34" charset="-120"/>
+              </a:rPr>
+              <a:t>Individual fibres extracted and committed back as objects</a:t>
+            </a:r>
+            <a:endParaRPr lang="en-US" sz="1800" dirty="0"/>
+          </a:p>
+          <a:p>
+            <a:pPr marL="342900" indent="-342900">
+              <a:spcAft>
+                <a:spcPts val="1100"/>
+              </a:spcAft>
+              <a:buSzPct val="100000"/>
+              <a:buChar char="•"/>
+            </a:pPr>
+            <a:r>
+              <a:rPr lang="en-US" sz="1800" dirty="0">
+                <a:solidFill>
+                  <a:srgbClr val="1F2933"/>
+                </a:solidFill>
+                <a:latin typeface="Calibri" pitchFamily="34" charset="0"/>
+                <a:ea typeface="Calibri" pitchFamily="34" charset="-122"/>
+                <a:cs typeface="Calibri" pitchFamily="34" charset="-120"/>
+              </a:rPr>
+              <a:t>Set the threshold by eye, with the mask shown before you commit</a:t>
+            </a:r>
+            <a:endParaRPr lang="en-US" sz="1800" dirty="0"/>
+          </a:p>
+          <a:p>
+            <a:pPr marL="342900" indent="-342900">
+              <a:spcAft>
+                <a:spcPts val="1100"/>
+              </a:spcAft>
+              <a:buSzPct val="100000"/>
+              <a:buChar char="•"/>
+            </a:pPr>
+            <a:r>
+              <a:rPr lang="en-US" sz="1800" dirty="0">
+                <a:solidFill>
+                  <a:srgbClr val="1F2933"/>
+                </a:solidFill>
+                <a:latin typeface="Calibri" pitchFamily="34" charset="0"/>
+                <a:ea typeface="Calibri" pitchFamily="34" charset="-122"/>
+                <a:cs typeface="Calibri" pitchFamily="34" charset="-120"/>
+              </a:rPr>
+              <a:t>Trace a few real fibres yourself, and it tunes its own parameters to match</a:t>
+            </a:r>
+            <a:endParaRPr lang="en-US" sz="1800" dirty="0"/>
+          </a:p>
+          <a:p>
+            <a:pPr marL="342900" indent="-342900">
+              <a:spcAft>
+                <a:spcPts val="1100"/>
+              </a:spcAft>
+              <a:buSzPct val="100000"/>
+              <a:buChar char="•"/>
+            </a:pPr>
+            <a:r>
+              <a:rPr lang="en-US" sz="1800" dirty="0">
+                <a:solidFill>
+                  <a:srgbClr val="1F2933"/>
+                </a:solidFill>
+                <a:latin typeface="Calibri" pitchFamily="34" charset="0"/>
+                <a:ea typeface="Calibri" pitchFamily="34" charset="-122"/>
+                <a:cs typeface="Calibri" pitchFamily="34" charset="-120"/>
+              </a:rPr>
+              <a:t>Fibres classified by orientation relative to a tumour boundary</a:t>
+            </a:r>
+            <a:endParaRPr lang="en-US" sz="1800" dirty="0"/>
+          </a:p>
+        </p:txBody>
+      </p:sp>
+      <p:sp>
+        <p:nvSpPr>
+          <p:cNvPr id="10" name="Text 8"/>
           <p:cNvSpPr/>
           <p:nvPr/>
         </p:nvSpPr>
@@ -17331,7 +17483,7 @@
                 <a:ea typeface="Trebuchet MS" pitchFamily="34" charset="-122"/>
                 <a:cs typeface="Trebuchet MS" pitchFamily="34" charset="-120"/>
               </a:rPr>
-              <a:t>Please cite the methods</a:t>
+              <a:t>A dense mat and a sparse clump</a:t>
             </a:r>
             <a:endParaRPr lang="en-US" sz="3000" dirty="0"/>
           </a:p>
@@ -17397,7 +17549,7 @@
                 <a:ea typeface="Calibri" pitchFamily="34" charset="-122"/>
                 <a:cs typeface="Calibri" pitchFamily="34" charset="-120"/>
               </a:rPr>
-              <a:t>Both tools are thin wrappers over other people’s science</a:t>
+              <a:t>Two fields can share the same mean fibre alignment and be completely different tissue</a:t>
             </a:r>
             <a:endParaRPr lang="en-US" sz="2000" dirty="0"/>
           </a:p>
@@ -17421,7 +17573,7 @@
                 <a:ea typeface="Calibri" pitchFamily="34" charset="-122"/>
                 <a:cs typeface="Calibri" pitchFamily="34" charset="-120"/>
               </a:rPr>
-              <a:t>CT-FIRE — Bredfeldt et al. 2014, Journal of Biomedical Optics 19(1):016007</a:t>
+              <a:t>Texture measures the spatial heterogeneity that alignment averages away</a:t>
             </a:r>
             <a:endParaRPr lang="en-US" sz="2000" dirty="0"/>
           </a:p>
@@ -17445,63 +17597,79 @@
                 <a:ea typeface="Calibri" pitchFamily="34" charset="-122"/>
                 <a:cs typeface="Calibri" pitchFamily="34" charset="-120"/>
               </a:rPr>
-              <a:t>CurveAlign — LOCI, University of Wisconsin–Madison</a:t>
+              <a:t>Which is why both tools are worth running, on the same region</a:t>
             </a:r>
             <a:endParaRPr lang="en-US" sz="2000" dirty="0"/>
           </a:p>
-          <a:p>
-            <a:pPr marL="342900" indent="-342900">
-              <a:lnSpc>
-                <a:spcPct val="105000"/>
-              </a:lnSpc>
-              <a:spcAft>
-                <a:spcPts val="1200"/>
-              </a:spcAft>
-              <a:buSzPct val="100000"/>
-              <a:buChar char="•"/>
-            </a:pPr>
-            <a:r>
-              <a:rPr lang="en-US" sz="2000" dirty="0">
-                <a:solidFill>
-                  <a:srgbClr val="1F2933"/>
-                </a:solidFill>
-                <a:latin typeface="Calibri" pitchFamily="34" charset="0"/>
-                <a:ea typeface="Calibri" pitchFamily="34" charset="-122"/>
-                <a:cs typeface="Calibri" pitchFamily="34" charset="-120"/>
-              </a:rPr>
-              <a:t>TACS — Conklin et al. 2011; Provenzano et al. 2008, BMC Medicine 6:11</a:t>
-            </a:r>
-            <a:endParaRPr lang="en-US" sz="2000" dirty="0"/>
-          </a:p>
-          <a:p>
-            <a:pPr marL="342900" indent="-342900">
-              <a:lnSpc>
-                <a:spcPct val="105000"/>
-              </a:lnSpc>
-              <a:spcAft>
-                <a:spcPts val="1200"/>
-              </a:spcAft>
-              <a:buSzPct val="100000"/>
-              <a:buChar char="•"/>
-            </a:pPr>
-            <a:r>
-              <a:rPr lang="en-US" sz="2000" dirty="0">
-                <a:solidFill>
-                  <a:srgbClr val="1F2933"/>
-                </a:solidFill>
-                <a:latin typeface="Calibri" pitchFamily="34" charset="0"/>
-                <a:ea typeface="Calibri" pitchFamily="34" charset="-122"/>
-                <a:cs typeface="Calibri" pitchFamily="34" charset="-120"/>
-              </a:rPr>
-              <a:t>TWOMBLI — Wershof et al. 2021, Life Science Alliance 4(3)</a:t>
-            </a:r>
-            <a:endParaRPr lang="en-US" sz="2000" dirty="0"/>
-          </a:p>
-        </p:txBody>
-      </p:sp>
-      <p:sp>
-        <p:nvSpPr>
-          <p:cNvPr id="5" name="Text 3"/>
+        </p:txBody>
+      </p:sp>
+      <p:sp>
+        <p:nvSpPr>
+          <p:cNvPr id="5" name="Shape 3"/>
+          <p:cNvSpPr/>
+          <p:nvPr/>
+        </p:nvSpPr>
+        <p:spPr>
+          <a:xfrm>
+            <a:off x="566928" y="5650992"/>
+            <a:ext cx="11055096" cy="566928"/>
+          </a:xfrm>
+          <a:prstGeom prst="rect">
+            <a:avLst/>
+          </a:prstGeom>
+          <a:solidFill>
+            <a:srgbClr val="F4F8FD"/>
+          </a:solidFill>
+          <a:ln w="9525">
+            <a:solidFill>
+              <a:srgbClr val="3674C1"/>
+            </a:solidFill>
+            <a:prstDash val="solid"/>
+          </a:ln>
+        </p:spPr>
+      </p:sp>
+      <p:sp>
+        <p:nvSpPr>
+          <p:cNvPr id="6" name="Text 4"/>
+          <p:cNvSpPr/>
+          <p:nvPr/>
+        </p:nvSpPr>
+        <p:spPr>
+          <a:xfrm>
+            <a:off x="768096" y="5650992"/>
+            <a:ext cx="10652760" cy="566928"/>
+          </a:xfrm>
+          <a:prstGeom prst="rect">
+            <a:avLst/>
+          </a:prstGeom>
+          <a:noFill/>
+          <a:ln/>
+        </p:spPr>
+        <p:txBody>
+          <a:bodyPr wrap="square" rtlCol="0" anchor="ctr"/>
+          <a:lstStyle/>
+          <a:p>
+            <a:pPr indent="0" marL="0">
+              <a:buNone/>
+            </a:pPr>
+            <a:r>
+              <a:rPr lang="en-US" sz="1600" b="1" dirty="0">
+                <a:solidFill>
+                  <a:srgbClr val="1F4C86"/>
+                </a:solidFill>
+                <a:latin typeface="Calibri" pitchFamily="34" charset="0"/>
+                <a:ea typeface="Calibri" pitchFamily="34" charset="-122"/>
+                <a:cs typeface="Calibri" pitchFamily="34" charset="-120"/>
+              </a:rPr>
+              <a:t>Demo only today: one needs a long environment build, the other a dedicated analysis server.</a:t>
+            </a:r>
+            <a:endParaRPr lang="en-US" sz="1600" dirty="0"/>
+          </a:p>
+        </p:txBody>
+      </p:sp>
+      <p:sp>
+        <p:nvSpPr>
+          <p:cNvPr id="7" name="Text 5"/>
           <p:cNvSpPr/>
           <p:nvPr/>
         </p:nvSpPr>
@@ -17572,23 +17740,42 @@
       </p:grpSpPr>
       <p:sp>
         <p:nvSpPr>
-          <p:cNvPr id="2" name="Shape 0"/>
-          <p:cNvSpPr/>
-          <p:nvPr/>
-        </p:nvSpPr>
-        <p:spPr>
-          <a:xfrm>
-            <a:off x="0" y="1417320"/>
-            <a:ext cx="12188952" cy="3108960"/>
-          </a:xfrm>
-          <a:prstGeom prst="rect">
-            <a:avLst/>
-          </a:prstGeom>
-          <a:solidFill>
-            <a:srgbClr val="E8F0FA"/>
-          </a:solidFill>
-          <a:ln/>
-        </p:spPr>
+          <p:cNvPr id="2" name="Text 0"/>
+          <p:cNvSpPr/>
+          <p:nvPr/>
+        </p:nvSpPr>
+        <p:spPr>
+          <a:xfrm>
+            <a:off x="566928" y="384048"/>
+            <a:ext cx="11055096" cy="658368"/>
+          </a:xfrm>
+          <a:prstGeom prst="rect">
+            <a:avLst/>
+          </a:prstGeom>
+          <a:noFill/>
+          <a:ln/>
+        </p:spPr>
+        <p:txBody>
+          <a:bodyPr wrap="square" rtlCol="0" anchor="ctr"/>
+          <a:lstStyle/>
+          <a:p>
+            <a:pPr indent="0" marL="0">
+              <a:buNone/>
+            </a:pPr>
+            <a:r>
+              <a:rPr lang="en-US" sz="3000" b="1" dirty="0">
+                <a:solidFill>
+                  <a:srgbClr val="1F4C86"/>
+                </a:solidFill>
+                <a:latin typeface="Trebuchet MS" pitchFamily="34" charset="0"/>
+                <a:ea typeface="Trebuchet MS" pitchFamily="34" charset="-122"/>
+                <a:cs typeface="Trebuchet MS" pitchFamily="34" charset="-120"/>
+              </a:rPr>
+              <a:t>Please cite the methods</a:t>
+            </a:r>
+            <a:endParaRPr lang="en-US" sz="3000" dirty="0"/>
+          </a:p>
+        </p:txBody>
       </p:sp>
       <p:sp>
         <p:nvSpPr>
@@ -17598,8 +17785,8 @@
         </p:nvSpPr>
         <p:spPr>
           <a:xfrm>
-            <a:off x="0" y="1417320"/>
-            <a:ext cx="201168" cy="3108960"/>
+            <a:off x="566928" y="1097280"/>
+            <a:ext cx="1920240" cy="50292"/>
           </a:xfrm>
           <a:prstGeom prst="rect">
             <a:avLst/>
@@ -17618,157 +17805,143 @@
         </p:nvSpPr>
         <p:spPr>
           <a:xfrm>
-            <a:off x="566928" y="1691640"/>
-            <a:ext cx="1828800" cy="914400"/>
-          </a:xfrm>
-          <a:prstGeom prst="rect">
-            <a:avLst/>
-          </a:prstGeom>
-          <a:noFill/>
-          <a:ln/>
-        </p:spPr>
-        <p:txBody>
-          <a:bodyPr wrap="square" rtlCol="0" anchor="ctr"/>
-          <a:lstStyle/>
-          <a:p>
-            <a:pPr indent="0" marL="0">
-              <a:buNone/>
-            </a:pPr>
-            <a:r>
-              <a:rPr lang="en-US" sz="5400" b="1" dirty="0">
-                <a:solidFill>
-                  <a:srgbClr val="3674C1"/>
-                </a:solidFill>
-                <a:latin typeface="Trebuchet MS" pitchFamily="34" charset="0"/>
-                <a:ea typeface="Trebuchet MS" pitchFamily="34" charset="-122"/>
-                <a:cs typeface="Trebuchet MS" pitchFamily="34" charset="-120"/>
-              </a:rPr>
-              <a:t>08</a:t>
-            </a:r>
-            <a:endParaRPr lang="en-US" sz="5400" dirty="0"/>
+            <a:off x="640080" y="1481328"/>
+            <a:ext cx="10963656" cy="4553712"/>
+          </a:xfrm>
+          <a:prstGeom prst="rect">
+            <a:avLst/>
+          </a:prstGeom>
+          <a:noFill/>
+          <a:ln/>
+        </p:spPr>
+        <p:txBody>
+          <a:bodyPr wrap="square" rtlCol="0" anchor="t"/>
+          <a:lstStyle/>
+          <a:p>
+            <a:pPr marL="342900" indent="-342900">
+              <a:lnSpc>
+                <a:spcPct val="105000"/>
+              </a:lnSpc>
+              <a:spcAft>
+                <a:spcPts val="1200"/>
+              </a:spcAft>
+              <a:buSzPct val="100000"/>
+              <a:buChar char="•"/>
+            </a:pPr>
+            <a:r>
+              <a:rPr lang="en-US" sz="2000" dirty="0">
+                <a:solidFill>
+                  <a:srgbClr val="1F2933"/>
+                </a:solidFill>
+                <a:latin typeface="Calibri" pitchFamily="34" charset="0"/>
+                <a:ea typeface="Calibri" pitchFamily="34" charset="-122"/>
+                <a:cs typeface="Calibri" pitchFamily="34" charset="-120"/>
+              </a:rPr>
+              <a:t>Both tools are thin wrappers over other people’s science</a:t>
+            </a:r>
+            <a:endParaRPr lang="en-US" sz="2000" dirty="0"/>
+          </a:p>
+          <a:p>
+            <a:pPr marL="342900" indent="-342900">
+              <a:lnSpc>
+                <a:spcPct val="105000"/>
+              </a:lnSpc>
+              <a:spcAft>
+                <a:spcPts val="1200"/>
+              </a:spcAft>
+              <a:buSzPct val="100000"/>
+              <a:buChar char="•"/>
+            </a:pPr>
+            <a:r>
+              <a:rPr lang="en-US" sz="2000" dirty="0">
+                <a:solidFill>
+                  <a:srgbClr val="1F2933"/>
+                </a:solidFill>
+                <a:latin typeface="Calibri" pitchFamily="34" charset="0"/>
+                <a:ea typeface="Calibri" pitchFamily="34" charset="-122"/>
+                <a:cs typeface="Calibri" pitchFamily="34" charset="-120"/>
+              </a:rPr>
+              <a:t>CT-FIRE — Bredfeldt et al. 2014, Journal of Biomedical Optics 19(1):016007</a:t>
+            </a:r>
+            <a:endParaRPr lang="en-US" sz="2000" dirty="0"/>
+          </a:p>
+          <a:p>
+            <a:pPr marL="342900" indent="-342900">
+              <a:lnSpc>
+                <a:spcPct val="105000"/>
+              </a:lnSpc>
+              <a:spcAft>
+                <a:spcPts val="1200"/>
+              </a:spcAft>
+              <a:buSzPct val="100000"/>
+              <a:buChar char="•"/>
+            </a:pPr>
+            <a:r>
+              <a:rPr lang="en-US" sz="2000" dirty="0">
+                <a:solidFill>
+                  <a:srgbClr val="1F2933"/>
+                </a:solidFill>
+                <a:latin typeface="Calibri" pitchFamily="34" charset="0"/>
+                <a:ea typeface="Calibri" pitchFamily="34" charset="-122"/>
+                <a:cs typeface="Calibri" pitchFamily="34" charset="-120"/>
+              </a:rPr>
+              <a:t>CurveAlign — LOCI, University of Wisconsin–Madison</a:t>
+            </a:r>
+            <a:endParaRPr lang="en-US" sz="2000" dirty="0"/>
+          </a:p>
+          <a:p>
+            <a:pPr marL="342900" indent="-342900">
+              <a:lnSpc>
+                <a:spcPct val="105000"/>
+              </a:lnSpc>
+              <a:spcAft>
+                <a:spcPts val="1200"/>
+              </a:spcAft>
+              <a:buSzPct val="100000"/>
+              <a:buChar char="•"/>
+            </a:pPr>
+            <a:r>
+              <a:rPr lang="en-US" sz="2000" dirty="0">
+                <a:solidFill>
+                  <a:srgbClr val="1F2933"/>
+                </a:solidFill>
+                <a:latin typeface="Calibri" pitchFamily="34" charset="0"/>
+                <a:ea typeface="Calibri" pitchFamily="34" charset="-122"/>
+                <a:cs typeface="Calibri" pitchFamily="34" charset="-120"/>
+              </a:rPr>
+              <a:t>TACS — Conklin et al. 2011; Provenzano et al. 2008, BMC Medicine 6:11</a:t>
+            </a:r>
+            <a:endParaRPr lang="en-US" sz="2000" dirty="0"/>
+          </a:p>
+          <a:p>
+            <a:pPr marL="342900" indent="-342900">
+              <a:lnSpc>
+                <a:spcPct val="105000"/>
+              </a:lnSpc>
+              <a:spcAft>
+                <a:spcPts val="1200"/>
+              </a:spcAft>
+              <a:buSzPct val="100000"/>
+              <a:buChar char="•"/>
+            </a:pPr>
+            <a:r>
+              <a:rPr lang="en-US" sz="2000" dirty="0">
+                <a:solidFill>
+                  <a:srgbClr val="1F2933"/>
+                </a:solidFill>
+                <a:latin typeface="Calibri" pitchFamily="34" charset="0"/>
+                <a:ea typeface="Calibri" pitchFamily="34" charset="-122"/>
+                <a:cs typeface="Calibri" pitchFamily="34" charset="-120"/>
+              </a:rPr>
+              <a:t>TWOMBLI — Wershof et al. 2021, Life Science Alliance 4(3)</a:t>
+            </a:r>
+            <a:endParaRPr lang="en-US" sz="2000" dirty="0"/>
           </a:p>
         </p:txBody>
       </p:sp>
       <p:sp>
         <p:nvSpPr>
           <p:cNvPr id="5" name="Text 3"/>
-          <p:cNvSpPr/>
-          <p:nvPr/>
-        </p:nvSpPr>
-        <p:spPr>
-          <a:xfrm>
-            <a:off x="566928" y="2606040"/>
-            <a:ext cx="11055096" cy="868680"/>
-          </a:xfrm>
-          <a:prstGeom prst="rect">
-            <a:avLst/>
-          </a:prstGeom>
-          <a:noFill/>
-          <a:ln/>
-        </p:spPr>
-        <p:txBody>
-          <a:bodyPr wrap="square" rtlCol="0" anchor="ctr"/>
-          <a:lstStyle/>
-          <a:p>
-            <a:pPr indent="0" marL="0">
-              <a:buNone/>
-            </a:pPr>
-            <a:r>
-              <a:rPr lang="en-US" sz="4000" b="1" dirty="0">
-                <a:solidFill>
-                  <a:srgbClr val="1F4C86"/>
-                </a:solidFill>
-                <a:latin typeface="Trebuchet MS" pitchFamily="34" charset="0"/>
-                <a:ea typeface="Trebuchet MS" pitchFamily="34" charset="-122"/>
-                <a:cs typeface="Trebuchet MS" pitchFamily="34" charset="-120"/>
-              </a:rPr>
-              <a:t>Microscope control</a:t>
-            </a:r>
-            <a:endParaRPr lang="en-US" sz="4000" dirty="0"/>
-          </a:p>
-        </p:txBody>
-      </p:sp>
-      <p:sp>
-        <p:nvSpPr>
-          <p:cNvPr id="6" name="Text 4"/>
-          <p:cNvSpPr/>
-          <p:nvPr/>
-        </p:nvSpPr>
-        <p:spPr>
-          <a:xfrm>
-            <a:off x="566928" y="3456432"/>
-            <a:ext cx="10140696" cy="731520"/>
-          </a:xfrm>
-          <a:prstGeom prst="rect">
-            <a:avLst/>
-          </a:prstGeom>
-          <a:noFill/>
-          <a:ln/>
-        </p:spPr>
-        <p:txBody>
-          <a:bodyPr wrap="square" rtlCol="0" anchor="t"/>
-          <a:lstStyle/>
-          <a:p>
-            <a:pPr indent="0" marL="0">
-              <a:buNone/>
-            </a:pPr>
-            <a:r>
-              <a:rPr lang="en-US" sz="1900" dirty="0">
-                <a:solidFill>
-                  <a:srgbClr val="5A6675"/>
-                </a:solidFill>
-                <a:latin typeface="Calibri" pitchFamily="34" charset="0"/>
-                <a:ea typeface="Calibri" pitchFamily="34" charset="-122"/>
-                <a:cs typeface="Calibri" pitchFamily="34" charset="-120"/>
-              </a:rPr>
-              <a:t>The most complex thing here, and the reason for the rest</a:t>
-            </a:r>
-            <a:endParaRPr lang="en-US" sz="1900" dirty="0"/>
-          </a:p>
-        </p:txBody>
-      </p:sp>
-      <p:sp>
-        <p:nvSpPr>
-          <p:cNvPr id="7" name="Text 5"/>
-          <p:cNvSpPr/>
-          <p:nvPr/>
-        </p:nvSpPr>
-        <p:spPr>
-          <a:xfrm>
-            <a:off x="566928" y="6199632"/>
-            <a:ext cx="8229600" cy="365760"/>
-          </a:xfrm>
-          <a:prstGeom prst="rect">
-            <a:avLst/>
-          </a:prstGeom>
-          <a:noFill/>
-          <a:ln/>
-        </p:spPr>
-        <p:txBody>
-          <a:bodyPr wrap="square" rtlCol="0" anchor="ctr"/>
-          <a:lstStyle/>
-          <a:p>
-            <a:pPr indent="0" marL="0">
-              <a:buNone/>
-            </a:pPr>
-            <a:r>
-              <a:rPr lang="en-US" sz="1400" dirty="0">
-                <a:solidFill>
-                  <a:srgbClr val="A8B2BF"/>
-                </a:solidFill>
-                <a:latin typeface="Calibri" pitchFamily="34" charset="0"/>
-                <a:ea typeface="Calibri" pitchFamily="34" charset="-122"/>
-                <a:cs typeface="Calibri" pitchFamily="34" charset="-120"/>
-              </a:rPr>
-              <a:t>michaelsnelson.github.io/BINA-I2K-2026-QuPath-Extensions</a:t>
-            </a:r>
-            <a:endParaRPr lang="en-US" sz="1400" dirty="0"/>
-          </a:p>
-        </p:txBody>
-      </p:sp>
-      <p:sp>
-        <p:nvSpPr>
-          <p:cNvPr id="8" name="Text 6"/>
           <p:cNvSpPr/>
           <p:nvPr/>
         </p:nvSpPr>
@@ -17839,14 +18012,54 @@
       </p:grpSpPr>
       <p:sp>
         <p:nvSpPr>
-          <p:cNvPr id="2" name="Text 0"/>
-          <p:cNvSpPr/>
-          <p:nvPr/>
-        </p:nvSpPr>
-        <p:spPr>
-          <a:xfrm>
-            <a:off x="566928" y="384048"/>
-            <a:ext cx="11055096" cy="658368"/>
+          <p:cNvPr id="2" name="Shape 0"/>
+          <p:cNvSpPr/>
+          <p:nvPr/>
+        </p:nvSpPr>
+        <p:spPr>
+          <a:xfrm>
+            <a:off x="0" y="1417320"/>
+            <a:ext cx="12188952" cy="3108960"/>
+          </a:xfrm>
+          <a:prstGeom prst="rect">
+            <a:avLst/>
+          </a:prstGeom>
+          <a:solidFill>
+            <a:srgbClr val="E8F0FA"/>
+          </a:solidFill>
+          <a:ln/>
+        </p:spPr>
+      </p:sp>
+      <p:sp>
+        <p:nvSpPr>
+          <p:cNvPr id="3" name="Shape 1"/>
+          <p:cNvSpPr/>
+          <p:nvPr/>
+        </p:nvSpPr>
+        <p:spPr>
+          <a:xfrm>
+            <a:off x="0" y="1417320"/>
+            <a:ext cx="201168" cy="3108960"/>
+          </a:xfrm>
+          <a:prstGeom prst="rect">
+            <a:avLst/>
+          </a:prstGeom>
+          <a:solidFill>
+            <a:srgbClr val="3674C1"/>
+          </a:solidFill>
+          <a:ln/>
+        </p:spPr>
+      </p:sp>
+      <p:sp>
+        <p:nvSpPr>
+          <p:cNvPr id="4" name="Text 2"/>
+          <p:cNvSpPr/>
+          <p:nvPr/>
+        </p:nvSpPr>
+        <p:spPr>
+          <a:xfrm>
+            <a:off x="566928" y="1691640"/>
+            <a:ext cx="1828800" cy="914400"/>
           </a:xfrm>
           <a:prstGeom prst="rect">
             <a:avLst/>
@@ -17862,50 +18075,69 @@
               <a:buNone/>
             </a:pPr>
             <a:r>
-              <a:rPr lang="en-US" sz="3000" b="1" dirty="0">
-                <a:solidFill>
-                  <a:srgbClr val="1F4C86"/>
+              <a:rPr lang="en-US" sz="5400" b="1" dirty="0">
+                <a:solidFill>
+                  <a:srgbClr val="3674C1"/>
                 </a:solidFill>
                 <a:latin typeface="Trebuchet MS" pitchFamily="34" charset="0"/>
                 <a:ea typeface="Trebuchet MS" pitchFamily="34" charset="-122"/>
                 <a:cs typeface="Trebuchet MS" pitchFamily="34" charset="-120"/>
               </a:rPr>
-              <a:t>QPSC — QuPath Scope Control</a:t>
-            </a:r>
-            <a:endParaRPr lang="en-US" sz="3000" dirty="0"/>
-          </a:p>
-        </p:txBody>
-      </p:sp>
-      <p:sp>
-        <p:nvSpPr>
-          <p:cNvPr id="3" name="Shape 1"/>
-          <p:cNvSpPr/>
-          <p:nvPr/>
-        </p:nvSpPr>
-        <p:spPr>
-          <a:xfrm>
-            <a:off x="566928" y="1097280"/>
-            <a:ext cx="1920240" cy="50292"/>
-          </a:xfrm>
-          <a:prstGeom prst="rect">
-            <a:avLst/>
-          </a:prstGeom>
-          <a:solidFill>
-            <a:srgbClr val="3674C1"/>
-          </a:solidFill>
-          <a:ln/>
-        </p:spPr>
-      </p:sp>
-      <p:sp>
-        <p:nvSpPr>
-          <p:cNvPr id="4" name="Text 2"/>
-          <p:cNvSpPr/>
-          <p:nvPr/>
-        </p:nvSpPr>
-        <p:spPr>
-          <a:xfrm>
-            <a:off x="640080" y="1481328"/>
-            <a:ext cx="10963656" cy="4553712"/>
+              <a:t>08</a:t>
+            </a:r>
+            <a:endParaRPr lang="en-US" sz="5400" dirty="0"/>
+          </a:p>
+        </p:txBody>
+      </p:sp>
+      <p:sp>
+        <p:nvSpPr>
+          <p:cNvPr id="5" name="Text 3"/>
+          <p:cNvSpPr/>
+          <p:nvPr/>
+        </p:nvSpPr>
+        <p:spPr>
+          <a:xfrm>
+            <a:off x="566928" y="2606040"/>
+            <a:ext cx="11055096" cy="868680"/>
+          </a:xfrm>
+          <a:prstGeom prst="rect">
+            <a:avLst/>
+          </a:prstGeom>
+          <a:noFill/>
+          <a:ln/>
+        </p:spPr>
+        <p:txBody>
+          <a:bodyPr wrap="square" rtlCol="0" anchor="ctr"/>
+          <a:lstStyle/>
+          <a:p>
+            <a:pPr indent="0" marL="0">
+              <a:buNone/>
+            </a:pPr>
+            <a:r>
+              <a:rPr lang="en-US" sz="4000" b="1" dirty="0">
+                <a:solidFill>
+                  <a:srgbClr val="1F4C86"/>
+                </a:solidFill>
+                <a:latin typeface="Trebuchet MS" pitchFamily="34" charset="0"/>
+                <a:ea typeface="Trebuchet MS" pitchFamily="34" charset="-122"/>
+                <a:cs typeface="Trebuchet MS" pitchFamily="34" charset="-120"/>
+              </a:rPr>
+              <a:t>Microscope control</a:t>
+            </a:r>
+            <a:endParaRPr lang="en-US" sz="4000" dirty="0"/>
+          </a:p>
+        </p:txBody>
+      </p:sp>
+      <p:sp>
+        <p:nvSpPr>
+          <p:cNvPr id="6" name="Text 4"/>
+          <p:cNvSpPr/>
+          <p:nvPr/>
+        </p:nvSpPr>
+        <p:spPr>
+          <a:xfrm>
+            <a:off x="566928" y="3456432"/>
+            <a:ext cx="10140696" cy="731520"/>
           </a:xfrm>
           <a:prstGeom prst="rect">
             <a:avLst/>
@@ -17917,106 +18149,66 @@
           <a:bodyPr wrap="square" rtlCol="0" anchor="t"/>
           <a:lstStyle/>
           <a:p>
-            <a:pPr marL="342900" indent="-342900">
-              <a:lnSpc>
-                <a:spcPct val="105000"/>
-              </a:lnSpc>
-              <a:spcAft>
-                <a:spcPts val="1200"/>
-              </a:spcAft>
-              <a:buSzPct val="100000"/>
-              <a:buChar char="•"/>
-            </a:pPr>
-            <a:r>
-              <a:rPr lang="en-US" sz="2000" dirty="0">
-                <a:solidFill>
-                  <a:srgbClr val="1F2933"/>
-                </a:solidFill>
-                <a:latin typeface="Calibri" pitchFamily="34" charset="0"/>
-                <a:ea typeface="Calibri" pitchFamily="34" charset="-122"/>
-                <a:cs typeface="Calibri" pitchFamily="34" charset="-120"/>
-              </a:rPr>
-              <a:t>Draw a box around a region in QuPath. The stage moves, the tiles are captured and stitched, and the image appears back in your project</a:t>
-            </a:r>
-            <a:endParaRPr lang="en-US" sz="2000" dirty="0"/>
-          </a:p>
-          <a:p>
-            <a:pPr marL="342900" indent="-342900">
-              <a:lnSpc>
-                <a:spcPct val="105000"/>
-              </a:lnSpc>
-              <a:spcAft>
-                <a:spcPts val="1200"/>
-              </a:spcAft>
-              <a:buSzPct val="100000"/>
-              <a:buChar char="•"/>
-            </a:pPr>
-            <a:r>
-              <a:rPr lang="en-US" sz="2000" dirty="0">
-                <a:solidFill>
-                  <a:srgbClr val="1F2933"/>
-                </a:solidFill>
-                <a:latin typeface="Calibri" pitchFamily="34" charset="0"/>
-                <a:ea typeface="Calibri" pitchFamily="34" charset="-122"/>
-                <a:cs typeface="Calibri" pitchFamily="34" charset="-120"/>
-              </a:rPr>
-              <a:t>Target specific annotations on a slide you already scanned</a:t>
-            </a:r>
-            <a:endParaRPr lang="en-US" sz="2000" dirty="0"/>
-          </a:p>
-          <a:p>
-            <a:pPr marL="342900" indent="-342900">
-              <a:lnSpc>
-                <a:spcPct val="105000"/>
-              </a:lnSpc>
-              <a:spcAft>
-                <a:spcPts val="1200"/>
-              </a:spcAft>
-              <a:buSzPct val="100000"/>
-              <a:buChar char="•"/>
-            </a:pPr>
-            <a:r>
-              <a:rPr lang="en-US" sz="2000" dirty="0">
-                <a:solidFill>
-                  <a:srgbClr val="1F2933"/>
-                </a:solidFill>
-                <a:latin typeface="Calibri" pitchFamily="34" charset="0"/>
-                <a:ea typeface="Calibri" pitchFamily="34" charset="-122"/>
-                <a:cs typeface="Calibri" pitchFamily="34" charset="-120"/>
-              </a:rPr>
-              <a:t>Live camera view, stage map, saved positions, and a virtual joystick</a:t>
-            </a:r>
-            <a:endParaRPr lang="en-US" sz="2000" dirty="0"/>
-          </a:p>
-          <a:p>
-            <a:pPr marL="342900" indent="-342900">
-              <a:lnSpc>
-                <a:spcPct val="105000"/>
-              </a:lnSpc>
-              <a:spcAft>
-                <a:spcPts val="1200"/>
-              </a:spcAft>
-              <a:buSzPct val="100000"/>
-              <a:buChar char="•"/>
-            </a:pPr>
-            <a:r>
-              <a:rPr lang="en-US" sz="2000" dirty="0">
-                <a:solidFill>
-                  <a:srgbClr val="1F2933"/>
-                </a:solidFill>
-                <a:latin typeface="Calibri" pitchFamily="34" charset="0"/>
-                <a:ea typeface="Calibri" pitchFamily="34" charset="-122"/>
-                <a:cs typeface="Calibri" pitchFamily="34" charset="-120"/>
-              </a:rPr>
-              <a:t>Brightfield, multi-channel fluorescence, and combined passes on a single-camera scope</a:t>
-            </a:r>
-            <a:endParaRPr lang="en-US" sz="2000" dirty="0"/>
-          </a:p>
-        </p:txBody>
-      </p:sp>
-      <p:sp>
-        <p:nvSpPr>
-          <p:cNvPr id="5" name="Text 3"/>
+            <a:pPr indent="0" marL="0">
+              <a:buNone/>
+            </a:pPr>
+            <a:r>
+              <a:rPr lang="en-US" sz="1900" dirty="0">
+                <a:solidFill>
+                  <a:srgbClr val="5A6675"/>
+                </a:solidFill>
+                <a:latin typeface="Calibri" pitchFamily="34" charset="0"/>
+                <a:ea typeface="Calibri" pitchFamily="34" charset="-122"/>
+                <a:cs typeface="Calibri" pitchFamily="34" charset="-120"/>
+              </a:rPr>
+              <a:t>The most complex thing here, and the reason for the rest</a:t>
+            </a:r>
+            <a:endParaRPr lang="en-US" sz="1900" dirty="0"/>
+          </a:p>
+        </p:txBody>
+      </p:sp>
+      <p:sp>
+        <p:nvSpPr>
+          <p:cNvPr id="7" name="Text 5"/>
+          <p:cNvSpPr/>
+          <p:nvPr/>
+        </p:nvSpPr>
+        <p:spPr>
+          <a:xfrm>
+            <a:off x="566928" y="6199632"/>
+            <a:ext cx="8229600" cy="365760"/>
+          </a:xfrm>
+          <a:prstGeom prst="rect">
+            <a:avLst/>
+          </a:prstGeom>
+          <a:noFill/>
+          <a:ln/>
+        </p:spPr>
+        <p:txBody>
+          <a:bodyPr wrap="square" rtlCol="0" anchor="ctr"/>
+          <a:lstStyle/>
+          <a:p>
+            <a:pPr indent="0" marL="0">
+              <a:buNone/>
+            </a:pPr>
+            <a:r>
+              <a:rPr lang="en-US" sz="1400" dirty="0">
+                <a:solidFill>
+                  <a:srgbClr val="A8B2BF"/>
+                </a:solidFill>
+                <a:latin typeface="Calibri" pitchFamily="34" charset="0"/>
+                <a:ea typeface="Calibri" pitchFamily="34" charset="-122"/>
+                <a:cs typeface="Calibri" pitchFamily="34" charset="-120"/>
+              </a:rPr>
+              <a:t>michaelsnelson.github.io/BINA-I2K-2026-QuPath-Extensions</a:t>
+            </a:r>
+            <a:endParaRPr lang="en-US" sz="1400" dirty="0"/>
+          </a:p>
+        </p:txBody>
+      </p:sp>
+      <p:sp>
+        <p:nvSpPr>
+          <p:cNvPr id="8" name="Text 6"/>
           <p:cNvSpPr/>
           <p:nvPr/>
         </p:nvSpPr>
@@ -18118,7 +18310,7 @@
                 <a:ea typeface="Trebuchet MS" pitchFamily="34" charset="-122"/>
                 <a:cs typeface="Trebuchet MS" pitchFamily="34" charset="-120"/>
               </a:rPr>
-              <a:t>Why this changes the rest</a:t>
+              <a:t>QPSC — QuPath Scope Control</a:t>
             </a:r>
             <a:endParaRPr lang="en-US" sz="3000" dirty="0"/>
           </a:p>
@@ -18184,7 +18376,7 @@
                 <a:ea typeface="Calibri" pitchFamily="34" charset="-122"/>
                 <a:cs typeface="Calibri" pitchFamily="34" charset="-120"/>
               </a:rPr>
-              <a:t>The region you analysed is the region you acquire at high resolution</a:t>
+              <a:t>Draw a box around a region in QuPath. The stage moves, the tiles are captured and stitched, and the image appears back in your project</a:t>
             </a:r>
             <a:endParaRPr lang="en-US" sz="2000" dirty="0"/>
           </a:p>
@@ -18208,7 +18400,7 @@
                 <a:ea typeface="Calibri" pitchFamily="34" charset="-122"/>
                 <a:cs typeface="Calibri" pitchFamily="34" charset="-120"/>
               </a:rPr>
-              <a:t>Acquisition metadata arrives in the project, not in a folder that gets separated from the images</a:t>
+              <a:t>Target specific annotations on a slide you already scanned</a:t>
             </a:r>
             <a:endParaRPr lang="en-US" sz="2000" dirty="0"/>
           </a:p>
@@ -18232,79 +18424,39 @@
                 <a:ea typeface="Calibri" pitchFamily="34" charset="-122"/>
                 <a:cs typeface="Calibri" pitchFamily="34" charset="-120"/>
               </a:rPr>
-              <a:t>Stitching is a step in this pipeline — and it works perfectly well on its own, which is why it is in your hands-on hour</a:t>
+              <a:t>Live camera view, stage map, saved positions, and a virtual joystick</a:t>
             </a:r>
             <a:endParaRPr lang="en-US" sz="2000" dirty="0"/>
           </a:p>
-        </p:txBody>
-      </p:sp>
-      <p:sp>
-        <p:nvSpPr>
-          <p:cNvPr id="5" name="Shape 3"/>
-          <p:cNvSpPr/>
-          <p:nvPr/>
-        </p:nvSpPr>
-        <p:spPr>
-          <a:xfrm>
-            <a:off x="566928" y="5650992"/>
-            <a:ext cx="11055096" cy="566928"/>
-          </a:xfrm>
-          <a:prstGeom prst="rect">
-            <a:avLst/>
-          </a:prstGeom>
-          <a:solidFill>
-            <a:srgbClr val="F4F8FD"/>
-          </a:solidFill>
-          <a:ln w="9525">
-            <a:solidFill>
-              <a:srgbClr val="3674C1"/>
-            </a:solidFill>
-            <a:prstDash val="solid"/>
-          </a:ln>
-        </p:spPr>
-      </p:sp>
-      <p:sp>
-        <p:nvSpPr>
-          <p:cNvPr id="6" name="Text 4"/>
-          <p:cNvSpPr/>
-          <p:nvPr/>
-        </p:nvSpPr>
-        <p:spPr>
-          <a:xfrm>
-            <a:off x="768096" y="5650992"/>
-            <a:ext cx="10652760" cy="566928"/>
-          </a:xfrm>
-          <a:prstGeom prst="rect">
-            <a:avLst/>
-          </a:prstGeom>
-          <a:noFill/>
-          <a:ln/>
-        </p:spPr>
-        <p:txBody>
-          <a:bodyPr wrap="square" rtlCol="0" anchor="ctr"/>
-          <a:lstStyle/>
-          <a:p>
-            <a:pPr indent="0" marL="0">
-              <a:buNone/>
-            </a:pPr>
-            <a:r>
-              <a:rPr lang="en-US" sz="1600" b="1" dirty="0">
-                <a:solidFill>
-                  <a:srgbClr val="1F4C86"/>
-                </a:solidFill>
-                <a:latin typeface="Calibri" pitchFamily="34" charset="0"/>
-                <a:ea typeface="Calibri" pitchFamily="34" charset="-122"/>
-                <a:cs typeface="Calibri" pitchFamily="34" charset="-120"/>
-              </a:rPr>
-              <a:t>Once acquisition is driven from QuPath, "acquisition software" and "analysis software" stop being separate places your data lives.</a:t>
-            </a:r>
-            <a:endParaRPr lang="en-US" sz="1600" dirty="0"/>
-          </a:p>
-        </p:txBody>
-      </p:sp>
-      <p:sp>
-        <p:nvSpPr>
-          <p:cNvPr id="7" name="Text 5"/>
+          <a:p>
+            <a:pPr marL="342900" indent="-342900">
+              <a:lnSpc>
+                <a:spcPct val="105000"/>
+              </a:lnSpc>
+              <a:spcAft>
+                <a:spcPts val="1200"/>
+              </a:spcAft>
+              <a:buSzPct val="100000"/>
+              <a:buChar char="•"/>
+            </a:pPr>
+            <a:r>
+              <a:rPr lang="en-US" sz="2000" dirty="0">
+                <a:solidFill>
+                  <a:srgbClr val="1F2933"/>
+                </a:solidFill>
+                <a:latin typeface="Calibri" pitchFamily="34" charset="0"/>
+                <a:ea typeface="Calibri" pitchFamily="34" charset="-122"/>
+                <a:cs typeface="Calibri" pitchFamily="34" charset="-120"/>
+              </a:rPr>
+              <a:t>Brightfield, multi-channel fluorescence, and combined passes on a single-camera scope</a:t>
+            </a:r>
+            <a:endParaRPr lang="en-US" sz="2000" dirty="0"/>
+          </a:p>
+        </p:txBody>
+      </p:sp>
+      <p:sp>
+        <p:nvSpPr>
+          <p:cNvPr id="5" name="Text 3"/>
           <p:cNvSpPr/>
           <p:nvPr/>
         </p:nvSpPr>
@@ -18406,7 +18558,7 @@
                 <a:ea typeface="Trebuchet MS" pitchFamily="34" charset="-122"/>
                 <a:cs typeface="Trebuchet MS" pitchFamily="34" charset="-120"/>
               </a:rPr>
-              <a:t>How it is put together</a:t>
+              <a:t>Why this changes the rest</a:t>
             </a:r>
             <a:endParaRPr lang="en-US" sz="3000" dirty="0"/>
           </a:p>
@@ -18440,47 +18592,8 @@
         </p:nvSpPr>
         <p:spPr>
           <a:xfrm>
-            <a:off x="566928" y="1243584"/>
-            <a:ext cx="11055096" cy="384048"/>
-          </a:xfrm>
-          <a:prstGeom prst="rect">
-            <a:avLst/>
-          </a:prstGeom>
-          <a:noFill/>
-          <a:ln/>
-        </p:spPr>
-        <p:txBody>
-          <a:bodyPr wrap="square" rtlCol="0" anchor="ctr"/>
-          <a:lstStyle/>
-          <a:p>
-            <a:pPr indent="0" marL="0">
-              <a:buNone/>
-            </a:pPr>
-            <a:r>
-              <a:rPr lang="en-US" sz="1700" i="1" dirty="0">
-                <a:solidFill>
-                  <a:srgbClr val="5A6675"/>
-                </a:solidFill>
-                <a:latin typeface="Calibri" pitchFamily="34" charset="0"/>
-                <a:ea typeface="Calibri" pitchFamily="34" charset="-122"/>
-                <a:cs typeface="Calibri" pitchFamily="34" charset="-120"/>
-              </a:rPr>
-              <a:t>The easy part is the QuPath extension. Budget your time for the microscope side.</a:t>
-            </a:r>
-            <a:endParaRPr lang="en-US" sz="1700" dirty="0"/>
-          </a:p>
-        </p:txBody>
-      </p:sp>
-      <p:sp>
-        <p:nvSpPr>
-          <p:cNvPr id="5" name="Text 3"/>
-          <p:cNvSpPr/>
-          <p:nvPr/>
-        </p:nvSpPr>
-        <p:spPr>
-          <a:xfrm>
-            <a:off x="640080" y="1755648"/>
-            <a:ext cx="10963656" cy="4279392"/>
+            <a:off x="640080" y="1481328"/>
+            <a:ext cx="10963656" cy="4553712"/>
           </a:xfrm>
           <a:prstGeom prst="rect">
             <a:avLst/>
@@ -18511,7 +18624,7 @@
                 <a:ea typeface="Calibri" pitchFamily="34" charset="-122"/>
                 <a:cs typeface="Calibri" pitchFamily="34" charset="-120"/>
               </a:rPr>
-              <a:t>QuPath talks to a small command server, which drives Micro-Manager, which drives the hardware</a:t>
+              <a:t>The region you analysed is the region you acquire at high resolution</a:t>
             </a:r>
             <a:endParaRPr lang="en-US" sz="2000" dirty="0"/>
           </a:p>
@@ -18535,7 +18648,7 @@
                 <a:ea typeface="Calibri" pitchFamily="34" charset="-122"/>
                 <a:cs typeface="Calibri" pitchFamily="34" charset="-120"/>
               </a:rPr>
-              <a:t>Each instrument is described by its own configuration — the QuPath side does not know what kind of microscope it is</a:t>
+              <a:t>Acquisition metadata arrives in the project, not in a folder that gets separated from the images</a:t>
             </a:r>
             <a:endParaRPr lang="en-US" sz="2000" dirty="0"/>
           </a:p>
@@ -18559,7 +18672,7 @@
                 <a:ea typeface="Calibri" pitchFamily="34" charset="-122"/>
                 <a:cs typeface="Calibri" pitchFamily="34" charset="-120"/>
               </a:rPr>
-              <a:t>Micro-Manager remains the device layer. We did not reinvent it</a:t>
+              <a:t>Stitching is a step in this pipeline — and it works perfectly well on its own, which is why it is in your hands-on hour</a:t>
             </a:r>
             <a:endParaRPr lang="en-US" sz="2000" dirty="0"/>
           </a:p>
@@ -18567,7 +18680,71 @@
       </p:sp>
       <p:sp>
         <p:nvSpPr>
+          <p:cNvPr id="5" name="Shape 3"/>
+          <p:cNvSpPr/>
+          <p:nvPr/>
+        </p:nvSpPr>
+        <p:spPr>
+          <a:xfrm>
+            <a:off x="566928" y="5650992"/>
+            <a:ext cx="11055096" cy="566928"/>
+          </a:xfrm>
+          <a:prstGeom prst="rect">
+            <a:avLst/>
+          </a:prstGeom>
+          <a:solidFill>
+            <a:srgbClr val="F4F8FD"/>
+          </a:solidFill>
+          <a:ln w="9525">
+            <a:solidFill>
+              <a:srgbClr val="3674C1"/>
+            </a:solidFill>
+            <a:prstDash val="solid"/>
+          </a:ln>
+        </p:spPr>
+      </p:sp>
+      <p:sp>
+        <p:nvSpPr>
           <p:cNvPr id="6" name="Text 4"/>
+          <p:cNvSpPr/>
+          <p:nvPr/>
+        </p:nvSpPr>
+        <p:spPr>
+          <a:xfrm>
+            <a:off x="768096" y="5650992"/>
+            <a:ext cx="10652760" cy="566928"/>
+          </a:xfrm>
+          <a:prstGeom prst="rect">
+            <a:avLst/>
+          </a:prstGeom>
+          <a:noFill/>
+          <a:ln/>
+        </p:spPr>
+        <p:txBody>
+          <a:bodyPr wrap="square" rtlCol="0" anchor="ctr"/>
+          <a:lstStyle/>
+          <a:p>
+            <a:pPr indent="0" marL="0">
+              <a:buNone/>
+            </a:pPr>
+            <a:r>
+              <a:rPr lang="en-US" sz="1600" b="1" dirty="0">
+                <a:solidFill>
+                  <a:srgbClr val="1F4C86"/>
+                </a:solidFill>
+                <a:latin typeface="Calibri" pitchFamily="34" charset="0"/>
+                <a:ea typeface="Calibri" pitchFamily="34" charset="-122"/>
+                <a:cs typeface="Calibri" pitchFamily="34" charset="-120"/>
+              </a:rPr>
+              <a:t>Once acquisition is driven from QuPath, "acquisition software" and "analysis software" stop being separate places your data lives.</a:t>
+            </a:r>
+            <a:endParaRPr lang="en-US" sz="1600" dirty="0"/>
+          </a:p>
+        </p:txBody>
+      </p:sp>
+      <p:sp>
+        <p:nvSpPr>
+          <p:cNvPr id="7" name="Text 5"/>
           <p:cNvSpPr/>
           <p:nvPr/>
         </p:nvSpPr>
@@ -18638,41 +18815,14 @@
       </p:grpSpPr>
       <p:sp>
         <p:nvSpPr>
-          <p:cNvPr id="2" name="Shape 0"/>
-          <p:cNvSpPr/>
-          <p:nvPr/>
-        </p:nvSpPr>
-        <p:spPr>
-          <a:xfrm>
-            <a:off x="566928" y="411480"/>
-            <a:ext cx="2331720" cy="457200"/>
-          </a:xfrm>
-          <a:prstGeom prst="roundRect">
-            <a:avLst>
-              <a:gd name="adj" fmla="val 20000"/>
-            </a:avLst>
-          </a:prstGeom>
-          <a:solidFill>
-            <a:srgbClr val="FBF1E0"/>
-          </a:solidFill>
-          <a:ln w="12700">
-            <a:solidFill>
-              <a:srgbClr val="B26A00"/>
-            </a:solidFill>
-            <a:prstDash val="solid"/>
-          </a:ln>
-        </p:spPr>
-      </p:sp>
-      <p:sp>
-        <p:nvSpPr>
-          <p:cNvPr id="3" name="Text 1"/>
-          <p:cNvSpPr/>
-          <p:nvPr/>
-        </p:nvSpPr>
-        <p:spPr>
-          <a:xfrm>
-            <a:off x="566928" y="411480"/>
-            <a:ext cx="2331720" cy="457200"/>
+          <p:cNvPr id="2" name="Text 0"/>
+          <p:cNvSpPr/>
+          <p:nvPr/>
+        </p:nvSpPr>
+        <p:spPr>
+          <a:xfrm>
+            <a:off x="566928" y="384048"/>
+            <a:ext cx="11055096" cy="658368"/>
           </a:xfrm>
           <a:prstGeom prst="rect">
             <a:avLst/>
@@ -18684,72 +18834,33 @@
           <a:bodyPr wrap="square" rtlCol="0" anchor="ctr"/>
           <a:lstStyle/>
           <a:p>
-            <a:pPr algn="ctr" indent="0" marL="0">
+            <a:pPr indent="0" marL="0">
               <a:buNone/>
             </a:pPr>
             <a:r>
-              <a:rPr lang="en-US" sz="1600" b="1" dirty="0">
-                <a:solidFill>
-                  <a:srgbClr val="B26A00"/>
+              <a:rPr lang="en-US" sz="3000" b="1" dirty="0">
+                <a:solidFill>
+                  <a:srgbClr val="1F4C86"/>
                 </a:solidFill>
                 <a:latin typeface="Trebuchet MS" pitchFamily="34" charset="0"/>
                 <a:ea typeface="Trebuchet MS" pitchFamily="34" charset="-122"/>
                 <a:cs typeface="Trebuchet MS" pitchFamily="34" charset="-120"/>
               </a:rPr>
-              <a:t>▶  SHOWN  ·  NOT YOURS TO RUN</a:t>
-            </a:r>
-            <a:endParaRPr lang="en-US" sz="1600" dirty="0"/>
-          </a:p>
-        </p:txBody>
-      </p:sp>
-      <p:sp>
-        <p:nvSpPr>
-          <p:cNvPr id="4" name="Text 2"/>
-          <p:cNvSpPr/>
-          <p:nvPr/>
-        </p:nvSpPr>
-        <p:spPr>
-          <a:xfrm>
-            <a:off x="566928" y="1024128"/>
-            <a:ext cx="11055096" cy="685800"/>
-          </a:xfrm>
-          <a:prstGeom prst="rect">
-            <a:avLst/>
-          </a:prstGeom>
-          <a:noFill/>
-          <a:ln/>
-        </p:spPr>
-        <p:txBody>
-          <a:bodyPr wrap="square" rtlCol="0" anchor="ctr"/>
-          <a:lstStyle/>
-          <a:p>
-            <a:pPr indent="0" marL="0">
-              <a:buNone/>
-            </a:pPr>
-            <a:r>
-              <a:rPr lang="en-US" sz="3200" b="1" dirty="0">
-                <a:solidFill>
-                  <a:srgbClr val="1F4C86"/>
-                </a:solidFill>
-                <a:latin typeface="Trebuchet MS" pitchFamily="34" charset="0"/>
-                <a:ea typeface="Trebuchet MS" pitchFamily="34" charset="-122"/>
-                <a:cs typeface="Trebuchet MS" pitchFamily="34" charset="-120"/>
-              </a:rPr>
-              <a:t>Acquisition, live</a:t>
-            </a:r>
-            <a:endParaRPr lang="en-US" sz="3200" dirty="0"/>
-          </a:p>
-        </p:txBody>
-      </p:sp>
-      <p:sp>
-        <p:nvSpPr>
-          <p:cNvPr id="5" name="Shape 3"/>
-          <p:cNvSpPr/>
-          <p:nvPr/>
-        </p:nvSpPr>
-        <p:spPr>
-          <a:xfrm>
-            <a:off x="566928" y="1783080"/>
+              <a:t>How it is put together</a:t>
+            </a:r>
+            <a:endParaRPr lang="en-US" sz="3000" dirty="0"/>
+          </a:p>
+        </p:txBody>
+      </p:sp>
+      <p:sp>
+        <p:nvSpPr>
+          <p:cNvPr id="3" name="Shape 1"/>
+          <p:cNvSpPr/>
+          <p:nvPr/>
+        </p:nvSpPr>
+        <p:spPr>
+          <a:xfrm>
+            <a:off x="566928" y="1097280"/>
             <a:ext cx="1920240" cy="50292"/>
           </a:xfrm>
           <a:prstGeom prst="rect">
@@ -18763,14 +18874,53 @@
       </p:sp>
       <p:sp>
         <p:nvSpPr>
-          <p:cNvPr id="6" name="Text 4"/>
-          <p:cNvSpPr/>
-          <p:nvPr/>
-        </p:nvSpPr>
-        <p:spPr>
-          <a:xfrm>
-            <a:off x="640080" y="2103120"/>
-            <a:ext cx="10963656" cy="3017520"/>
+          <p:cNvPr id="4" name="Text 2"/>
+          <p:cNvSpPr/>
+          <p:nvPr/>
+        </p:nvSpPr>
+        <p:spPr>
+          <a:xfrm>
+            <a:off x="566928" y="1243584"/>
+            <a:ext cx="11055096" cy="384048"/>
+          </a:xfrm>
+          <a:prstGeom prst="rect">
+            <a:avLst/>
+          </a:prstGeom>
+          <a:noFill/>
+          <a:ln/>
+        </p:spPr>
+        <p:txBody>
+          <a:bodyPr wrap="square" rtlCol="0" anchor="ctr"/>
+          <a:lstStyle/>
+          <a:p>
+            <a:pPr indent="0" marL="0">
+              <a:buNone/>
+            </a:pPr>
+            <a:r>
+              <a:rPr lang="en-US" sz="1700" i="1" dirty="0">
+                <a:solidFill>
+                  <a:srgbClr val="5A6675"/>
+                </a:solidFill>
+                <a:latin typeface="Calibri" pitchFamily="34" charset="0"/>
+                <a:ea typeface="Calibri" pitchFamily="34" charset="-122"/>
+                <a:cs typeface="Calibri" pitchFamily="34" charset="-120"/>
+              </a:rPr>
+              <a:t>The easy part is the QuPath extension. Budget your time for the microscope side.</a:t>
+            </a:r>
+            <a:endParaRPr lang="en-US" sz="1700" dirty="0"/>
+          </a:p>
+        </p:txBody>
+      </p:sp>
+      <p:sp>
+        <p:nvSpPr>
+          <p:cNvPr id="5" name="Text 3"/>
+          <p:cNvSpPr/>
+          <p:nvPr/>
+        </p:nvSpPr>
+        <p:spPr>
+          <a:xfrm>
+            <a:off x="640080" y="1755648"/>
+            <a:ext cx="10963656" cy="4279392"/>
           </a:xfrm>
           <a:prstGeom prst="rect">
             <a:avLst/>
@@ -18783,8 +18933,11 @@
           <a:lstStyle/>
           <a:p>
             <a:pPr marL="342900" indent="-342900">
+              <a:lnSpc>
+                <a:spcPct val="105000"/>
+              </a:lnSpc>
               <a:spcAft>
-                <a:spcPts val="1400"/>
+                <a:spcPts val="1200"/>
               </a:spcAft>
               <a:buSzPct val="100000"/>
               <a:buChar char="•"/>
@@ -18798,14 +18951,17 @@
                 <a:ea typeface="Calibri" pitchFamily="34" charset="-122"/>
                 <a:cs typeface="Calibri" pitchFamily="34" charset="-120"/>
               </a:rPr>
-              <a:t>Draw a bounding box on a slide overview</a:t>
+              <a:t>QuPath talks to a small command server, which drives Micro-Manager, which drives the hardware</a:t>
             </a:r>
             <a:endParaRPr lang="en-US" sz="2000" dirty="0"/>
           </a:p>
           <a:p>
             <a:pPr marL="342900" indent="-342900">
+              <a:lnSpc>
+                <a:spcPct val="105000"/>
+              </a:lnSpc>
               <a:spcAft>
-                <a:spcPts val="1400"/>
+                <a:spcPts val="1200"/>
               </a:spcAft>
               <a:buSzPct val="100000"/>
               <a:buChar char="•"/>
@@ -18819,14 +18975,17 @@
                 <a:ea typeface="Calibri" pitchFamily="34" charset="-122"/>
                 <a:cs typeface="Calibri" pitchFamily="34" charset="-120"/>
               </a:rPr>
-              <a:t>Watch the stage move and the tiles come in</a:t>
+              <a:t>Each instrument is described by its own configuration — the QuPath side does not know what kind of microscope it is</a:t>
             </a:r>
             <a:endParaRPr lang="en-US" sz="2000" dirty="0"/>
           </a:p>
           <a:p>
             <a:pPr marL="342900" indent="-342900">
+              <a:lnSpc>
+                <a:spcPct val="105000"/>
+              </a:lnSpc>
               <a:spcAft>
-                <a:spcPts val="1400"/>
+                <a:spcPts val="1200"/>
               </a:spcAft>
               <a:buSzPct val="100000"/>
               <a:buChar char="•"/>
@@ -18840,121 +18999,15 @@
                 <a:ea typeface="Calibri" pitchFamily="34" charset="-122"/>
                 <a:cs typeface="Calibri" pitchFamily="34" charset="-120"/>
               </a:rPr>
-              <a:t>Stitched pyramidal image lands back in the project, with its metadata</a:t>
+              <a:t>Micro-Manager remains the device layer. We did not reinvent it</a:t>
             </a:r>
             <a:endParaRPr lang="en-US" sz="2000" dirty="0"/>
           </a:p>
-          <a:p>
-            <a:pPr marL="342900" indent="-342900">
-              <a:spcAft>
-                <a:spcPts val="1400"/>
-              </a:spcAft>
-              <a:buSzPct val="100000"/>
-              <a:buChar char="•"/>
-            </a:pPr>
-            <a:r>
-              <a:rPr lang="en-US" sz="2000" dirty="0">
-                <a:solidFill>
-                  <a:srgbClr val="1F2933"/>
-                </a:solidFill>
-                <a:latin typeface="Calibri" pitchFamily="34" charset="0"/>
-                <a:ea typeface="Calibri" pitchFamily="34" charset="-122"/>
-                <a:cs typeface="Calibri" pitchFamily="34" charset="-120"/>
-              </a:rPr>
-              <a:t>Then open it and annotate it — the loop closes</a:t>
-            </a:r>
-            <a:endParaRPr lang="en-US" sz="2000" dirty="0"/>
-          </a:p>
-          <a:p>
-            <a:pPr marL="342900" indent="-342900">
-              <a:spcAft>
-                <a:spcPts val="1400"/>
-              </a:spcAft>
-              <a:buSzPct val="100000"/>
-              <a:buChar char="•"/>
-            </a:pPr>
-            <a:r>
-              <a:rPr lang="en-US" sz="2000" dirty="0">
-                <a:solidFill>
-                  <a:srgbClr val="1F2933"/>
-                </a:solidFill>
-                <a:latin typeface="Calibri" pitchFamily="34" charset="0"/>
-                <a:ea typeface="Calibri" pitchFamily="34" charset="-122"/>
-                <a:cs typeface="Calibri" pitchFamily="34" charset="-120"/>
-              </a:rPr>
-              <a:t>The stitching half — Tiles to Pyramid — you can install and use today, no microscope needed</a:t>
-            </a:r>
-            <a:endParaRPr lang="en-US" sz="2000" dirty="0"/>
-          </a:p>
-        </p:txBody>
-      </p:sp>
-      <p:sp>
-        <p:nvSpPr>
-          <p:cNvPr id="7" name="Shape 5"/>
-          <p:cNvSpPr/>
-          <p:nvPr/>
-        </p:nvSpPr>
-        <p:spPr>
-          <a:xfrm>
-            <a:off x="566928" y="5650992"/>
-            <a:ext cx="11055096" cy="566928"/>
-          </a:xfrm>
-          <a:prstGeom prst="rect">
-            <a:avLst/>
-          </a:prstGeom>
-          <a:solidFill>
-            <a:srgbClr val="F4F8FD"/>
-          </a:solidFill>
-          <a:ln w="9525">
-            <a:solidFill>
-              <a:srgbClr val="3674C1"/>
-            </a:solidFill>
-            <a:prstDash val="solid"/>
-          </a:ln>
-        </p:spPr>
-      </p:sp>
-      <p:sp>
-        <p:nvSpPr>
-          <p:cNvPr id="8" name="Text 6"/>
-          <p:cNvSpPr/>
-          <p:nvPr/>
-        </p:nvSpPr>
-        <p:spPr>
-          <a:xfrm>
-            <a:off x="768096" y="5650992"/>
-            <a:ext cx="10652760" cy="566928"/>
-          </a:xfrm>
-          <a:prstGeom prst="rect">
-            <a:avLst/>
-          </a:prstGeom>
-          <a:noFill/>
-          <a:ln/>
-        </p:spPr>
-        <p:txBody>
-          <a:bodyPr wrap="square" rtlCol="0" anchor="ctr"/>
-          <a:lstStyle/>
-          <a:p>
-            <a:pPr indent="0" marL="0">
-              <a:buNone/>
-            </a:pPr>
-            <a:r>
-              <a:rPr lang="en-US" sz="1600" b="1" dirty="0">
-                <a:solidFill>
-                  <a:srgbClr val="1F4C86"/>
-                </a:solidFill>
-                <a:latin typeface="Calibri" pitchFamily="34" charset="0"/>
-                <a:ea typeface="Calibri" pitchFamily="34" charset="-122"/>
-                <a:cs typeface="Calibri" pitchFamily="34" charset="-120"/>
-              </a:rPr>
-              <a:t>You watch this one: it needs a microscope, so nobody in the room runs it. About five minutes, with a recorded fallback if the network or the hardware disagrees.</a:t>
-            </a:r>
-            <a:endParaRPr lang="en-US" sz="1600" dirty="0"/>
-          </a:p>
-        </p:txBody>
-      </p:sp>
-      <p:sp>
-        <p:nvSpPr>
-          <p:cNvPr id="9" name="Text 7"/>
+        </p:txBody>
+      </p:sp>
+      <p:sp>
+        <p:nvSpPr>
+          <p:cNvPr id="6" name="Text 4"/>
           <p:cNvSpPr/>
           <p:nvPr/>
         </p:nvSpPr>
@@ -19025,14 +19078,41 @@
       </p:grpSpPr>
       <p:sp>
         <p:nvSpPr>
-          <p:cNvPr id="2" name="Text 0"/>
+          <p:cNvPr id="2" name="Shape 0"/>
           <p:cNvSpPr/>
           <p:nvPr/>
         </p:nvSpPr>
         <p:spPr>
           <a:xfrm>
             <a:off x="566928" y="411480"/>
-            <a:ext cx="11055096" cy="685800"/>
+            <a:ext cx="2331720" cy="457200"/>
+          </a:xfrm>
+          <a:prstGeom prst="roundRect">
+            <a:avLst>
+              <a:gd name="adj" fmla="val 20000"/>
+            </a:avLst>
+          </a:prstGeom>
+          <a:solidFill>
+            <a:srgbClr val="FBF1E0"/>
+          </a:solidFill>
+          <a:ln w="12700">
+            <a:solidFill>
+              <a:srgbClr val="B26A00"/>
+            </a:solidFill>
+            <a:prstDash val="solid"/>
+          </a:ln>
+        </p:spPr>
+      </p:sp>
+      <p:sp>
+        <p:nvSpPr>
+          <p:cNvPr id="3" name="Text 1"/>
+          <p:cNvSpPr/>
+          <p:nvPr/>
+        </p:nvSpPr>
+        <p:spPr>
+          <a:xfrm>
+            <a:off x="566928" y="411480"/>
+            <a:ext cx="2331720" cy="457200"/>
           </a:xfrm>
           <a:prstGeom prst="rect">
             <a:avLst/>
@@ -19044,19 +19124,58 @@
           <a:bodyPr wrap="square" rtlCol="0" anchor="ctr"/>
           <a:lstStyle/>
           <a:p>
-            <a:pPr indent="0" marL="0">
+            <a:pPr algn="ctr" indent="0" marL="0">
               <a:buNone/>
             </a:pPr>
             <a:r>
-              <a:rPr lang="en-US" sz="3200" b="1" dirty="0">
-                <a:solidFill>
-                  <a:srgbClr val="1F4C86"/>
+              <a:rPr lang="en-US" sz="1600" b="1" dirty="0">
+                <a:solidFill>
+                  <a:srgbClr val="B26A00"/>
                 </a:solidFill>
                 <a:latin typeface="Trebuchet MS" pitchFamily="34" charset="0"/>
                 <a:ea typeface="Trebuchet MS" pitchFamily="34" charset="-122"/>
                 <a:cs typeface="Trebuchet MS" pitchFamily="34" charset="-120"/>
               </a:rPr>
-              <a:t>Acknowledgements</a:t>
+              <a:t>▶  SHOWN  ·  NOT YOURS TO RUN</a:t>
+            </a:r>
+            <a:endParaRPr lang="en-US" sz="1600" dirty="0"/>
+          </a:p>
+        </p:txBody>
+      </p:sp>
+      <p:sp>
+        <p:nvSpPr>
+          <p:cNvPr id="4" name="Text 2"/>
+          <p:cNvSpPr/>
+          <p:nvPr/>
+        </p:nvSpPr>
+        <p:spPr>
+          <a:xfrm>
+            <a:off x="566928" y="1024128"/>
+            <a:ext cx="11055096" cy="685800"/>
+          </a:xfrm>
+          <a:prstGeom prst="rect">
+            <a:avLst/>
+          </a:prstGeom>
+          <a:noFill/>
+          <a:ln/>
+        </p:spPr>
+        <p:txBody>
+          <a:bodyPr wrap="square" rtlCol="0" anchor="ctr"/>
+          <a:lstStyle/>
+          <a:p>
+            <a:pPr indent="0" marL="0">
+              <a:buNone/>
+            </a:pPr>
+            <a:r>
+              <a:rPr lang="en-US" sz="3200" b="1" dirty="0">
+                <a:solidFill>
+                  <a:srgbClr val="1F4C86"/>
+                </a:solidFill>
+                <a:latin typeface="Trebuchet MS" pitchFamily="34" charset="0"/>
+                <a:ea typeface="Trebuchet MS" pitchFamily="34" charset="-122"/>
+                <a:cs typeface="Trebuchet MS" pitchFamily="34" charset="-120"/>
+              </a:rPr>
+              <a:t>Acquisition, live</a:t>
             </a:r>
             <a:endParaRPr lang="en-US" sz="3200" dirty="0"/>
           </a:p>
@@ -19064,13 +19183,13 @@
       </p:sp>
       <p:sp>
         <p:nvSpPr>
-          <p:cNvPr id="3" name="Shape 1"/>
-          <p:cNvSpPr/>
-          <p:nvPr/>
-        </p:nvSpPr>
-        <p:spPr>
-          <a:xfrm>
-            <a:off x="566928" y="1152144"/>
+          <p:cNvPr id="5" name="Shape 3"/>
+          <p:cNvSpPr/>
+          <p:nvPr/>
+        </p:nvSpPr>
+        <p:spPr>
+          <a:xfrm>
+            <a:off x="566928" y="1783080"/>
             <a:ext cx="1920240" cy="50292"/>
           </a:xfrm>
           <a:prstGeom prst="rect">
@@ -19084,54 +19203,166 @@
       </p:sp>
       <p:sp>
         <p:nvSpPr>
-          <p:cNvPr id="4" name="Shape 2"/>
-          <p:cNvSpPr/>
-          <p:nvPr/>
-        </p:nvSpPr>
-        <p:spPr>
-          <a:xfrm>
-            <a:off x="566928" y="1572768"/>
-            <a:ext cx="11055096" cy="2240280"/>
+          <p:cNvPr id="6" name="Text 4"/>
+          <p:cNvSpPr/>
+          <p:nvPr/>
+        </p:nvSpPr>
+        <p:spPr>
+          <a:xfrm>
+            <a:off x="640080" y="2103120"/>
+            <a:ext cx="10963656" cy="3017520"/>
+          </a:xfrm>
+          <a:prstGeom prst="rect">
+            <a:avLst/>
+          </a:prstGeom>
+          <a:noFill/>
+          <a:ln/>
+        </p:spPr>
+        <p:txBody>
+          <a:bodyPr wrap="square" rtlCol="0" anchor="t"/>
+          <a:lstStyle/>
+          <a:p>
+            <a:pPr marL="342900" indent="-342900">
+              <a:spcAft>
+                <a:spcPts val="1400"/>
+              </a:spcAft>
+              <a:buSzPct val="100000"/>
+              <a:buChar char="•"/>
+            </a:pPr>
+            <a:r>
+              <a:rPr lang="en-US" sz="2000" dirty="0">
+                <a:solidFill>
+                  <a:srgbClr val="1F2933"/>
+                </a:solidFill>
+                <a:latin typeface="Calibri" pitchFamily="34" charset="0"/>
+                <a:ea typeface="Calibri" pitchFamily="34" charset="-122"/>
+                <a:cs typeface="Calibri" pitchFamily="34" charset="-120"/>
+              </a:rPr>
+              <a:t>Draw a bounding box on a slide overview</a:t>
+            </a:r>
+            <a:endParaRPr lang="en-US" sz="2000" dirty="0"/>
+          </a:p>
+          <a:p>
+            <a:pPr marL="342900" indent="-342900">
+              <a:spcAft>
+                <a:spcPts val="1400"/>
+              </a:spcAft>
+              <a:buSzPct val="100000"/>
+              <a:buChar char="•"/>
+            </a:pPr>
+            <a:r>
+              <a:rPr lang="en-US" sz="2000" dirty="0">
+                <a:solidFill>
+                  <a:srgbClr val="1F2933"/>
+                </a:solidFill>
+                <a:latin typeface="Calibri" pitchFamily="34" charset="0"/>
+                <a:ea typeface="Calibri" pitchFamily="34" charset="-122"/>
+                <a:cs typeface="Calibri" pitchFamily="34" charset="-120"/>
+              </a:rPr>
+              <a:t>Watch the stage move and the tiles come in</a:t>
+            </a:r>
+            <a:endParaRPr lang="en-US" sz="2000" dirty="0"/>
+          </a:p>
+          <a:p>
+            <a:pPr marL="342900" indent="-342900">
+              <a:spcAft>
+                <a:spcPts val="1400"/>
+              </a:spcAft>
+              <a:buSzPct val="100000"/>
+              <a:buChar char="•"/>
+            </a:pPr>
+            <a:r>
+              <a:rPr lang="en-US" sz="2000" dirty="0">
+                <a:solidFill>
+                  <a:srgbClr val="1F2933"/>
+                </a:solidFill>
+                <a:latin typeface="Calibri" pitchFamily="34" charset="0"/>
+                <a:ea typeface="Calibri" pitchFamily="34" charset="-122"/>
+                <a:cs typeface="Calibri" pitchFamily="34" charset="-120"/>
+              </a:rPr>
+              <a:t>Stitched pyramidal image lands back in the project, with its metadata</a:t>
+            </a:r>
+            <a:endParaRPr lang="en-US" sz="2000" dirty="0"/>
+          </a:p>
+          <a:p>
+            <a:pPr marL="342900" indent="-342900">
+              <a:spcAft>
+                <a:spcPts val="1400"/>
+              </a:spcAft>
+              <a:buSzPct val="100000"/>
+              <a:buChar char="•"/>
+            </a:pPr>
+            <a:r>
+              <a:rPr lang="en-US" sz="2000" dirty="0">
+                <a:solidFill>
+                  <a:srgbClr val="1F2933"/>
+                </a:solidFill>
+                <a:latin typeface="Calibri" pitchFamily="34" charset="0"/>
+                <a:ea typeface="Calibri" pitchFamily="34" charset="-122"/>
+                <a:cs typeface="Calibri" pitchFamily="34" charset="-120"/>
+              </a:rPr>
+              <a:t>Then open it and annotate it — the loop closes</a:t>
+            </a:r>
+            <a:endParaRPr lang="en-US" sz="2000" dirty="0"/>
+          </a:p>
+          <a:p>
+            <a:pPr marL="342900" indent="-342900">
+              <a:spcAft>
+                <a:spcPts val="1400"/>
+              </a:spcAft>
+              <a:buSzPct val="100000"/>
+              <a:buChar char="•"/>
+            </a:pPr>
+            <a:r>
+              <a:rPr lang="en-US" sz="2000" dirty="0">
+                <a:solidFill>
+                  <a:srgbClr val="1F2933"/>
+                </a:solidFill>
+                <a:latin typeface="Calibri" pitchFamily="34" charset="0"/>
+                <a:ea typeface="Calibri" pitchFamily="34" charset="-122"/>
+                <a:cs typeface="Calibri" pitchFamily="34" charset="-120"/>
+              </a:rPr>
+              <a:t>The stitching half — Tiles to Pyramid — you can install and use today, no microscope needed</a:t>
+            </a:r>
+            <a:endParaRPr lang="en-US" sz="2000" dirty="0"/>
+          </a:p>
+        </p:txBody>
+      </p:sp>
+      <p:sp>
+        <p:nvSpPr>
+          <p:cNvPr id="7" name="Shape 5"/>
+          <p:cNvSpPr/>
+          <p:nvPr/>
+        </p:nvSpPr>
+        <p:spPr>
+          <a:xfrm>
+            <a:off x="566928" y="5650992"/>
+            <a:ext cx="11055096" cy="566928"/>
           </a:xfrm>
           <a:prstGeom prst="rect">
             <a:avLst/>
           </a:prstGeom>
           <a:solidFill>
-            <a:srgbClr val="E8F0FA"/>
+            <a:srgbClr val="F4F8FD"/>
           </a:solidFill>
-          <a:ln/>
-        </p:spPr>
-      </p:sp>
-      <p:sp>
-        <p:nvSpPr>
-          <p:cNvPr id="5" name="Shape 3"/>
-          <p:cNvSpPr/>
-          <p:nvPr/>
-        </p:nvSpPr>
-        <p:spPr>
-          <a:xfrm>
-            <a:off x="566928" y="1572768"/>
-            <a:ext cx="146304" cy="2240280"/>
-          </a:xfrm>
-          <a:prstGeom prst="rect">
-            <a:avLst/>
-          </a:prstGeom>
-          <a:solidFill>
-            <a:srgbClr val="3674C1"/>
-          </a:solidFill>
-          <a:ln/>
-        </p:spPr>
-      </p:sp>
-      <p:sp>
-        <p:nvSpPr>
-          <p:cNvPr id="6" name="Text 4"/>
-          <p:cNvSpPr/>
-          <p:nvPr/>
-        </p:nvSpPr>
-        <p:spPr>
-          <a:xfrm>
-            <a:off x="978408" y="1737360"/>
-            <a:ext cx="10232136" cy="365760"/>
+          <a:ln w="9525">
+            <a:solidFill>
+              <a:srgbClr val="3674C1"/>
+            </a:solidFill>
+            <a:prstDash val="solid"/>
+          </a:ln>
+        </p:spPr>
+      </p:sp>
+      <p:sp>
+        <p:nvSpPr>
+          <p:cNvPr id="8" name="Text 6"/>
+          <p:cNvSpPr/>
+          <p:nvPr/>
+        </p:nvSpPr>
+        <p:spPr>
+          <a:xfrm>
+            <a:off x="768096" y="5650992"/>
+            <a:ext cx="10652760" cy="566928"/>
           </a:xfrm>
           <a:prstGeom prst="rect">
             <a:avLst/>
@@ -19147,15 +19378,15 @@
               <a:buNone/>
             </a:pPr>
             <a:r>
-              <a:rPr lang="en-US" sz="1600" b="1" spc="150" kern="0" dirty="0">
-                <a:solidFill>
-                  <a:srgbClr val="3674C1"/>
-                </a:solidFill>
-                <a:latin typeface="Calibri" pitchFamily="34" charset="0"/>
-                <a:ea typeface="Calibri" pitchFamily="34" charset="-122"/>
-                <a:cs typeface="Calibri" pitchFamily="34" charset="-120"/>
-              </a:rPr>
-              <a:t>Sample data</a:t>
+              <a:rPr lang="en-US" sz="1600" b="1" dirty="0">
+                <a:solidFill>
+                  <a:srgbClr val="1F4C86"/>
+                </a:solidFill>
+                <a:latin typeface="Calibri" pitchFamily="34" charset="0"/>
+                <a:ea typeface="Calibri" pitchFamily="34" charset="-122"/>
+                <a:cs typeface="Calibri" pitchFamily="34" charset="-120"/>
+              </a:rPr>
+              <a:t>You watch this one: it needs a microscope, so nobody in the room runs it. About five minutes, with a recorded fallback if the network or the hardware disagrees.</a:t>
             </a:r>
             <a:endParaRPr lang="en-US" sz="1600" dirty="0"/>
           </a:p>
@@ -19163,222 +19394,7 @@
       </p:sp>
       <p:sp>
         <p:nvSpPr>
-          <p:cNvPr id="7" name="Text 5"/>
-          <p:cNvSpPr/>
-          <p:nvPr/>
-        </p:nvSpPr>
-        <p:spPr>
-          <a:xfrm>
-            <a:off x="978408" y="2103120"/>
-            <a:ext cx="10232136" cy="566928"/>
-          </a:xfrm>
-          <a:prstGeom prst="rect">
-            <a:avLst/>
-          </a:prstGeom>
-          <a:noFill/>
-          <a:ln/>
-        </p:spPr>
-        <p:txBody>
-          <a:bodyPr wrap="square" rtlCol="0" anchor="ctr"/>
-          <a:lstStyle/>
-          <a:p>
-            <a:pPr indent="0" marL="0">
-              <a:buNone/>
-            </a:pPr>
-            <a:r>
-              <a:rPr lang="en-US" sz="3200" b="1" dirty="0">
-                <a:solidFill>
-                  <a:srgbClr val="1F4C86"/>
-                </a:solidFill>
-                <a:latin typeface="Trebuchet MS" pitchFamily="34" charset="0"/>
-                <a:ea typeface="Trebuchet MS" pitchFamily="34" charset="-122"/>
-                <a:cs typeface="Trebuchet MS" pitchFamily="34" charset="-120"/>
-              </a:rPr>
-              <a:t>Sara McArdle  ·  Zbigniew Mikulski</a:t>
-            </a:r>
-            <a:endParaRPr lang="en-US" sz="3200" dirty="0"/>
-          </a:p>
-        </p:txBody>
-      </p:sp>
-      <p:sp>
-        <p:nvSpPr>
-          <p:cNvPr id="8" name="Text 6"/>
-          <p:cNvSpPr/>
-          <p:nvPr/>
-        </p:nvSpPr>
-        <p:spPr>
-          <a:xfrm>
-            <a:off x="978408" y="2670048"/>
-            <a:ext cx="10232136" cy="384048"/>
-          </a:xfrm>
-          <a:prstGeom prst="rect">
-            <a:avLst/>
-          </a:prstGeom>
-          <a:noFill/>
-          <a:ln/>
-        </p:spPr>
-        <p:txBody>
-          <a:bodyPr wrap="square" rtlCol="0" anchor="ctr"/>
-          <a:lstStyle/>
-          <a:p>
-            <a:pPr indent="0" marL="0">
-              <a:buNone/>
-            </a:pPr>
-            <a:r>
-              <a:rPr lang="en-US" sz="2100" dirty="0">
-                <a:solidFill>
-                  <a:srgbClr val="1F2933"/>
-                </a:solidFill>
-                <a:latin typeface="Calibri" pitchFamily="34" charset="0"/>
-                <a:ea typeface="Calibri" pitchFamily="34" charset="-122"/>
-                <a:cs typeface="Calibri" pitchFamily="34" charset="-120"/>
-              </a:rPr>
-              <a:t>La Jolla Institute for Immunology</a:t>
-            </a:r>
-            <a:endParaRPr lang="en-US" sz="2100" dirty="0"/>
-          </a:p>
-        </p:txBody>
-      </p:sp>
-      <p:sp>
-        <p:nvSpPr>
           <p:cNvPr id="9" name="Text 7"/>
-          <p:cNvSpPr/>
-          <p:nvPr/>
-        </p:nvSpPr>
-        <p:spPr>
-          <a:xfrm>
-            <a:off x="978408" y="3054096"/>
-            <a:ext cx="10232136" cy="731520"/>
-          </a:xfrm>
-          <a:prstGeom prst="rect">
-            <a:avLst/>
-          </a:prstGeom>
-          <a:noFill/>
-          <a:ln/>
-        </p:spPr>
-        <p:txBody>
-          <a:bodyPr wrap="square" rtlCol="0" anchor="ctr"/>
-          <a:lstStyle/>
-          <a:p>
-            <a:pPr indent="0" marL="0">
-              <a:lnSpc>
-                <a:spcPct val="110000"/>
-              </a:lnSpc>
-              <a:buNone/>
-            </a:pPr>
-            <a:r>
-              <a:rPr lang="en-US" sz="1700" i="1" dirty="0">
-                <a:solidFill>
-                  <a:srgbClr val="5A6675"/>
-                </a:solidFill>
-                <a:latin typeface="Calibri" pitchFamily="34" charset="0"/>
-                <a:ea typeface="Calibri" pitchFamily="34" charset="-122"/>
-                <a:cs typeface="Calibri" pitchFamily="34" charset="-120"/>
-              </a:rPr>
-              <a:t>They provided the majority of the test and demonstration data behind almost every exercise you will see today.</a:t>
-            </a:r>
-            <a:endParaRPr lang="en-US" sz="1700" dirty="0"/>
-          </a:p>
-          <a:p>
-            <a:pPr indent="0" marL="0">
-              <a:lnSpc>
-                <a:spcPct val="110000"/>
-              </a:lnSpc>
-              <a:buNone/>
-            </a:pPr>
-            <a:r>
-              <a:rPr lang="en-US" sz="1700" i="1" dirty="0">
-                <a:solidFill>
-                  <a:srgbClr val="5A6675"/>
-                </a:solidFill>
-                <a:latin typeface="Calibri" pitchFamily="34" charset="0"/>
-                <a:ea typeface="Calibri" pitchFamily="34" charset="-122"/>
-                <a:cs typeface="Calibri" pitchFamily="34" charset="-120"/>
-              </a:rPr>
-              <a:t>These tools could not have been built, tested, or taught without it.</a:t>
-            </a:r>
-            <a:endParaRPr lang="en-US" sz="1700" dirty="0"/>
-          </a:p>
-        </p:txBody>
-      </p:sp>
-      <p:sp>
-        <p:nvSpPr>
-          <p:cNvPr id="10" name="Text 8"/>
-          <p:cNvSpPr/>
-          <p:nvPr/>
-        </p:nvSpPr>
-        <p:spPr>
-          <a:xfrm>
-            <a:off x="566928" y="3977640"/>
-            <a:ext cx="11055096" cy="2103120"/>
-          </a:xfrm>
-          <a:prstGeom prst="rect">
-            <a:avLst/>
-          </a:prstGeom>
-          <a:noFill/>
-          <a:ln/>
-        </p:spPr>
-        <p:txBody>
-          <a:bodyPr wrap="square" rtlCol="0" anchor="t"/>
-          <a:lstStyle/>
-          <a:p>
-            <a:pPr indent="0" marL="0">
-              <a:spcAft>
-                <a:spcPts val="1000"/>
-              </a:spcAft>
-              <a:buNone/>
-            </a:pPr>
-            <a:r>
-              <a:rPr lang="en-US" sz="1700" dirty="0">
-                <a:solidFill>
-                  <a:srgbClr val="1F2933"/>
-                </a:solidFill>
-                <a:latin typeface="Calibri" pitchFamily="34" charset="0"/>
-                <a:ea typeface="Calibri" pitchFamily="34" charset="-122"/>
-                <a:cs typeface="Calibri" pitchFamily="34" charset="-120"/>
-              </a:rPr>
-              <a:t>Sara McArdle also shaped the software directly — two of these extensions began as her Groovy scripts, and her FS2K course was the model for how the workshop pages are written.
-</a:t>
-            </a:r>
-            <a:pPr indent="0" marL="0">
-              <a:spcAft>
-                <a:spcPts val="1000"/>
-              </a:spcAft>
-              <a:buNone/>
-            </a:pPr>
-            <a:r>
-              <a:rPr lang="en-US" sz="1700" dirty="0">
-                <a:solidFill>
-                  <a:srgbClr val="1F2933"/>
-                </a:solidFill>
-                <a:latin typeface="Calibri" pitchFamily="34" charset="0"/>
-                <a:ea typeface="Calibri" pitchFamily="34" charset="-122"/>
-                <a:cs typeface="Calibri" pitchFamily="34" charset="-120"/>
-              </a:rPr>
-              <a:t>Kristin Gallick, whose concept and scripts the Confusion Matrix grew from.  ·  Pete Bankhead and the QuPath team.  ·  CT-FIRE, CurveAlign, TACS and TWOMBLI for the fibre work.  ·  CytoMAP and QuBaLab for bringing clustering into QuPath.  ·  QUAREP-LiMi for the reporting standards.  ·  The image.sc community, where several of these features were first requested.
-</a:t>
-            </a:r>
-            <a:pPr indent="0" marL="0">
-              <a:buNone/>
-            </a:pPr>
-            <a:r>
-              <a:rPr lang="en-US" sz="1700" b="1" dirty="0">
-                <a:solidFill>
-                  <a:srgbClr val="1F4C86"/>
-                </a:solidFill>
-                <a:latin typeface="Calibri" pitchFamily="34" charset="0"/>
-                <a:ea typeface="Calibri" pitchFamily="34" charset="-122"/>
-                <a:cs typeface="Calibri" pitchFamily="34" charset="-120"/>
-              </a:rPr>
-              <a:t>Full credits: michaelsnelson.github.io/BINA-I2K-2026-QuPath-Extensions/docs/acknowledgements.html</a:t>
-            </a:r>
-            <a:endParaRPr lang="en-US" sz="1700" dirty="0"/>
-          </a:p>
-        </p:txBody>
-      </p:sp>
-      <p:sp>
-        <p:nvSpPr>
-          <p:cNvPr id="11" name="Text 9"/>
           <p:cNvSpPr/>
           <p:nvPr/>
         </p:nvSpPr>
@@ -19657,7 +19673,7 @@
                 <a:ea typeface="Calibri" pitchFamily="34" charset="-122"/>
                 <a:cs typeface="Calibri" pitchFamily="34" charset="-120"/>
               </a:rPr>
-              <a:t>A few slots are fixed; Sara McArdle presents two of them in her session</a:t>
+              <a:t>A few slots are fixed; two more were covered in Sara McArdle’s session this morning</a:t>
             </a:r>
             <a:endParaRPr lang="en-US" sz="2000" dirty="0"/>
           </a:p>
@@ -19824,14 +19840,53 @@
       </p:grpSpPr>
       <p:sp>
         <p:nvSpPr>
-          <p:cNvPr id="2" name="Shape 0"/>
-          <p:cNvSpPr/>
-          <p:nvPr/>
-        </p:nvSpPr>
-        <p:spPr>
-          <a:xfrm>
-            <a:off x="0" y="0"/>
-            <a:ext cx="274320" cy="6858000"/>
+          <p:cNvPr id="2" name="Text 0"/>
+          <p:cNvSpPr/>
+          <p:nvPr/>
+        </p:nvSpPr>
+        <p:spPr>
+          <a:xfrm>
+            <a:off x="566928" y="411480"/>
+            <a:ext cx="11055096" cy="685800"/>
+          </a:xfrm>
+          <a:prstGeom prst="rect">
+            <a:avLst/>
+          </a:prstGeom>
+          <a:noFill/>
+          <a:ln/>
+        </p:spPr>
+        <p:txBody>
+          <a:bodyPr wrap="square" rtlCol="0" anchor="ctr"/>
+          <a:lstStyle/>
+          <a:p>
+            <a:pPr indent="0" marL="0">
+              <a:buNone/>
+            </a:pPr>
+            <a:r>
+              <a:rPr lang="en-US" sz="3200" b="1" dirty="0">
+                <a:solidFill>
+                  <a:srgbClr val="1F4C86"/>
+                </a:solidFill>
+                <a:latin typeface="Trebuchet MS" pitchFamily="34" charset="0"/>
+                <a:ea typeface="Trebuchet MS" pitchFamily="34" charset="-122"/>
+                <a:cs typeface="Trebuchet MS" pitchFamily="34" charset="-120"/>
+              </a:rPr>
+              <a:t>Acknowledgements</a:t>
+            </a:r>
+            <a:endParaRPr lang="en-US" sz="3200" dirty="0"/>
+          </a:p>
+        </p:txBody>
+      </p:sp>
+      <p:sp>
+        <p:nvSpPr>
+          <p:cNvPr id="3" name="Shape 1"/>
+          <p:cNvSpPr/>
+          <p:nvPr/>
+        </p:nvSpPr>
+        <p:spPr>
+          <a:xfrm>
+            <a:off x="566928" y="1152144"/>
+            <a:ext cx="1920240" cy="50292"/>
           </a:xfrm>
           <a:prstGeom prst="rect">
             <a:avLst/>
@@ -19844,14 +19899,54 @@
       </p:sp>
       <p:sp>
         <p:nvSpPr>
-          <p:cNvPr id="3" name="Text 1"/>
-          <p:cNvSpPr/>
-          <p:nvPr/>
-        </p:nvSpPr>
-        <p:spPr>
-          <a:xfrm>
-            <a:off x="960120" y="777240"/>
-            <a:ext cx="10268712" cy="822960"/>
+          <p:cNvPr id="4" name="Shape 2"/>
+          <p:cNvSpPr/>
+          <p:nvPr/>
+        </p:nvSpPr>
+        <p:spPr>
+          <a:xfrm>
+            <a:off x="566928" y="1572768"/>
+            <a:ext cx="11055096" cy="2240280"/>
+          </a:xfrm>
+          <a:prstGeom prst="rect">
+            <a:avLst/>
+          </a:prstGeom>
+          <a:solidFill>
+            <a:srgbClr val="E8F0FA"/>
+          </a:solidFill>
+          <a:ln/>
+        </p:spPr>
+      </p:sp>
+      <p:sp>
+        <p:nvSpPr>
+          <p:cNvPr id="5" name="Shape 3"/>
+          <p:cNvSpPr/>
+          <p:nvPr/>
+        </p:nvSpPr>
+        <p:spPr>
+          <a:xfrm>
+            <a:off x="566928" y="1572768"/>
+            <a:ext cx="146304" cy="2240280"/>
+          </a:xfrm>
+          <a:prstGeom prst="rect">
+            <a:avLst/>
+          </a:prstGeom>
+          <a:solidFill>
+            <a:srgbClr val="3674C1"/>
+          </a:solidFill>
+          <a:ln/>
+        </p:spPr>
+      </p:sp>
+      <p:sp>
+        <p:nvSpPr>
+          <p:cNvPr id="6" name="Text 4"/>
+          <p:cNvSpPr/>
+          <p:nvPr/>
+        </p:nvSpPr>
+        <p:spPr>
+          <a:xfrm>
+            <a:off x="978408" y="1737360"/>
+            <a:ext cx="10232136" cy="365760"/>
           </a:xfrm>
           <a:prstGeom prst="rect">
             <a:avLst/>
@@ -19867,7 +19962,46 @@
               <a:buNone/>
             </a:pPr>
             <a:r>
-              <a:rPr lang="en-US" sz="4000" b="1" dirty="0">
+              <a:rPr lang="en-US" sz="1600" b="1" spc="150" kern="0" dirty="0">
+                <a:solidFill>
+                  <a:srgbClr val="3674C1"/>
+                </a:solidFill>
+                <a:latin typeface="Calibri" pitchFamily="34" charset="0"/>
+                <a:ea typeface="Calibri" pitchFamily="34" charset="-122"/>
+                <a:cs typeface="Calibri" pitchFamily="34" charset="-120"/>
+              </a:rPr>
+              <a:t>Sample data</a:t>
+            </a:r>
+            <a:endParaRPr lang="en-US" sz="1600" dirty="0"/>
+          </a:p>
+        </p:txBody>
+      </p:sp>
+      <p:sp>
+        <p:nvSpPr>
+          <p:cNvPr id="7" name="Text 5"/>
+          <p:cNvSpPr/>
+          <p:nvPr/>
+        </p:nvSpPr>
+        <p:spPr>
+          <a:xfrm>
+            <a:off x="978408" y="2103120"/>
+            <a:ext cx="10232136" cy="566928"/>
+          </a:xfrm>
+          <a:prstGeom prst="rect">
+            <a:avLst/>
+          </a:prstGeom>
+          <a:noFill/>
+          <a:ln/>
+        </p:spPr>
+        <p:txBody>
+          <a:bodyPr wrap="square" rtlCol="0" anchor="ctr"/>
+          <a:lstStyle/>
+          <a:p>
+            <a:pPr indent="0" marL="0">
+              <a:buNone/>
+            </a:pPr>
+            <a:r>
+              <a:rPr lang="en-US" sz="3200" b="1" dirty="0">
                 <a:solidFill>
                   <a:srgbClr val="1F4C86"/>
                 </a:solidFill>
@@ -19875,42 +20009,22 @@
                 <a:ea typeface="Trebuchet MS" pitchFamily="34" charset="-122"/>
                 <a:cs typeface="Trebuchet MS" pitchFamily="34" charset="-120"/>
               </a:rPr>
-              <a:t>Everything is here</a:t>
-            </a:r>
-            <a:endParaRPr lang="en-US" sz="4000" dirty="0"/>
-          </a:p>
-        </p:txBody>
-      </p:sp>
-      <p:sp>
-        <p:nvSpPr>
-          <p:cNvPr id="4" name="Shape 2"/>
-          <p:cNvSpPr/>
-          <p:nvPr/>
-        </p:nvSpPr>
-        <p:spPr>
-          <a:xfrm>
-            <a:off x="960120" y="1691640"/>
-            <a:ext cx="8686800" cy="713232"/>
-          </a:xfrm>
-          <a:prstGeom prst="rect">
-            <a:avLst/>
-          </a:prstGeom>
-          <a:solidFill>
-            <a:srgbClr val="E8F0FA"/>
-          </a:solidFill>
-          <a:ln/>
-        </p:spPr>
-      </p:sp>
-      <p:sp>
-        <p:nvSpPr>
-          <p:cNvPr id="5" name="Text 3"/>
-          <p:cNvSpPr/>
-          <p:nvPr/>
-        </p:nvSpPr>
-        <p:spPr>
-          <a:xfrm>
-            <a:off x="1188720" y="1691640"/>
-            <a:ext cx="8412480" cy="713232"/>
+              <a:t>Sara McArdle  ·  Zbigniew Mikulski</a:t>
+            </a:r>
+            <a:endParaRPr lang="en-US" sz="3200" dirty="0"/>
+          </a:p>
+        </p:txBody>
+      </p:sp>
+      <p:sp>
+        <p:nvSpPr>
+          <p:cNvPr id="8" name="Text 6"/>
+          <p:cNvSpPr/>
+          <p:nvPr/>
+        </p:nvSpPr>
+        <p:spPr>
+          <a:xfrm>
+            <a:off x="978408" y="2670048"/>
+            <a:ext cx="10232136" cy="384048"/>
           </a:xfrm>
           <a:prstGeom prst="rect">
             <a:avLst/>
@@ -19926,30 +20040,92 @@
               <a:buNone/>
             </a:pPr>
             <a:r>
-              <a:rPr lang="en-US" sz="2200" b="1" dirty="0">
-                <a:solidFill>
-                  <a:srgbClr val="1F4C86"/>
-                </a:solidFill>
-                <a:latin typeface="Calibri" pitchFamily="34" charset="0"/>
-                <a:ea typeface="Calibri" pitchFamily="34" charset="-122"/>
-                <a:cs typeface="Calibri" pitchFamily="34" charset="-120"/>
-              </a:rPr>
-              <a:t>michaelsnelson.github.io/BINA-I2K-2026-QuPath-Extensions</a:t>
-            </a:r>
-            <a:endParaRPr lang="en-US" sz="2200" dirty="0"/>
-          </a:p>
-        </p:txBody>
-      </p:sp>
-      <p:sp>
-        <p:nvSpPr>
-          <p:cNvPr id="6" name="Text 4"/>
-          <p:cNvSpPr/>
-          <p:nvPr/>
-        </p:nvSpPr>
-        <p:spPr>
-          <a:xfrm>
-            <a:off x="960120" y="2697480"/>
-            <a:ext cx="9811512" cy="2560320"/>
+              <a:rPr lang="en-US" sz="2100" dirty="0">
+                <a:solidFill>
+                  <a:srgbClr val="1F2933"/>
+                </a:solidFill>
+                <a:latin typeface="Calibri" pitchFamily="34" charset="0"/>
+                <a:ea typeface="Calibri" pitchFamily="34" charset="-122"/>
+                <a:cs typeface="Calibri" pitchFamily="34" charset="-120"/>
+              </a:rPr>
+              <a:t>La Jolla Institute for Immunology</a:t>
+            </a:r>
+            <a:endParaRPr lang="en-US" sz="2100" dirty="0"/>
+          </a:p>
+        </p:txBody>
+      </p:sp>
+      <p:sp>
+        <p:nvSpPr>
+          <p:cNvPr id="9" name="Text 7"/>
+          <p:cNvSpPr/>
+          <p:nvPr/>
+        </p:nvSpPr>
+        <p:spPr>
+          <a:xfrm>
+            <a:off x="978408" y="3054096"/>
+            <a:ext cx="10232136" cy="731520"/>
+          </a:xfrm>
+          <a:prstGeom prst="rect">
+            <a:avLst/>
+          </a:prstGeom>
+          <a:noFill/>
+          <a:ln/>
+        </p:spPr>
+        <p:txBody>
+          <a:bodyPr wrap="square" rtlCol="0" anchor="ctr"/>
+          <a:lstStyle/>
+          <a:p>
+            <a:pPr indent="0" marL="0">
+              <a:lnSpc>
+                <a:spcPct val="110000"/>
+              </a:lnSpc>
+              <a:buNone/>
+            </a:pPr>
+            <a:r>
+              <a:rPr lang="en-US" sz="1700" i="1" dirty="0">
+                <a:solidFill>
+                  <a:srgbClr val="5A6675"/>
+                </a:solidFill>
+                <a:latin typeface="Calibri" pitchFamily="34" charset="0"/>
+                <a:ea typeface="Calibri" pitchFamily="34" charset="-122"/>
+                <a:cs typeface="Calibri" pitchFamily="34" charset="-120"/>
+              </a:rPr>
+              <a:t>They provided the majority of the test and demonstration data behind almost every exercise you will see today.</a:t>
+            </a:r>
+            <a:endParaRPr lang="en-US" sz="1700" dirty="0"/>
+          </a:p>
+          <a:p>
+            <a:pPr indent="0" marL="0">
+              <a:lnSpc>
+                <a:spcPct val="110000"/>
+              </a:lnSpc>
+              <a:buNone/>
+            </a:pPr>
+            <a:r>
+              <a:rPr lang="en-US" sz="1700" i="1" dirty="0">
+                <a:solidFill>
+                  <a:srgbClr val="5A6675"/>
+                </a:solidFill>
+                <a:latin typeface="Calibri" pitchFamily="34" charset="0"/>
+                <a:ea typeface="Calibri" pitchFamily="34" charset="-122"/>
+                <a:cs typeface="Calibri" pitchFamily="34" charset="-120"/>
+              </a:rPr>
+              <a:t>These tools could not have been built, tested, or taught without it.</a:t>
+            </a:r>
+            <a:endParaRPr lang="en-US" sz="1700" dirty="0"/>
+          </a:p>
+        </p:txBody>
+      </p:sp>
+      <p:sp>
+        <p:nvSpPr>
+          <p:cNvPr id="10" name="Text 8"/>
+          <p:cNvSpPr/>
+          <p:nvPr/>
+        </p:nvSpPr>
+        <p:spPr>
+          <a:xfrm>
+            <a:off x="566928" y="3977640"/>
+            <a:ext cx="11055096" cy="2103120"/>
           </a:xfrm>
           <a:prstGeom prst="rect">
             <a:avLst/>
@@ -19968,6 +20144,270 @@
               <a:buNone/>
             </a:pPr>
             <a:r>
+              <a:rPr lang="en-US" sz="1700" dirty="0">
+                <a:solidFill>
+                  <a:srgbClr val="1F2933"/>
+                </a:solidFill>
+                <a:latin typeface="Calibri" pitchFamily="34" charset="0"/>
+                <a:ea typeface="Calibri" pitchFamily="34" charset="-122"/>
+                <a:cs typeface="Calibri" pitchFamily="34" charset="-120"/>
+              </a:rPr>
+              <a:t>Sara McArdle also shaped the software directly — two of these extensions began as her Groovy scripts, and her FS2K course was the model for how the workshop pages are written.
+</a:t>
+            </a:r>
+            <a:pPr indent="0" marL="0">
+              <a:spcAft>
+                <a:spcPts val="1000"/>
+              </a:spcAft>
+              <a:buNone/>
+            </a:pPr>
+            <a:r>
+              <a:rPr lang="en-US" sz="1700" dirty="0">
+                <a:solidFill>
+                  <a:srgbClr val="1F2933"/>
+                </a:solidFill>
+                <a:latin typeface="Calibri" pitchFamily="34" charset="0"/>
+                <a:ea typeface="Calibri" pitchFamily="34" charset="-122"/>
+                <a:cs typeface="Calibri" pitchFamily="34" charset="-120"/>
+              </a:rPr>
+              <a:t>Kristin Gallick, whose concept and scripts the Confusion Matrix grew from.  ·  Pete Bankhead and the QuPath team.  ·  CT-FIRE, CurveAlign, TACS and TWOMBLI for the fibre work.  ·  CytoMAP and QuBaLab for bringing clustering into QuPath.  ·  QUAREP-LiMi for the reporting standards.  ·  The image.sc community, where several of these features were first requested.
+</a:t>
+            </a:r>
+            <a:pPr indent="0" marL="0">
+              <a:buNone/>
+            </a:pPr>
+            <a:r>
+              <a:rPr lang="en-US" sz="1700" b="1" dirty="0">
+                <a:solidFill>
+                  <a:srgbClr val="1F4C86"/>
+                </a:solidFill>
+                <a:latin typeface="Calibri" pitchFamily="34" charset="0"/>
+                <a:ea typeface="Calibri" pitchFamily="34" charset="-122"/>
+                <a:cs typeface="Calibri" pitchFamily="34" charset="-120"/>
+              </a:rPr>
+              <a:t>Full credits: michaelsnelson.github.io/BINA-I2K-2026-QuPath-Extensions/docs/acknowledgements.html</a:t>
+            </a:r>
+            <a:endParaRPr lang="en-US" sz="1700" dirty="0"/>
+          </a:p>
+        </p:txBody>
+      </p:sp>
+      <p:sp>
+        <p:nvSpPr>
+          <p:cNvPr id="11" name="Text 9"/>
+          <p:cNvSpPr/>
+          <p:nvPr/>
+        </p:nvSpPr>
+        <p:spPr>
+          <a:xfrm>
+            <a:off x="11274552" y="6291072"/>
+            <a:ext cx="457200" cy="310896"/>
+          </a:xfrm>
+          <a:prstGeom prst="rect">
+            <a:avLst/>
+          </a:prstGeom>
+          <a:noFill/>
+          <a:ln/>
+        </p:spPr>
+        <p:txBody>
+          <a:bodyPr wrap="square" rtlCol="0" anchor="ctr"/>
+          <a:lstStyle/>
+          <a:p>
+            <a:pPr algn="r" indent="0" marL="0">
+              <a:buNone/>
+            </a:pPr>
+            <a:r>
+              <a:rPr lang="en-US" sz="1400" dirty="0">
+                <a:solidFill>
+                  <a:srgbClr val="A8B2BF"/>
+                </a:solidFill>
+                <a:latin typeface="Calibri" pitchFamily="34" charset="0"/>
+                <a:ea typeface="Calibri" pitchFamily="34" charset="-122"/>
+                <a:cs typeface="Calibri" pitchFamily="34" charset="-120"/>
+              </a:rPr>
+              <a:t>50</a:t>
+            </a:r>
+            <a:endParaRPr lang="en-US" sz="1400" dirty="0"/>
+          </a:p>
+        </p:txBody>
+      </p:sp>
+    </p:spTree>
+  </p:cSld>
+  <p:clrMapOvr>
+    <a:masterClrMapping/>
+  </p:clrMapOvr>
+</p:sld>
+</file>
+
+<file path=ppt/slides/slide51.xml><?xml version="1.0" encoding="utf-8"?>
+<p:sld xmlns:a="http://schemas.openxmlformats.org/drawingml/2006/main" xmlns:r="http://schemas.openxmlformats.org/officeDocument/2006/relationships" xmlns:p="http://schemas.openxmlformats.org/presentationml/2006/main">
+  <p:cSld name="Slide 51">
+    <p:bg>
+      <p:bgPr>
+        <a:solidFill>
+          <a:srgbClr val="FFFFFF"/>
+        </a:solidFill>
+      </p:bgPr>
+    </p:bg>
+    <p:spTree>
+      <p:nvGrpSpPr>
+        <p:cNvPr id="1" name=""/>
+        <p:cNvGrpSpPr/>
+        <p:nvPr/>
+      </p:nvGrpSpPr>
+      <p:grpSpPr>
+        <a:xfrm>
+          <a:off x="0" y="0"/>
+          <a:ext cx="0" cy="0"/>
+          <a:chOff x="0" y="0"/>
+          <a:chExt cx="0" cy="0"/>
+        </a:xfrm>
+      </p:grpSpPr>
+      <p:sp>
+        <p:nvSpPr>
+          <p:cNvPr id="2" name="Shape 0"/>
+          <p:cNvSpPr/>
+          <p:nvPr/>
+        </p:nvSpPr>
+        <p:spPr>
+          <a:xfrm>
+            <a:off x="0" y="0"/>
+            <a:ext cx="274320" cy="6858000"/>
+          </a:xfrm>
+          <a:prstGeom prst="rect">
+            <a:avLst/>
+          </a:prstGeom>
+          <a:solidFill>
+            <a:srgbClr val="3674C1"/>
+          </a:solidFill>
+          <a:ln/>
+        </p:spPr>
+      </p:sp>
+      <p:sp>
+        <p:nvSpPr>
+          <p:cNvPr id="3" name="Text 1"/>
+          <p:cNvSpPr/>
+          <p:nvPr/>
+        </p:nvSpPr>
+        <p:spPr>
+          <a:xfrm>
+            <a:off x="960120" y="777240"/>
+            <a:ext cx="10268712" cy="822960"/>
+          </a:xfrm>
+          <a:prstGeom prst="rect">
+            <a:avLst/>
+          </a:prstGeom>
+          <a:noFill/>
+          <a:ln/>
+        </p:spPr>
+        <p:txBody>
+          <a:bodyPr wrap="square" rtlCol="0" anchor="ctr"/>
+          <a:lstStyle/>
+          <a:p>
+            <a:pPr indent="0" marL="0">
+              <a:buNone/>
+            </a:pPr>
+            <a:r>
+              <a:rPr lang="en-US" sz="4000" b="1" dirty="0">
+                <a:solidFill>
+                  <a:srgbClr val="1F4C86"/>
+                </a:solidFill>
+                <a:latin typeface="Trebuchet MS" pitchFamily="34" charset="0"/>
+                <a:ea typeface="Trebuchet MS" pitchFamily="34" charset="-122"/>
+                <a:cs typeface="Trebuchet MS" pitchFamily="34" charset="-120"/>
+              </a:rPr>
+              <a:t>Everything is here</a:t>
+            </a:r>
+            <a:endParaRPr lang="en-US" sz="4000" dirty="0"/>
+          </a:p>
+        </p:txBody>
+      </p:sp>
+      <p:sp>
+        <p:nvSpPr>
+          <p:cNvPr id="4" name="Shape 2"/>
+          <p:cNvSpPr/>
+          <p:nvPr/>
+        </p:nvSpPr>
+        <p:spPr>
+          <a:xfrm>
+            <a:off x="960120" y="1691640"/>
+            <a:ext cx="8686800" cy="713232"/>
+          </a:xfrm>
+          <a:prstGeom prst="rect">
+            <a:avLst/>
+          </a:prstGeom>
+          <a:solidFill>
+            <a:srgbClr val="E8F0FA"/>
+          </a:solidFill>
+          <a:ln/>
+        </p:spPr>
+      </p:sp>
+      <p:sp>
+        <p:nvSpPr>
+          <p:cNvPr id="5" name="Text 3"/>
+          <p:cNvSpPr/>
+          <p:nvPr/>
+        </p:nvSpPr>
+        <p:spPr>
+          <a:xfrm>
+            <a:off x="1188720" y="1691640"/>
+            <a:ext cx="8412480" cy="713232"/>
+          </a:xfrm>
+          <a:prstGeom prst="rect">
+            <a:avLst/>
+          </a:prstGeom>
+          <a:noFill/>
+          <a:ln/>
+        </p:spPr>
+        <p:txBody>
+          <a:bodyPr wrap="square" rtlCol="0" anchor="ctr"/>
+          <a:lstStyle/>
+          <a:p>
+            <a:pPr indent="0" marL="0">
+              <a:buNone/>
+            </a:pPr>
+            <a:r>
+              <a:rPr lang="en-US" sz="2200" b="1" dirty="0">
+                <a:solidFill>
+                  <a:srgbClr val="1F4C86"/>
+                </a:solidFill>
+                <a:latin typeface="Calibri" pitchFamily="34" charset="0"/>
+                <a:ea typeface="Calibri" pitchFamily="34" charset="-122"/>
+                <a:cs typeface="Calibri" pitchFamily="34" charset="-120"/>
+              </a:rPr>
+              <a:t>michaelsnelson.github.io/BINA-I2K-2026-QuPath-Extensions</a:t>
+            </a:r>
+            <a:endParaRPr lang="en-US" sz="2200" dirty="0"/>
+          </a:p>
+        </p:txBody>
+      </p:sp>
+      <p:sp>
+        <p:nvSpPr>
+          <p:cNvPr id="6" name="Text 4"/>
+          <p:cNvSpPr/>
+          <p:nvPr/>
+        </p:nvSpPr>
+        <p:spPr>
+          <a:xfrm>
+            <a:off x="960120" y="2697480"/>
+            <a:ext cx="9811512" cy="2560320"/>
+          </a:xfrm>
+          <a:prstGeom prst="rect">
+            <a:avLst/>
+          </a:prstGeom>
+          <a:noFill/>
+          <a:ln/>
+        </p:spPr>
+        <p:txBody>
+          <a:bodyPr wrap="square" rtlCol="0" anchor="t"/>
+          <a:lstStyle/>
+          <a:p>
+            <a:pPr indent="0" marL="0">
+              <a:spcAft>
+                <a:spcPts val="1000"/>
+              </a:spcAft>
+              <a:buNone/>
+            </a:pPr>
+            <a:r>
               <a:rPr lang="en-US" sz="1900" dirty="0">
                 <a:solidFill>
                   <a:srgbClr val="1F2933"/>
@@ -20162,7 +20602,7 @@
                 <a:ea typeface="Calibri" pitchFamily="34" charset="-122"/>
                 <a:cs typeface="Calibri" pitchFamily="34" charset="-120"/>
               </a:rPr>
-              <a:t>50</a:t>
+              <a:t>51</a:t>
             </a:r>
             <a:endParaRPr lang="en-US" sz="1400" dirty="0"/>
           </a:p>
@@ -20372,7 +20812,7 @@
                 <a:ea typeface="Calibri" pitchFamily="34" charset="-122"/>
                 <a:cs typeface="Calibri" pitchFamily="34" charset="-120"/>
               </a:rPr>
-              <a:t>Already fixed: QPSC, the Confusion Matrix and the fibre tools are shown regardless — and Channel Names Viewer and Classify Object Subset belong to Sara McArdle’s session.
+              <a:t>Already fixed: QPSC, the Confusion Matrix and the fibre tools are shown regardless — and Channel Names Viewer and Classify Object Subset were covered in Sara McArdle’s session this morning.
 </a:t>
             </a:r>
             <a:pPr indent="0" marL="0">

--- a/I2K_2026_QuPath_Extensions.pptx
+++ b/I2K_2026_QuPath_Extensions.pptx
@@ -14641,7 +14641,7 @@
                 <a:ea typeface="Trebuchet MS" pitchFamily="34" charset="-122"/>
                 <a:cs typeface="Trebuchet MS" pitchFamily="34" charset="-120"/>
               </a:rPr>
-              <a:t>Where Sara’s session leads next</a:t>
+              <a:t>What we are not covering</a:t>
             </a:r>
             <a:endParaRPr lang="en-US" sz="3000" dirty="0"/>
           </a:p>
@@ -14700,7 +14700,7 @@
                 <a:ea typeface="Calibri" pitchFamily="34" charset="-122"/>
                 <a:cs typeface="Calibri" pitchFamily="34" charset="-120"/>
               </a:rPr>
-              <a:t>Sara’s session and this one are two halves of the same workflow, in the right order.</a:t>
+              <a:t>Two halves of the same workflow, in the right order — hers first, then this.</a:t>
             </a:r>
             <a:endParaRPr lang="en-US" sz="1700" dirty="0"/>
           </a:p>
@@ -14746,7 +14746,7 @@
                 <a:ea typeface="Calibri" pitchFamily="34" charset="-122"/>
                 <a:cs typeface="Calibri" pitchFamily="34" charset="-120"/>
               </a:rPr>
-              <a:t>Hi-plex classification, kept sane — that was this morning’s other QuPath session</a:t>
+              <a:t>QuPath already has object classification — train on measurements, or threshold a single one</a:t>
             </a:r>
             <a:endParaRPr lang="en-US" sz="2000" dirty="0"/>
           </a:p>
@@ -14770,7 +14770,7 @@
                 <a:ea typeface="Calibri" pitchFamily="34" charset="-122"/>
                 <a:cs typeface="Calibri" pitchFamily="34" charset="-120"/>
               </a:rPr>
-              <a:t>The next question is what the classified cells are actually telling you</a:t>
+              <a:t>We are not re-teaching it. Sara’s session this morning was the hi-plex classification half</a:t>
             </a:r>
             <a:endParaRPr lang="en-US" sz="2000" dirty="0"/>
           </a:p>
@@ -14794,7 +14794,7 @@
                 <a:ea typeface="Calibri" pitchFamily="34" charset="-122"/>
                 <a:cs typeface="Calibri" pitchFamily="34" charset="-120"/>
               </a:rPr>
-              <a:t>Which populations group together, which sit next to which, and whether that differs between images</a:t>
+              <a:t>What follows are alternative mechanisms for getting a class onto a cell:</a:t>
             </a:r>
             <a:endParaRPr lang="en-US" sz="2000" dirty="0"/>
           </a:p>
@@ -14818,7 +14818,31 @@
                 <a:ea typeface="Calibri" pitchFamily="34" charset="-122"/>
                 <a:cs typeface="Calibri" pitchFamily="34" charset="-120"/>
               </a:rPr>
-              <a:t>That is clustering, phenotyping and spatial statistics — and it is the rest of this section</a:t>
+              <a:t>Unsupervised clustering · rule-based marker gating · propagation from a small hand-labelled subset · applying an existing classifier to a chosen subset instead of everything</a:t>
+            </a:r>
+            <a:endParaRPr lang="en-US" sz="2000" dirty="0"/>
+          </a:p>
+          <a:p>
+            <a:pPr marL="342900" indent="-342900">
+              <a:lnSpc>
+                <a:spcPct val="105000"/>
+              </a:lnSpc>
+              <a:spcAft>
+                <a:spcPts val="1200"/>
+              </a:spcAft>
+              <a:buSzPct val="100000"/>
+              <a:buChar char="•"/>
+            </a:pPr>
+            <a:r>
+              <a:rPr lang="en-US" sz="2000" dirty="0">
+                <a:solidFill>
+                  <a:srgbClr val="1F2933"/>
+                </a:solidFill>
+                <a:latin typeface="Calibri" pitchFamily="34" charset="0"/>
+                <a:ea typeface="Calibri" pitchFamily="34" charset="-122"/>
+                <a:cs typeface="Calibri" pitchFamily="34" charset="-120"/>
+              </a:rPr>
+              <a:t>Then: what those classified cells are actually telling you — which sit next to which, and whether that differs between images</a:t>
             </a:r>
             <a:endParaRPr lang="en-US" sz="2000" dirty="0"/>
           </a:p>
@@ -15145,7 +15169,7 @@
                 <a:ea typeface="Calibri" pitchFamily="34" charset="-122"/>
                 <a:cs typeface="Calibri" pitchFamily="34" charset="-120"/>
               </a:rPr>
-              <a:t>Label a small subset by hand and have the rest of the project labelled for you</a:t>
+              <a:t>Label a small subset by hand and have the rest of the project labelled for you — no object classifier involved</a:t>
             </a:r>
             <a:endParaRPr lang="en-US" sz="2000" dirty="0"/>
           </a:p>

--- a/I2K_2026_QuPath_Extensions.pptx
+++ b/I2K_2026_QuPath_Extensions.pptx
@@ -5984,7 +5984,7 @@
                 <a:ea typeface="Calibri" pitchFamily="34" charset="-122"/>
                 <a:cs typeface="Calibri" pitchFamily="34" charset="-120"/>
               </a:rPr>
-              <a:t>LOCI catalog  —  github.com/uw-loci/qupath-catalog-mikenelson</a:t>
+              <a:t>LOCI catalog  —  github.com/uw-loci/qupath-catalog-mikenelson  (the only one you need today)</a:t>
             </a:r>
             <a:endParaRPr lang="en-US" sz="2000" dirty="0"/>
           </a:p>
@@ -6008,7 +6008,7 @@
                 <a:ea typeface="Calibri" pitchFamily="34" charset="-122"/>
                 <a:cs typeface="Calibri" pitchFamily="34" charset="-120"/>
               </a:rPr>
-              <a:t>QPSC catalog  —  github.com/uw-loci/qupath-catalog-qpsc</a:t>
+              <a:t>Adding a catalog installs NOTHING. It shows you a list</a:t>
             </a:r>
             <a:endParaRPr lang="en-US" sz="2000" dirty="0"/>
           </a:p>
@@ -6032,7 +6032,7 @@
                 <a:ea typeface="Calibri" pitchFamily="34" charset="-122"/>
                 <a:cs typeface="Calibri" pitchFamily="34" charset="-120"/>
               </a:rPr>
-              <a:t>You pick what you want from the list. You do not have to install everything</a:t>
+              <a:t>Install only what you want — QP-CAT and the DL classifier each pull 1.5–2.5 GB on first use</a:t>
             </a:r>
             <a:endParaRPr lang="en-US" sz="2000" dirty="0"/>
           </a:p>
@@ -20458,7 +20458,7 @@
                 <a:ea typeface="Calibri" pitchFamily="34" charset="-122"/>
                 <a:cs typeface="Calibri" pitchFamily="34" charset="-120"/>
               </a:rPr>
-              <a:t>Add the two catalogs in QuPath, install only what interests you, and restart:
+              <a:t>Add one catalog in QuPath, install only what interests you, and restart:
 </a:t>
             </a:r>
             <a:pPr indent="0" marL="0">
@@ -20486,15 +20486,15 @@
               <a:buNone/>
             </a:pPr>
             <a:r>
-              <a:rPr lang="en-US" sz="1800" b="1" dirty="0">
-                <a:solidFill>
-                  <a:srgbClr val="1F4C86"/>
-                </a:solidFill>
-                <a:latin typeface="Calibri" pitchFamily="34" charset="0"/>
-                <a:ea typeface="Calibri" pitchFamily="34" charset="-122"/>
-                <a:cs typeface="Calibri" pitchFamily="34" charset="-120"/>
-              </a:rPr>
-              <a:t>github.com/uw-loci/qupath-catalog-qpsc
+              <a:rPr lang="en-US" sz="1700" i="1" dirty="0">
+                <a:solidFill>
+                  <a:srgbClr val="5A6675"/>
+                </a:solidFill>
+                <a:latin typeface="Calibri" pitchFamily="34" charset="0"/>
+                <a:ea typeface="Calibri" pitchFamily="34" charset="-122"/>
+                <a:cs typeface="Calibri" pitchFamily="34" charset="-120"/>
+              </a:rPr>
+              <a:t>Adding it installs nothing — you pick from the list. Two entries download 1.5–2.5 GB.
 </a:t>
             </a:r>
             <a:pPr indent="0" marL="0">
